--- a/PYDATA_SOUTHAMPTON_16SEP2025.pptx
+++ b/PYDATA_SOUTHAMPTON_16SEP2025.pptx
@@ -5,32 +5,33 @@
     <p:sldMasterId id="2147483648" r:id="rId1"/>
   </p:sldMasterIdLst>
   <p:notesMasterIdLst>
-    <p:notesMasterId r:id="rId25"/>
+    <p:notesMasterId r:id="rId26"/>
   </p:notesMasterIdLst>
   <p:sldIdLst>
     <p:sldId id="257" r:id="rId2"/>
     <p:sldId id="284" r:id="rId3"/>
-    <p:sldId id="287" r:id="rId4"/>
-    <p:sldId id="262" r:id="rId5"/>
-    <p:sldId id="283" r:id="rId6"/>
-    <p:sldId id="266" r:id="rId7"/>
-    <p:sldId id="289" r:id="rId8"/>
-    <p:sldId id="263" r:id="rId9"/>
-    <p:sldId id="282" r:id="rId10"/>
-    <p:sldId id="280" r:id="rId11"/>
-    <p:sldId id="264" r:id="rId12"/>
-    <p:sldId id="275" r:id="rId13"/>
-    <p:sldId id="285" r:id="rId14"/>
-    <p:sldId id="270" r:id="rId15"/>
-    <p:sldId id="291" r:id="rId16"/>
-    <p:sldId id="292" r:id="rId17"/>
-    <p:sldId id="293" r:id="rId18"/>
-    <p:sldId id="296" r:id="rId19"/>
-    <p:sldId id="297" r:id="rId20"/>
-    <p:sldId id="298" r:id="rId21"/>
-    <p:sldId id="300" r:id="rId22"/>
-    <p:sldId id="290" r:id="rId23"/>
-    <p:sldId id="286" r:id="rId24"/>
+    <p:sldId id="301" r:id="rId4"/>
+    <p:sldId id="280" r:id="rId5"/>
+    <p:sldId id="287" r:id="rId6"/>
+    <p:sldId id="262" r:id="rId7"/>
+    <p:sldId id="283" r:id="rId8"/>
+    <p:sldId id="266" r:id="rId9"/>
+    <p:sldId id="289" r:id="rId10"/>
+    <p:sldId id="263" r:id="rId11"/>
+    <p:sldId id="282" r:id="rId12"/>
+    <p:sldId id="264" r:id="rId13"/>
+    <p:sldId id="275" r:id="rId14"/>
+    <p:sldId id="285" r:id="rId15"/>
+    <p:sldId id="270" r:id="rId16"/>
+    <p:sldId id="291" r:id="rId17"/>
+    <p:sldId id="292" r:id="rId18"/>
+    <p:sldId id="293" r:id="rId19"/>
+    <p:sldId id="296" r:id="rId20"/>
+    <p:sldId id="297" r:id="rId21"/>
+    <p:sldId id="298" r:id="rId22"/>
+    <p:sldId id="300" r:id="rId23"/>
+    <p:sldId id="290" r:id="rId24"/>
+    <p:sldId id="286" r:id="rId25"/>
   </p:sldIdLst>
   <p:sldSz cx="12192000" cy="6858000"/>
   <p:notesSz cx="6858000" cy="9144000"/>
@@ -561,7 +562,7 @@
           <a:p>
             <a:fld id="{065A44AA-8EC2-41D9-A3D3-17850C1F9C4A}" type="slidenum">
               <a:rPr lang="en-GB" smtClean="0"/>
-              <a:t>9</a:t>
+              <a:t>11</a:t>
             </a:fld>
             <a:endParaRPr lang="en-GB"/>
           </a:p>
@@ -4059,7 +4060,7 @@
         <p:cNvPr id="1" name="">
           <a:extLst>
             <a:ext uri="{FF2B5EF4-FFF2-40B4-BE49-F238E27FC236}">
-              <a16:creationId xmlns:a16="http://schemas.microsoft.com/office/drawing/2014/main" id="{1AA440AF-DD92-7905-6BC8-EE77381BAEAB}"/>
+              <a16:creationId xmlns:a16="http://schemas.microsoft.com/office/drawing/2014/main" id="{2347564E-77B5-A1B3-4D8A-5BB5653DB1BE}"/>
             </a:ext>
           </a:extLst>
         </p:cNvPr>
@@ -4079,7 +4080,7 @@
           <p:cNvPr id="2" name="Title 1">
             <a:extLst>
               <a:ext uri="{FF2B5EF4-FFF2-40B4-BE49-F238E27FC236}">
-                <a16:creationId xmlns:a16="http://schemas.microsoft.com/office/drawing/2014/main" id="{1A15E1A2-83B2-14F0-BFEA-861422733F26}"/>
+                <a16:creationId xmlns:a16="http://schemas.microsoft.com/office/drawing/2014/main" id="{D7145CE4-27DE-F4A8-F6E6-AB0BFE9E0E92}"/>
               </a:ext>
             </a:extLst>
           </p:cNvPr>
@@ -4106,17 +4107,17 @@
                   <a:srgbClr val="676767"/>
                 </a:solidFill>
               </a:rPr>
-              <a:t>Google CRM Agent</a:t>
+              <a:t>What is an AI Agent?</a:t>
             </a:r>
           </a:p>
         </p:txBody>
       </p:sp>
       <p:pic>
         <p:nvPicPr>
-          <p:cNvPr id="5" name="Content Placeholder 4" descr="A diagram of a business&#10;&#10;AI-generated content may be incorrect.">
-            <a:extLst>
-              <a:ext uri="{FF2B5EF4-FFF2-40B4-BE49-F238E27FC236}">
-                <a16:creationId xmlns:a16="http://schemas.microsoft.com/office/drawing/2014/main" id="{35C7062D-4D91-6909-2AFE-1BD94FA2B192}"/>
+          <p:cNvPr id="5" name="Content Placeholder 4" descr="A white background with black text&#10;&#10;AI-generated content may be incorrect.">
+            <a:extLst>
+              <a:ext uri="{FF2B5EF4-FFF2-40B4-BE49-F238E27FC236}">
+                <a16:creationId xmlns:a16="http://schemas.microsoft.com/office/drawing/2014/main" id="{C5945021-DA27-E6E7-4078-598B7B83A45D}"/>
               </a:ext>
             </a:extLst>
           </p:cNvPr>
@@ -4141,8 +4142,8 @@
         </p:blipFill>
         <p:spPr>
           <a:xfrm>
-            <a:off x="919314" y="1204979"/>
-            <a:ext cx="10596563" cy="4870469"/>
+            <a:off x="1006867" y="3621288"/>
+            <a:ext cx="7819867" cy="2002649"/>
           </a:xfrm>
           <a:solidFill>
             <a:srgbClr val="FAF0E6"/>
@@ -4151,10 +4152,10 @@
       </p:pic>
       <p:sp>
         <p:nvSpPr>
-          <p:cNvPr id="3" name="TextBox 2">
-            <a:extLst>
-              <a:ext uri="{FF2B5EF4-FFF2-40B4-BE49-F238E27FC236}">
-                <a16:creationId xmlns:a16="http://schemas.microsoft.com/office/drawing/2014/main" id="{5E94F5A6-658B-3303-7ABD-572CD1DE28E5}"/>
+          <p:cNvPr id="6" name="TextBox 5">
+            <a:extLst>
+              <a:ext uri="{FF2B5EF4-FFF2-40B4-BE49-F238E27FC236}">
+                <a16:creationId xmlns:a16="http://schemas.microsoft.com/office/drawing/2014/main" id="{770FE6C9-06DD-BD42-AAA1-C250315A7DD0}"/>
               </a:ext>
             </a:extLst>
           </p:cNvPr>
@@ -4163,8 +4164,8 @@
         </p:nvSpPr>
         <p:spPr>
           <a:xfrm>
-            <a:off x="882443" y="6104945"/>
-            <a:ext cx="10670303" cy="615553"/>
+            <a:off x="1006867" y="2853273"/>
+            <a:ext cx="6185043" cy="646331"/>
           </a:xfrm>
           <a:prstGeom prst="rect">
             <a:avLst/>
@@ -4177,31 +4178,52 @@
           </a:bodyPr>
           <a:lstStyle/>
           <a:p>
-            <a:pPr algn="ctr"/>
-            <a:r>
-              <a:rPr lang="en-GB" sz="1600" dirty="0">
-                <a:hlinkClick r:id="rId3"/>
-              </a:rPr>
-              <a:t>https://github.com/vladkol/crm-data-agent/blob/main/src/agents/data_agent/prompts/crm_business_analyst.py</a:t>
-            </a:r>
-            <a:endParaRPr lang="en-GB" sz="1600" dirty="0"/>
-          </a:p>
-          <a:p>
-            <a:pPr algn="ctr"/>
-            <a:r>
-              <a:rPr lang="en-GB" u="sng" dirty="0">
-                <a:hlinkClick r:id="rId4"/>
-              </a:rPr>
-              <a:t>https://www.youtube.com/watch?v=2-AJszogj7Y</a:t>
-            </a:r>
-            <a:endParaRPr lang="en-GB" sz="1600" dirty="0"/>
+            <a:r>
+              <a:rPr lang="en-GB" sz="3600" dirty="0"/>
+              <a:t>Anthropic</a:t>
+            </a:r>
+          </a:p>
+        </p:txBody>
+      </p:sp>
+      <p:sp>
+        <p:nvSpPr>
+          <p:cNvPr id="7" name="TextBox 6">
+            <a:extLst>
+              <a:ext uri="{FF2B5EF4-FFF2-40B4-BE49-F238E27FC236}">
+                <a16:creationId xmlns:a16="http://schemas.microsoft.com/office/drawing/2014/main" id="{10574A54-4BBE-E586-ECF8-9E088A1BAD42}"/>
+              </a:ext>
+            </a:extLst>
+          </p:cNvPr>
+          <p:cNvSpPr txBox="1"/>
+          <p:nvPr/>
+        </p:nvSpPr>
+        <p:spPr>
+          <a:xfrm>
+            <a:off x="1006866" y="1923040"/>
+            <a:ext cx="10428047" cy="584775"/>
+          </a:xfrm>
+          <a:prstGeom prst="rect">
+            <a:avLst/>
+          </a:prstGeom>
+          <a:noFill/>
+        </p:spPr>
+        <p:txBody>
+          <a:bodyPr wrap="square" rtlCol="0">
+            <a:spAutoFit/>
+          </a:bodyPr>
+          <a:lstStyle/>
+          <a:p>
+            <a:r>
+              <a:rPr lang="en-GB" sz="3200" dirty="0"/>
+              <a:t>Many definitions and people opt for ‘Agentic Apps’</a:t>
+            </a:r>
           </a:p>
         </p:txBody>
       </p:sp>
     </p:spTree>
     <p:extLst>
       <p:ext uri="{BB962C8B-B14F-4D97-AF65-F5344CB8AC3E}">
-        <p14:creationId xmlns:p14="http://schemas.microsoft.com/office/powerpoint/2010/main" val="3279871281"/>
+        <p14:creationId xmlns:p14="http://schemas.microsoft.com/office/powerpoint/2010/main" val="3202180944"/>
       </p:ext>
     </p:extLst>
   </p:cSld>
@@ -4212,6 +4234,125 @@
 </file>
 
 <file path=ppt/slides/slide11.xml><?xml version="1.0" encoding="utf-8"?>
+<p:sld xmlns:a="http://schemas.openxmlformats.org/drawingml/2006/main" xmlns:r="http://schemas.openxmlformats.org/officeDocument/2006/relationships" xmlns:p="http://schemas.openxmlformats.org/presentationml/2006/main">
+  <p:cSld>
+    <p:bg>
+      <p:bgPr>
+        <a:solidFill>
+          <a:srgbClr val="FAF0E6"/>
+        </a:solidFill>
+        <a:effectLst/>
+      </p:bgPr>
+    </p:bg>
+    <p:spTree>
+      <p:nvGrpSpPr>
+        <p:cNvPr id="1" name="">
+          <a:extLst>
+            <a:ext uri="{FF2B5EF4-FFF2-40B4-BE49-F238E27FC236}">
+              <a16:creationId xmlns:a16="http://schemas.microsoft.com/office/drawing/2014/main" id="{6DD41B23-3D3A-3C9B-88A6-3FD8EB1C9BB8}"/>
+            </a:ext>
+          </a:extLst>
+        </p:cNvPr>
+        <p:cNvGrpSpPr/>
+        <p:nvPr/>
+      </p:nvGrpSpPr>
+      <p:grpSpPr>
+        <a:xfrm>
+          <a:off x="0" y="0"/>
+          <a:ext cx="0" cy="0"/>
+          <a:chOff x="0" y="0"/>
+          <a:chExt cx="0" cy="0"/>
+        </a:xfrm>
+      </p:grpSpPr>
+      <p:sp>
+        <p:nvSpPr>
+          <p:cNvPr id="2" name="Title 1">
+            <a:extLst>
+              <a:ext uri="{FF2B5EF4-FFF2-40B4-BE49-F238E27FC236}">
+                <a16:creationId xmlns:a16="http://schemas.microsoft.com/office/drawing/2014/main" id="{B46820D4-81FD-4FC2-57D1-F722A5249B9A}"/>
+              </a:ext>
+            </a:extLst>
+          </p:cNvPr>
+          <p:cNvSpPr>
+            <a:spLocks noGrp="1"/>
+          </p:cNvSpPr>
+          <p:nvPr>
+            <p:ph type="title"/>
+          </p:nvPr>
+        </p:nvSpPr>
+        <p:spPr>
+          <a:xfrm>
+            <a:off x="919314" y="190464"/>
+            <a:ext cx="10515600" cy="1325563"/>
+          </a:xfrm>
+        </p:spPr>
+        <p:txBody>
+          <a:bodyPr/>
+          <a:lstStyle/>
+          <a:p>
+            <a:r>
+              <a:rPr lang="en-GB" dirty="0">
+                <a:solidFill>
+                  <a:srgbClr val="676767"/>
+                </a:solidFill>
+              </a:rPr>
+              <a:t>API</a:t>
+            </a:r>
+          </a:p>
+        </p:txBody>
+      </p:sp>
+      <p:pic>
+        <p:nvPicPr>
+          <p:cNvPr id="5" name="Content Placeholder 4">
+            <a:hlinkClick r:id="rId3"/>
+            <a:extLst>
+              <a:ext uri="{FF2B5EF4-FFF2-40B4-BE49-F238E27FC236}">
+                <a16:creationId xmlns:a16="http://schemas.microsoft.com/office/drawing/2014/main" id="{28262053-F2FE-0B42-8B58-D4F6DA7A50D1}"/>
+              </a:ext>
+            </a:extLst>
+          </p:cNvPr>
+          <p:cNvPicPr>
+            <a:picLocks noGrp="1" noChangeAspect="1"/>
+          </p:cNvPicPr>
+          <p:nvPr>
+            <p:ph idx="1"/>
+          </p:nvPr>
+        </p:nvPicPr>
+        <p:blipFill>
+          <a:blip r:embed="rId4">
+            <a:extLst>
+              <a:ext uri="{28A0092B-C50C-407E-A947-70E740481C1C}">
+                <a14:useLocalDpi xmlns:a14="http://schemas.microsoft.com/office/drawing/2010/main" val="0"/>
+              </a:ext>
+            </a:extLst>
+          </a:blip>
+          <a:srcRect/>
+          <a:stretch/>
+        </p:blipFill>
+        <p:spPr>
+          <a:xfrm>
+            <a:off x="935542" y="1151739"/>
+            <a:ext cx="10499372" cy="5101576"/>
+          </a:xfrm>
+          <a:solidFill>
+            <a:srgbClr val="FAF0E6"/>
+          </a:solidFill>
+        </p:spPr>
+      </p:pic>
+    </p:spTree>
+    <p:extLst>
+      <p:ext uri="{BB962C8B-B14F-4D97-AF65-F5344CB8AC3E}">
+        <p14:creationId xmlns:p14="http://schemas.microsoft.com/office/powerpoint/2010/main" val="755290413"/>
+      </p:ext>
+    </p:extLst>
+  </p:cSld>
+  <p:clrMapOvr>
+    <a:masterClrMapping/>
+  </p:clrMapOvr>
+</p:sld>
+</file>
+
+<file path=ppt/slides/slide12.xml><?xml version="1.0" encoding="utf-8"?>
 <p:sld xmlns:a="http://schemas.openxmlformats.org/drawingml/2006/main" xmlns:r="http://schemas.openxmlformats.org/officeDocument/2006/relationships" xmlns:p="http://schemas.openxmlformats.org/presentationml/2006/main">
   <p:cSld>
     <p:bg>
@@ -4416,7 +4557,7 @@
 </p:sld>
 </file>
 
-<file path=ppt/slides/slide12.xml><?xml version="1.0" encoding="utf-8"?>
+<file path=ppt/slides/slide13.xml><?xml version="1.0" encoding="utf-8"?>
 <p:sld xmlns:a="http://schemas.openxmlformats.org/drawingml/2006/main" xmlns:r="http://schemas.openxmlformats.org/officeDocument/2006/relationships" xmlns:p="http://schemas.openxmlformats.org/presentationml/2006/main">
   <p:cSld>
     <p:bg>
@@ -4695,7 +4836,7 @@
 </p:sld>
 </file>
 
-<file path=ppt/slides/slide13.xml><?xml version="1.0" encoding="utf-8"?>
+<file path=ppt/slides/slide14.xml><?xml version="1.0" encoding="utf-8"?>
 <p:sld xmlns:a="http://schemas.openxmlformats.org/drawingml/2006/main" xmlns:r="http://schemas.openxmlformats.org/officeDocument/2006/relationships" xmlns:p="http://schemas.openxmlformats.org/presentationml/2006/main">
   <p:cSld>
     <p:bg>
@@ -4968,7 +5109,7 @@
 </p:sld>
 </file>
 
-<file path=ppt/slides/slide14.xml><?xml version="1.0" encoding="utf-8"?>
+<file path=ppt/slides/slide15.xml><?xml version="1.0" encoding="utf-8"?>
 <p:sld xmlns:a="http://schemas.openxmlformats.org/drawingml/2006/main" xmlns:r="http://schemas.openxmlformats.org/officeDocument/2006/relationships" xmlns:p="http://schemas.openxmlformats.org/presentationml/2006/main">
   <p:cSld>
     <p:bg>
@@ -5166,7 +5307,7 @@
 </p:sld>
 </file>
 
-<file path=ppt/slides/slide15.xml><?xml version="1.0" encoding="utf-8"?>
+<file path=ppt/slides/slide16.xml><?xml version="1.0" encoding="utf-8"?>
 <p:sld xmlns:a="http://schemas.openxmlformats.org/drawingml/2006/main" xmlns:r="http://schemas.openxmlformats.org/officeDocument/2006/relationships" xmlns:p="http://schemas.openxmlformats.org/presentationml/2006/main">
   <p:cSld>
     <p:bg>
@@ -5403,7 +5544,7 @@
 </p:sld>
 </file>
 
-<file path=ppt/slides/slide16.xml><?xml version="1.0" encoding="utf-8"?>
+<file path=ppt/slides/slide17.xml><?xml version="1.0" encoding="utf-8"?>
 <p:sld xmlns:a="http://schemas.openxmlformats.org/drawingml/2006/main" xmlns:r="http://schemas.openxmlformats.org/officeDocument/2006/relationships" xmlns:p="http://schemas.openxmlformats.org/presentationml/2006/main">
   <p:cSld>
     <p:bg>
@@ -5563,7 +5704,7 @@
 </p:sld>
 </file>
 
-<file path=ppt/slides/slide17.xml><?xml version="1.0" encoding="utf-8"?>
+<file path=ppt/slides/slide18.xml><?xml version="1.0" encoding="utf-8"?>
 <p:sld xmlns:a="http://schemas.openxmlformats.org/drawingml/2006/main" xmlns:r="http://schemas.openxmlformats.org/officeDocument/2006/relationships" xmlns:p="http://schemas.openxmlformats.org/presentationml/2006/main">
   <p:cSld>
     <p:bg>
@@ -5723,7 +5864,7 @@
 </p:sld>
 </file>
 
-<file path=ppt/slides/slide18.xml><?xml version="1.0" encoding="utf-8"?>
+<file path=ppt/slides/slide19.xml><?xml version="1.0" encoding="utf-8"?>
 <p:sld xmlns:a="http://schemas.openxmlformats.org/drawingml/2006/main" xmlns:r="http://schemas.openxmlformats.org/officeDocument/2006/relationships" xmlns:p="http://schemas.openxmlformats.org/presentationml/2006/main">
   <p:cSld>
     <p:bg>
@@ -5916,179 +6057,6 @@
     <p:extLst>
       <p:ext uri="{BB962C8B-B14F-4D97-AF65-F5344CB8AC3E}">
         <p14:creationId xmlns:p14="http://schemas.microsoft.com/office/powerpoint/2010/main" val="2312621687"/>
-      </p:ext>
-    </p:extLst>
-  </p:cSld>
-  <p:clrMapOvr>
-    <a:masterClrMapping/>
-  </p:clrMapOvr>
-</p:sld>
-</file>
-
-<file path=ppt/slides/slide19.xml><?xml version="1.0" encoding="utf-8"?>
-<p:sld xmlns:a="http://schemas.openxmlformats.org/drawingml/2006/main" xmlns:r="http://schemas.openxmlformats.org/officeDocument/2006/relationships" xmlns:p="http://schemas.openxmlformats.org/presentationml/2006/main">
-  <p:cSld>
-    <p:bg>
-      <p:bgPr>
-        <a:solidFill>
-          <a:srgbClr val="FAF0E6"/>
-        </a:solidFill>
-        <a:effectLst/>
-      </p:bgPr>
-    </p:bg>
-    <p:spTree>
-      <p:nvGrpSpPr>
-        <p:cNvPr id="1" name="">
-          <a:extLst>
-            <a:ext uri="{FF2B5EF4-FFF2-40B4-BE49-F238E27FC236}">
-              <a16:creationId xmlns:a16="http://schemas.microsoft.com/office/drawing/2014/main" id="{BBE8893A-DC61-4C1F-F66E-16B9BEF6FEF8}"/>
-            </a:ext>
-          </a:extLst>
-        </p:cNvPr>
-        <p:cNvGrpSpPr/>
-        <p:nvPr/>
-      </p:nvGrpSpPr>
-      <p:grpSpPr>
-        <a:xfrm>
-          <a:off x="0" y="0"/>
-          <a:ext cx="0" cy="0"/>
-          <a:chOff x="0" y="0"/>
-          <a:chExt cx="0" cy="0"/>
-        </a:xfrm>
-      </p:grpSpPr>
-      <p:sp>
-        <p:nvSpPr>
-          <p:cNvPr id="2" name="Title 1">
-            <a:extLst>
-              <a:ext uri="{FF2B5EF4-FFF2-40B4-BE49-F238E27FC236}">
-                <a16:creationId xmlns:a16="http://schemas.microsoft.com/office/drawing/2014/main" id="{8573560D-6E5D-1168-8281-F94F2F5A04BA}"/>
-              </a:ext>
-            </a:extLst>
-          </p:cNvPr>
-          <p:cNvSpPr>
-            <a:spLocks noGrp="1"/>
-          </p:cNvSpPr>
-          <p:nvPr>
-            <p:ph type="title"/>
-          </p:nvPr>
-        </p:nvSpPr>
-        <p:spPr>
-          <a:xfrm>
-            <a:off x="919314" y="190464"/>
-            <a:ext cx="10515600" cy="1325563"/>
-          </a:xfrm>
-        </p:spPr>
-        <p:txBody>
-          <a:bodyPr/>
-          <a:lstStyle/>
-          <a:p>
-            <a:r>
-              <a:rPr lang="en-GB" dirty="0">
-                <a:solidFill>
-                  <a:srgbClr val="676767"/>
-                </a:solidFill>
-              </a:rPr>
-              <a:t>A possible workflow</a:t>
-            </a:r>
-          </a:p>
-        </p:txBody>
-      </p:sp>
-      <p:sp>
-        <p:nvSpPr>
-          <p:cNvPr id="3" name="Content Placeholder 2">
-            <a:extLst>
-              <a:ext uri="{FF2B5EF4-FFF2-40B4-BE49-F238E27FC236}">
-                <a16:creationId xmlns:a16="http://schemas.microsoft.com/office/drawing/2014/main" id="{A6BF4D6B-1CA0-DB9A-FA7F-A5FA83DEBA99}"/>
-              </a:ext>
-            </a:extLst>
-          </p:cNvPr>
-          <p:cNvSpPr>
-            <a:spLocks noGrp="1"/>
-          </p:cNvSpPr>
-          <p:nvPr>
-            <p:ph idx="1"/>
-          </p:nvPr>
-        </p:nvSpPr>
-        <p:spPr>
-          <a:xfrm>
-            <a:off x="838199" y="1413031"/>
-            <a:ext cx="10596715" cy="4906652"/>
-          </a:xfrm>
-          <a:solidFill>
-            <a:srgbClr val="FAF0E6"/>
-          </a:solidFill>
-        </p:spPr>
-        <p:txBody>
-          <a:bodyPr>
-            <a:normAutofit/>
-          </a:bodyPr>
-          <a:lstStyle/>
-          <a:p>
-            <a:pPr marL="0" indent="0">
-              <a:buNone/>
-            </a:pPr>
-            <a:r>
-              <a:rPr lang="en-GB" sz="3600" dirty="0">
-                <a:solidFill>
-                  <a:srgbClr val="3A3A3A"/>
-                </a:solidFill>
-              </a:rPr>
-              <a:t>Now that we are looking at our data, we see that sometimes the app offers financial advice.</a:t>
-            </a:r>
-          </a:p>
-          <a:p>
-            <a:pPr marL="0" indent="0">
-              <a:buNone/>
-            </a:pPr>
-            <a:endParaRPr lang="en-GB" sz="3600" dirty="0">
-              <a:solidFill>
-                <a:srgbClr val="3A3A3A"/>
-              </a:solidFill>
-            </a:endParaRPr>
-          </a:p>
-          <a:p>
-            <a:pPr marL="0" indent="0">
-              <a:buNone/>
-            </a:pPr>
-            <a:r>
-              <a:rPr lang="en-GB" sz="3600" dirty="0">
-                <a:solidFill>
-                  <a:srgbClr val="3A3A3A"/>
-                </a:solidFill>
-              </a:rPr>
-              <a:t>We must prevent this (guardrails) so we create an LLM as Judge that detects if this article had financial advice.</a:t>
-            </a:r>
-          </a:p>
-          <a:p>
-            <a:pPr marL="0" indent="0">
-              <a:buNone/>
-            </a:pPr>
-            <a:endParaRPr lang="en-GB" sz="3600" dirty="0">
-              <a:solidFill>
-                <a:srgbClr val="3A3A3A"/>
-              </a:solidFill>
-            </a:endParaRPr>
-          </a:p>
-          <a:p>
-            <a:pPr marL="0" indent="0">
-              <a:buNone/>
-            </a:pPr>
-            <a:r>
-              <a:rPr lang="en-GB" sz="3600" dirty="0">
-                <a:solidFill>
-                  <a:srgbClr val="3A3A3A"/>
-                </a:solidFill>
-              </a:rPr>
-              <a:t>It saves many problems…</a:t>
-            </a:r>
-            <a:endParaRPr lang="en-GB" sz="3600" dirty="0"/>
-          </a:p>
-        </p:txBody>
-      </p:sp>
-    </p:spTree>
-    <p:extLst>
-      <p:ext uri="{BB962C8B-B14F-4D97-AF65-F5344CB8AC3E}">
-        <p14:creationId xmlns:p14="http://schemas.microsoft.com/office/powerpoint/2010/main" val="2293205134"/>
       </p:ext>
     </p:extLst>
   </p:cSld>
@@ -6215,7 +6183,7 @@
             </a:pPr>
             <a:r>
               <a:rPr lang="en-GB" dirty="0"/>
-              <a:t>You might use or incorporate ready made 3rd party software that is Agentic as in the next slide…Google’s CRM Agent…</a:t>
+              <a:t>You might use or incorporate ready made 3rd party software that is Agentic as in the next two slides…</a:t>
             </a:r>
           </a:p>
           <a:p>
@@ -6237,13 +6205,8 @@
             </a:pPr>
             <a:r>
               <a:rPr lang="en-GB" dirty="0"/>
-              <a:t>It may be helpful to understand what Agents are as they seem to crop </a:t>
-            </a:r>
-            <a:r>
-              <a:rPr lang="en-GB"/>
-              <a:t>up everywhere.</a:t>
-            </a:r>
-            <a:endParaRPr lang="en-GB" dirty="0"/>
+              <a:t>It may be helpful to understand what Agents are as they seem to crop up everywhere.</a:t>
+            </a:r>
           </a:p>
         </p:txBody>
       </p:sp>
@@ -6261,6 +6224,179 @@
 </file>
 
 <file path=ppt/slides/slide20.xml><?xml version="1.0" encoding="utf-8"?>
+<p:sld xmlns:a="http://schemas.openxmlformats.org/drawingml/2006/main" xmlns:r="http://schemas.openxmlformats.org/officeDocument/2006/relationships" xmlns:p="http://schemas.openxmlformats.org/presentationml/2006/main">
+  <p:cSld>
+    <p:bg>
+      <p:bgPr>
+        <a:solidFill>
+          <a:srgbClr val="FAF0E6"/>
+        </a:solidFill>
+        <a:effectLst/>
+      </p:bgPr>
+    </p:bg>
+    <p:spTree>
+      <p:nvGrpSpPr>
+        <p:cNvPr id="1" name="">
+          <a:extLst>
+            <a:ext uri="{FF2B5EF4-FFF2-40B4-BE49-F238E27FC236}">
+              <a16:creationId xmlns:a16="http://schemas.microsoft.com/office/drawing/2014/main" id="{BBE8893A-DC61-4C1F-F66E-16B9BEF6FEF8}"/>
+            </a:ext>
+          </a:extLst>
+        </p:cNvPr>
+        <p:cNvGrpSpPr/>
+        <p:nvPr/>
+      </p:nvGrpSpPr>
+      <p:grpSpPr>
+        <a:xfrm>
+          <a:off x="0" y="0"/>
+          <a:ext cx="0" cy="0"/>
+          <a:chOff x="0" y="0"/>
+          <a:chExt cx="0" cy="0"/>
+        </a:xfrm>
+      </p:grpSpPr>
+      <p:sp>
+        <p:nvSpPr>
+          <p:cNvPr id="2" name="Title 1">
+            <a:extLst>
+              <a:ext uri="{FF2B5EF4-FFF2-40B4-BE49-F238E27FC236}">
+                <a16:creationId xmlns:a16="http://schemas.microsoft.com/office/drawing/2014/main" id="{8573560D-6E5D-1168-8281-F94F2F5A04BA}"/>
+              </a:ext>
+            </a:extLst>
+          </p:cNvPr>
+          <p:cNvSpPr>
+            <a:spLocks noGrp="1"/>
+          </p:cNvSpPr>
+          <p:nvPr>
+            <p:ph type="title"/>
+          </p:nvPr>
+        </p:nvSpPr>
+        <p:spPr>
+          <a:xfrm>
+            <a:off x="919314" y="190464"/>
+            <a:ext cx="10515600" cy="1325563"/>
+          </a:xfrm>
+        </p:spPr>
+        <p:txBody>
+          <a:bodyPr/>
+          <a:lstStyle/>
+          <a:p>
+            <a:r>
+              <a:rPr lang="en-GB" dirty="0">
+                <a:solidFill>
+                  <a:srgbClr val="676767"/>
+                </a:solidFill>
+              </a:rPr>
+              <a:t>A possible workflow</a:t>
+            </a:r>
+          </a:p>
+        </p:txBody>
+      </p:sp>
+      <p:sp>
+        <p:nvSpPr>
+          <p:cNvPr id="3" name="Content Placeholder 2">
+            <a:extLst>
+              <a:ext uri="{FF2B5EF4-FFF2-40B4-BE49-F238E27FC236}">
+                <a16:creationId xmlns:a16="http://schemas.microsoft.com/office/drawing/2014/main" id="{A6BF4D6B-1CA0-DB9A-FA7F-A5FA83DEBA99}"/>
+              </a:ext>
+            </a:extLst>
+          </p:cNvPr>
+          <p:cNvSpPr>
+            <a:spLocks noGrp="1"/>
+          </p:cNvSpPr>
+          <p:nvPr>
+            <p:ph idx="1"/>
+          </p:nvPr>
+        </p:nvSpPr>
+        <p:spPr>
+          <a:xfrm>
+            <a:off x="838199" y="1413031"/>
+            <a:ext cx="10596715" cy="4906652"/>
+          </a:xfrm>
+          <a:solidFill>
+            <a:srgbClr val="FAF0E6"/>
+          </a:solidFill>
+        </p:spPr>
+        <p:txBody>
+          <a:bodyPr>
+            <a:normAutofit/>
+          </a:bodyPr>
+          <a:lstStyle/>
+          <a:p>
+            <a:pPr marL="0" indent="0">
+              <a:buNone/>
+            </a:pPr>
+            <a:r>
+              <a:rPr lang="en-GB" sz="3600" dirty="0">
+                <a:solidFill>
+                  <a:srgbClr val="3A3A3A"/>
+                </a:solidFill>
+              </a:rPr>
+              <a:t>Now that we are looking at our data, we see that sometimes the app offers financial advice.</a:t>
+            </a:r>
+          </a:p>
+          <a:p>
+            <a:pPr marL="0" indent="0">
+              <a:buNone/>
+            </a:pPr>
+            <a:endParaRPr lang="en-GB" sz="3600" dirty="0">
+              <a:solidFill>
+                <a:srgbClr val="3A3A3A"/>
+              </a:solidFill>
+            </a:endParaRPr>
+          </a:p>
+          <a:p>
+            <a:pPr marL="0" indent="0">
+              <a:buNone/>
+            </a:pPr>
+            <a:r>
+              <a:rPr lang="en-GB" sz="3600" dirty="0">
+                <a:solidFill>
+                  <a:srgbClr val="3A3A3A"/>
+                </a:solidFill>
+              </a:rPr>
+              <a:t>We must prevent this (guardrails) so we create an LLM as Judge that detects if this article had financial advice.</a:t>
+            </a:r>
+          </a:p>
+          <a:p>
+            <a:pPr marL="0" indent="0">
+              <a:buNone/>
+            </a:pPr>
+            <a:endParaRPr lang="en-GB" sz="3600" dirty="0">
+              <a:solidFill>
+                <a:srgbClr val="3A3A3A"/>
+              </a:solidFill>
+            </a:endParaRPr>
+          </a:p>
+          <a:p>
+            <a:pPr marL="0" indent="0">
+              <a:buNone/>
+            </a:pPr>
+            <a:r>
+              <a:rPr lang="en-GB" sz="3600" dirty="0">
+                <a:solidFill>
+                  <a:srgbClr val="3A3A3A"/>
+                </a:solidFill>
+              </a:rPr>
+              <a:t>It saves many problems…</a:t>
+            </a:r>
+            <a:endParaRPr lang="en-GB" sz="3600" dirty="0"/>
+          </a:p>
+        </p:txBody>
+      </p:sp>
+    </p:spTree>
+    <p:extLst>
+      <p:ext uri="{BB962C8B-B14F-4D97-AF65-F5344CB8AC3E}">
+        <p14:creationId xmlns:p14="http://schemas.microsoft.com/office/powerpoint/2010/main" val="2293205134"/>
+      </p:ext>
+    </p:extLst>
+  </p:cSld>
+  <p:clrMapOvr>
+    <a:masterClrMapping/>
+  </p:clrMapOvr>
+</p:sld>
+</file>
+
+<file path=ppt/slides/slide21.xml><?xml version="1.0" encoding="utf-8"?>
 <p:sld xmlns:a="http://schemas.openxmlformats.org/drawingml/2006/main" xmlns:r="http://schemas.openxmlformats.org/officeDocument/2006/relationships" xmlns:p="http://schemas.openxmlformats.org/presentationml/2006/main">
   <p:cSld>
     <p:bg>
@@ -6442,7 +6578,7 @@
 </p:sld>
 </file>
 
-<file path=ppt/slides/slide21.xml><?xml version="1.0" encoding="utf-8"?>
+<file path=ppt/slides/slide22.xml><?xml version="1.0" encoding="utf-8"?>
 <p:sld xmlns:a="http://schemas.openxmlformats.org/drawingml/2006/main" xmlns:r="http://schemas.openxmlformats.org/officeDocument/2006/relationships" xmlns:p="http://schemas.openxmlformats.org/presentationml/2006/main">
   <p:cSld>
     <p:bg>
@@ -6720,7 +6856,7 @@
 </p:sld>
 </file>
 
-<file path=ppt/slides/slide22.xml><?xml version="1.0" encoding="utf-8"?>
+<file path=ppt/slides/slide23.xml><?xml version="1.0" encoding="utf-8"?>
 <p:sld xmlns:a="http://schemas.openxmlformats.org/drawingml/2006/main" xmlns:r="http://schemas.openxmlformats.org/officeDocument/2006/relationships" xmlns:p="http://schemas.openxmlformats.org/presentationml/2006/main">
   <p:cSld>
     <p:bg>
@@ -6919,7 +7055,7 @@
 </p:sld>
 </file>
 
-<file path=ppt/slides/slide23.xml><?xml version="1.0" encoding="utf-8"?>
+<file path=ppt/slides/slide24.xml><?xml version="1.0" encoding="utf-8"?>
 <p:sld xmlns:a="http://schemas.openxmlformats.org/drawingml/2006/main" xmlns:r="http://schemas.openxmlformats.org/officeDocument/2006/relationships" xmlns:p="http://schemas.openxmlformats.org/presentationml/2006/main">
   <p:cSld>
     <p:bg>
@@ -7229,6 +7365,366 @@
         <p:cNvPr id="1" name="">
           <a:extLst>
             <a:ext uri="{FF2B5EF4-FFF2-40B4-BE49-F238E27FC236}">
+              <a16:creationId xmlns:a16="http://schemas.microsoft.com/office/drawing/2014/main" id="{12B368DB-F2D2-7CA9-1BC2-247B2B57A665}"/>
+            </a:ext>
+          </a:extLst>
+        </p:cNvPr>
+        <p:cNvGrpSpPr/>
+        <p:nvPr/>
+      </p:nvGrpSpPr>
+      <p:grpSpPr>
+        <a:xfrm>
+          <a:off x="0" y="0"/>
+          <a:ext cx="0" cy="0"/>
+          <a:chOff x="0" y="0"/>
+          <a:chExt cx="0" cy="0"/>
+        </a:xfrm>
+      </p:grpSpPr>
+      <p:sp>
+        <p:nvSpPr>
+          <p:cNvPr id="2" name="Title 1">
+            <a:extLst>
+              <a:ext uri="{FF2B5EF4-FFF2-40B4-BE49-F238E27FC236}">
+                <a16:creationId xmlns:a16="http://schemas.microsoft.com/office/drawing/2014/main" id="{0ED2CB7A-5099-F122-7A14-416B6039955F}"/>
+              </a:ext>
+            </a:extLst>
+          </p:cNvPr>
+          <p:cNvSpPr>
+            <a:spLocks noGrp="1"/>
+          </p:cNvSpPr>
+          <p:nvPr>
+            <p:ph type="title"/>
+          </p:nvPr>
+        </p:nvSpPr>
+        <p:spPr>
+          <a:xfrm>
+            <a:off x="919314" y="190464"/>
+            <a:ext cx="10515600" cy="1325563"/>
+          </a:xfrm>
+        </p:spPr>
+        <p:txBody>
+          <a:bodyPr/>
+          <a:lstStyle/>
+          <a:p>
+            <a:r>
+              <a:rPr lang="en-GB" dirty="0">
+                <a:solidFill>
+                  <a:srgbClr val="676767"/>
+                </a:solidFill>
+              </a:rPr>
+              <a:t>Langchain Deep Research Agent</a:t>
+            </a:r>
+          </a:p>
+        </p:txBody>
+      </p:sp>
+      <p:pic>
+        <p:nvPicPr>
+          <p:cNvPr id="5" name="Content Placeholder 4">
+            <a:extLst>
+              <a:ext uri="{FF2B5EF4-FFF2-40B4-BE49-F238E27FC236}">
+                <a16:creationId xmlns:a16="http://schemas.microsoft.com/office/drawing/2014/main" id="{4072A051-1893-52F9-2868-7CC8BEF1B590}"/>
+              </a:ext>
+            </a:extLst>
+          </p:cNvPr>
+          <p:cNvPicPr>
+            <a:picLocks noGrp="1" noChangeAspect="1"/>
+          </p:cNvPicPr>
+          <p:nvPr>
+            <p:ph idx="1"/>
+          </p:nvPr>
+        </p:nvPicPr>
+        <p:blipFill>
+          <a:blip r:embed="rId2">
+            <a:extLst>
+              <a:ext uri="{28A0092B-C50C-407E-A947-70E740481C1C}">
+                <a14:useLocalDpi xmlns:a14="http://schemas.microsoft.com/office/drawing/2010/main" val="0"/>
+              </a:ext>
+            </a:extLst>
+          </a:blip>
+          <a:srcRect/>
+          <a:stretch/>
+        </p:blipFill>
+        <p:spPr>
+          <a:xfrm>
+            <a:off x="919314" y="1234476"/>
+            <a:ext cx="10596563" cy="4870469"/>
+          </a:xfrm>
+          <a:solidFill>
+            <a:srgbClr val="FAF0E6"/>
+          </a:solidFill>
+        </p:spPr>
+      </p:pic>
+      <p:sp>
+        <p:nvSpPr>
+          <p:cNvPr id="3" name="TextBox 2">
+            <a:extLst>
+              <a:ext uri="{FF2B5EF4-FFF2-40B4-BE49-F238E27FC236}">
+                <a16:creationId xmlns:a16="http://schemas.microsoft.com/office/drawing/2014/main" id="{ED29D640-FB0D-6E7D-3BC2-3F2645D1968B}"/>
+              </a:ext>
+            </a:extLst>
+          </p:cNvPr>
+          <p:cNvSpPr txBox="1"/>
+          <p:nvPr/>
+        </p:nvSpPr>
+        <p:spPr>
+          <a:xfrm>
+            <a:off x="882443" y="6104945"/>
+            <a:ext cx="10670303" cy="461665"/>
+          </a:xfrm>
+          <a:prstGeom prst="rect">
+            <a:avLst/>
+          </a:prstGeom>
+          <a:noFill/>
+        </p:spPr>
+        <p:txBody>
+          <a:bodyPr wrap="square" rtlCol="0">
+            <a:spAutoFit/>
+          </a:bodyPr>
+          <a:lstStyle/>
+          <a:p>
+            <a:pPr algn="ctr"/>
+            <a:r>
+              <a:rPr lang="en-GB" sz="2400" dirty="0">
+                <a:hlinkClick r:id="rId3"/>
+              </a:rPr>
+              <a:t>https://github.com/langchain-ai/open_deep_research</a:t>
+            </a:r>
+            <a:endParaRPr lang="en-GB" sz="2400" dirty="0"/>
+          </a:p>
+        </p:txBody>
+      </p:sp>
+      <p:sp>
+        <p:nvSpPr>
+          <p:cNvPr id="4" name="TextBox 3">
+            <a:extLst>
+              <a:ext uri="{FF2B5EF4-FFF2-40B4-BE49-F238E27FC236}">
+                <a16:creationId xmlns:a16="http://schemas.microsoft.com/office/drawing/2014/main" id="{74476A36-D4CC-04A8-8BCA-4E5DCB2C14CC}"/>
+              </a:ext>
+            </a:extLst>
+          </p:cNvPr>
+          <p:cNvSpPr txBox="1"/>
+          <p:nvPr/>
+        </p:nvSpPr>
+        <p:spPr>
+          <a:xfrm>
+            <a:off x="1212351" y="2761769"/>
+            <a:ext cx="3955550" cy="1815882"/>
+          </a:xfrm>
+          <a:prstGeom prst="rect">
+            <a:avLst/>
+          </a:prstGeom>
+          <a:noFill/>
+        </p:spPr>
+        <p:txBody>
+          <a:bodyPr wrap="square" rtlCol="0">
+            <a:spAutoFit/>
+          </a:bodyPr>
+          <a:lstStyle/>
+          <a:p>
+            <a:r>
+              <a:rPr lang="en-GB" sz="2800" dirty="0"/>
+              <a:t>A top performing Deep Research Agent based on certain open benchmarks.</a:t>
+            </a:r>
+          </a:p>
+        </p:txBody>
+      </p:sp>
+    </p:spTree>
+    <p:extLst>
+      <p:ext uri="{BB962C8B-B14F-4D97-AF65-F5344CB8AC3E}">
+        <p14:creationId xmlns:p14="http://schemas.microsoft.com/office/powerpoint/2010/main" val="2357972529"/>
+      </p:ext>
+    </p:extLst>
+  </p:cSld>
+  <p:clrMapOvr>
+    <a:masterClrMapping/>
+  </p:clrMapOvr>
+</p:sld>
+</file>
+
+<file path=ppt/slides/slide4.xml><?xml version="1.0" encoding="utf-8"?>
+<p:sld xmlns:a="http://schemas.openxmlformats.org/drawingml/2006/main" xmlns:r="http://schemas.openxmlformats.org/officeDocument/2006/relationships" xmlns:p="http://schemas.openxmlformats.org/presentationml/2006/main">
+  <p:cSld>
+    <p:bg>
+      <p:bgPr>
+        <a:solidFill>
+          <a:srgbClr val="FAF0E6"/>
+        </a:solidFill>
+        <a:effectLst/>
+      </p:bgPr>
+    </p:bg>
+    <p:spTree>
+      <p:nvGrpSpPr>
+        <p:cNvPr id="1" name="">
+          <a:extLst>
+            <a:ext uri="{FF2B5EF4-FFF2-40B4-BE49-F238E27FC236}">
+              <a16:creationId xmlns:a16="http://schemas.microsoft.com/office/drawing/2014/main" id="{1AA440AF-DD92-7905-6BC8-EE77381BAEAB}"/>
+            </a:ext>
+          </a:extLst>
+        </p:cNvPr>
+        <p:cNvGrpSpPr/>
+        <p:nvPr/>
+      </p:nvGrpSpPr>
+      <p:grpSpPr>
+        <a:xfrm>
+          <a:off x="0" y="0"/>
+          <a:ext cx="0" cy="0"/>
+          <a:chOff x="0" y="0"/>
+          <a:chExt cx="0" cy="0"/>
+        </a:xfrm>
+      </p:grpSpPr>
+      <p:sp>
+        <p:nvSpPr>
+          <p:cNvPr id="2" name="Title 1">
+            <a:extLst>
+              <a:ext uri="{FF2B5EF4-FFF2-40B4-BE49-F238E27FC236}">
+                <a16:creationId xmlns:a16="http://schemas.microsoft.com/office/drawing/2014/main" id="{1A15E1A2-83B2-14F0-BFEA-861422733F26}"/>
+              </a:ext>
+            </a:extLst>
+          </p:cNvPr>
+          <p:cNvSpPr>
+            <a:spLocks noGrp="1"/>
+          </p:cNvSpPr>
+          <p:nvPr>
+            <p:ph type="title"/>
+          </p:nvPr>
+        </p:nvSpPr>
+        <p:spPr>
+          <a:xfrm>
+            <a:off x="919314" y="190464"/>
+            <a:ext cx="10515600" cy="1325563"/>
+          </a:xfrm>
+        </p:spPr>
+        <p:txBody>
+          <a:bodyPr/>
+          <a:lstStyle/>
+          <a:p>
+            <a:r>
+              <a:rPr lang="en-GB" dirty="0">
+                <a:solidFill>
+                  <a:srgbClr val="676767"/>
+                </a:solidFill>
+              </a:rPr>
+              <a:t>Google CRM Agent</a:t>
+            </a:r>
+          </a:p>
+        </p:txBody>
+      </p:sp>
+      <p:pic>
+        <p:nvPicPr>
+          <p:cNvPr id="5" name="Content Placeholder 4" descr="A diagram of a business&#10;&#10;AI-generated content may be incorrect.">
+            <a:extLst>
+              <a:ext uri="{FF2B5EF4-FFF2-40B4-BE49-F238E27FC236}">
+                <a16:creationId xmlns:a16="http://schemas.microsoft.com/office/drawing/2014/main" id="{35C7062D-4D91-6909-2AFE-1BD94FA2B192}"/>
+              </a:ext>
+            </a:extLst>
+          </p:cNvPr>
+          <p:cNvPicPr>
+            <a:picLocks noGrp="1" noChangeAspect="1"/>
+          </p:cNvPicPr>
+          <p:nvPr>
+            <p:ph idx="1"/>
+          </p:nvPr>
+        </p:nvPicPr>
+        <p:blipFill>
+          <a:blip r:embed="rId2">
+            <a:extLst>
+              <a:ext uri="{28A0092B-C50C-407E-A947-70E740481C1C}">
+                <a14:useLocalDpi xmlns:a14="http://schemas.microsoft.com/office/drawing/2010/main" val="0"/>
+              </a:ext>
+            </a:extLst>
+          </a:blip>
+          <a:stretch>
+            <a:fillRect/>
+          </a:stretch>
+        </p:blipFill>
+        <p:spPr>
+          <a:xfrm>
+            <a:off x="919314" y="1204979"/>
+            <a:ext cx="10596563" cy="4870469"/>
+          </a:xfrm>
+          <a:solidFill>
+            <a:srgbClr val="FAF0E6"/>
+          </a:solidFill>
+        </p:spPr>
+      </p:pic>
+      <p:sp>
+        <p:nvSpPr>
+          <p:cNvPr id="3" name="TextBox 2">
+            <a:extLst>
+              <a:ext uri="{FF2B5EF4-FFF2-40B4-BE49-F238E27FC236}">
+                <a16:creationId xmlns:a16="http://schemas.microsoft.com/office/drawing/2014/main" id="{5E94F5A6-658B-3303-7ABD-572CD1DE28E5}"/>
+              </a:ext>
+            </a:extLst>
+          </p:cNvPr>
+          <p:cNvSpPr txBox="1"/>
+          <p:nvPr/>
+        </p:nvSpPr>
+        <p:spPr>
+          <a:xfrm>
+            <a:off x="882443" y="6104945"/>
+            <a:ext cx="10670303" cy="615553"/>
+          </a:xfrm>
+          <a:prstGeom prst="rect">
+            <a:avLst/>
+          </a:prstGeom>
+          <a:noFill/>
+        </p:spPr>
+        <p:txBody>
+          <a:bodyPr wrap="square" rtlCol="0">
+            <a:spAutoFit/>
+          </a:bodyPr>
+          <a:lstStyle/>
+          <a:p>
+            <a:pPr algn="ctr"/>
+            <a:r>
+              <a:rPr lang="en-GB" sz="1600" dirty="0">
+                <a:hlinkClick r:id="rId3"/>
+              </a:rPr>
+              <a:t>https://github.com/vladkol/crm-data-agent/blob/main/src/agents/data_agent/prompts/crm_business_analyst.py</a:t>
+            </a:r>
+            <a:endParaRPr lang="en-GB" sz="1600" dirty="0"/>
+          </a:p>
+          <a:p>
+            <a:pPr algn="ctr"/>
+            <a:r>
+              <a:rPr lang="en-GB" u="sng" dirty="0">
+                <a:hlinkClick r:id="rId4"/>
+              </a:rPr>
+              <a:t>https://www.youtube.com/watch?v=2-AJszogj7Y</a:t>
+            </a:r>
+            <a:endParaRPr lang="en-GB" sz="1600" dirty="0"/>
+          </a:p>
+        </p:txBody>
+      </p:sp>
+    </p:spTree>
+    <p:extLst>
+      <p:ext uri="{BB962C8B-B14F-4D97-AF65-F5344CB8AC3E}">
+        <p14:creationId xmlns:p14="http://schemas.microsoft.com/office/powerpoint/2010/main" val="3279871281"/>
+      </p:ext>
+    </p:extLst>
+  </p:cSld>
+  <p:clrMapOvr>
+    <a:masterClrMapping/>
+  </p:clrMapOvr>
+</p:sld>
+</file>
+
+<file path=ppt/slides/slide5.xml><?xml version="1.0" encoding="utf-8"?>
+<p:sld xmlns:a="http://schemas.openxmlformats.org/drawingml/2006/main" xmlns:r="http://schemas.openxmlformats.org/officeDocument/2006/relationships" xmlns:p="http://schemas.openxmlformats.org/presentationml/2006/main">
+  <p:cSld>
+    <p:bg>
+      <p:bgPr>
+        <a:solidFill>
+          <a:srgbClr val="FAF0E6"/>
+        </a:solidFill>
+        <a:effectLst/>
+      </p:bgPr>
+    </p:bg>
+    <p:spTree>
+      <p:nvGrpSpPr>
+        <p:cNvPr id="1" name="">
+          <a:extLst>
+            <a:ext uri="{FF2B5EF4-FFF2-40B4-BE49-F238E27FC236}">
               <a16:creationId xmlns:a16="http://schemas.microsoft.com/office/drawing/2014/main" id="{FF357D8D-75A6-7D51-8D6A-0577ACB955CF}"/>
             </a:ext>
           </a:extLst>
@@ -7407,7 +7903,7 @@
 </p:sld>
 </file>
 
-<file path=ppt/slides/slide4.xml><?xml version="1.0" encoding="utf-8"?>
+<file path=ppt/slides/slide6.xml><?xml version="1.0" encoding="utf-8"?>
 <p:sld xmlns:a="http://schemas.openxmlformats.org/drawingml/2006/main" xmlns:r="http://schemas.openxmlformats.org/officeDocument/2006/relationships" xmlns:p="http://schemas.openxmlformats.org/presentationml/2006/main">
   <p:cSld>
     <p:bg>
@@ -7737,7 +8233,7 @@
 </p:sld>
 </file>
 
-<file path=ppt/slides/slide5.xml><?xml version="1.0" encoding="utf-8"?>
+<file path=ppt/slides/slide7.xml><?xml version="1.0" encoding="utf-8"?>
 <p:sld xmlns:a="http://schemas.openxmlformats.org/drawingml/2006/main" xmlns:r="http://schemas.openxmlformats.org/officeDocument/2006/relationships" xmlns:p="http://schemas.openxmlformats.org/presentationml/2006/main">
   <p:cSld>
     <p:bg>
@@ -7921,7 +8417,7 @@
 </p:sld>
 </file>
 
-<file path=ppt/slides/slide6.xml><?xml version="1.0" encoding="utf-8"?>
+<file path=ppt/slides/slide8.xml><?xml version="1.0" encoding="utf-8"?>
 <p:sld xmlns:a="http://schemas.openxmlformats.org/drawingml/2006/main" xmlns:r="http://schemas.openxmlformats.org/officeDocument/2006/relationships" xmlns:p="http://schemas.openxmlformats.org/presentationml/2006/main">
   <p:cSld>
     <p:bg>
@@ -8076,7 +8572,7 @@
 </p:sld>
 </file>
 
-<file path=ppt/slides/slide7.xml><?xml version="1.0" encoding="utf-8"?>
+<file path=ppt/slides/slide9.xml><?xml version="1.0" encoding="utf-8"?>
 <p:sld xmlns:a="http://schemas.openxmlformats.org/drawingml/2006/main" xmlns:r="http://schemas.openxmlformats.org/officeDocument/2006/relationships" xmlns:p="http://schemas.openxmlformats.org/presentationml/2006/main">
   <p:cSld>
     <p:bg>
@@ -8343,314 +8839,6 @@
     <p:extLst>
       <p:ext uri="{BB962C8B-B14F-4D97-AF65-F5344CB8AC3E}">
         <p14:creationId xmlns:p14="http://schemas.microsoft.com/office/powerpoint/2010/main" val="1963721843"/>
-      </p:ext>
-    </p:extLst>
-  </p:cSld>
-  <p:clrMapOvr>
-    <a:masterClrMapping/>
-  </p:clrMapOvr>
-</p:sld>
-</file>
-
-<file path=ppt/slides/slide8.xml><?xml version="1.0" encoding="utf-8"?>
-<p:sld xmlns:a="http://schemas.openxmlformats.org/drawingml/2006/main" xmlns:r="http://schemas.openxmlformats.org/officeDocument/2006/relationships" xmlns:p="http://schemas.openxmlformats.org/presentationml/2006/main">
-  <p:cSld>
-    <p:bg>
-      <p:bgPr>
-        <a:solidFill>
-          <a:srgbClr val="FAF0E6"/>
-        </a:solidFill>
-        <a:effectLst/>
-      </p:bgPr>
-    </p:bg>
-    <p:spTree>
-      <p:nvGrpSpPr>
-        <p:cNvPr id="1" name="">
-          <a:extLst>
-            <a:ext uri="{FF2B5EF4-FFF2-40B4-BE49-F238E27FC236}">
-              <a16:creationId xmlns:a16="http://schemas.microsoft.com/office/drawing/2014/main" id="{2347564E-77B5-A1B3-4D8A-5BB5653DB1BE}"/>
-            </a:ext>
-          </a:extLst>
-        </p:cNvPr>
-        <p:cNvGrpSpPr/>
-        <p:nvPr/>
-      </p:nvGrpSpPr>
-      <p:grpSpPr>
-        <a:xfrm>
-          <a:off x="0" y="0"/>
-          <a:ext cx="0" cy="0"/>
-          <a:chOff x="0" y="0"/>
-          <a:chExt cx="0" cy="0"/>
-        </a:xfrm>
-      </p:grpSpPr>
-      <p:sp>
-        <p:nvSpPr>
-          <p:cNvPr id="2" name="Title 1">
-            <a:extLst>
-              <a:ext uri="{FF2B5EF4-FFF2-40B4-BE49-F238E27FC236}">
-                <a16:creationId xmlns:a16="http://schemas.microsoft.com/office/drawing/2014/main" id="{D7145CE4-27DE-F4A8-F6E6-AB0BFE9E0E92}"/>
-              </a:ext>
-            </a:extLst>
-          </p:cNvPr>
-          <p:cNvSpPr>
-            <a:spLocks noGrp="1"/>
-          </p:cNvSpPr>
-          <p:nvPr>
-            <p:ph type="title"/>
-          </p:nvPr>
-        </p:nvSpPr>
-        <p:spPr>
-          <a:xfrm>
-            <a:off x="919314" y="190464"/>
-            <a:ext cx="10515600" cy="1325563"/>
-          </a:xfrm>
-        </p:spPr>
-        <p:txBody>
-          <a:bodyPr/>
-          <a:lstStyle/>
-          <a:p>
-            <a:r>
-              <a:rPr lang="en-GB" dirty="0">
-                <a:solidFill>
-                  <a:srgbClr val="676767"/>
-                </a:solidFill>
-              </a:rPr>
-              <a:t>What is an AI Agent?</a:t>
-            </a:r>
-          </a:p>
-        </p:txBody>
-      </p:sp>
-      <p:pic>
-        <p:nvPicPr>
-          <p:cNvPr id="5" name="Content Placeholder 4" descr="A white background with black text&#10;&#10;AI-generated content may be incorrect.">
-            <a:extLst>
-              <a:ext uri="{FF2B5EF4-FFF2-40B4-BE49-F238E27FC236}">
-                <a16:creationId xmlns:a16="http://schemas.microsoft.com/office/drawing/2014/main" id="{C5945021-DA27-E6E7-4078-598B7B83A45D}"/>
-              </a:ext>
-            </a:extLst>
-          </p:cNvPr>
-          <p:cNvPicPr>
-            <a:picLocks noGrp="1" noChangeAspect="1"/>
-          </p:cNvPicPr>
-          <p:nvPr>
-            <p:ph idx="1"/>
-          </p:nvPr>
-        </p:nvPicPr>
-        <p:blipFill>
-          <a:blip r:embed="rId2">
-            <a:extLst>
-              <a:ext uri="{28A0092B-C50C-407E-A947-70E740481C1C}">
-                <a14:useLocalDpi xmlns:a14="http://schemas.microsoft.com/office/drawing/2010/main" val="0"/>
-              </a:ext>
-            </a:extLst>
-          </a:blip>
-          <a:stretch>
-            <a:fillRect/>
-          </a:stretch>
-        </p:blipFill>
-        <p:spPr>
-          <a:xfrm>
-            <a:off x="1006867" y="3621288"/>
-            <a:ext cx="7819867" cy="2002649"/>
-          </a:xfrm>
-          <a:solidFill>
-            <a:srgbClr val="FAF0E6"/>
-          </a:solidFill>
-        </p:spPr>
-      </p:pic>
-      <p:sp>
-        <p:nvSpPr>
-          <p:cNvPr id="6" name="TextBox 5">
-            <a:extLst>
-              <a:ext uri="{FF2B5EF4-FFF2-40B4-BE49-F238E27FC236}">
-                <a16:creationId xmlns:a16="http://schemas.microsoft.com/office/drawing/2014/main" id="{770FE6C9-06DD-BD42-AAA1-C250315A7DD0}"/>
-              </a:ext>
-            </a:extLst>
-          </p:cNvPr>
-          <p:cNvSpPr txBox="1"/>
-          <p:nvPr/>
-        </p:nvSpPr>
-        <p:spPr>
-          <a:xfrm>
-            <a:off x="1006867" y="2853273"/>
-            <a:ext cx="6185043" cy="646331"/>
-          </a:xfrm>
-          <a:prstGeom prst="rect">
-            <a:avLst/>
-          </a:prstGeom>
-          <a:noFill/>
-        </p:spPr>
-        <p:txBody>
-          <a:bodyPr wrap="square" rtlCol="0">
-            <a:spAutoFit/>
-          </a:bodyPr>
-          <a:lstStyle/>
-          <a:p>
-            <a:r>
-              <a:rPr lang="en-GB" sz="3600" dirty="0"/>
-              <a:t>Anthropic</a:t>
-            </a:r>
-          </a:p>
-        </p:txBody>
-      </p:sp>
-      <p:sp>
-        <p:nvSpPr>
-          <p:cNvPr id="7" name="TextBox 6">
-            <a:extLst>
-              <a:ext uri="{FF2B5EF4-FFF2-40B4-BE49-F238E27FC236}">
-                <a16:creationId xmlns:a16="http://schemas.microsoft.com/office/drawing/2014/main" id="{10574A54-4BBE-E586-ECF8-9E088A1BAD42}"/>
-              </a:ext>
-            </a:extLst>
-          </p:cNvPr>
-          <p:cNvSpPr txBox="1"/>
-          <p:nvPr/>
-        </p:nvSpPr>
-        <p:spPr>
-          <a:xfrm>
-            <a:off x="1006866" y="1923040"/>
-            <a:ext cx="10428047" cy="584775"/>
-          </a:xfrm>
-          <a:prstGeom prst="rect">
-            <a:avLst/>
-          </a:prstGeom>
-          <a:noFill/>
-        </p:spPr>
-        <p:txBody>
-          <a:bodyPr wrap="square" rtlCol="0">
-            <a:spAutoFit/>
-          </a:bodyPr>
-          <a:lstStyle/>
-          <a:p>
-            <a:r>
-              <a:rPr lang="en-GB" sz="3200" dirty="0"/>
-              <a:t>Many definitions and people opt for ‘Agentic Apps’</a:t>
-            </a:r>
-          </a:p>
-        </p:txBody>
-      </p:sp>
-    </p:spTree>
-    <p:extLst>
-      <p:ext uri="{BB962C8B-B14F-4D97-AF65-F5344CB8AC3E}">
-        <p14:creationId xmlns:p14="http://schemas.microsoft.com/office/powerpoint/2010/main" val="3202180944"/>
-      </p:ext>
-    </p:extLst>
-  </p:cSld>
-  <p:clrMapOvr>
-    <a:masterClrMapping/>
-  </p:clrMapOvr>
-</p:sld>
-</file>
-
-<file path=ppt/slides/slide9.xml><?xml version="1.0" encoding="utf-8"?>
-<p:sld xmlns:a="http://schemas.openxmlformats.org/drawingml/2006/main" xmlns:r="http://schemas.openxmlformats.org/officeDocument/2006/relationships" xmlns:p="http://schemas.openxmlformats.org/presentationml/2006/main">
-  <p:cSld>
-    <p:bg>
-      <p:bgPr>
-        <a:solidFill>
-          <a:srgbClr val="FAF0E6"/>
-        </a:solidFill>
-        <a:effectLst/>
-      </p:bgPr>
-    </p:bg>
-    <p:spTree>
-      <p:nvGrpSpPr>
-        <p:cNvPr id="1" name="">
-          <a:extLst>
-            <a:ext uri="{FF2B5EF4-FFF2-40B4-BE49-F238E27FC236}">
-              <a16:creationId xmlns:a16="http://schemas.microsoft.com/office/drawing/2014/main" id="{6DD41B23-3D3A-3C9B-88A6-3FD8EB1C9BB8}"/>
-            </a:ext>
-          </a:extLst>
-        </p:cNvPr>
-        <p:cNvGrpSpPr/>
-        <p:nvPr/>
-      </p:nvGrpSpPr>
-      <p:grpSpPr>
-        <a:xfrm>
-          <a:off x="0" y="0"/>
-          <a:ext cx="0" cy="0"/>
-          <a:chOff x="0" y="0"/>
-          <a:chExt cx="0" cy="0"/>
-        </a:xfrm>
-      </p:grpSpPr>
-      <p:sp>
-        <p:nvSpPr>
-          <p:cNvPr id="2" name="Title 1">
-            <a:extLst>
-              <a:ext uri="{FF2B5EF4-FFF2-40B4-BE49-F238E27FC236}">
-                <a16:creationId xmlns:a16="http://schemas.microsoft.com/office/drawing/2014/main" id="{B46820D4-81FD-4FC2-57D1-F722A5249B9A}"/>
-              </a:ext>
-            </a:extLst>
-          </p:cNvPr>
-          <p:cNvSpPr>
-            <a:spLocks noGrp="1"/>
-          </p:cNvSpPr>
-          <p:nvPr>
-            <p:ph type="title"/>
-          </p:nvPr>
-        </p:nvSpPr>
-        <p:spPr>
-          <a:xfrm>
-            <a:off x="919314" y="190464"/>
-            <a:ext cx="10515600" cy="1325563"/>
-          </a:xfrm>
-        </p:spPr>
-        <p:txBody>
-          <a:bodyPr/>
-          <a:lstStyle/>
-          <a:p>
-            <a:r>
-              <a:rPr lang="en-GB" dirty="0">
-                <a:solidFill>
-                  <a:srgbClr val="676767"/>
-                </a:solidFill>
-              </a:rPr>
-              <a:t>API</a:t>
-            </a:r>
-          </a:p>
-        </p:txBody>
-      </p:sp>
-      <p:pic>
-        <p:nvPicPr>
-          <p:cNvPr id="5" name="Content Placeholder 4">
-            <a:hlinkClick r:id="rId3"/>
-            <a:extLst>
-              <a:ext uri="{FF2B5EF4-FFF2-40B4-BE49-F238E27FC236}">
-                <a16:creationId xmlns:a16="http://schemas.microsoft.com/office/drawing/2014/main" id="{28262053-F2FE-0B42-8B58-D4F6DA7A50D1}"/>
-              </a:ext>
-            </a:extLst>
-          </p:cNvPr>
-          <p:cNvPicPr>
-            <a:picLocks noGrp="1" noChangeAspect="1"/>
-          </p:cNvPicPr>
-          <p:nvPr>
-            <p:ph idx="1"/>
-          </p:nvPr>
-        </p:nvPicPr>
-        <p:blipFill>
-          <a:blip r:embed="rId4">
-            <a:extLst>
-              <a:ext uri="{28A0092B-C50C-407E-A947-70E740481C1C}">
-                <a14:useLocalDpi xmlns:a14="http://schemas.microsoft.com/office/drawing/2010/main" val="0"/>
-              </a:ext>
-            </a:extLst>
-          </a:blip>
-          <a:srcRect/>
-          <a:stretch/>
-        </p:blipFill>
-        <p:spPr>
-          <a:xfrm>
-            <a:off x="935542" y="1151739"/>
-            <a:ext cx="10499372" cy="5101576"/>
-          </a:xfrm>
-          <a:solidFill>
-            <a:srgbClr val="FAF0E6"/>
-          </a:solidFill>
-        </p:spPr>
-      </p:pic>
-    </p:spTree>
-    <p:extLst>
-      <p:ext uri="{BB962C8B-B14F-4D97-AF65-F5344CB8AC3E}">
-        <p14:creationId xmlns:p14="http://schemas.microsoft.com/office/powerpoint/2010/main" val="755290413"/>
       </p:ext>
     </p:extLst>
   </p:cSld>

--- a/PYDATA_SOUTHAMPTON_16SEP2025.pptx
+++ b/PYDATA_SOUTHAMPTON_16SEP2025.pptx
@@ -5,33 +5,34 @@
     <p:sldMasterId id="2147483648" r:id="rId1"/>
   </p:sldMasterIdLst>
   <p:notesMasterIdLst>
-    <p:notesMasterId r:id="rId26"/>
+    <p:notesMasterId r:id="rId27"/>
   </p:notesMasterIdLst>
   <p:sldIdLst>
     <p:sldId id="257" r:id="rId2"/>
-    <p:sldId id="284" r:id="rId3"/>
-    <p:sldId id="301" r:id="rId4"/>
-    <p:sldId id="280" r:id="rId5"/>
-    <p:sldId id="287" r:id="rId6"/>
-    <p:sldId id="262" r:id="rId7"/>
-    <p:sldId id="283" r:id="rId8"/>
-    <p:sldId id="266" r:id="rId9"/>
-    <p:sldId id="289" r:id="rId10"/>
-    <p:sldId id="263" r:id="rId11"/>
-    <p:sldId id="282" r:id="rId12"/>
-    <p:sldId id="264" r:id="rId13"/>
-    <p:sldId id="275" r:id="rId14"/>
-    <p:sldId id="285" r:id="rId15"/>
-    <p:sldId id="270" r:id="rId16"/>
-    <p:sldId id="291" r:id="rId17"/>
-    <p:sldId id="292" r:id="rId18"/>
-    <p:sldId id="293" r:id="rId19"/>
-    <p:sldId id="296" r:id="rId20"/>
-    <p:sldId id="297" r:id="rId21"/>
-    <p:sldId id="298" r:id="rId22"/>
-    <p:sldId id="300" r:id="rId23"/>
-    <p:sldId id="290" r:id="rId24"/>
-    <p:sldId id="286" r:id="rId25"/>
+    <p:sldId id="275" r:id="rId3"/>
+    <p:sldId id="284" r:id="rId4"/>
+    <p:sldId id="301" r:id="rId5"/>
+    <p:sldId id="280" r:id="rId6"/>
+    <p:sldId id="287" r:id="rId7"/>
+    <p:sldId id="262" r:id="rId8"/>
+    <p:sldId id="283" r:id="rId9"/>
+    <p:sldId id="266" r:id="rId10"/>
+    <p:sldId id="289" r:id="rId11"/>
+    <p:sldId id="263" r:id="rId12"/>
+    <p:sldId id="282" r:id="rId13"/>
+    <p:sldId id="302" r:id="rId14"/>
+    <p:sldId id="303" r:id="rId15"/>
+    <p:sldId id="285" r:id="rId16"/>
+    <p:sldId id="270" r:id="rId17"/>
+    <p:sldId id="291" r:id="rId18"/>
+    <p:sldId id="292" r:id="rId19"/>
+    <p:sldId id="293" r:id="rId20"/>
+    <p:sldId id="296" r:id="rId21"/>
+    <p:sldId id="297" r:id="rId22"/>
+    <p:sldId id="298" r:id="rId23"/>
+    <p:sldId id="300" r:id="rId24"/>
+    <p:sldId id="290" r:id="rId25"/>
+    <p:sldId id="286" r:id="rId26"/>
   </p:sldIdLst>
   <p:sldSz cx="12192000" cy="6858000"/>
   <p:notesSz cx="6858000" cy="9144000"/>
@@ -562,7 +563,7 @@
           <a:p>
             <a:fld id="{065A44AA-8EC2-41D9-A3D3-17850C1F9C4A}" type="slidenum">
               <a:rPr lang="en-GB" smtClean="0"/>
-              <a:t>11</a:t>
+              <a:t>12</a:t>
             </a:fld>
             <a:endParaRPr lang="en-GB"/>
           </a:p>
@@ -4060,6 +4061,282 @@
         <p:cNvPr id="1" name="">
           <a:extLst>
             <a:ext uri="{FF2B5EF4-FFF2-40B4-BE49-F238E27FC236}">
+              <a16:creationId xmlns:a16="http://schemas.microsoft.com/office/drawing/2014/main" id="{D9D054C6-8917-D20E-D273-8120BC3DCEF7}"/>
+            </a:ext>
+          </a:extLst>
+        </p:cNvPr>
+        <p:cNvGrpSpPr/>
+        <p:nvPr/>
+      </p:nvGrpSpPr>
+      <p:grpSpPr>
+        <a:xfrm>
+          <a:off x="0" y="0"/>
+          <a:ext cx="0" cy="0"/>
+          <a:chOff x="0" y="0"/>
+          <a:chExt cx="0" cy="0"/>
+        </a:xfrm>
+      </p:grpSpPr>
+      <p:sp>
+        <p:nvSpPr>
+          <p:cNvPr id="2" name="Title 1">
+            <a:extLst>
+              <a:ext uri="{FF2B5EF4-FFF2-40B4-BE49-F238E27FC236}">
+                <a16:creationId xmlns:a16="http://schemas.microsoft.com/office/drawing/2014/main" id="{EBEC38D0-41FE-8EF6-B85D-AD4F33132BDF}"/>
+              </a:ext>
+            </a:extLst>
+          </p:cNvPr>
+          <p:cNvSpPr>
+            <a:spLocks noGrp="1"/>
+          </p:cNvSpPr>
+          <p:nvPr>
+            <p:ph type="title"/>
+          </p:nvPr>
+        </p:nvSpPr>
+        <p:spPr>
+          <a:xfrm>
+            <a:off x="919314" y="190464"/>
+            <a:ext cx="10515600" cy="1325563"/>
+          </a:xfrm>
+        </p:spPr>
+        <p:txBody>
+          <a:bodyPr/>
+          <a:lstStyle/>
+          <a:p>
+            <a:r>
+              <a:rPr lang="en-GB" dirty="0">
+                <a:solidFill>
+                  <a:srgbClr val="676767"/>
+                </a:solidFill>
+              </a:rPr>
+              <a:t>When to use Evals?</a:t>
+            </a:r>
+          </a:p>
+        </p:txBody>
+      </p:sp>
+      <p:sp>
+        <p:nvSpPr>
+          <p:cNvPr id="3" name="Content Placeholder 2">
+            <a:extLst>
+              <a:ext uri="{FF2B5EF4-FFF2-40B4-BE49-F238E27FC236}">
+                <a16:creationId xmlns:a16="http://schemas.microsoft.com/office/drawing/2014/main" id="{6DE91604-D9B5-E437-CC1A-AA6836D7FBDB}"/>
+              </a:ext>
+            </a:extLst>
+          </p:cNvPr>
+          <p:cNvSpPr>
+            <a:spLocks noGrp="1"/>
+          </p:cNvSpPr>
+          <p:nvPr>
+            <p:ph idx="1"/>
+          </p:nvPr>
+        </p:nvSpPr>
+        <p:spPr>
+          <a:xfrm>
+            <a:off x="919314" y="1413031"/>
+            <a:ext cx="10596715" cy="4906652"/>
+          </a:xfrm>
+          <a:solidFill>
+            <a:srgbClr val="FAF0E6"/>
+          </a:solidFill>
+        </p:spPr>
+        <p:txBody>
+          <a:bodyPr>
+            <a:normAutofit/>
+          </a:bodyPr>
+          <a:lstStyle/>
+          <a:p>
+            <a:pPr marL="0" indent="0" algn="ctr">
+              <a:lnSpc>
+                <a:spcPts val="4500"/>
+              </a:lnSpc>
+              <a:buNone/>
+            </a:pPr>
+            <a:r>
+              <a:rPr lang="en-GB" sz="3600" i="1" dirty="0"/>
+              <a:t>.</a:t>
+            </a:r>
+          </a:p>
+        </p:txBody>
+      </p:sp>
+      <p:pic>
+        <p:nvPicPr>
+          <p:cNvPr id="5" name="Picture 4" descr="A screenshot of a video chat&#10;&#10;AI-generated content may be incorrect.">
+            <a:extLst>
+              <a:ext uri="{FF2B5EF4-FFF2-40B4-BE49-F238E27FC236}">
+                <a16:creationId xmlns:a16="http://schemas.microsoft.com/office/drawing/2014/main" id="{DA6CAE77-CE52-0982-3169-9D57CB095BCF}"/>
+              </a:ext>
+            </a:extLst>
+          </p:cNvPr>
+          <p:cNvPicPr>
+            <a:picLocks noChangeAspect="1"/>
+          </p:cNvPicPr>
+          <p:nvPr/>
+        </p:nvPicPr>
+        <p:blipFill>
+          <a:blip r:embed="rId2">
+            <a:extLst>
+              <a:ext uri="{28A0092B-C50C-407E-A947-70E740481C1C}">
+                <a14:useLocalDpi xmlns:a14="http://schemas.microsoft.com/office/drawing/2010/main" val="0"/>
+              </a:ext>
+            </a:extLst>
+          </a:blip>
+          <a:stretch>
+            <a:fillRect/>
+          </a:stretch>
+        </p:blipFill>
+        <p:spPr>
+          <a:xfrm>
+            <a:off x="951267" y="1238865"/>
+            <a:ext cx="7814286" cy="5080818"/>
+          </a:xfrm>
+          <a:prstGeom prst="rect">
+            <a:avLst/>
+          </a:prstGeom>
+        </p:spPr>
+      </p:pic>
+      <p:sp>
+        <p:nvSpPr>
+          <p:cNvPr id="6" name="TextBox 5">
+            <a:extLst>
+              <a:ext uri="{FF2B5EF4-FFF2-40B4-BE49-F238E27FC236}">
+                <a16:creationId xmlns:a16="http://schemas.microsoft.com/office/drawing/2014/main" id="{AF571150-50D6-DBAC-508E-95157935EFA8}"/>
+              </a:ext>
+            </a:extLst>
+          </p:cNvPr>
+          <p:cNvSpPr txBox="1"/>
+          <p:nvPr/>
+        </p:nvSpPr>
+        <p:spPr>
+          <a:xfrm>
+            <a:off x="6114614" y="2886982"/>
+            <a:ext cx="2682892" cy="1477328"/>
+          </a:xfrm>
+          <a:prstGeom prst="rect">
+            <a:avLst/>
+          </a:prstGeom>
+          <a:noFill/>
+        </p:spPr>
+        <p:txBody>
+          <a:bodyPr wrap="square" rtlCol="0">
+            <a:spAutoFit/>
+          </a:bodyPr>
+          <a:lstStyle/>
+          <a:p>
+            <a:r>
+              <a:rPr lang="en-GB" dirty="0"/>
+              <a:t>Raza Habib is the CEO and Cofounder of Humanloop</a:t>
+            </a:r>
+          </a:p>
+          <a:p>
+            <a:endParaRPr lang="en-GB" dirty="0"/>
+          </a:p>
+          <a:p>
+            <a:r>
+              <a:rPr lang="en-GB" dirty="0"/>
+              <a:t>Acquired by Anthropic</a:t>
+            </a:r>
+          </a:p>
+        </p:txBody>
+      </p:sp>
+      <p:pic>
+        <p:nvPicPr>
+          <p:cNvPr id="9" name="Graphic 8" descr="Convertible with solid fill">
+            <a:extLst>
+              <a:ext uri="{FF2B5EF4-FFF2-40B4-BE49-F238E27FC236}">
+                <a16:creationId xmlns:a16="http://schemas.microsoft.com/office/drawing/2014/main" id="{4311C918-C2A8-40AA-689D-6D6C00BED3AB}"/>
+              </a:ext>
+            </a:extLst>
+          </p:cNvPr>
+          <p:cNvPicPr>
+            <a:picLocks noChangeAspect="1"/>
+          </p:cNvPicPr>
+          <p:nvPr/>
+        </p:nvPicPr>
+        <p:blipFill>
+          <a:blip r:embed="rId3">
+            <a:extLst>
+              <a:ext uri="{96DAC541-7B7A-43D3-8B79-37D633B846F1}">
+                <asvg:svgBlip xmlns:asvg="http://schemas.microsoft.com/office/drawing/2016/SVG/main" r:embed="rId4"/>
+              </a:ext>
+            </a:extLst>
+          </a:blip>
+          <a:stretch>
+            <a:fillRect/>
+          </a:stretch>
+        </p:blipFill>
+        <p:spPr>
+          <a:xfrm>
+            <a:off x="9566196" y="-29615"/>
+            <a:ext cx="1868718" cy="1868718"/>
+          </a:xfrm>
+          <a:prstGeom prst="rect">
+            <a:avLst/>
+          </a:prstGeom>
+        </p:spPr>
+      </p:pic>
+      <p:sp>
+        <p:nvSpPr>
+          <p:cNvPr id="10" name="TextBox 9">
+            <a:extLst>
+              <a:ext uri="{FF2B5EF4-FFF2-40B4-BE49-F238E27FC236}">
+                <a16:creationId xmlns:a16="http://schemas.microsoft.com/office/drawing/2014/main" id="{B879CC0E-0C52-38D8-4BF1-DB740FDAFA55}"/>
+              </a:ext>
+            </a:extLst>
+          </p:cNvPr>
+          <p:cNvSpPr txBox="1"/>
+          <p:nvPr/>
+        </p:nvSpPr>
+        <p:spPr>
+          <a:xfrm>
+            <a:off x="8971838" y="1516027"/>
+            <a:ext cx="3053014" cy="3108543"/>
+          </a:xfrm>
+          <a:prstGeom prst="rect">
+            <a:avLst/>
+          </a:prstGeom>
+          <a:noFill/>
+        </p:spPr>
+        <p:txBody>
+          <a:bodyPr wrap="square" rtlCol="0">
+            <a:spAutoFit/>
+          </a:bodyPr>
+          <a:lstStyle/>
+          <a:p>
+            <a:r>
+              <a:rPr lang="en-GB" sz="2800" dirty="0"/>
+              <a:t>If we are to design and build an F1 race car, we might need a set of specs to develop, test and monitor against.</a:t>
+            </a:r>
+          </a:p>
+        </p:txBody>
+      </p:sp>
+    </p:spTree>
+    <p:extLst>
+      <p:ext uri="{BB962C8B-B14F-4D97-AF65-F5344CB8AC3E}">
+        <p14:creationId xmlns:p14="http://schemas.microsoft.com/office/powerpoint/2010/main" val="1963721843"/>
+      </p:ext>
+    </p:extLst>
+  </p:cSld>
+  <p:clrMapOvr>
+    <a:masterClrMapping/>
+  </p:clrMapOvr>
+</p:sld>
+</file>
+
+<file path=ppt/slides/slide11.xml><?xml version="1.0" encoding="utf-8"?>
+<p:sld xmlns:a="http://schemas.openxmlformats.org/drawingml/2006/main" xmlns:r="http://schemas.openxmlformats.org/officeDocument/2006/relationships" xmlns:p="http://schemas.openxmlformats.org/presentationml/2006/main">
+  <p:cSld>
+    <p:bg>
+      <p:bgPr>
+        <a:solidFill>
+          <a:srgbClr val="FAF0E6"/>
+        </a:solidFill>
+        <a:effectLst/>
+      </p:bgPr>
+    </p:bg>
+    <p:spTree>
+      <p:nvGrpSpPr>
+        <p:cNvPr id="1" name="">
+          <a:extLst>
+            <a:ext uri="{FF2B5EF4-FFF2-40B4-BE49-F238E27FC236}">
               <a16:creationId xmlns:a16="http://schemas.microsoft.com/office/drawing/2014/main" id="{2347564E-77B5-A1B3-4D8A-5BB5653DB1BE}"/>
             </a:ext>
           </a:extLst>
@@ -4233,7 +4510,7 @@
 </p:sld>
 </file>
 
-<file path=ppt/slides/slide11.xml><?xml version="1.0" encoding="utf-8"?>
+<file path=ppt/slides/slide12.xml><?xml version="1.0" encoding="utf-8"?>
 <p:sld xmlns:a="http://schemas.openxmlformats.org/drawingml/2006/main" xmlns:r="http://schemas.openxmlformats.org/officeDocument/2006/relationships" xmlns:p="http://schemas.openxmlformats.org/presentationml/2006/main">
   <p:cSld>
     <p:bg>
@@ -4352,7 +4629,7 @@
 </p:sld>
 </file>
 
-<file path=ppt/slides/slide12.xml><?xml version="1.0" encoding="utf-8"?>
+<file path=ppt/slides/slide13.xml><?xml version="1.0" encoding="utf-8"?>
 <p:sld xmlns:a="http://schemas.openxmlformats.org/drawingml/2006/main" xmlns:r="http://schemas.openxmlformats.org/officeDocument/2006/relationships" xmlns:p="http://schemas.openxmlformats.org/presentationml/2006/main">
   <p:cSld>
     <p:bg>
@@ -4368,7 +4645,7 @@
         <p:cNvPr id="1" name="">
           <a:extLst>
             <a:ext uri="{FF2B5EF4-FFF2-40B4-BE49-F238E27FC236}">
-              <a16:creationId xmlns:a16="http://schemas.microsoft.com/office/drawing/2014/main" id="{4B0CA5E2-0CDB-C361-B62D-BAE7C3C30437}"/>
+              <a16:creationId xmlns:a16="http://schemas.microsoft.com/office/drawing/2014/main" id="{F12755AC-8D7A-202A-6BC8-53E74C13327C}"/>
             </a:ext>
           </a:extLst>
         </p:cNvPr>
@@ -4388,7 +4665,7 @@
           <p:cNvPr id="2" name="Title 1">
             <a:extLst>
               <a:ext uri="{FF2B5EF4-FFF2-40B4-BE49-F238E27FC236}">
-                <a16:creationId xmlns:a16="http://schemas.microsoft.com/office/drawing/2014/main" id="{7910003C-6A5E-9972-FCE5-6D8AFA785058}"/>
+                <a16:creationId xmlns:a16="http://schemas.microsoft.com/office/drawing/2014/main" id="{DCCE7DD3-2ED3-0476-B31C-47415FDE992D}"/>
               </a:ext>
             </a:extLst>
           </p:cNvPr>
@@ -4420,134 +4697,48 @@
           </a:p>
         </p:txBody>
       </p:sp>
-      <p:sp>
-        <p:nvSpPr>
-          <p:cNvPr id="3" name="Content Placeholder 2">
-            <a:extLst>
-              <a:ext uri="{FF2B5EF4-FFF2-40B4-BE49-F238E27FC236}">
-                <a16:creationId xmlns:a16="http://schemas.microsoft.com/office/drawing/2014/main" id="{8ED8F4FE-0FC2-94FC-9560-4EB76E38ACCF}"/>
-              </a:ext>
-            </a:extLst>
-          </p:cNvPr>
-          <p:cNvSpPr>
-            <a:spLocks noGrp="1"/>
-          </p:cNvSpPr>
+      <p:pic>
+        <p:nvPicPr>
+          <p:cNvPr id="5" name="Content Placeholder 4" descr="A screenshot of a computer&#10;&#10;AI-generated content may be incorrect.">
+            <a:extLst>
+              <a:ext uri="{FF2B5EF4-FFF2-40B4-BE49-F238E27FC236}">
+                <a16:creationId xmlns:a16="http://schemas.microsoft.com/office/drawing/2014/main" id="{1E56A2DF-6775-B0E5-9F1E-CED070C0B0A2}"/>
+              </a:ext>
+            </a:extLst>
+          </p:cNvPr>
+          <p:cNvPicPr>
+            <a:picLocks noGrp="1" noChangeAspect="1"/>
+          </p:cNvPicPr>
           <p:nvPr>
             <p:ph idx="1"/>
           </p:nvPr>
-        </p:nvSpPr>
-        <p:spPr>
-          <a:xfrm>
-            <a:off x="919314" y="1413031"/>
-            <a:ext cx="10596715" cy="4906652"/>
+        </p:nvPicPr>
+        <p:blipFill>
+          <a:blip r:embed="rId2">
+            <a:extLst>
+              <a:ext uri="{28A0092B-C50C-407E-A947-70E740481C1C}">
+                <a14:useLocalDpi xmlns:a14="http://schemas.microsoft.com/office/drawing/2010/main" val="0"/>
+              </a:ext>
+            </a:extLst>
+          </a:blip>
+          <a:stretch>
+            <a:fillRect/>
+          </a:stretch>
+        </p:blipFill>
+        <p:spPr>
+          <a:xfrm>
+            <a:off x="1885067" y="1357254"/>
+            <a:ext cx="8584094" cy="5500746"/>
           </a:xfrm>
           <a:solidFill>
             <a:srgbClr val="FAF0E6"/>
           </a:solidFill>
         </p:spPr>
-        <p:txBody>
-          <a:bodyPr>
-            <a:normAutofit/>
-          </a:bodyPr>
-          <a:lstStyle/>
-          <a:p>
-            <a:pPr>
-              <a:lnSpc>
-                <a:spcPts val="3000"/>
-              </a:lnSpc>
-            </a:pPr>
-            <a:endParaRPr lang="en-GB" dirty="0"/>
-          </a:p>
-          <a:p>
-            <a:pPr>
-              <a:lnSpc>
-                <a:spcPts val="3000"/>
-              </a:lnSpc>
-            </a:pPr>
-            <a:r>
-              <a:rPr lang="en-GB" dirty="0"/>
-              <a:t>Prompt Engineering is going out of fashion and people opt for </a:t>
-            </a:r>
-            <a:r>
-              <a:rPr lang="en-GB" i="1" dirty="0"/>
-              <a:t>Context Engineering </a:t>
-            </a:r>
-            <a:r>
-              <a:rPr lang="en-GB" dirty="0"/>
-              <a:t>and </a:t>
-            </a:r>
-            <a:r>
-              <a:rPr lang="en-GB" i="1" dirty="0"/>
-              <a:t>In Context Learning</a:t>
-            </a:r>
-            <a:r>
-              <a:rPr lang="en-GB" dirty="0"/>
-              <a:t>.</a:t>
-            </a:r>
-          </a:p>
-          <a:p>
-            <a:pPr>
-              <a:lnSpc>
-                <a:spcPts val="3000"/>
-              </a:lnSpc>
-            </a:pPr>
-            <a:r>
-              <a:rPr lang="en-GB" dirty="0"/>
-              <a:t>We create a set of instructions and add </a:t>
-            </a:r>
-            <a:r>
-              <a:rPr lang="en-GB" b="1" dirty="0"/>
-              <a:t>additional information </a:t>
-            </a:r>
-            <a:r>
-              <a:rPr lang="en-GB" dirty="0"/>
-              <a:t>to a request we send to the LLM.</a:t>
-            </a:r>
-          </a:p>
-          <a:p>
-            <a:pPr>
-              <a:lnSpc>
-                <a:spcPts val="3000"/>
-              </a:lnSpc>
-            </a:pPr>
-            <a:r>
-              <a:rPr lang="en-GB" dirty="0"/>
-              <a:t>We can let LLM know that more context is available if it tells us which of the </a:t>
-            </a:r>
-            <a:r>
-              <a:rPr lang="en-GB" b="1" dirty="0"/>
-              <a:t>tools/functions </a:t>
-            </a:r>
-            <a:r>
-              <a:rPr lang="en-GB" dirty="0"/>
-              <a:t>we have told it about it wants us to call with </a:t>
-            </a:r>
-            <a:r>
-              <a:rPr lang="en-GB" b="1" dirty="0"/>
-              <a:t>arguments</a:t>
-            </a:r>
-            <a:r>
-              <a:rPr lang="en-GB" dirty="0"/>
-              <a:t> it has provided – we will run it on our box and send the extra context/information.</a:t>
-            </a:r>
-          </a:p>
-          <a:p>
-            <a:pPr>
-              <a:lnSpc>
-                <a:spcPts val="3000"/>
-              </a:lnSpc>
-            </a:pPr>
-            <a:r>
-              <a:rPr lang="en-GB" dirty="0"/>
-              <a:t>The API is STATELESS – we must pass all the information it needs every time as if it was the first time.</a:t>
-            </a:r>
-          </a:p>
-        </p:txBody>
-      </p:sp>
+      </p:pic>
     </p:spTree>
     <p:extLst>
       <p:ext uri="{BB962C8B-B14F-4D97-AF65-F5344CB8AC3E}">
-        <p14:creationId xmlns:p14="http://schemas.microsoft.com/office/powerpoint/2010/main" val="269013049"/>
+        <p14:creationId xmlns:p14="http://schemas.microsoft.com/office/powerpoint/2010/main" val="3704195792"/>
       </p:ext>
     </p:extLst>
   </p:cSld>
@@ -4557,7 +4748,1153 @@
 </p:sld>
 </file>
 
-<file path=ppt/slides/slide13.xml><?xml version="1.0" encoding="utf-8"?>
+<file path=ppt/slides/slide14.xml><?xml version="1.0" encoding="utf-8"?>
+<p:sld xmlns:a="http://schemas.openxmlformats.org/drawingml/2006/main" xmlns:r="http://schemas.openxmlformats.org/officeDocument/2006/relationships" xmlns:p="http://schemas.openxmlformats.org/presentationml/2006/main">
+  <p:cSld>
+    <p:bg>
+      <p:bgPr>
+        <a:solidFill>
+          <a:srgbClr val="FAF0E6"/>
+        </a:solidFill>
+        <a:effectLst/>
+      </p:bgPr>
+    </p:bg>
+    <p:spTree>
+      <p:nvGrpSpPr>
+        <p:cNvPr id="1" name="">
+          <a:extLst>
+            <a:ext uri="{FF2B5EF4-FFF2-40B4-BE49-F238E27FC236}">
+              <a16:creationId xmlns:a16="http://schemas.microsoft.com/office/drawing/2014/main" id="{443954EA-3553-09A9-4A81-B63688B9F1A4}"/>
+            </a:ext>
+          </a:extLst>
+        </p:cNvPr>
+        <p:cNvGrpSpPr/>
+        <p:nvPr/>
+      </p:nvGrpSpPr>
+      <p:grpSpPr>
+        <a:xfrm>
+          <a:off x="0" y="0"/>
+          <a:ext cx="0" cy="0"/>
+          <a:chOff x="0" y="0"/>
+          <a:chExt cx="0" cy="0"/>
+        </a:xfrm>
+      </p:grpSpPr>
+      <p:sp>
+        <p:nvSpPr>
+          <p:cNvPr id="2" name="Title 1">
+            <a:extLst>
+              <a:ext uri="{FF2B5EF4-FFF2-40B4-BE49-F238E27FC236}">
+                <a16:creationId xmlns:a16="http://schemas.microsoft.com/office/drawing/2014/main" id="{5E064CF0-C185-0F6E-E958-86CC7C208356}"/>
+              </a:ext>
+            </a:extLst>
+          </p:cNvPr>
+          <p:cNvSpPr>
+            <a:spLocks noGrp="1"/>
+          </p:cNvSpPr>
+          <p:nvPr>
+            <p:ph type="title"/>
+          </p:nvPr>
+        </p:nvSpPr>
+        <p:spPr>
+          <a:xfrm>
+            <a:off x="919314" y="190464"/>
+            <a:ext cx="10515600" cy="1325563"/>
+          </a:xfrm>
+        </p:spPr>
+        <p:txBody>
+          <a:bodyPr/>
+          <a:lstStyle/>
+          <a:p>
+            <a:r>
+              <a:rPr lang="en-GB" dirty="0">
+                <a:solidFill>
+                  <a:srgbClr val="676767"/>
+                </a:solidFill>
+              </a:rPr>
+              <a:t>What is Prompt/Context Engineering?</a:t>
+            </a:r>
+          </a:p>
+        </p:txBody>
+      </p:sp>
+      <p:pic>
+        <p:nvPicPr>
+          <p:cNvPr id="5" name="Content Placeholder 4">
+            <a:extLst>
+              <a:ext uri="{FF2B5EF4-FFF2-40B4-BE49-F238E27FC236}">
+                <a16:creationId xmlns:a16="http://schemas.microsoft.com/office/drawing/2014/main" id="{527C40FB-0216-3641-7496-385ADEF540DF}"/>
+              </a:ext>
+            </a:extLst>
+          </p:cNvPr>
+          <p:cNvPicPr>
+            <a:picLocks noGrp="1" noChangeAspect="1"/>
+          </p:cNvPicPr>
+          <p:nvPr>
+            <p:ph idx="1"/>
+          </p:nvPr>
+        </p:nvPicPr>
+        <p:blipFill>
+          <a:blip r:embed="rId2">
+            <a:extLst>
+              <a:ext uri="{28A0092B-C50C-407E-A947-70E740481C1C}">
+                <a14:useLocalDpi xmlns:a14="http://schemas.microsoft.com/office/drawing/2010/main" val="0"/>
+              </a:ext>
+            </a:extLst>
+          </a:blip>
+          <a:srcRect/>
+          <a:stretch/>
+        </p:blipFill>
+        <p:spPr>
+          <a:xfrm>
+            <a:off x="1885067" y="1153947"/>
+            <a:ext cx="8584094" cy="5500746"/>
+          </a:xfrm>
+          <a:solidFill>
+            <a:srgbClr val="FAF0E6"/>
+          </a:solidFill>
+        </p:spPr>
+      </p:pic>
+    </p:spTree>
+    <p:extLst>
+      <p:ext uri="{BB962C8B-B14F-4D97-AF65-F5344CB8AC3E}">
+        <p14:creationId xmlns:p14="http://schemas.microsoft.com/office/powerpoint/2010/main" val="3447214692"/>
+      </p:ext>
+    </p:extLst>
+  </p:cSld>
+  <p:clrMapOvr>
+    <a:masterClrMapping/>
+  </p:clrMapOvr>
+</p:sld>
+</file>
+
+<file path=ppt/slides/slide15.xml><?xml version="1.0" encoding="utf-8"?>
+<p:sld xmlns:a="http://schemas.openxmlformats.org/drawingml/2006/main" xmlns:r="http://schemas.openxmlformats.org/officeDocument/2006/relationships" xmlns:p="http://schemas.openxmlformats.org/presentationml/2006/main">
+  <p:cSld>
+    <p:bg>
+      <p:bgPr>
+        <a:solidFill>
+          <a:srgbClr val="FAF0E6"/>
+        </a:solidFill>
+        <a:effectLst/>
+      </p:bgPr>
+    </p:bg>
+    <p:spTree>
+      <p:nvGrpSpPr>
+        <p:cNvPr id="1" name="">
+          <a:extLst>
+            <a:ext uri="{FF2B5EF4-FFF2-40B4-BE49-F238E27FC236}">
+              <a16:creationId xmlns:a16="http://schemas.microsoft.com/office/drawing/2014/main" id="{92E7F011-DD73-9195-5B39-D6C9A3D4D40E}"/>
+            </a:ext>
+          </a:extLst>
+        </p:cNvPr>
+        <p:cNvGrpSpPr/>
+        <p:nvPr/>
+      </p:nvGrpSpPr>
+      <p:grpSpPr>
+        <a:xfrm>
+          <a:off x="0" y="0"/>
+          <a:ext cx="0" cy="0"/>
+          <a:chOff x="0" y="0"/>
+          <a:chExt cx="0" cy="0"/>
+        </a:xfrm>
+      </p:grpSpPr>
+      <p:sp>
+        <p:nvSpPr>
+          <p:cNvPr id="2" name="Title 1">
+            <a:extLst>
+              <a:ext uri="{FF2B5EF4-FFF2-40B4-BE49-F238E27FC236}">
+                <a16:creationId xmlns:a16="http://schemas.microsoft.com/office/drawing/2014/main" id="{1D99B005-0E86-2311-D1CE-3D89A18E89D4}"/>
+              </a:ext>
+            </a:extLst>
+          </p:cNvPr>
+          <p:cNvSpPr>
+            <a:spLocks noGrp="1"/>
+          </p:cNvSpPr>
+          <p:nvPr>
+            <p:ph type="title"/>
+          </p:nvPr>
+        </p:nvSpPr>
+        <p:spPr>
+          <a:xfrm>
+            <a:off x="919314" y="190464"/>
+            <a:ext cx="10515600" cy="1325563"/>
+          </a:xfrm>
+        </p:spPr>
+        <p:txBody>
+          <a:bodyPr/>
+          <a:lstStyle/>
+          <a:p>
+            <a:r>
+              <a:rPr lang="en-GB" dirty="0">
+                <a:solidFill>
+                  <a:srgbClr val="676767"/>
+                </a:solidFill>
+              </a:rPr>
+              <a:t>Where to start?    What to do?</a:t>
+            </a:r>
+          </a:p>
+        </p:txBody>
+      </p:sp>
+      <p:sp>
+        <p:nvSpPr>
+          <p:cNvPr id="3" name="Content Placeholder 2">
+            <a:extLst>
+              <a:ext uri="{FF2B5EF4-FFF2-40B4-BE49-F238E27FC236}">
+                <a16:creationId xmlns:a16="http://schemas.microsoft.com/office/drawing/2014/main" id="{9D01D926-2685-1102-15DA-FE530DB0ED07}"/>
+              </a:ext>
+            </a:extLst>
+          </p:cNvPr>
+          <p:cNvSpPr>
+            <a:spLocks noGrp="1"/>
+          </p:cNvSpPr>
+          <p:nvPr>
+            <p:ph idx="1"/>
+          </p:nvPr>
+        </p:nvSpPr>
+        <p:spPr>
+          <a:xfrm>
+            <a:off x="919314" y="1413031"/>
+            <a:ext cx="10596715" cy="4906652"/>
+          </a:xfrm>
+          <a:solidFill>
+            <a:srgbClr val="FAF0E6"/>
+          </a:solidFill>
+        </p:spPr>
+        <p:txBody>
+          <a:bodyPr>
+            <a:normAutofit/>
+          </a:bodyPr>
+          <a:lstStyle/>
+          <a:p>
+            <a:pPr>
+              <a:lnSpc>
+                <a:spcPts val="4500"/>
+              </a:lnSpc>
+            </a:pPr>
+            <a:r>
+              <a:rPr lang="en-GB" dirty="0"/>
+              <a:t>We will look at Case Study 1 in the manual and framework.</a:t>
+            </a:r>
+          </a:p>
+          <a:p>
+            <a:pPr>
+              <a:lnSpc>
+                <a:spcPts val="4500"/>
+              </a:lnSpc>
+            </a:pPr>
+            <a:endParaRPr lang="en-GB" dirty="0"/>
+          </a:p>
+        </p:txBody>
+      </p:sp>
+      <p:pic>
+        <p:nvPicPr>
+          <p:cNvPr id="5" name="Picture 4">
+            <a:extLst>
+              <a:ext uri="{FF2B5EF4-FFF2-40B4-BE49-F238E27FC236}">
+                <a16:creationId xmlns:a16="http://schemas.microsoft.com/office/drawing/2014/main" id="{4D70A54A-8115-972C-E59F-B1FFBDCE4D1D}"/>
+              </a:ext>
+            </a:extLst>
+          </p:cNvPr>
+          <p:cNvPicPr>
+            <a:picLocks noChangeAspect="1"/>
+          </p:cNvPicPr>
+          <p:nvPr/>
+        </p:nvPicPr>
+        <p:blipFill>
+          <a:blip r:embed="rId2">
+            <a:extLst>
+              <a:ext uri="{28A0092B-C50C-407E-A947-70E740481C1C}">
+                <a14:useLocalDpi xmlns:a14="http://schemas.microsoft.com/office/drawing/2010/main" val="0"/>
+              </a:ext>
+            </a:extLst>
+          </a:blip>
+          <a:srcRect/>
+          <a:stretch/>
+        </p:blipFill>
+        <p:spPr>
+          <a:xfrm>
+            <a:off x="7509889" y="1992264"/>
+            <a:ext cx="4122392" cy="3851181"/>
+          </a:xfrm>
+          <a:prstGeom prst="rect">
+            <a:avLst/>
+          </a:prstGeom>
+        </p:spPr>
+      </p:pic>
+      <p:sp>
+        <p:nvSpPr>
+          <p:cNvPr id="6" name="TextBox 5">
+            <a:extLst>
+              <a:ext uri="{FF2B5EF4-FFF2-40B4-BE49-F238E27FC236}">
+                <a16:creationId xmlns:a16="http://schemas.microsoft.com/office/drawing/2014/main" id="{00CA9450-E002-D5D5-E96F-FB1BB1E25F92}"/>
+              </a:ext>
+            </a:extLst>
+          </p:cNvPr>
+          <p:cNvSpPr txBox="1"/>
+          <p:nvPr/>
+        </p:nvSpPr>
+        <p:spPr>
+          <a:xfrm>
+            <a:off x="675971" y="2369262"/>
+            <a:ext cx="6413198" cy="5078313"/>
+          </a:xfrm>
+          <a:prstGeom prst="rect">
+            <a:avLst/>
+          </a:prstGeom>
+          <a:noFill/>
+        </p:spPr>
+        <p:txBody>
+          <a:bodyPr wrap="square" rtlCol="0">
+            <a:spAutoFit/>
+          </a:bodyPr>
+          <a:lstStyle/>
+          <a:p>
+            <a:r>
+              <a:rPr lang="en-GB" sz="2400" dirty="0"/>
+              <a:t>Given an article title, determine if it is about AI.</a:t>
+            </a:r>
+          </a:p>
+          <a:p>
+            <a:endParaRPr lang="en-GB" sz="2400" dirty="0"/>
+          </a:p>
+          <a:p>
+            <a:pPr marL="342900" indent="-342900">
+              <a:buFont typeface="+mj-lt"/>
+              <a:buAutoNum type="arabicPeriod"/>
+            </a:pPr>
+            <a:r>
+              <a:rPr lang="en-GB" sz="2400" dirty="0"/>
+              <a:t>Take title and create article of N words (EXPANDER)</a:t>
+            </a:r>
+          </a:p>
+          <a:p>
+            <a:pPr marL="342900" indent="-342900">
+              <a:buFont typeface="+mj-lt"/>
+              <a:buAutoNum type="arabicPeriod"/>
+            </a:pPr>
+            <a:r>
+              <a:rPr lang="en-GB" sz="2400" dirty="0"/>
+              <a:t>In a specified language (TRANSLATOR)</a:t>
+            </a:r>
+          </a:p>
+          <a:p>
+            <a:pPr marL="342900" indent="-342900">
+              <a:buFont typeface="+mj-lt"/>
+              <a:buAutoNum type="arabicPeriod"/>
+            </a:pPr>
+            <a:r>
+              <a:rPr lang="en-GB" sz="2400" dirty="0"/>
+              <a:t>Ensure article is not sensational (EDITOR)</a:t>
+            </a:r>
+          </a:p>
+          <a:p>
+            <a:pPr marL="342900" indent="-342900">
+              <a:buFont typeface="+mj-lt"/>
+              <a:buAutoNum type="arabicPeriod"/>
+            </a:pPr>
+            <a:r>
+              <a:rPr lang="en-GB" sz="2400" dirty="0"/>
+              <a:t>Publisher determines prices with dependent tools (TOOL CALLING)</a:t>
+            </a:r>
+          </a:p>
+          <a:p>
+            <a:pPr marL="342900" indent="-342900">
+              <a:buFont typeface="+mj-lt"/>
+              <a:buAutoNum type="arabicPeriod"/>
+            </a:pPr>
+            <a:endParaRPr lang="en-GB" sz="2400" dirty="0"/>
+          </a:p>
+          <a:p>
+            <a:r>
+              <a:rPr lang="en-GB" sz="2400" dirty="0"/>
+              <a:t>PUBLISH = YES only if 1,2 and 3 are YES</a:t>
+            </a:r>
+          </a:p>
+          <a:p>
+            <a:endParaRPr lang="en-GB" sz="2400" i="1" dirty="0"/>
+          </a:p>
+          <a:p>
+            <a:r>
+              <a:rPr lang="en-GB" sz="2400" i="1" dirty="0"/>
+              <a:t>This app could be a leaf of a larger app.</a:t>
+            </a:r>
+          </a:p>
+          <a:p>
+            <a:endParaRPr lang="en-GB" dirty="0"/>
+          </a:p>
+          <a:p>
+            <a:endParaRPr lang="en-GB" dirty="0"/>
+          </a:p>
+        </p:txBody>
+      </p:sp>
+    </p:spTree>
+    <p:extLst>
+      <p:ext uri="{BB962C8B-B14F-4D97-AF65-F5344CB8AC3E}">
+        <p14:creationId xmlns:p14="http://schemas.microsoft.com/office/powerpoint/2010/main" val="1393936898"/>
+      </p:ext>
+    </p:extLst>
+  </p:cSld>
+  <p:clrMapOvr>
+    <a:masterClrMapping/>
+  </p:clrMapOvr>
+</p:sld>
+</file>
+
+<file path=ppt/slides/slide16.xml><?xml version="1.0" encoding="utf-8"?>
+<p:sld xmlns:a="http://schemas.openxmlformats.org/drawingml/2006/main" xmlns:r="http://schemas.openxmlformats.org/officeDocument/2006/relationships" xmlns:p="http://schemas.openxmlformats.org/presentationml/2006/main">
+  <p:cSld>
+    <p:bg>
+      <p:bgPr>
+        <a:solidFill>
+          <a:srgbClr val="FAF0E6"/>
+        </a:solidFill>
+        <a:effectLst/>
+      </p:bgPr>
+    </p:bg>
+    <p:spTree>
+      <p:nvGrpSpPr>
+        <p:cNvPr id="1" name="">
+          <a:extLst>
+            <a:ext uri="{FF2B5EF4-FFF2-40B4-BE49-F238E27FC236}">
+              <a16:creationId xmlns:a16="http://schemas.microsoft.com/office/drawing/2014/main" id="{B12C2438-6F39-1E74-B87F-C7E70AB4DA97}"/>
+            </a:ext>
+          </a:extLst>
+        </p:cNvPr>
+        <p:cNvGrpSpPr/>
+        <p:nvPr/>
+      </p:nvGrpSpPr>
+      <p:grpSpPr>
+        <a:xfrm>
+          <a:off x="0" y="0"/>
+          <a:ext cx="0" cy="0"/>
+          <a:chOff x="0" y="0"/>
+          <a:chExt cx="0" cy="0"/>
+        </a:xfrm>
+      </p:grpSpPr>
+      <p:sp>
+        <p:nvSpPr>
+          <p:cNvPr id="2" name="Title 1">
+            <a:extLst>
+              <a:ext uri="{FF2B5EF4-FFF2-40B4-BE49-F238E27FC236}">
+                <a16:creationId xmlns:a16="http://schemas.microsoft.com/office/drawing/2014/main" id="{9AE93777-B841-1FE9-B5E3-7E294CD7B927}"/>
+              </a:ext>
+            </a:extLst>
+          </p:cNvPr>
+          <p:cNvSpPr>
+            <a:spLocks noGrp="1"/>
+          </p:cNvSpPr>
+          <p:nvPr>
+            <p:ph type="title"/>
+          </p:nvPr>
+        </p:nvSpPr>
+        <p:spPr>
+          <a:xfrm>
+            <a:off x="919314" y="190464"/>
+            <a:ext cx="10515600" cy="1325563"/>
+          </a:xfrm>
+        </p:spPr>
+        <p:txBody>
+          <a:bodyPr/>
+          <a:lstStyle/>
+          <a:p>
+            <a:r>
+              <a:rPr lang="en-GB" dirty="0">
+                <a:solidFill>
+                  <a:srgbClr val="676767"/>
+                </a:solidFill>
+              </a:rPr>
+              <a:t>A possible workflow</a:t>
+            </a:r>
+          </a:p>
+        </p:txBody>
+      </p:sp>
+      <p:sp>
+        <p:nvSpPr>
+          <p:cNvPr id="3" name="Content Placeholder 2">
+            <a:extLst>
+              <a:ext uri="{FF2B5EF4-FFF2-40B4-BE49-F238E27FC236}">
+                <a16:creationId xmlns:a16="http://schemas.microsoft.com/office/drawing/2014/main" id="{A81FB872-4B2A-7D41-78EA-741C258663A8}"/>
+              </a:ext>
+            </a:extLst>
+          </p:cNvPr>
+          <p:cNvSpPr>
+            <a:spLocks noGrp="1"/>
+          </p:cNvSpPr>
+          <p:nvPr>
+            <p:ph idx="1"/>
+          </p:nvPr>
+        </p:nvSpPr>
+        <p:spPr>
+          <a:xfrm>
+            <a:off x="838199" y="1413031"/>
+            <a:ext cx="10596715" cy="4906652"/>
+          </a:xfrm>
+          <a:solidFill>
+            <a:srgbClr val="FAF0E6"/>
+          </a:solidFill>
+        </p:spPr>
+        <p:txBody>
+          <a:bodyPr>
+            <a:normAutofit/>
+          </a:bodyPr>
+          <a:lstStyle/>
+          <a:p>
+            <a:pPr marL="0" indent="0">
+              <a:buNone/>
+            </a:pPr>
+            <a:endParaRPr lang="en-GB" dirty="0">
+              <a:solidFill>
+                <a:srgbClr val="3A3A3A"/>
+              </a:solidFill>
+            </a:endParaRPr>
+          </a:p>
+          <a:p>
+            <a:pPr marL="0" indent="0">
+              <a:buNone/>
+            </a:pPr>
+            <a:r>
+              <a:rPr lang="en-GB" sz="3600" dirty="0">
+                <a:solidFill>
+                  <a:srgbClr val="3A3A3A"/>
+                </a:solidFill>
+              </a:rPr>
+              <a:t>We build our app with a basic prompt “Write an article on {topic} of around {N} words.”</a:t>
+            </a:r>
+          </a:p>
+          <a:p>
+            <a:pPr marL="0" indent="0">
+              <a:buNone/>
+            </a:pPr>
+            <a:endParaRPr lang="en-GB" sz="3600" dirty="0">
+              <a:solidFill>
+                <a:srgbClr val="3A3A3A"/>
+              </a:solidFill>
+            </a:endParaRPr>
+          </a:p>
+          <a:p>
+            <a:pPr marL="0" indent="0">
+              <a:buNone/>
+            </a:pPr>
+            <a:r>
+              <a:rPr lang="en-GB" sz="3600" dirty="0">
+                <a:solidFill>
+                  <a:srgbClr val="3A3A3A"/>
+                </a:solidFill>
+              </a:rPr>
+              <a:t>It all works mechanistically.</a:t>
+            </a:r>
+          </a:p>
+          <a:p>
+            <a:pPr marL="0" indent="0">
+              <a:buNone/>
+            </a:pPr>
+            <a:endParaRPr lang="en-GB" sz="3600" dirty="0">
+              <a:solidFill>
+                <a:srgbClr val="3A3A3A"/>
+              </a:solidFill>
+            </a:endParaRPr>
+          </a:p>
+          <a:p>
+            <a:pPr marL="0" indent="0">
+              <a:buNone/>
+            </a:pPr>
+            <a:r>
+              <a:rPr lang="en-GB" sz="3600" dirty="0">
+                <a:solidFill>
+                  <a:srgbClr val="3A3A3A"/>
+                </a:solidFill>
+              </a:rPr>
+              <a:t>Now lets progress…</a:t>
+            </a:r>
+          </a:p>
+          <a:p>
+            <a:pPr marL="0" indent="0">
+              <a:buNone/>
+            </a:pPr>
+            <a:endParaRPr lang="en-GB" dirty="0">
+              <a:solidFill>
+                <a:srgbClr val="3A3A3A"/>
+              </a:solidFill>
+            </a:endParaRPr>
+          </a:p>
+          <a:p>
+            <a:pPr marL="0" indent="0">
+              <a:buNone/>
+            </a:pPr>
+            <a:endParaRPr lang="en-GB" dirty="0"/>
+          </a:p>
+        </p:txBody>
+      </p:sp>
+    </p:spTree>
+    <p:extLst>
+      <p:ext uri="{BB962C8B-B14F-4D97-AF65-F5344CB8AC3E}">
+        <p14:creationId xmlns:p14="http://schemas.microsoft.com/office/powerpoint/2010/main" val="2854764619"/>
+      </p:ext>
+    </p:extLst>
+  </p:cSld>
+  <p:clrMapOvr>
+    <a:masterClrMapping/>
+  </p:clrMapOvr>
+</p:sld>
+</file>
+
+<file path=ppt/slides/slide17.xml><?xml version="1.0" encoding="utf-8"?>
+<p:sld xmlns:a="http://schemas.openxmlformats.org/drawingml/2006/main" xmlns:r="http://schemas.openxmlformats.org/officeDocument/2006/relationships" xmlns:p="http://schemas.openxmlformats.org/presentationml/2006/main">
+  <p:cSld>
+    <p:bg>
+      <p:bgPr>
+        <a:solidFill>
+          <a:srgbClr val="FAF0E6"/>
+        </a:solidFill>
+        <a:effectLst/>
+      </p:bgPr>
+    </p:bg>
+    <p:spTree>
+      <p:nvGrpSpPr>
+        <p:cNvPr id="1" name="">
+          <a:extLst>
+            <a:ext uri="{FF2B5EF4-FFF2-40B4-BE49-F238E27FC236}">
+              <a16:creationId xmlns:a16="http://schemas.microsoft.com/office/drawing/2014/main" id="{82DA7914-9C59-92B8-87EC-0CF6052F3940}"/>
+            </a:ext>
+          </a:extLst>
+        </p:cNvPr>
+        <p:cNvGrpSpPr/>
+        <p:nvPr/>
+      </p:nvGrpSpPr>
+      <p:grpSpPr>
+        <a:xfrm>
+          <a:off x="0" y="0"/>
+          <a:ext cx="0" cy="0"/>
+          <a:chOff x="0" y="0"/>
+          <a:chExt cx="0" cy="0"/>
+        </a:xfrm>
+      </p:grpSpPr>
+      <p:sp>
+        <p:nvSpPr>
+          <p:cNvPr id="2" name="Title 1">
+            <a:extLst>
+              <a:ext uri="{FF2B5EF4-FFF2-40B4-BE49-F238E27FC236}">
+                <a16:creationId xmlns:a16="http://schemas.microsoft.com/office/drawing/2014/main" id="{B7551BD0-D5CD-1D3A-DA5F-810AC1E58873}"/>
+              </a:ext>
+            </a:extLst>
+          </p:cNvPr>
+          <p:cNvSpPr>
+            <a:spLocks noGrp="1"/>
+          </p:cNvSpPr>
+          <p:nvPr>
+            <p:ph type="title"/>
+          </p:nvPr>
+        </p:nvSpPr>
+        <p:spPr>
+          <a:xfrm>
+            <a:off x="919314" y="190464"/>
+            <a:ext cx="10515600" cy="1325563"/>
+          </a:xfrm>
+        </p:spPr>
+        <p:txBody>
+          <a:bodyPr/>
+          <a:lstStyle/>
+          <a:p>
+            <a:r>
+              <a:rPr lang="en-GB" dirty="0">
+                <a:solidFill>
+                  <a:srgbClr val="676767"/>
+                </a:solidFill>
+              </a:rPr>
+              <a:t>A possible workflow</a:t>
+            </a:r>
+          </a:p>
+        </p:txBody>
+      </p:sp>
+      <p:sp>
+        <p:nvSpPr>
+          <p:cNvPr id="3" name="Content Placeholder 2">
+            <a:extLst>
+              <a:ext uri="{FF2B5EF4-FFF2-40B4-BE49-F238E27FC236}">
+                <a16:creationId xmlns:a16="http://schemas.microsoft.com/office/drawing/2014/main" id="{9E095495-A29E-5672-D1AA-94890BA4BD23}"/>
+              </a:ext>
+            </a:extLst>
+          </p:cNvPr>
+          <p:cNvSpPr>
+            <a:spLocks noGrp="1"/>
+          </p:cNvSpPr>
+          <p:nvPr>
+            <p:ph idx="1"/>
+          </p:nvPr>
+        </p:nvSpPr>
+        <p:spPr>
+          <a:xfrm>
+            <a:off x="838199" y="1413031"/>
+            <a:ext cx="10596715" cy="4906652"/>
+          </a:xfrm>
+          <a:solidFill>
+            <a:srgbClr val="FAF0E6"/>
+          </a:solidFill>
+        </p:spPr>
+        <p:txBody>
+          <a:bodyPr>
+            <a:normAutofit/>
+          </a:bodyPr>
+          <a:lstStyle/>
+          <a:p>
+            <a:pPr marL="0" indent="0">
+              <a:buNone/>
+            </a:pPr>
+            <a:endParaRPr lang="en-GB" dirty="0">
+              <a:solidFill>
+                <a:srgbClr val="3A3A3A"/>
+              </a:solidFill>
+            </a:endParaRPr>
+          </a:p>
+          <a:p>
+            <a:pPr marL="0" indent="0">
+              <a:buNone/>
+            </a:pPr>
+            <a:r>
+              <a:rPr lang="en-GB" sz="3600" dirty="0">
+                <a:solidFill>
+                  <a:srgbClr val="3A3A3A"/>
+                </a:solidFill>
+              </a:rPr>
+              <a:t>We decide to add a simple </a:t>
+            </a:r>
+          </a:p>
+          <a:p>
+            <a:pPr marL="0" indent="0">
+              <a:buNone/>
+            </a:pPr>
+            <a:endParaRPr lang="en-GB" sz="3600" dirty="0">
+              <a:solidFill>
+                <a:srgbClr val="3A3A3A"/>
+              </a:solidFill>
+            </a:endParaRPr>
+          </a:p>
+          <a:p>
+            <a:pPr marL="0" indent="0">
+              <a:buNone/>
+            </a:pPr>
+            <a:r>
+              <a:rPr lang="en-GB" sz="3600" dirty="0">
+                <a:solidFill>
+                  <a:srgbClr val="3A3A3A"/>
+                </a:solidFill>
+              </a:rPr>
+              <a:t>We notice that users like:</a:t>
+            </a:r>
+          </a:p>
+          <a:p>
+            <a:pPr marL="0" indent="0">
+              <a:buNone/>
+            </a:pPr>
+            <a:r>
+              <a:rPr lang="en-GB" sz="3600" dirty="0">
+                <a:solidFill>
+                  <a:srgbClr val="3A3A3A"/>
+                </a:solidFill>
+              </a:rPr>
+              <a:t>Bullet points – Abstract - Conclusion</a:t>
+            </a:r>
+          </a:p>
+          <a:p>
+            <a:pPr marL="0" indent="0">
+              <a:buNone/>
+            </a:pPr>
+            <a:endParaRPr lang="en-GB" dirty="0">
+              <a:solidFill>
+                <a:srgbClr val="3A3A3A"/>
+              </a:solidFill>
+            </a:endParaRPr>
+          </a:p>
+          <a:p>
+            <a:pPr marL="0" indent="0">
+              <a:buNone/>
+            </a:pPr>
+            <a:endParaRPr lang="en-GB" dirty="0"/>
+          </a:p>
+        </p:txBody>
+      </p:sp>
+      <p:sp>
+        <p:nvSpPr>
+          <p:cNvPr id="6" name="Heart 5">
+            <a:extLst>
+              <a:ext uri="{FF2B5EF4-FFF2-40B4-BE49-F238E27FC236}">
+                <a16:creationId xmlns:a16="http://schemas.microsoft.com/office/drawing/2014/main" id="{2DE13637-5C54-F149-1862-0D879316D033}"/>
+              </a:ext>
+            </a:extLst>
+          </p:cNvPr>
+          <p:cNvSpPr/>
+          <p:nvPr/>
+        </p:nvSpPr>
+        <p:spPr>
+          <a:xfrm>
+            <a:off x="6320413" y="1908469"/>
+            <a:ext cx="532563" cy="482321"/>
+          </a:xfrm>
+          <a:prstGeom prst="heart">
+            <a:avLst/>
+          </a:prstGeom>
+          <a:solidFill>
+            <a:srgbClr val="FFC000"/>
+          </a:solidFill>
+        </p:spPr>
+        <p:style>
+          <a:lnRef idx="2">
+            <a:schemeClr val="accent1">
+              <a:shade val="15000"/>
+            </a:schemeClr>
+          </a:lnRef>
+          <a:fillRef idx="1">
+            <a:schemeClr val="accent1"/>
+          </a:fillRef>
+          <a:effectRef idx="0">
+            <a:schemeClr val="accent1"/>
+          </a:effectRef>
+          <a:fontRef idx="minor">
+            <a:schemeClr val="lt1"/>
+          </a:fontRef>
+        </p:style>
+        <p:txBody>
+          <a:bodyPr rtlCol="0" anchor="ctr"/>
+          <a:lstStyle/>
+          <a:p>
+            <a:pPr algn="ctr"/>
+            <a:endParaRPr lang="en-GB"/>
+          </a:p>
+        </p:txBody>
+      </p:sp>
+    </p:spTree>
+    <p:extLst>
+      <p:ext uri="{BB962C8B-B14F-4D97-AF65-F5344CB8AC3E}">
+        <p14:creationId xmlns:p14="http://schemas.microsoft.com/office/powerpoint/2010/main" val="1410119164"/>
+      </p:ext>
+    </p:extLst>
+  </p:cSld>
+  <p:clrMapOvr>
+    <a:masterClrMapping/>
+  </p:clrMapOvr>
+</p:sld>
+</file>
+
+<file path=ppt/slides/slide18.xml><?xml version="1.0" encoding="utf-8"?>
+<p:sld xmlns:a="http://schemas.openxmlformats.org/drawingml/2006/main" xmlns:r="http://schemas.openxmlformats.org/officeDocument/2006/relationships" xmlns:p="http://schemas.openxmlformats.org/presentationml/2006/main">
+  <p:cSld>
+    <p:bg>
+      <p:bgPr>
+        <a:solidFill>
+          <a:srgbClr val="FAF0E6"/>
+        </a:solidFill>
+        <a:effectLst/>
+      </p:bgPr>
+    </p:bg>
+    <p:spTree>
+      <p:nvGrpSpPr>
+        <p:cNvPr id="1" name="">
+          <a:extLst>
+            <a:ext uri="{FF2B5EF4-FFF2-40B4-BE49-F238E27FC236}">
+              <a16:creationId xmlns:a16="http://schemas.microsoft.com/office/drawing/2014/main" id="{0BDB2118-2A00-6EB2-FC00-9E9A4B426FB2}"/>
+            </a:ext>
+          </a:extLst>
+        </p:cNvPr>
+        <p:cNvGrpSpPr/>
+        <p:nvPr/>
+      </p:nvGrpSpPr>
+      <p:grpSpPr>
+        <a:xfrm>
+          <a:off x="0" y="0"/>
+          <a:ext cx="0" cy="0"/>
+          <a:chOff x="0" y="0"/>
+          <a:chExt cx="0" cy="0"/>
+        </a:xfrm>
+      </p:grpSpPr>
+      <p:sp>
+        <p:nvSpPr>
+          <p:cNvPr id="2" name="Title 1">
+            <a:extLst>
+              <a:ext uri="{FF2B5EF4-FFF2-40B4-BE49-F238E27FC236}">
+                <a16:creationId xmlns:a16="http://schemas.microsoft.com/office/drawing/2014/main" id="{9F909056-E137-1FD8-1315-8F756AEBAABD}"/>
+              </a:ext>
+            </a:extLst>
+          </p:cNvPr>
+          <p:cNvSpPr>
+            <a:spLocks noGrp="1"/>
+          </p:cNvSpPr>
+          <p:nvPr>
+            <p:ph type="title"/>
+          </p:nvPr>
+        </p:nvSpPr>
+        <p:spPr>
+          <a:xfrm>
+            <a:off x="919314" y="190464"/>
+            <a:ext cx="10515600" cy="1325563"/>
+          </a:xfrm>
+        </p:spPr>
+        <p:txBody>
+          <a:bodyPr/>
+          <a:lstStyle/>
+          <a:p>
+            <a:r>
+              <a:rPr lang="en-GB" dirty="0">
+                <a:solidFill>
+                  <a:srgbClr val="676767"/>
+                </a:solidFill>
+              </a:rPr>
+              <a:t>A possible workflow</a:t>
+            </a:r>
+          </a:p>
+        </p:txBody>
+      </p:sp>
+      <p:sp>
+        <p:nvSpPr>
+          <p:cNvPr id="3" name="Content Placeholder 2">
+            <a:extLst>
+              <a:ext uri="{FF2B5EF4-FFF2-40B4-BE49-F238E27FC236}">
+                <a16:creationId xmlns:a16="http://schemas.microsoft.com/office/drawing/2014/main" id="{6B571EB7-4BEE-9743-713D-3D93F5662CFD}"/>
+              </a:ext>
+            </a:extLst>
+          </p:cNvPr>
+          <p:cNvSpPr>
+            <a:spLocks noGrp="1"/>
+          </p:cNvSpPr>
+          <p:nvPr>
+            <p:ph idx="1"/>
+          </p:nvPr>
+        </p:nvSpPr>
+        <p:spPr>
+          <a:xfrm>
+            <a:off x="838199" y="1413031"/>
+            <a:ext cx="10596715" cy="4906652"/>
+          </a:xfrm>
+          <a:solidFill>
+            <a:srgbClr val="FAF0E6"/>
+          </a:solidFill>
+        </p:spPr>
+        <p:txBody>
+          <a:bodyPr>
+            <a:normAutofit/>
+          </a:bodyPr>
+          <a:lstStyle/>
+          <a:p>
+            <a:pPr marL="0" indent="0">
+              <a:buNone/>
+            </a:pPr>
+            <a:endParaRPr lang="en-GB" dirty="0">
+              <a:solidFill>
+                <a:srgbClr val="3A3A3A"/>
+              </a:solidFill>
+            </a:endParaRPr>
+          </a:p>
+          <a:p>
+            <a:pPr marL="0" indent="0">
+              <a:buNone/>
+            </a:pPr>
+            <a:r>
+              <a:rPr lang="en-GB" sz="3600" dirty="0">
+                <a:solidFill>
+                  <a:srgbClr val="3A3A3A"/>
+                </a:solidFill>
+              </a:rPr>
+              <a:t>We change our prompt to include these features.</a:t>
+            </a:r>
+          </a:p>
+          <a:p>
+            <a:pPr marL="0" indent="0">
+              <a:buNone/>
+            </a:pPr>
+            <a:endParaRPr lang="en-GB" sz="3600" dirty="0">
+              <a:solidFill>
+                <a:srgbClr val="3A3A3A"/>
+              </a:solidFill>
+            </a:endParaRPr>
+          </a:p>
+          <a:p>
+            <a:pPr marL="0" indent="0">
+              <a:buNone/>
+            </a:pPr>
+            <a:r>
+              <a:rPr lang="en-GB" sz="3600" dirty="0">
+                <a:solidFill>
+                  <a:srgbClr val="3A3A3A"/>
+                </a:solidFill>
+              </a:rPr>
+              <a:t>However, only 2% of users give feedback so we decide to use Human Evaluators to give feedback as well as label articles ‘good’ etc</a:t>
+            </a:r>
+            <a:endParaRPr lang="en-GB" sz="3600" dirty="0"/>
+          </a:p>
+        </p:txBody>
+      </p:sp>
+    </p:spTree>
+    <p:extLst>
+      <p:ext uri="{BB962C8B-B14F-4D97-AF65-F5344CB8AC3E}">
+        <p14:creationId xmlns:p14="http://schemas.microsoft.com/office/powerpoint/2010/main" val="2709479580"/>
+      </p:ext>
+    </p:extLst>
+  </p:cSld>
+  <p:clrMapOvr>
+    <a:masterClrMapping/>
+  </p:clrMapOvr>
+</p:sld>
+</file>
+
+<file path=ppt/slides/slide19.xml><?xml version="1.0" encoding="utf-8"?>
+<p:sld xmlns:a="http://schemas.openxmlformats.org/drawingml/2006/main" xmlns:r="http://schemas.openxmlformats.org/officeDocument/2006/relationships" xmlns:p="http://schemas.openxmlformats.org/presentationml/2006/main">
+  <p:cSld>
+    <p:bg>
+      <p:bgPr>
+        <a:solidFill>
+          <a:srgbClr val="FAF0E6"/>
+        </a:solidFill>
+        <a:effectLst/>
+      </p:bgPr>
+    </p:bg>
+    <p:spTree>
+      <p:nvGrpSpPr>
+        <p:cNvPr id="1" name="">
+          <a:extLst>
+            <a:ext uri="{FF2B5EF4-FFF2-40B4-BE49-F238E27FC236}">
+              <a16:creationId xmlns:a16="http://schemas.microsoft.com/office/drawing/2014/main" id="{85ECCCBF-BB4A-48C7-BAAE-8E79BCA1A629}"/>
+            </a:ext>
+          </a:extLst>
+        </p:cNvPr>
+        <p:cNvGrpSpPr/>
+        <p:nvPr/>
+      </p:nvGrpSpPr>
+      <p:grpSpPr>
+        <a:xfrm>
+          <a:off x="0" y="0"/>
+          <a:ext cx="0" cy="0"/>
+          <a:chOff x="0" y="0"/>
+          <a:chExt cx="0" cy="0"/>
+        </a:xfrm>
+      </p:grpSpPr>
+      <p:sp>
+        <p:nvSpPr>
+          <p:cNvPr id="2" name="Title 1">
+            <a:extLst>
+              <a:ext uri="{FF2B5EF4-FFF2-40B4-BE49-F238E27FC236}">
+                <a16:creationId xmlns:a16="http://schemas.microsoft.com/office/drawing/2014/main" id="{6271C75B-7007-3FA8-53A3-6F646F633A24}"/>
+              </a:ext>
+            </a:extLst>
+          </p:cNvPr>
+          <p:cNvSpPr>
+            <a:spLocks noGrp="1"/>
+          </p:cNvSpPr>
+          <p:nvPr>
+            <p:ph type="title"/>
+          </p:nvPr>
+        </p:nvSpPr>
+        <p:spPr>
+          <a:xfrm>
+            <a:off x="919314" y="190464"/>
+            <a:ext cx="10515600" cy="1325563"/>
+          </a:xfrm>
+        </p:spPr>
+        <p:txBody>
+          <a:bodyPr/>
+          <a:lstStyle/>
+          <a:p>
+            <a:r>
+              <a:rPr lang="en-GB" dirty="0">
+                <a:solidFill>
+                  <a:srgbClr val="676767"/>
+                </a:solidFill>
+              </a:rPr>
+              <a:t>A possible workflow</a:t>
+            </a:r>
+          </a:p>
+        </p:txBody>
+      </p:sp>
+      <p:sp>
+        <p:nvSpPr>
+          <p:cNvPr id="3" name="Content Placeholder 2">
+            <a:extLst>
+              <a:ext uri="{FF2B5EF4-FFF2-40B4-BE49-F238E27FC236}">
+                <a16:creationId xmlns:a16="http://schemas.microsoft.com/office/drawing/2014/main" id="{2A926702-F2DA-89CC-4997-B322A510229E}"/>
+              </a:ext>
+            </a:extLst>
+          </p:cNvPr>
+          <p:cNvSpPr>
+            <a:spLocks noGrp="1"/>
+          </p:cNvSpPr>
+          <p:nvPr>
+            <p:ph idx="1"/>
+          </p:nvPr>
+        </p:nvSpPr>
+        <p:spPr>
+          <a:xfrm>
+            <a:off x="838199" y="1413031"/>
+            <a:ext cx="10596715" cy="4906652"/>
+          </a:xfrm>
+          <a:solidFill>
+            <a:srgbClr val="FAF0E6"/>
+          </a:solidFill>
+        </p:spPr>
+        <p:txBody>
+          <a:bodyPr>
+            <a:normAutofit/>
+          </a:bodyPr>
+          <a:lstStyle/>
+          <a:p>
+            <a:pPr marL="0" indent="0">
+              <a:buNone/>
+            </a:pPr>
+            <a:endParaRPr lang="en-GB" sz="3600" dirty="0">
+              <a:solidFill>
+                <a:srgbClr val="3A3A3A"/>
+              </a:solidFill>
+            </a:endParaRPr>
+          </a:p>
+          <a:p>
+            <a:pPr marL="0" indent="0">
+              <a:buNone/>
+            </a:pPr>
+            <a:r>
+              <a:rPr lang="en-GB" sz="3600" dirty="0">
+                <a:solidFill>
+                  <a:srgbClr val="3A3A3A"/>
+                </a:solidFill>
+              </a:rPr>
+              <a:t>We need to draft up guidelines on what an article should contain, its structure and other ways an article is ‘good’.</a:t>
+            </a:r>
+          </a:p>
+          <a:p>
+            <a:pPr marL="0" indent="0">
+              <a:buNone/>
+            </a:pPr>
+            <a:endParaRPr lang="en-GB" sz="3600" dirty="0">
+              <a:solidFill>
+                <a:srgbClr val="3A3A3A"/>
+              </a:solidFill>
+            </a:endParaRPr>
+          </a:p>
+          <a:p>
+            <a:pPr marL="0" indent="0">
+              <a:buNone/>
+            </a:pPr>
+            <a:r>
+              <a:rPr lang="en-GB" sz="3600" dirty="0">
+                <a:solidFill>
+                  <a:srgbClr val="3A3A3A"/>
+                </a:solidFill>
+              </a:rPr>
+              <a:t>This exercise further helps our LLM app prompt, and we refine it.</a:t>
+            </a:r>
+            <a:endParaRPr lang="en-GB" sz="3600" dirty="0"/>
+          </a:p>
+        </p:txBody>
+      </p:sp>
+    </p:spTree>
+    <p:extLst>
+      <p:ext uri="{BB962C8B-B14F-4D97-AF65-F5344CB8AC3E}">
+        <p14:creationId xmlns:p14="http://schemas.microsoft.com/office/powerpoint/2010/main" val="2606623600"/>
+      </p:ext>
+    </p:extLst>
+  </p:cSld>
+  <p:clrMapOvr>
+    <a:masterClrMapping/>
+  </p:clrMapOvr>
+</p:sld>
+</file>
+
+<file path=ppt/slides/slide2.xml><?xml version="1.0" encoding="utf-8"?>
 <p:sld xmlns:a="http://schemas.openxmlformats.org/drawingml/2006/main" xmlns:r="http://schemas.openxmlformats.org/officeDocument/2006/relationships" xmlns:p="http://schemas.openxmlformats.org/presentationml/2006/main">
   <p:cSld>
     <p:bg>
@@ -4836,1035 +6173,7 @@
 </p:sld>
 </file>
 
-<file path=ppt/slides/slide14.xml><?xml version="1.0" encoding="utf-8"?>
-<p:sld xmlns:a="http://schemas.openxmlformats.org/drawingml/2006/main" xmlns:r="http://schemas.openxmlformats.org/officeDocument/2006/relationships" xmlns:p="http://schemas.openxmlformats.org/presentationml/2006/main">
-  <p:cSld>
-    <p:bg>
-      <p:bgPr>
-        <a:solidFill>
-          <a:srgbClr val="FAF0E6"/>
-        </a:solidFill>
-        <a:effectLst/>
-      </p:bgPr>
-    </p:bg>
-    <p:spTree>
-      <p:nvGrpSpPr>
-        <p:cNvPr id="1" name="">
-          <a:extLst>
-            <a:ext uri="{FF2B5EF4-FFF2-40B4-BE49-F238E27FC236}">
-              <a16:creationId xmlns:a16="http://schemas.microsoft.com/office/drawing/2014/main" id="{92E7F011-DD73-9195-5B39-D6C9A3D4D40E}"/>
-            </a:ext>
-          </a:extLst>
-        </p:cNvPr>
-        <p:cNvGrpSpPr/>
-        <p:nvPr/>
-      </p:nvGrpSpPr>
-      <p:grpSpPr>
-        <a:xfrm>
-          <a:off x="0" y="0"/>
-          <a:ext cx="0" cy="0"/>
-          <a:chOff x="0" y="0"/>
-          <a:chExt cx="0" cy="0"/>
-        </a:xfrm>
-      </p:grpSpPr>
-      <p:sp>
-        <p:nvSpPr>
-          <p:cNvPr id="2" name="Title 1">
-            <a:extLst>
-              <a:ext uri="{FF2B5EF4-FFF2-40B4-BE49-F238E27FC236}">
-                <a16:creationId xmlns:a16="http://schemas.microsoft.com/office/drawing/2014/main" id="{1D99B005-0E86-2311-D1CE-3D89A18E89D4}"/>
-              </a:ext>
-            </a:extLst>
-          </p:cNvPr>
-          <p:cNvSpPr>
-            <a:spLocks noGrp="1"/>
-          </p:cNvSpPr>
-          <p:nvPr>
-            <p:ph type="title"/>
-          </p:nvPr>
-        </p:nvSpPr>
-        <p:spPr>
-          <a:xfrm>
-            <a:off x="919314" y="190464"/>
-            <a:ext cx="10515600" cy="1325563"/>
-          </a:xfrm>
-        </p:spPr>
-        <p:txBody>
-          <a:bodyPr/>
-          <a:lstStyle/>
-          <a:p>
-            <a:r>
-              <a:rPr lang="en-GB" dirty="0">
-                <a:solidFill>
-                  <a:srgbClr val="676767"/>
-                </a:solidFill>
-              </a:rPr>
-              <a:t>Where to start?    What to do?</a:t>
-            </a:r>
-          </a:p>
-        </p:txBody>
-      </p:sp>
-      <p:sp>
-        <p:nvSpPr>
-          <p:cNvPr id="3" name="Content Placeholder 2">
-            <a:extLst>
-              <a:ext uri="{FF2B5EF4-FFF2-40B4-BE49-F238E27FC236}">
-                <a16:creationId xmlns:a16="http://schemas.microsoft.com/office/drawing/2014/main" id="{9D01D926-2685-1102-15DA-FE530DB0ED07}"/>
-              </a:ext>
-            </a:extLst>
-          </p:cNvPr>
-          <p:cNvSpPr>
-            <a:spLocks noGrp="1"/>
-          </p:cNvSpPr>
-          <p:nvPr>
-            <p:ph idx="1"/>
-          </p:nvPr>
-        </p:nvSpPr>
-        <p:spPr>
-          <a:xfrm>
-            <a:off x="919314" y="1413031"/>
-            <a:ext cx="10596715" cy="4906652"/>
-          </a:xfrm>
-          <a:solidFill>
-            <a:srgbClr val="FAF0E6"/>
-          </a:solidFill>
-        </p:spPr>
-        <p:txBody>
-          <a:bodyPr>
-            <a:normAutofit/>
-          </a:bodyPr>
-          <a:lstStyle/>
-          <a:p>
-            <a:pPr>
-              <a:lnSpc>
-                <a:spcPts val="4500"/>
-              </a:lnSpc>
-            </a:pPr>
-            <a:r>
-              <a:rPr lang="en-GB" dirty="0"/>
-              <a:t>We will look at Case Study 1 in the manual and framework.</a:t>
-            </a:r>
-          </a:p>
-          <a:p>
-            <a:pPr>
-              <a:lnSpc>
-                <a:spcPts val="4500"/>
-              </a:lnSpc>
-            </a:pPr>
-            <a:endParaRPr lang="en-GB" dirty="0"/>
-          </a:p>
-        </p:txBody>
-      </p:sp>
-      <p:pic>
-        <p:nvPicPr>
-          <p:cNvPr id="5" name="Picture 4">
-            <a:extLst>
-              <a:ext uri="{FF2B5EF4-FFF2-40B4-BE49-F238E27FC236}">
-                <a16:creationId xmlns:a16="http://schemas.microsoft.com/office/drawing/2014/main" id="{4D70A54A-8115-972C-E59F-B1FFBDCE4D1D}"/>
-              </a:ext>
-            </a:extLst>
-          </p:cNvPr>
-          <p:cNvPicPr>
-            <a:picLocks noChangeAspect="1"/>
-          </p:cNvPicPr>
-          <p:nvPr/>
-        </p:nvPicPr>
-        <p:blipFill>
-          <a:blip r:embed="rId2">
-            <a:extLst>
-              <a:ext uri="{28A0092B-C50C-407E-A947-70E740481C1C}">
-                <a14:useLocalDpi xmlns:a14="http://schemas.microsoft.com/office/drawing/2010/main" val="0"/>
-              </a:ext>
-            </a:extLst>
-          </a:blip>
-          <a:srcRect/>
-          <a:stretch/>
-        </p:blipFill>
-        <p:spPr>
-          <a:xfrm>
-            <a:off x="7509889" y="1992264"/>
-            <a:ext cx="4122392" cy="3851181"/>
-          </a:xfrm>
-          <a:prstGeom prst="rect">
-            <a:avLst/>
-          </a:prstGeom>
-        </p:spPr>
-      </p:pic>
-      <p:sp>
-        <p:nvSpPr>
-          <p:cNvPr id="6" name="TextBox 5">
-            <a:extLst>
-              <a:ext uri="{FF2B5EF4-FFF2-40B4-BE49-F238E27FC236}">
-                <a16:creationId xmlns:a16="http://schemas.microsoft.com/office/drawing/2014/main" id="{00CA9450-E002-D5D5-E96F-FB1BB1E25F92}"/>
-              </a:ext>
-            </a:extLst>
-          </p:cNvPr>
-          <p:cNvSpPr txBox="1"/>
-          <p:nvPr/>
-        </p:nvSpPr>
-        <p:spPr>
-          <a:xfrm>
-            <a:off x="675971" y="2369262"/>
-            <a:ext cx="6413198" cy="5078313"/>
-          </a:xfrm>
-          <a:prstGeom prst="rect">
-            <a:avLst/>
-          </a:prstGeom>
-          <a:noFill/>
-        </p:spPr>
-        <p:txBody>
-          <a:bodyPr wrap="square" rtlCol="0">
-            <a:spAutoFit/>
-          </a:bodyPr>
-          <a:lstStyle/>
-          <a:p>
-            <a:r>
-              <a:rPr lang="en-GB" sz="2400" dirty="0"/>
-              <a:t>Given an article title, determine if it is about AI.</a:t>
-            </a:r>
-          </a:p>
-          <a:p>
-            <a:endParaRPr lang="en-GB" sz="2400" dirty="0"/>
-          </a:p>
-          <a:p>
-            <a:pPr marL="342900" indent="-342900">
-              <a:buFont typeface="+mj-lt"/>
-              <a:buAutoNum type="arabicPeriod"/>
-            </a:pPr>
-            <a:r>
-              <a:rPr lang="en-GB" sz="2400" dirty="0"/>
-              <a:t>Take title and create article of N words (EXPANDER)</a:t>
-            </a:r>
-          </a:p>
-          <a:p>
-            <a:pPr marL="342900" indent="-342900">
-              <a:buFont typeface="+mj-lt"/>
-              <a:buAutoNum type="arabicPeriod"/>
-            </a:pPr>
-            <a:r>
-              <a:rPr lang="en-GB" sz="2400" dirty="0"/>
-              <a:t>In a specified language (TRANSLATOR)</a:t>
-            </a:r>
-          </a:p>
-          <a:p>
-            <a:pPr marL="342900" indent="-342900">
-              <a:buFont typeface="+mj-lt"/>
-              <a:buAutoNum type="arabicPeriod"/>
-            </a:pPr>
-            <a:r>
-              <a:rPr lang="en-GB" sz="2400" dirty="0"/>
-              <a:t>Ensure article is not sensational (EDITOR)</a:t>
-            </a:r>
-          </a:p>
-          <a:p>
-            <a:pPr marL="342900" indent="-342900">
-              <a:buFont typeface="+mj-lt"/>
-              <a:buAutoNum type="arabicPeriod"/>
-            </a:pPr>
-            <a:r>
-              <a:rPr lang="en-GB" sz="2400" dirty="0"/>
-              <a:t>Publisher determines prices with dependent tools (TOOL CALLING)</a:t>
-            </a:r>
-          </a:p>
-          <a:p>
-            <a:pPr marL="342900" indent="-342900">
-              <a:buFont typeface="+mj-lt"/>
-              <a:buAutoNum type="arabicPeriod"/>
-            </a:pPr>
-            <a:endParaRPr lang="en-GB" sz="2400" dirty="0"/>
-          </a:p>
-          <a:p>
-            <a:r>
-              <a:rPr lang="en-GB" sz="2400" dirty="0"/>
-              <a:t>PUBLISH = YES only if 1,2 and 3 are YES</a:t>
-            </a:r>
-          </a:p>
-          <a:p>
-            <a:endParaRPr lang="en-GB" sz="2400" i="1" dirty="0"/>
-          </a:p>
-          <a:p>
-            <a:r>
-              <a:rPr lang="en-GB" sz="2400" i="1" dirty="0"/>
-              <a:t>This app could be a leaf of a larger app.</a:t>
-            </a:r>
-          </a:p>
-          <a:p>
-            <a:endParaRPr lang="en-GB" dirty="0"/>
-          </a:p>
-          <a:p>
-            <a:endParaRPr lang="en-GB" dirty="0"/>
-          </a:p>
-        </p:txBody>
-      </p:sp>
-    </p:spTree>
-    <p:extLst>
-      <p:ext uri="{BB962C8B-B14F-4D97-AF65-F5344CB8AC3E}">
-        <p14:creationId xmlns:p14="http://schemas.microsoft.com/office/powerpoint/2010/main" val="1393936898"/>
-      </p:ext>
-    </p:extLst>
-  </p:cSld>
-  <p:clrMapOvr>
-    <a:masterClrMapping/>
-  </p:clrMapOvr>
-</p:sld>
-</file>
-
-<file path=ppt/slides/slide15.xml><?xml version="1.0" encoding="utf-8"?>
-<p:sld xmlns:a="http://schemas.openxmlformats.org/drawingml/2006/main" xmlns:r="http://schemas.openxmlformats.org/officeDocument/2006/relationships" xmlns:p="http://schemas.openxmlformats.org/presentationml/2006/main">
-  <p:cSld>
-    <p:bg>
-      <p:bgPr>
-        <a:solidFill>
-          <a:srgbClr val="FAF0E6"/>
-        </a:solidFill>
-        <a:effectLst/>
-      </p:bgPr>
-    </p:bg>
-    <p:spTree>
-      <p:nvGrpSpPr>
-        <p:cNvPr id="1" name="">
-          <a:extLst>
-            <a:ext uri="{FF2B5EF4-FFF2-40B4-BE49-F238E27FC236}">
-              <a16:creationId xmlns:a16="http://schemas.microsoft.com/office/drawing/2014/main" id="{B12C2438-6F39-1E74-B87F-C7E70AB4DA97}"/>
-            </a:ext>
-          </a:extLst>
-        </p:cNvPr>
-        <p:cNvGrpSpPr/>
-        <p:nvPr/>
-      </p:nvGrpSpPr>
-      <p:grpSpPr>
-        <a:xfrm>
-          <a:off x="0" y="0"/>
-          <a:ext cx="0" cy="0"/>
-          <a:chOff x="0" y="0"/>
-          <a:chExt cx="0" cy="0"/>
-        </a:xfrm>
-      </p:grpSpPr>
-      <p:sp>
-        <p:nvSpPr>
-          <p:cNvPr id="2" name="Title 1">
-            <a:extLst>
-              <a:ext uri="{FF2B5EF4-FFF2-40B4-BE49-F238E27FC236}">
-                <a16:creationId xmlns:a16="http://schemas.microsoft.com/office/drawing/2014/main" id="{9AE93777-B841-1FE9-B5E3-7E294CD7B927}"/>
-              </a:ext>
-            </a:extLst>
-          </p:cNvPr>
-          <p:cNvSpPr>
-            <a:spLocks noGrp="1"/>
-          </p:cNvSpPr>
-          <p:nvPr>
-            <p:ph type="title"/>
-          </p:nvPr>
-        </p:nvSpPr>
-        <p:spPr>
-          <a:xfrm>
-            <a:off x="919314" y="190464"/>
-            <a:ext cx="10515600" cy="1325563"/>
-          </a:xfrm>
-        </p:spPr>
-        <p:txBody>
-          <a:bodyPr/>
-          <a:lstStyle/>
-          <a:p>
-            <a:r>
-              <a:rPr lang="en-GB" dirty="0">
-                <a:solidFill>
-                  <a:srgbClr val="676767"/>
-                </a:solidFill>
-              </a:rPr>
-              <a:t>A possible workflow</a:t>
-            </a:r>
-          </a:p>
-        </p:txBody>
-      </p:sp>
-      <p:sp>
-        <p:nvSpPr>
-          <p:cNvPr id="3" name="Content Placeholder 2">
-            <a:extLst>
-              <a:ext uri="{FF2B5EF4-FFF2-40B4-BE49-F238E27FC236}">
-                <a16:creationId xmlns:a16="http://schemas.microsoft.com/office/drawing/2014/main" id="{A81FB872-4B2A-7D41-78EA-741C258663A8}"/>
-              </a:ext>
-            </a:extLst>
-          </p:cNvPr>
-          <p:cNvSpPr>
-            <a:spLocks noGrp="1"/>
-          </p:cNvSpPr>
-          <p:nvPr>
-            <p:ph idx="1"/>
-          </p:nvPr>
-        </p:nvSpPr>
-        <p:spPr>
-          <a:xfrm>
-            <a:off x="838199" y="1413031"/>
-            <a:ext cx="10596715" cy="4906652"/>
-          </a:xfrm>
-          <a:solidFill>
-            <a:srgbClr val="FAF0E6"/>
-          </a:solidFill>
-        </p:spPr>
-        <p:txBody>
-          <a:bodyPr>
-            <a:normAutofit/>
-          </a:bodyPr>
-          <a:lstStyle/>
-          <a:p>
-            <a:pPr marL="0" indent="0">
-              <a:buNone/>
-            </a:pPr>
-            <a:endParaRPr lang="en-GB" dirty="0">
-              <a:solidFill>
-                <a:srgbClr val="3A3A3A"/>
-              </a:solidFill>
-            </a:endParaRPr>
-          </a:p>
-          <a:p>
-            <a:pPr marL="0" indent="0">
-              <a:buNone/>
-            </a:pPr>
-            <a:r>
-              <a:rPr lang="en-GB" sz="3600" dirty="0">
-                <a:solidFill>
-                  <a:srgbClr val="3A3A3A"/>
-                </a:solidFill>
-              </a:rPr>
-              <a:t>We build our app with a basic prompt “Write an article on {topic} of around {N} words.”</a:t>
-            </a:r>
-          </a:p>
-          <a:p>
-            <a:pPr marL="0" indent="0">
-              <a:buNone/>
-            </a:pPr>
-            <a:endParaRPr lang="en-GB" sz="3600" dirty="0">
-              <a:solidFill>
-                <a:srgbClr val="3A3A3A"/>
-              </a:solidFill>
-            </a:endParaRPr>
-          </a:p>
-          <a:p>
-            <a:pPr marL="0" indent="0">
-              <a:buNone/>
-            </a:pPr>
-            <a:r>
-              <a:rPr lang="en-GB" sz="3600" dirty="0">
-                <a:solidFill>
-                  <a:srgbClr val="3A3A3A"/>
-                </a:solidFill>
-              </a:rPr>
-              <a:t>It all works mechanistically.</a:t>
-            </a:r>
-          </a:p>
-          <a:p>
-            <a:pPr marL="0" indent="0">
-              <a:buNone/>
-            </a:pPr>
-            <a:endParaRPr lang="en-GB" sz="3600" dirty="0">
-              <a:solidFill>
-                <a:srgbClr val="3A3A3A"/>
-              </a:solidFill>
-            </a:endParaRPr>
-          </a:p>
-          <a:p>
-            <a:pPr marL="0" indent="0">
-              <a:buNone/>
-            </a:pPr>
-            <a:r>
-              <a:rPr lang="en-GB" sz="3600" dirty="0">
-                <a:solidFill>
-                  <a:srgbClr val="3A3A3A"/>
-                </a:solidFill>
-              </a:rPr>
-              <a:t>Now lets progress…</a:t>
-            </a:r>
-          </a:p>
-          <a:p>
-            <a:pPr marL="0" indent="0">
-              <a:buNone/>
-            </a:pPr>
-            <a:endParaRPr lang="en-GB" dirty="0">
-              <a:solidFill>
-                <a:srgbClr val="3A3A3A"/>
-              </a:solidFill>
-            </a:endParaRPr>
-          </a:p>
-          <a:p>
-            <a:pPr marL="0" indent="0">
-              <a:buNone/>
-            </a:pPr>
-            <a:endParaRPr lang="en-GB" dirty="0"/>
-          </a:p>
-        </p:txBody>
-      </p:sp>
-    </p:spTree>
-    <p:extLst>
-      <p:ext uri="{BB962C8B-B14F-4D97-AF65-F5344CB8AC3E}">
-        <p14:creationId xmlns:p14="http://schemas.microsoft.com/office/powerpoint/2010/main" val="2854764619"/>
-      </p:ext>
-    </p:extLst>
-  </p:cSld>
-  <p:clrMapOvr>
-    <a:masterClrMapping/>
-  </p:clrMapOvr>
-</p:sld>
-</file>
-
-<file path=ppt/slides/slide16.xml><?xml version="1.0" encoding="utf-8"?>
-<p:sld xmlns:a="http://schemas.openxmlformats.org/drawingml/2006/main" xmlns:r="http://schemas.openxmlformats.org/officeDocument/2006/relationships" xmlns:p="http://schemas.openxmlformats.org/presentationml/2006/main">
-  <p:cSld>
-    <p:bg>
-      <p:bgPr>
-        <a:solidFill>
-          <a:srgbClr val="FAF0E6"/>
-        </a:solidFill>
-        <a:effectLst/>
-      </p:bgPr>
-    </p:bg>
-    <p:spTree>
-      <p:nvGrpSpPr>
-        <p:cNvPr id="1" name="">
-          <a:extLst>
-            <a:ext uri="{FF2B5EF4-FFF2-40B4-BE49-F238E27FC236}">
-              <a16:creationId xmlns:a16="http://schemas.microsoft.com/office/drawing/2014/main" id="{82DA7914-9C59-92B8-87EC-0CF6052F3940}"/>
-            </a:ext>
-          </a:extLst>
-        </p:cNvPr>
-        <p:cNvGrpSpPr/>
-        <p:nvPr/>
-      </p:nvGrpSpPr>
-      <p:grpSpPr>
-        <a:xfrm>
-          <a:off x="0" y="0"/>
-          <a:ext cx="0" cy="0"/>
-          <a:chOff x="0" y="0"/>
-          <a:chExt cx="0" cy="0"/>
-        </a:xfrm>
-      </p:grpSpPr>
-      <p:sp>
-        <p:nvSpPr>
-          <p:cNvPr id="2" name="Title 1">
-            <a:extLst>
-              <a:ext uri="{FF2B5EF4-FFF2-40B4-BE49-F238E27FC236}">
-                <a16:creationId xmlns:a16="http://schemas.microsoft.com/office/drawing/2014/main" id="{B7551BD0-D5CD-1D3A-DA5F-810AC1E58873}"/>
-              </a:ext>
-            </a:extLst>
-          </p:cNvPr>
-          <p:cNvSpPr>
-            <a:spLocks noGrp="1"/>
-          </p:cNvSpPr>
-          <p:nvPr>
-            <p:ph type="title"/>
-          </p:nvPr>
-        </p:nvSpPr>
-        <p:spPr>
-          <a:xfrm>
-            <a:off x="919314" y="190464"/>
-            <a:ext cx="10515600" cy="1325563"/>
-          </a:xfrm>
-        </p:spPr>
-        <p:txBody>
-          <a:bodyPr/>
-          <a:lstStyle/>
-          <a:p>
-            <a:r>
-              <a:rPr lang="en-GB" dirty="0">
-                <a:solidFill>
-                  <a:srgbClr val="676767"/>
-                </a:solidFill>
-              </a:rPr>
-              <a:t>A possible workflow</a:t>
-            </a:r>
-          </a:p>
-        </p:txBody>
-      </p:sp>
-      <p:sp>
-        <p:nvSpPr>
-          <p:cNvPr id="3" name="Content Placeholder 2">
-            <a:extLst>
-              <a:ext uri="{FF2B5EF4-FFF2-40B4-BE49-F238E27FC236}">
-                <a16:creationId xmlns:a16="http://schemas.microsoft.com/office/drawing/2014/main" id="{9E095495-A29E-5672-D1AA-94890BA4BD23}"/>
-              </a:ext>
-            </a:extLst>
-          </p:cNvPr>
-          <p:cNvSpPr>
-            <a:spLocks noGrp="1"/>
-          </p:cNvSpPr>
-          <p:nvPr>
-            <p:ph idx="1"/>
-          </p:nvPr>
-        </p:nvSpPr>
-        <p:spPr>
-          <a:xfrm>
-            <a:off x="838199" y="1413031"/>
-            <a:ext cx="10596715" cy="4906652"/>
-          </a:xfrm>
-          <a:solidFill>
-            <a:srgbClr val="FAF0E6"/>
-          </a:solidFill>
-        </p:spPr>
-        <p:txBody>
-          <a:bodyPr>
-            <a:normAutofit/>
-          </a:bodyPr>
-          <a:lstStyle/>
-          <a:p>
-            <a:pPr marL="0" indent="0">
-              <a:buNone/>
-            </a:pPr>
-            <a:endParaRPr lang="en-GB" dirty="0">
-              <a:solidFill>
-                <a:srgbClr val="3A3A3A"/>
-              </a:solidFill>
-            </a:endParaRPr>
-          </a:p>
-          <a:p>
-            <a:pPr marL="0" indent="0">
-              <a:buNone/>
-            </a:pPr>
-            <a:r>
-              <a:rPr lang="en-GB" sz="3600" dirty="0">
-                <a:solidFill>
-                  <a:srgbClr val="3A3A3A"/>
-                </a:solidFill>
-              </a:rPr>
-              <a:t>We decide to add a simple </a:t>
-            </a:r>
-          </a:p>
-          <a:p>
-            <a:pPr marL="0" indent="0">
-              <a:buNone/>
-            </a:pPr>
-            <a:endParaRPr lang="en-GB" sz="3600" dirty="0">
-              <a:solidFill>
-                <a:srgbClr val="3A3A3A"/>
-              </a:solidFill>
-            </a:endParaRPr>
-          </a:p>
-          <a:p>
-            <a:pPr marL="0" indent="0">
-              <a:buNone/>
-            </a:pPr>
-            <a:r>
-              <a:rPr lang="en-GB" sz="3600" dirty="0">
-                <a:solidFill>
-                  <a:srgbClr val="3A3A3A"/>
-                </a:solidFill>
-              </a:rPr>
-              <a:t>We notice that users like:</a:t>
-            </a:r>
-          </a:p>
-          <a:p>
-            <a:pPr marL="0" indent="0">
-              <a:buNone/>
-            </a:pPr>
-            <a:r>
-              <a:rPr lang="en-GB" sz="3600" dirty="0">
-                <a:solidFill>
-                  <a:srgbClr val="3A3A3A"/>
-                </a:solidFill>
-              </a:rPr>
-              <a:t>Bullet points – Abstract - Conclusion</a:t>
-            </a:r>
-          </a:p>
-          <a:p>
-            <a:pPr marL="0" indent="0">
-              <a:buNone/>
-            </a:pPr>
-            <a:endParaRPr lang="en-GB" dirty="0">
-              <a:solidFill>
-                <a:srgbClr val="3A3A3A"/>
-              </a:solidFill>
-            </a:endParaRPr>
-          </a:p>
-          <a:p>
-            <a:pPr marL="0" indent="0">
-              <a:buNone/>
-            </a:pPr>
-            <a:endParaRPr lang="en-GB" dirty="0"/>
-          </a:p>
-        </p:txBody>
-      </p:sp>
-      <p:sp>
-        <p:nvSpPr>
-          <p:cNvPr id="6" name="Heart 5">
-            <a:extLst>
-              <a:ext uri="{FF2B5EF4-FFF2-40B4-BE49-F238E27FC236}">
-                <a16:creationId xmlns:a16="http://schemas.microsoft.com/office/drawing/2014/main" id="{2DE13637-5C54-F149-1862-0D879316D033}"/>
-              </a:ext>
-            </a:extLst>
-          </p:cNvPr>
-          <p:cNvSpPr/>
-          <p:nvPr/>
-        </p:nvSpPr>
-        <p:spPr>
-          <a:xfrm>
-            <a:off x="6320413" y="1908469"/>
-            <a:ext cx="532563" cy="482321"/>
-          </a:xfrm>
-          <a:prstGeom prst="heart">
-            <a:avLst/>
-          </a:prstGeom>
-          <a:solidFill>
-            <a:srgbClr val="FFC000"/>
-          </a:solidFill>
-        </p:spPr>
-        <p:style>
-          <a:lnRef idx="2">
-            <a:schemeClr val="accent1">
-              <a:shade val="15000"/>
-            </a:schemeClr>
-          </a:lnRef>
-          <a:fillRef idx="1">
-            <a:schemeClr val="accent1"/>
-          </a:fillRef>
-          <a:effectRef idx="0">
-            <a:schemeClr val="accent1"/>
-          </a:effectRef>
-          <a:fontRef idx="minor">
-            <a:schemeClr val="lt1"/>
-          </a:fontRef>
-        </p:style>
-        <p:txBody>
-          <a:bodyPr rtlCol="0" anchor="ctr"/>
-          <a:lstStyle/>
-          <a:p>
-            <a:pPr algn="ctr"/>
-            <a:endParaRPr lang="en-GB"/>
-          </a:p>
-        </p:txBody>
-      </p:sp>
-    </p:spTree>
-    <p:extLst>
-      <p:ext uri="{BB962C8B-B14F-4D97-AF65-F5344CB8AC3E}">
-        <p14:creationId xmlns:p14="http://schemas.microsoft.com/office/powerpoint/2010/main" val="1410119164"/>
-      </p:ext>
-    </p:extLst>
-  </p:cSld>
-  <p:clrMapOvr>
-    <a:masterClrMapping/>
-  </p:clrMapOvr>
-</p:sld>
-</file>
-
-<file path=ppt/slides/slide17.xml><?xml version="1.0" encoding="utf-8"?>
-<p:sld xmlns:a="http://schemas.openxmlformats.org/drawingml/2006/main" xmlns:r="http://schemas.openxmlformats.org/officeDocument/2006/relationships" xmlns:p="http://schemas.openxmlformats.org/presentationml/2006/main">
-  <p:cSld>
-    <p:bg>
-      <p:bgPr>
-        <a:solidFill>
-          <a:srgbClr val="FAF0E6"/>
-        </a:solidFill>
-        <a:effectLst/>
-      </p:bgPr>
-    </p:bg>
-    <p:spTree>
-      <p:nvGrpSpPr>
-        <p:cNvPr id="1" name="">
-          <a:extLst>
-            <a:ext uri="{FF2B5EF4-FFF2-40B4-BE49-F238E27FC236}">
-              <a16:creationId xmlns:a16="http://schemas.microsoft.com/office/drawing/2014/main" id="{0BDB2118-2A00-6EB2-FC00-9E9A4B426FB2}"/>
-            </a:ext>
-          </a:extLst>
-        </p:cNvPr>
-        <p:cNvGrpSpPr/>
-        <p:nvPr/>
-      </p:nvGrpSpPr>
-      <p:grpSpPr>
-        <a:xfrm>
-          <a:off x="0" y="0"/>
-          <a:ext cx="0" cy="0"/>
-          <a:chOff x="0" y="0"/>
-          <a:chExt cx="0" cy="0"/>
-        </a:xfrm>
-      </p:grpSpPr>
-      <p:sp>
-        <p:nvSpPr>
-          <p:cNvPr id="2" name="Title 1">
-            <a:extLst>
-              <a:ext uri="{FF2B5EF4-FFF2-40B4-BE49-F238E27FC236}">
-                <a16:creationId xmlns:a16="http://schemas.microsoft.com/office/drawing/2014/main" id="{9F909056-E137-1FD8-1315-8F756AEBAABD}"/>
-              </a:ext>
-            </a:extLst>
-          </p:cNvPr>
-          <p:cNvSpPr>
-            <a:spLocks noGrp="1"/>
-          </p:cNvSpPr>
-          <p:nvPr>
-            <p:ph type="title"/>
-          </p:nvPr>
-        </p:nvSpPr>
-        <p:spPr>
-          <a:xfrm>
-            <a:off x="919314" y="190464"/>
-            <a:ext cx="10515600" cy="1325563"/>
-          </a:xfrm>
-        </p:spPr>
-        <p:txBody>
-          <a:bodyPr/>
-          <a:lstStyle/>
-          <a:p>
-            <a:r>
-              <a:rPr lang="en-GB" dirty="0">
-                <a:solidFill>
-                  <a:srgbClr val="676767"/>
-                </a:solidFill>
-              </a:rPr>
-              <a:t>A possible workflow</a:t>
-            </a:r>
-          </a:p>
-        </p:txBody>
-      </p:sp>
-      <p:sp>
-        <p:nvSpPr>
-          <p:cNvPr id="3" name="Content Placeholder 2">
-            <a:extLst>
-              <a:ext uri="{FF2B5EF4-FFF2-40B4-BE49-F238E27FC236}">
-                <a16:creationId xmlns:a16="http://schemas.microsoft.com/office/drawing/2014/main" id="{6B571EB7-4BEE-9743-713D-3D93F5662CFD}"/>
-              </a:ext>
-            </a:extLst>
-          </p:cNvPr>
-          <p:cNvSpPr>
-            <a:spLocks noGrp="1"/>
-          </p:cNvSpPr>
-          <p:nvPr>
-            <p:ph idx="1"/>
-          </p:nvPr>
-        </p:nvSpPr>
-        <p:spPr>
-          <a:xfrm>
-            <a:off x="838199" y="1413031"/>
-            <a:ext cx="10596715" cy="4906652"/>
-          </a:xfrm>
-          <a:solidFill>
-            <a:srgbClr val="FAF0E6"/>
-          </a:solidFill>
-        </p:spPr>
-        <p:txBody>
-          <a:bodyPr>
-            <a:normAutofit/>
-          </a:bodyPr>
-          <a:lstStyle/>
-          <a:p>
-            <a:pPr marL="0" indent="0">
-              <a:buNone/>
-            </a:pPr>
-            <a:endParaRPr lang="en-GB" dirty="0">
-              <a:solidFill>
-                <a:srgbClr val="3A3A3A"/>
-              </a:solidFill>
-            </a:endParaRPr>
-          </a:p>
-          <a:p>
-            <a:pPr marL="0" indent="0">
-              <a:buNone/>
-            </a:pPr>
-            <a:r>
-              <a:rPr lang="en-GB" sz="3600" dirty="0">
-                <a:solidFill>
-                  <a:srgbClr val="3A3A3A"/>
-                </a:solidFill>
-              </a:rPr>
-              <a:t>We change our prompt to include these features.</a:t>
-            </a:r>
-          </a:p>
-          <a:p>
-            <a:pPr marL="0" indent="0">
-              <a:buNone/>
-            </a:pPr>
-            <a:endParaRPr lang="en-GB" sz="3600" dirty="0">
-              <a:solidFill>
-                <a:srgbClr val="3A3A3A"/>
-              </a:solidFill>
-            </a:endParaRPr>
-          </a:p>
-          <a:p>
-            <a:pPr marL="0" indent="0">
-              <a:buNone/>
-            </a:pPr>
-            <a:r>
-              <a:rPr lang="en-GB" sz="3600" dirty="0">
-                <a:solidFill>
-                  <a:srgbClr val="3A3A3A"/>
-                </a:solidFill>
-              </a:rPr>
-              <a:t>However, only 2% of users give feedback so we decide to use Human Evaluators to give feedback as well as label articles ‘good’ etc</a:t>
-            </a:r>
-            <a:endParaRPr lang="en-GB" sz="3600" dirty="0"/>
-          </a:p>
-        </p:txBody>
-      </p:sp>
-    </p:spTree>
-    <p:extLst>
-      <p:ext uri="{BB962C8B-B14F-4D97-AF65-F5344CB8AC3E}">
-        <p14:creationId xmlns:p14="http://schemas.microsoft.com/office/powerpoint/2010/main" val="2709479580"/>
-      </p:ext>
-    </p:extLst>
-  </p:cSld>
-  <p:clrMapOvr>
-    <a:masterClrMapping/>
-  </p:clrMapOvr>
-</p:sld>
-</file>
-
-<file path=ppt/slides/slide18.xml><?xml version="1.0" encoding="utf-8"?>
-<p:sld xmlns:a="http://schemas.openxmlformats.org/drawingml/2006/main" xmlns:r="http://schemas.openxmlformats.org/officeDocument/2006/relationships" xmlns:p="http://schemas.openxmlformats.org/presentationml/2006/main">
-  <p:cSld>
-    <p:bg>
-      <p:bgPr>
-        <a:solidFill>
-          <a:srgbClr val="FAF0E6"/>
-        </a:solidFill>
-        <a:effectLst/>
-      </p:bgPr>
-    </p:bg>
-    <p:spTree>
-      <p:nvGrpSpPr>
-        <p:cNvPr id="1" name="">
-          <a:extLst>
-            <a:ext uri="{FF2B5EF4-FFF2-40B4-BE49-F238E27FC236}">
-              <a16:creationId xmlns:a16="http://schemas.microsoft.com/office/drawing/2014/main" id="{85ECCCBF-BB4A-48C7-BAAE-8E79BCA1A629}"/>
-            </a:ext>
-          </a:extLst>
-        </p:cNvPr>
-        <p:cNvGrpSpPr/>
-        <p:nvPr/>
-      </p:nvGrpSpPr>
-      <p:grpSpPr>
-        <a:xfrm>
-          <a:off x="0" y="0"/>
-          <a:ext cx="0" cy="0"/>
-          <a:chOff x="0" y="0"/>
-          <a:chExt cx="0" cy="0"/>
-        </a:xfrm>
-      </p:grpSpPr>
-      <p:sp>
-        <p:nvSpPr>
-          <p:cNvPr id="2" name="Title 1">
-            <a:extLst>
-              <a:ext uri="{FF2B5EF4-FFF2-40B4-BE49-F238E27FC236}">
-                <a16:creationId xmlns:a16="http://schemas.microsoft.com/office/drawing/2014/main" id="{6271C75B-7007-3FA8-53A3-6F646F633A24}"/>
-              </a:ext>
-            </a:extLst>
-          </p:cNvPr>
-          <p:cNvSpPr>
-            <a:spLocks noGrp="1"/>
-          </p:cNvSpPr>
-          <p:nvPr>
-            <p:ph type="title"/>
-          </p:nvPr>
-        </p:nvSpPr>
-        <p:spPr>
-          <a:xfrm>
-            <a:off x="919314" y="190464"/>
-            <a:ext cx="10515600" cy="1325563"/>
-          </a:xfrm>
-        </p:spPr>
-        <p:txBody>
-          <a:bodyPr/>
-          <a:lstStyle/>
-          <a:p>
-            <a:r>
-              <a:rPr lang="en-GB" dirty="0">
-                <a:solidFill>
-                  <a:srgbClr val="676767"/>
-                </a:solidFill>
-              </a:rPr>
-              <a:t>A possible workflow</a:t>
-            </a:r>
-          </a:p>
-        </p:txBody>
-      </p:sp>
-      <p:sp>
-        <p:nvSpPr>
-          <p:cNvPr id="3" name="Content Placeholder 2">
-            <a:extLst>
-              <a:ext uri="{FF2B5EF4-FFF2-40B4-BE49-F238E27FC236}">
-                <a16:creationId xmlns:a16="http://schemas.microsoft.com/office/drawing/2014/main" id="{2A926702-F2DA-89CC-4997-B322A510229E}"/>
-              </a:ext>
-            </a:extLst>
-          </p:cNvPr>
-          <p:cNvSpPr>
-            <a:spLocks noGrp="1"/>
-          </p:cNvSpPr>
-          <p:nvPr>
-            <p:ph idx="1"/>
-          </p:nvPr>
-        </p:nvSpPr>
-        <p:spPr>
-          <a:xfrm>
-            <a:off x="838199" y="1413031"/>
-            <a:ext cx="10596715" cy="4906652"/>
-          </a:xfrm>
-          <a:solidFill>
-            <a:srgbClr val="FAF0E6"/>
-          </a:solidFill>
-        </p:spPr>
-        <p:txBody>
-          <a:bodyPr>
-            <a:normAutofit/>
-          </a:bodyPr>
-          <a:lstStyle/>
-          <a:p>
-            <a:pPr marL="0" indent="0">
-              <a:buNone/>
-            </a:pPr>
-            <a:endParaRPr lang="en-GB" sz="3600" dirty="0">
-              <a:solidFill>
-                <a:srgbClr val="3A3A3A"/>
-              </a:solidFill>
-            </a:endParaRPr>
-          </a:p>
-          <a:p>
-            <a:pPr marL="0" indent="0">
-              <a:buNone/>
-            </a:pPr>
-            <a:r>
-              <a:rPr lang="en-GB" sz="3600" dirty="0">
-                <a:solidFill>
-                  <a:srgbClr val="3A3A3A"/>
-                </a:solidFill>
-              </a:rPr>
-              <a:t>We need to draft up guidelines on what an article should contain, its structure and other ways an article is ‘good’.</a:t>
-            </a:r>
-          </a:p>
-          <a:p>
-            <a:pPr marL="0" indent="0">
-              <a:buNone/>
-            </a:pPr>
-            <a:endParaRPr lang="en-GB" sz="3600" dirty="0">
-              <a:solidFill>
-                <a:srgbClr val="3A3A3A"/>
-              </a:solidFill>
-            </a:endParaRPr>
-          </a:p>
-          <a:p>
-            <a:pPr marL="0" indent="0">
-              <a:buNone/>
-            </a:pPr>
-            <a:r>
-              <a:rPr lang="en-GB" sz="3600" dirty="0">
-                <a:solidFill>
-                  <a:srgbClr val="3A3A3A"/>
-                </a:solidFill>
-              </a:rPr>
-              <a:t>This exercise further helps our LLM app prompt, and we refine it.</a:t>
-            </a:r>
-            <a:endParaRPr lang="en-GB" sz="3600" dirty="0"/>
-          </a:p>
-        </p:txBody>
-      </p:sp>
-    </p:spTree>
-    <p:extLst>
-      <p:ext uri="{BB962C8B-B14F-4D97-AF65-F5344CB8AC3E}">
-        <p14:creationId xmlns:p14="http://schemas.microsoft.com/office/powerpoint/2010/main" val="2606623600"/>
-      </p:ext>
-    </p:extLst>
-  </p:cSld>
-  <p:clrMapOvr>
-    <a:masterClrMapping/>
-  </p:clrMapOvr>
-</p:sld>
-</file>
-
-<file path=ppt/slides/slide19.xml><?xml version="1.0" encoding="utf-8"?>
+<file path=ppt/slides/slide20.xml><?xml version="1.0" encoding="utf-8"?>
 <p:sld xmlns:a="http://schemas.openxmlformats.org/drawingml/2006/main" xmlns:r="http://schemas.openxmlformats.org/officeDocument/2006/relationships" xmlns:p="http://schemas.openxmlformats.org/presentationml/2006/main">
   <p:cSld>
     <p:bg>
@@ -6066,7 +6375,1133 @@
 </p:sld>
 </file>
 
-<file path=ppt/slides/slide2.xml><?xml version="1.0" encoding="utf-8"?>
+<file path=ppt/slides/slide21.xml><?xml version="1.0" encoding="utf-8"?>
+<p:sld xmlns:a="http://schemas.openxmlformats.org/drawingml/2006/main" xmlns:r="http://schemas.openxmlformats.org/officeDocument/2006/relationships" xmlns:p="http://schemas.openxmlformats.org/presentationml/2006/main">
+  <p:cSld>
+    <p:bg>
+      <p:bgPr>
+        <a:solidFill>
+          <a:srgbClr val="FAF0E6"/>
+        </a:solidFill>
+        <a:effectLst/>
+      </p:bgPr>
+    </p:bg>
+    <p:spTree>
+      <p:nvGrpSpPr>
+        <p:cNvPr id="1" name="">
+          <a:extLst>
+            <a:ext uri="{FF2B5EF4-FFF2-40B4-BE49-F238E27FC236}">
+              <a16:creationId xmlns:a16="http://schemas.microsoft.com/office/drawing/2014/main" id="{BBE8893A-DC61-4C1F-F66E-16B9BEF6FEF8}"/>
+            </a:ext>
+          </a:extLst>
+        </p:cNvPr>
+        <p:cNvGrpSpPr/>
+        <p:nvPr/>
+      </p:nvGrpSpPr>
+      <p:grpSpPr>
+        <a:xfrm>
+          <a:off x="0" y="0"/>
+          <a:ext cx="0" cy="0"/>
+          <a:chOff x="0" y="0"/>
+          <a:chExt cx="0" cy="0"/>
+        </a:xfrm>
+      </p:grpSpPr>
+      <p:sp>
+        <p:nvSpPr>
+          <p:cNvPr id="2" name="Title 1">
+            <a:extLst>
+              <a:ext uri="{FF2B5EF4-FFF2-40B4-BE49-F238E27FC236}">
+                <a16:creationId xmlns:a16="http://schemas.microsoft.com/office/drawing/2014/main" id="{8573560D-6E5D-1168-8281-F94F2F5A04BA}"/>
+              </a:ext>
+            </a:extLst>
+          </p:cNvPr>
+          <p:cNvSpPr>
+            <a:spLocks noGrp="1"/>
+          </p:cNvSpPr>
+          <p:nvPr>
+            <p:ph type="title"/>
+          </p:nvPr>
+        </p:nvSpPr>
+        <p:spPr>
+          <a:xfrm>
+            <a:off x="919314" y="190464"/>
+            <a:ext cx="10515600" cy="1325563"/>
+          </a:xfrm>
+        </p:spPr>
+        <p:txBody>
+          <a:bodyPr/>
+          <a:lstStyle/>
+          <a:p>
+            <a:r>
+              <a:rPr lang="en-GB" dirty="0">
+                <a:solidFill>
+                  <a:srgbClr val="676767"/>
+                </a:solidFill>
+              </a:rPr>
+              <a:t>A possible workflow</a:t>
+            </a:r>
+          </a:p>
+        </p:txBody>
+      </p:sp>
+      <p:sp>
+        <p:nvSpPr>
+          <p:cNvPr id="3" name="Content Placeholder 2">
+            <a:extLst>
+              <a:ext uri="{FF2B5EF4-FFF2-40B4-BE49-F238E27FC236}">
+                <a16:creationId xmlns:a16="http://schemas.microsoft.com/office/drawing/2014/main" id="{A6BF4D6B-1CA0-DB9A-FA7F-A5FA83DEBA99}"/>
+              </a:ext>
+            </a:extLst>
+          </p:cNvPr>
+          <p:cNvSpPr>
+            <a:spLocks noGrp="1"/>
+          </p:cNvSpPr>
+          <p:nvPr>
+            <p:ph idx="1"/>
+          </p:nvPr>
+        </p:nvSpPr>
+        <p:spPr>
+          <a:xfrm>
+            <a:off x="838199" y="1413031"/>
+            <a:ext cx="10596715" cy="4906652"/>
+          </a:xfrm>
+          <a:solidFill>
+            <a:srgbClr val="FAF0E6"/>
+          </a:solidFill>
+        </p:spPr>
+        <p:txBody>
+          <a:bodyPr>
+            <a:normAutofit/>
+          </a:bodyPr>
+          <a:lstStyle/>
+          <a:p>
+            <a:pPr marL="0" indent="0">
+              <a:buNone/>
+            </a:pPr>
+            <a:r>
+              <a:rPr lang="en-GB" sz="3600" dirty="0">
+                <a:solidFill>
+                  <a:srgbClr val="3A3A3A"/>
+                </a:solidFill>
+              </a:rPr>
+              <a:t>Now that we are looking at our data, we see that sometimes the app offers financial advice.</a:t>
+            </a:r>
+          </a:p>
+          <a:p>
+            <a:pPr marL="0" indent="0">
+              <a:buNone/>
+            </a:pPr>
+            <a:endParaRPr lang="en-GB" sz="3600" dirty="0">
+              <a:solidFill>
+                <a:srgbClr val="3A3A3A"/>
+              </a:solidFill>
+            </a:endParaRPr>
+          </a:p>
+          <a:p>
+            <a:pPr marL="0" indent="0">
+              <a:buNone/>
+            </a:pPr>
+            <a:r>
+              <a:rPr lang="en-GB" sz="3600" dirty="0">
+                <a:solidFill>
+                  <a:srgbClr val="3A3A3A"/>
+                </a:solidFill>
+              </a:rPr>
+              <a:t>We must prevent this (guardrails) so we create an LLM as Judge that detects if this article had financial advice.</a:t>
+            </a:r>
+          </a:p>
+          <a:p>
+            <a:pPr marL="0" indent="0">
+              <a:buNone/>
+            </a:pPr>
+            <a:endParaRPr lang="en-GB" sz="3600" dirty="0">
+              <a:solidFill>
+                <a:srgbClr val="3A3A3A"/>
+              </a:solidFill>
+            </a:endParaRPr>
+          </a:p>
+          <a:p>
+            <a:pPr marL="0" indent="0">
+              <a:buNone/>
+            </a:pPr>
+            <a:r>
+              <a:rPr lang="en-GB" sz="3600" dirty="0">
+                <a:solidFill>
+                  <a:srgbClr val="3A3A3A"/>
+                </a:solidFill>
+              </a:rPr>
+              <a:t>It saves many problems…</a:t>
+            </a:r>
+            <a:endParaRPr lang="en-GB" sz="3600" dirty="0"/>
+          </a:p>
+        </p:txBody>
+      </p:sp>
+    </p:spTree>
+    <p:extLst>
+      <p:ext uri="{BB962C8B-B14F-4D97-AF65-F5344CB8AC3E}">
+        <p14:creationId xmlns:p14="http://schemas.microsoft.com/office/powerpoint/2010/main" val="2293205134"/>
+      </p:ext>
+    </p:extLst>
+  </p:cSld>
+  <p:clrMapOvr>
+    <a:masterClrMapping/>
+  </p:clrMapOvr>
+</p:sld>
+</file>
+
+<file path=ppt/slides/slide22.xml><?xml version="1.0" encoding="utf-8"?>
+<p:sld xmlns:a="http://schemas.openxmlformats.org/drawingml/2006/main" xmlns:r="http://schemas.openxmlformats.org/officeDocument/2006/relationships" xmlns:p="http://schemas.openxmlformats.org/presentationml/2006/main">
+  <p:cSld>
+    <p:bg>
+      <p:bgPr>
+        <a:solidFill>
+          <a:srgbClr val="FAF0E6"/>
+        </a:solidFill>
+        <a:effectLst/>
+      </p:bgPr>
+    </p:bg>
+    <p:spTree>
+      <p:nvGrpSpPr>
+        <p:cNvPr id="1" name="">
+          <a:extLst>
+            <a:ext uri="{FF2B5EF4-FFF2-40B4-BE49-F238E27FC236}">
+              <a16:creationId xmlns:a16="http://schemas.microsoft.com/office/drawing/2014/main" id="{597709D9-749A-561E-D646-A04FE9BCB443}"/>
+            </a:ext>
+          </a:extLst>
+        </p:cNvPr>
+        <p:cNvGrpSpPr/>
+        <p:nvPr/>
+      </p:nvGrpSpPr>
+      <p:grpSpPr>
+        <a:xfrm>
+          <a:off x="0" y="0"/>
+          <a:ext cx="0" cy="0"/>
+          <a:chOff x="0" y="0"/>
+          <a:chExt cx="0" cy="0"/>
+        </a:xfrm>
+      </p:grpSpPr>
+      <p:sp>
+        <p:nvSpPr>
+          <p:cNvPr id="2" name="Title 1">
+            <a:extLst>
+              <a:ext uri="{FF2B5EF4-FFF2-40B4-BE49-F238E27FC236}">
+                <a16:creationId xmlns:a16="http://schemas.microsoft.com/office/drawing/2014/main" id="{1AF3FBE5-17E2-228C-18B0-FB0EA14A4DAF}"/>
+              </a:ext>
+            </a:extLst>
+          </p:cNvPr>
+          <p:cNvSpPr>
+            <a:spLocks noGrp="1"/>
+          </p:cNvSpPr>
+          <p:nvPr>
+            <p:ph type="title"/>
+          </p:nvPr>
+        </p:nvSpPr>
+        <p:spPr>
+          <a:xfrm>
+            <a:off x="919314" y="190464"/>
+            <a:ext cx="10515600" cy="1325563"/>
+          </a:xfrm>
+        </p:spPr>
+        <p:txBody>
+          <a:bodyPr/>
+          <a:lstStyle/>
+          <a:p>
+            <a:r>
+              <a:rPr lang="en-GB" dirty="0">
+                <a:solidFill>
+                  <a:srgbClr val="676767"/>
+                </a:solidFill>
+              </a:rPr>
+              <a:t>A possible workflow</a:t>
+            </a:r>
+          </a:p>
+        </p:txBody>
+      </p:sp>
+      <p:sp>
+        <p:nvSpPr>
+          <p:cNvPr id="3" name="Content Placeholder 2">
+            <a:extLst>
+              <a:ext uri="{FF2B5EF4-FFF2-40B4-BE49-F238E27FC236}">
+                <a16:creationId xmlns:a16="http://schemas.microsoft.com/office/drawing/2014/main" id="{46E37527-D4B3-3EC3-AC11-F3CCC637F567}"/>
+              </a:ext>
+            </a:extLst>
+          </p:cNvPr>
+          <p:cNvSpPr>
+            <a:spLocks noGrp="1"/>
+          </p:cNvSpPr>
+          <p:nvPr>
+            <p:ph idx="1"/>
+          </p:nvPr>
+        </p:nvSpPr>
+        <p:spPr>
+          <a:xfrm>
+            <a:off x="838199" y="1413031"/>
+            <a:ext cx="10596715" cy="4906652"/>
+          </a:xfrm>
+          <a:solidFill>
+            <a:srgbClr val="FAF0E6"/>
+          </a:solidFill>
+        </p:spPr>
+        <p:txBody>
+          <a:bodyPr>
+            <a:normAutofit lnSpcReduction="10000"/>
+          </a:bodyPr>
+          <a:lstStyle/>
+          <a:p>
+            <a:pPr marL="0" indent="0">
+              <a:buNone/>
+            </a:pPr>
+            <a:r>
+              <a:rPr lang="en-GB" sz="3600" dirty="0">
+                <a:solidFill>
+                  <a:srgbClr val="3A3A3A"/>
+                </a:solidFill>
+              </a:rPr>
+              <a:t>Now that we have a robust way of evaluating our app, we can start to tinker:</a:t>
+            </a:r>
+            <a:endParaRPr lang="en-GB" sz="2400" dirty="0">
+              <a:solidFill>
+                <a:srgbClr val="3A3A3A"/>
+              </a:solidFill>
+            </a:endParaRPr>
+          </a:p>
+          <a:p>
+            <a:r>
+              <a:rPr lang="en-GB" dirty="0">
+                <a:solidFill>
+                  <a:srgbClr val="3A3A3A"/>
+                </a:solidFill>
+              </a:rPr>
+              <a:t>Different models in different places for cost reduction yet same performance? </a:t>
+            </a:r>
+          </a:p>
+          <a:p>
+            <a:r>
+              <a:rPr lang="en-GB" dirty="0">
+                <a:solidFill>
+                  <a:srgbClr val="3A3A3A"/>
+                </a:solidFill>
+              </a:rPr>
+              <a:t>Does one part of the app give greater benefit for unit of change than another?</a:t>
+            </a:r>
+          </a:p>
+          <a:p>
+            <a:r>
+              <a:rPr lang="en-GB" dirty="0">
+                <a:solidFill>
+                  <a:srgbClr val="3A3A3A"/>
+                </a:solidFill>
+              </a:rPr>
+              <a:t>Can we reduce latency without breaking anything (regression testing)</a:t>
+            </a:r>
+          </a:p>
+          <a:p>
+            <a:r>
+              <a:rPr lang="en-GB" dirty="0">
+                <a:solidFill>
+                  <a:srgbClr val="3A3A3A"/>
+                </a:solidFill>
+              </a:rPr>
+              <a:t>Offer a client dashboard of filtered metrics to our clients in real time? They have entrusted us with their business.</a:t>
+            </a:r>
+          </a:p>
+          <a:p>
+            <a:r>
+              <a:rPr lang="en-GB" i="1" dirty="0">
+                <a:solidFill>
+                  <a:srgbClr val="3A3A3A"/>
+                </a:solidFill>
+              </a:rPr>
+              <a:t>Process not tools.</a:t>
+            </a:r>
+            <a:endParaRPr lang="en-GB" i="1" dirty="0"/>
+          </a:p>
+        </p:txBody>
+      </p:sp>
+    </p:spTree>
+    <p:extLst>
+      <p:ext uri="{BB962C8B-B14F-4D97-AF65-F5344CB8AC3E}">
+        <p14:creationId xmlns:p14="http://schemas.microsoft.com/office/powerpoint/2010/main" val="2467199627"/>
+      </p:ext>
+    </p:extLst>
+  </p:cSld>
+  <p:clrMapOvr>
+    <a:masterClrMapping/>
+  </p:clrMapOvr>
+</p:sld>
+</file>
+
+<file path=ppt/slides/slide23.xml><?xml version="1.0" encoding="utf-8"?>
+<p:sld xmlns:a="http://schemas.openxmlformats.org/drawingml/2006/main" xmlns:r="http://schemas.openxmlformats.org/officeDocument/2006/relationships" xmlns:p="http://schemas.openxmlformats.org/presentationml/2006/main">
+  <p:cSld>
+    <p:bg>
+      <p:bgPr>
+        <a:solidFill>
+          <a:srgbClr val="FAF0E6"/>
+        </a:solidFill>
+        <a:effectLst/>
+      </p:bgPr>
+    </p:bg>
+    <p:spTree>
+      <p:nvGrpSpPr>
+        <p:cNvPr id="1" name="">
+          <a:extLst>
+            <a:ext uri="{FF2B5EF4-FFF2-40B4-BE49-F238E27FC236}">
+              <a16:creationId xmlns:a16="http://schemas.microsoft.com/office/drawing/2014/main" id="{E9DE99CB-B7FE-D269-5053-A318EA450790}"/>
+            </a:ext>
+          </a:extLst>
+        </p:cNvPr>
+        <p:cNvGrpSpPr/>
+        <p:nvPr/>
+      </p:nvGrpSpPr>
+      <p:grpSpPr>
+        <a:xfrm>
+          <a:off x="0" y="0"/>
+          <a:ext cx="0" cy="0"/>
+          <a:chOff x="0" y="0"/>
+          <a:chExt cx="0" cy="0"/>
+        </a:xfrm>
+      </p:grpSpPr>
+      <p:sp>
+        <p:nvSpPr>
+          <p:cNvPr id="2" name="Title 1">
+            <a:extLst>
+              <a:ext uri="{FF2B5EF4-FFF2-40B4-BE49-F238E27FC236}">
+                <a16:creationId xmlns:a16="http://schemas.microsoft.com/office/drawing/2014/main" id="{27837EF3-3471-3B0A-0B80-BE9C4680AB83}"/>
+              </a:ext>
+            </a:extLst>
+          </p:cNvPr>
+          <p:cNvSpPr>
+            <a:spLocks noGrp="1"/>
+          </p:cNvSpPr>
+          <p:nvPr>
+            <p:ph type="title"/>
+          </p:nvPr>
+        </p:nvSpPr>
+        <p:spPr>
+          <a:xfrm>
+            <a:off x="919314" y="190464"/>
+            <a:ext cx="10515600" cy="1325563"/>
+          </a:xfrm>
+        </p:spPr>
+        <p:txBody>
+          <a:bodyPr/>
+          <a:lstStyle/>
+          <a:p>
+            <a:r>
+              <a:rPr lang="en-GB" dirty="0">
+                <a:solidFill>
+                  <a:srgbClr val="676767"/>
+                </a:solidFill>
+              </a:rPr>
+              <a:t>Demo – our app from earlier</a:t>
+            </a:r>
+          </a:p>
+        </p:txBody>
+      </p:sp>
+      <p:sp>
+        <p:nvSpPr>
+          <p:cNvPr id="3" name="Content Placeholder 2">
+            <a:extLst>
+              <a:ext uri="{FF2B5EF4-FFF2-40B4-BE49-F238E27FC236}">
+                <a16:creationId xmlns:a16="http://schemas.microsoft.com/office/drawing/2014/main" id="{CB7D921D-0A3A-0A9B-28B4-27739391277E}"/>
+              </a:ext>
+            </a:extLst>
+          </p:cNvPr>
+          <p:cNvSpPr>
+            <a:spLocks noGrp="1"/>
+          </p:cNvSpPr>
+          <p:nvPr>
+            <p:ph idx="1"/>
+          </p:nvPr>
+        </p:nvSpPr>
+        <p:spPr>
+          <a:xfrm>
+            <a:off x="675971" y="1058467"/>
+            <a:ext cx="10596715" cy="4906652"/>
+          </a:xfrm>
+          <a:solidFill>
+            <a:srgbClr val="FAF0E6"/>
+          </a:solidFill>
+        </p:spPr>
+        <p:txBody>
+          <a:bodyPr>
+            <a:normAutofit/>
+          </a:bodyPr>
+          <a:lstStyle/>
+          <a:p>
+            <a:pPr marL="0" indent="0">
+              <a:lnSpc>
+                <a:spcPts val="4500"/>
+              </a:lnSpc>
+              <a:buNone/>
+            </a:pPr>
+            <a:r>
+              <a:rPr lang="en-GB" dirty="0"/>
+              <a:t>We will look at Case Study 1 in the manual and framework.</a:t>
+            </a:r>
+          </a:p>
+          <a:p>
+            <a:pPr>
+              <a:lnSpc>
+                <a:spcPts val="4500"/>
+              </a:lnSpc>
+            </a:pPr>
+            <a:endParaRPr lang="en-GB" dirty="0"/>
+          </a:p>
+        </p:txBody>
+      </p:sp>
+      <p:pic>
+        <p:nvPicPr>
+          <p:cNvPr id="5" name="Picture 4" descr="A diagram of a diagram&#10;&#10;AI-generated content may be incorrect.">
+            <a:extLst>
+              <a:ext uri="{FF2B5EF4-FFF2-40B4-BE49-F238E27FC236}">
+                <a16:creationId xmlns:a16="http://schemas.microsoft.com/office/drawing/2014/main" id="{16C13F1D-73CA-929F-46E5-F1983D274369}"/>
+              </a:ext>
+            </a:extLst>
+          </p:cNvPr>
+          <p:cNvPicPr>
+            <a:picLocks noChangeAspect="1"/>
+          </p:cNvPicPr>
+          <p:nvPr/>
+        </p:nvPicPr>
+        <p:blipFill>
+          <a:blip r:embed="rId2">
+            <a:extLst>
+              <a:ext uri="{28A0092B-C50C-407E-A947-70E740481C1C}">
+                <a14:useLocalDpi xmlns:a14="http://schemas.microsoft.com/office/drawing/2010/main" val="0"/>
+              </a:ext>
+            </a:extLst>
+          </a:blip>
+          <a:stretch>
+            <a:fillRect/>
+          </a:stretch>
+        </p:blipFill>
+        <p:spPr>
+          <a:xfrm>
+            <a:off x="7444321" y="2503499"/>
+            <a:ext cx="4452210" cy="4160262"/>
+          </a:xfrm>
+          <a:prstGeom prst="rect">
+            <a:avLst/>
+          </a:prstGeom>
+        </p:spPr>
+      </p:pic>
+      <p:sp>
+        <p:nvSpPr>
+          <p:cNvPr id="6" name="TextBox 5">
+            <a:extLst>
+              <a:ext uri="{FF2B5EF4-FFF2-40B4-BE49-F238E27FC236}">
+                <a16:creationId xmlns:a16="http://schemas.microsoft.com/office/drawing/2014/main" id="{F59B59F7-7AA3-F77B-5C7B-D1E26FF52C1D}"/>
+              </a:ext>
+            </a:extLst>
+          </p:cNvPr>
+          <p:cNvSpPr txBox="1"/>
+          <p:nvPr/>
+        </p:nvSpPr>
+        <p:spPr>
+          <a:xfrm>
+            <a:off x="675971" y="1324527"/>
+            <a:ext cx="8113466" cy="4832092"/>
+          </a:xfrm>
+          <a:prstGeom prst="rect">
+            <a:avLst/>
+          </a:prstGeom>
+          <a:noFill/>
+        </p:spPr>
+        <p:txBody>
+          <a:bodyPr wrap="square" rtlCol="0">
+            <a:spAutoFit/>
+          </a:bodyPr>
+          <a:lstStyle/>
+          <a:p>
+            <a:endParaRPr lang="en-GB" sz="2400" dirty="0"/>
+          </a:p>
+          <a:p>
+            <a:pPr marL="342900" indent="-342900">
+              <a:buFont typeface="Arial" panose="020B0604020202020204" pitchFamily="34" charset="0"/>
+              <a:buChar char="•"/>
+            </a:pPr>
+            <a:r>
+              <a:rPr lang="en-GB" sz="2400" dirty="0"/>
+              <a:t>Given an article title, determine if it is about AI (ROUTER)</a:t>
+            </a:r>
+          </a:p>
+          <a:p>
+            <a:pPr marL="342900" indent="-342900">
+              <a:buFont typeface="Arial" panose="020B0604020202020204" pitchFamily="34" charset="0"/>
+              <a:buChar char="•"/>
+            </a:pPr>
+            <a:r>
+              <a:rPr lang="en-GB" sz="2400" dirty="0"/>
+              <a:t>Take title and create article of N words (EXPANDER)</a:t>
+            </a:r>
+          </a:p>
+          <a:p>
+            <a:pPr marL="342900" indent="-342900">
+              <a:buFont typeface="Arial" panose="020B0604020202020204" pitchFamily="34" charset="0"/>
+              <a:buChar char="•"/>
+            </a:pPr>
+            <a:r>
+              <a:rPr lang="en-GB" sz="2400" dirty="0"/>
+              <a:t>In a specified language (TRANSLATOR)</a:t>
+            </a:r>
+          </a:p>
+          <a:p>
+            <a:pPr marL="342900" indent="-342900">
+              <a:buFont typeface="Arial" panose="020B0604020202020204" pitchFamily="34" charset="0"/>
+              <a:buChar char="•"/>
+            </a:pPr>
+            <a:r>
+              <a:rPr lang="en-GB" sz="2400" dirty="0"/>
+              <a:t>Ensure article is not sensational (EDITOR)</a:t>
+            </a:r>
+          </a:p>
+          <a:p>
+            <a:endParaRPr lang="en-GB" sz="2400" dirty="0"/>
+          </a:p>
+          <a:p>
+            <a:r>
+              <a:rPr lang="en-GB" sz="2400" dirty="0"/>
+              <a:t>A ‘good article’ – OMITTED IN DEMO</a:t>
+            </a:r>
+          </a:p>
+          <a:p>
+            <a:pPr marL="342900" indent="-342900">
+              <a:buFont typeface="+mj-lt"/>
+              <a:buAutoNum type="arabicPeriod"/>
+            </a:pPr>
+            <a:endParaRPr lang="en-GB" sz="2400" dirty="0"/>
+          </a:p>
+          <a:p>
+            <a:r>
+              <a:rPr lang="en-GB" sz="2400" dirty="0"/>
+              <a:t>PUBLISH = YES only if last three are YES in EDITOR</a:t>
+            </a:r>
+          </a:p>
+          <a:p>
+            <a:endParaRPr lang="en-GB" sz="2400" i="1" dirty="0"/>
+          </a:p>
+          <a:p>
+            <a:r>
+              <a:rPr lang="en-GB" sz="3200" i="1" dirty="0"/>
+              <a:t>Let’s go to the guide and code…</a:t>
+            </a:r>
+          </a:p>
+          <a:p>
+            <a:endParaRPr lang="en-GB" dirty="0"/>
+          </a:p>
+          <a:p>
+            <a:endParaRPr lang="en-GB" dirty="0"/>
+          </a:p>
+        </p:txBody>
+      </p:sp>
+    </p:spTree>
+    <p:extLst>
+      <p:ext uri="{BB962C8B-B14F-4D97-AF65-F5344CB8AC3E}">
+        <p14:creationId xmlns:p14="http://schemas.microsoft.com/office/powerpoint/2010/main" val="1389024405"/>
+      </p:ext>
+    </p:extLst>
+  </p:cSld>
+  <p:clrMapOvr>
+    <a:masterClrMapping/>
+  </p:clrMapOvr>
+</p:sld>
+</file>
+
+<file path=ppt/slides/slide24.xml><?xml version="1.0" encoding="utf-8"?>
+<p:sld xmlns:a="http://schemas.openxmlformats.org/drawingml/2006/main" xmlns:r="http://schemas.openxmlformats.org/officeDocument/2006/relationships" xmlns:p="http://schemas.openxmlformats.org/presentationml/2006/main">
+  <p:cSld>
+    <p:bg>
+      <p:bgPr>
+        <a:solidFill>
+          <a:srgbClr val="FAF0E6"/>
+        </a:solidFill>
+        <a:effectLst/>
+      </p:bgPr>
+    </p:bg>
+    <p:spTree>
+      <p:nvGrpSpPr>
+        <p:cNvPr id="1" name="">
+          <a:extLst>
+            <a:ext uri="{FF2B5EF4-FFF2-40B4-BE49-F238E27FC236}">
+              <a16:creationId xmlns:a16="http://schemas.microsoft.com/office/drawing/2014/main" id="{28532D0B-499F-6B2B-DF29-2721E71E20FD}"/>
+            </a:ext>
+          </a:extLst>
+        </p:cNvPr>
+        <p:cNvGrpSpPr/>
+        <p:nvPr/>
+      </p:nvGrpSpPr>
+      <p:grpSpPr>
+        <a:xfrm>
+          <a:off x="0" y="0"/>
+          <a:ext cx="0" cy="0"/>
+          <a:chOff x="0" y="0"/>
+          <a:chExt cx="0" cy="0"/>
+        </a:xfrm>
+      </p:grpSpPr>
+      <p:sp>
+        <p:nvSpPr>
+          <p:cNvPr id="2" name="Title 1">
+            <a:extLst>
+              <a:ext uri="{FF2B5EF4-FFF2-40B4-BE49-F238E27FC236}">
+                <a16:creationId xmlns:a16="http://schemas.microsoft.com/office/drawing/2014/main" id="{ECA1ECCD-969B-2C26-B0C3-CE65C985C56D}"/>
+              </a:ext>
+            </a:extLst>
+          </p:cNvPr>
+          <p:cNvSpPr>
+            <a:spLocks noGrp="1"/>
+          </p:cNvSpPr>
+          <p:nvPr>
+            <p:ph type="title"/>
+          </p:nvPr>
+        </p:nvSpPr>
+        <p:spPr>
+          <a:xfrm>
+            <a:off x="919314" y="190464"/>
+            <a:ext cx="10515600" cy="1325563"/>
+          </a:xfrm>
+        </p:spPr>
+        <p:txBody>
+          <a:bodyPr/>
+          <a:lstStyle/>
+          <a:p>
+            <a:r>
+              <a:rPr lang="en-GB" dirty="0">
+                <a:solidFill>
+                  <a:srgbClr val="676767"/>
+                </a:solidFill>
+              </a:rPr>
+              <a:t>Summary Key Points</a:t>
+            </a:r>
+          </a:p>
+        </p:txBody>
+      </p:sp>
+      <p:sp>
+        <p:nvSpPr>
+          <p:cNvPr id="3" name="Content Placeholder 2">
+            <a:extLst>
+              <a:ext uri="{FF2B5EF4-FFF2-40B4-BE49-F238E27FC236}">
+                <a16:creationId xmlns:a16="http://schemas.microsoft.com/office/drawing/2014/main" id="{F7B30729-BE9A-44FD-60E7-9CAE0499060D}"/>
+              </a:ext>
+            </a:extLst>
+          </p:cNvPr>
+          <p:cNvSpPr>
+            <a:spLocks noGrp="1"/>
+          </p:cNvSpPr>
+          <p:nvPr>
+            <p:ph idx="1"/>
+          </p:nvPr>
+        </p:nvSpPr>
+        <p:spPr>
+          <a:xfrm>
+            <a:off x="838199" y="1413031"/>
+            <a:ext cx="10596715" cy="4906652"/>
+          </a:xfrm>
+          <a:solidFill>
+            <a:srgbClr val="FAF0E6"/>
+          </a:solidFill>
+        </p:spPr>
+        <p:txBody>
+          <a:bodyPr>
+            <a:normAutofit/>
+          </a:bodyPr>
+          <a:lstStyle/>
+          <a:p>
+            <a:r>
+              <a:rPr lang="en-GB" dirty="0">
+                <a:solidFill>
+                  <a:srgbClr val="3A3A3A"/>
+                </a:solidFill>
+              </a:rPr>
+              <a:t>We need to look at the data to determine what are EVAL criteria are</a:t>
+            </a:r>
+          </a:p>
+          <a:p>
+            <a:r>
+              <a:rPr lang="en-GB" dirty="0">
+                <a:solidFill>
+                  <a:srgbClr val="3A3A3A"/>
+                </a:solidFill>
+              </a:rPr>
+              <a:t>We need to determine what success will look like</a:t>
+            </a:r>
+          </a:p>
+          <a:p>
+            <a:r>
+              <a:rPr lang="en-GB" dirty="0">
+                <a:solidFill>
+                  <a:srgbClr val="3A3A3A"/>
+                </a:solidFill>
+              </a:rPr>
+              <a:t>We will need humans at certain points</a:t>
+            </a:r>
+          </a:p>
+          <a:p>
+            <a:r>
+              <a:rPr lang="en-GB" dirty="0">
+                <a:solidFill>
+                  <a:srgbClr val="3A3A3A"/>
+                </a:solidFill>
+              </a:rPr>
+              <a:t>We need a Domain Expert</a:t>
+            </a:r>
+          </a:p>
+          <a:p>
+            <a:r>
+              <a:rPr lang="en-GB" dirty="0">
+                <a:solidFill>
+                  <a:srgbClr val="3A3A3A"/>
+                </a:solidFill>
+              </a:rPr>
+              <a:t>LLM Judges are primarily for scaling</a:t>
+            </a:r>
+          </a:p>
+          <a:p>
+            <a:r>
+              <a:rPr lang="en-GB" dirty="0">
+                <a:solidFill>
+                  <a:srgbClr val="3A3A3A"/>
+                </a:solidFill>
+              </a:rPr>
+              <a:t>We need to do EVALS on these LLM Judges</a:t>
+            </a:r>
+          </a:p>
+          <a:p>
+            <a:r>
+              <a:rPr lang="en-GB" dirty="0">
+                <a:solidFill>
+                  <a:srgbClr val="3A3A3A"/>
+                </a:solidFill>
+              </a:rPr>
+              <a:t>Process more important than tools</a:t>
+            </a:r>
+          </a:p>
+          <a:p>
+            <a:pPr marL="0" indent="0">
+              <a:buNone/>
+            </a:pPr>
+            <a:endParaRPr lang="en-GB" dirty="0">
+              <a:solidFill>
+                <a:srgbClr val="3A3A3A"/>
+              </a:solidFill>
+            </a:endParaRPr>
+          </a:p>
+          <a:p>
+            <a:pPr marL="0" indent="0">
+              <a:buNone/>
+            </a:pPr>
+            <a:endParaRPr lang="en-GB" dirty="0"/>
+          </a:p>
+        </p:txBody>
+      </p:sp>
+    </p:spTree>
+    <p:extLst>
+      <p:ext uri="{BB962C8B-B14F-4D97-AF65-F5344CB8AC3E}">
+        <p14:creationId xmlns:p14="http://schemas.microsoft.com/office/powerpoint/2010/main" val="1095368260"/>
+      </p:ext>
+    </p:extLst>
+  </p:cSld>
+  <p:clrMapOvr>
+    <a:masterClrMapping/>
+  </p:clrMapOvr>
+</p:sld>
+</file>
+
+<file path=ppt/slides/slide25.xml><?xml version="1.0" encoding="utf-8"?>
+<p:sld xmlns:a="http://schemas.openxmlformats.org/drawingml/2006/main" xmlns:r="http://schemas.openxmlformats.org/officeDocument/2006/relationships" xmlns:p="http://schemas.openxmlformats.org/presentationml/2006/main">
+  <p:cSld>
+    <p:bg>
+      <p:bgPr>
+        <a:solidFill>
+          <a:srgbClr val="FAF0E6"/>
+        </a:solidFill>
+        <a:effectLst/>
+      </p:bgPr>
+    </p:bg>
+    <p:spTree>
+      <p:nvGrpSpPr>
+        <p:cNvPr id="1" name="">
+          <a:extLst>
+            <a:ext uri="{FF2B5EF4-FFF2-40B4-BE49-F238E27FC236}">
+              <a16:creationId xmlns:a16="http://schemas.microsoft.com/office/drawing/2014/main" id="{B9ACA70E-FAAB-6030-8F27-A4E223D005C1}"/>
+            </a:ext>
+          </a:extLst>
+        </p:cNvPr>
+        <p:cNvGrpSpPr/>
+        <p:nvPr/>
+      </p:nvGrpSpPr>
+      <p:grpSpPr>
+        <a:xfrm>
+          <a:off x="0" y="0"/>
+          <a:ext cx="0" cy="0"/>
+          <a:chOff x="0" y="0"/>
+          <a:chExt cx="0" cy="0"/>
+        </a:xfrm>
+      </p:grpSpPr>
+      <p:sp>
+        <p:nvSpPr>
+          <p:cNvPr id="2" name="Title 1">
+            <a:extLst>
+              <a:ext uri="{FF2B5EF4-FFF2-40B4-BE49-F238E27FC236}">
+                <a16:creationId xmlns:a16="http://schemas.microsoft.com/office/drawing/2014/main" id="{3E59E890-081A-3B32-C506-6FF13671B6B0}"/>
+              </a:ext>
+            </a:extLst>
+          </p:cNvPr>
+          <p:cNvSpPr>
+            <a:spLocks noGrp="1"/>
+          </p:cNvSpPr>
+          <p:nvPr>
+            <p:ph type="title"/>
+          </p:nvPr>
+        </p:nvSpPr>
+        <p:spPr>
+          <a:xfrm>
+            <a:off x="919314" y="190464"/>
+            <a:ext cx="10515600" cy="1325563"/>
+          </a:xfrm>
+        </p:spPr>
+        <p:txBody>
+          <a:bodyPr/>
+          <a:lstStyle/>
+          <a:p>
+            <a:r>
+              <a:rPr lang="en-GB" dirty="0">
+                <a:solidFill>
+                  <a:srgbClr val="676767"/>
+                </a:solidFill>
+              </a:rPr>
+              <a:t>Future</a:t>
+            </a:r>
+          </a:p>
+        </p:txBody>
+      </p:sp>
+      <p:sp>
+        <p:nvSpPr>
+          <p:cNvPr id="3" name="Content Placeholder 2">
+            <a:extLst>
+              <a:ext uri="{FF2B5EF4-FFF2-40B4-BE49-F238E27FC236}">
+                <a16:creationId xmlns:a16="http://schemas.microsoft.com/office/drawing/2014/main" id="{63D7FBBE-121F-6462-358B-A2B6E0DFBAC6}"/>
+              </a:ext>
+            </a:extLst>
+          </p:cNvPr>
+          <p:cNvSpPr>
+            <a:spLocks noGrp="1"/>
+          </p:cNvSpPr>
+          <p:nvPr>
+            <p:ph idx="1"/>
+          </p:nvPr>
+        </p:nvSpPr>
+        <p:spPr>
+          <a:xfrm>
+            <a:off x="838199" y="1413031"/>
+            <a:ext cx="10596715" cy="4906652"/>
+          </a:xfrm>
+          <a:solidFill>
+            <a:srgbClr val="FAF0E6"/>
+          </a:solidFill>
+        </p:spPr>
+        <p:txBody>
+          <a:bodyPr>
+            <a:normAutofit/>
+          </a:bodyPr>
+          <a:lstStyle/>
+          <a:p>
+            <a:pPr marL="0" indent="0">
+              <a:buNone/>
+            </a:pPr>
+            <a:endParaRPr lang="en-GB" dirty="0"/>
+          </a:p>
+          <a:p>
+            <a:pPr marL="0" indent="0">
+              <a:buNone/>
+            </a:pPr>
+            <a:r>
+              <a:rPr lang="en-GB" dirty="0">
+                <a:solidFill>
+                  <a:srgbClr val="3A3A3A"/>
+                </a:solidFill>
+              </a:rPr>
+              <a:t>Craig West</a:t>
+            </a:r>
+          </a:p>
+          <a:p>
+            <a:pPr marL="0" indent="0">
+              <a:buNone/>
+            </a:pPr>
+            <a:r>
+              <a:rPr lang="en-GB" dirty="0">
+                <a:solidFill>
+                  <a:srgbClr val="0070C0"/>
+                </a:solidFill>
+                <a:hlinkClick r:id="rId2">
+                  <a:extLst>
+                    <a:ext uri="{A12FA001-AC4F-418D-AE19-62706E023703}">
+                      <ahyp:hlinkClr xmlns:ahyp="http://schemas.microsoft.com/office/drawing/2018/hyperlinkcolor" val="tx"/>
+                    </a:ext>
+                  </a:extLst>
+                </a:hlinkClick>
+              </a:rPr>
+              <a:t>https://craig-west.netlify.app/</a:t>
+            </a:r>
+            <a:endParaRPr lang="en-GB" dirty="0">
+              <a:solidFill>
+                <a:srgbClr val="0070C0"/>
+              </a:solidFill>
+            </a:endParaRPr>
+          </a:p>
+          <a:p>
+            <a:pPr marL="0" indent="0">
+              <a:buNone/>
+            </a:pPr>
+            <a:r>
+              <a:rPr lang="en-GB" dirty="0">
+                <a:solidFill>
+                  <a:srgbClr val="467886"/>
+                </a:solidFill>
+                <a:hlinkClick r:id="rId3">
+                  <a:extLst>
+                    <a:ext uri="{A12FA001-AC4F-418D-AE19-62706E023703}">
+                      <ahyp:hlinkClr xmlns:ahyp="http://schemas.microsoft.com/office/drawing/2018/hyperlinkcolor" val="tx"/>
+                    </a:ext>
+                  </a:extLst>
+                </a:hlinkClick>
+              </a:rPr>
+              <a:t>https</a:t>
+            </a:r>
+            <a:r>
+              <a:rPr lang="en-GB" dirty="0">
+                <a:solidFill>
+                  <a:srgbClr val="0070C0"/>
+                </a:solidFill>
+                <a:hlinkClick r:id="rId3">
+                  <a:extLst>
+                    <a:ext uri="{A12FA001-AC4F-418D-AE19-62706E023703}">
+                      <ahyp:hlinkClr xmlns:ahyp="http://schemas.microsoft.com/office/drawing/2018/hyperlinkcolor" val="tx"/>
+                    </a:ext>
+                  </a:extLst>
+                </a:hlinkClick>
+              </a:rPr>
+              <a:t>://evaluating-ai-agents.com/</a:t>
+            </a:r>
+            <a:endParaRPr lang="en-GB" dirty="0">
+              <a:solidFill>
+                <a:srgbClr val="0070C0"/>
+              </a:solidFill>
+            </a:endParaRPr>
+          </a:p>
+          <a:p>
+            <a:pPr marL="0" indent="0">
+              <a:buNone/>
+            </a:pPr>
+            <a:endParaRPr lang="en-GB" dirty="0">
+              <a:solidFill>
+                <a:srgbClr val="3A3A3A"/>
+              </a:solidFill>
+            </a:endParaRPr>
+          </a:p>
+          <a:p>
+            <a:pPr marL="0" indent="0">
+              <a:buNone/>
+            </a:pPr>
+            <a:r>
+              <a:rPr lang="en-GB" b="1" dirty="0">
+                <a:solidFill>
+                  <a:srgbClr val="3A3A3A"/>
+                </a:solidFill>
+              </a:rPr>
+              <a:t>Contact links on the sites</a:t>
+            </a:r>
+          </a:p>
+          <a:p>
+            <a:pPr marL="0" indent="0">
+              <a:buNone/>
+            </a:pPr>
+            <a:r>
+              <a:rPr lang="en-GB" dirty="0">
+                <a:solidFill>
+                  <a:srgbClr val="3A3A3A"/>
+                </a:solidFill>
+              </a:rPr>
+              <a:t>Always have 10 mins to answer questions…</a:t>
+            </a:r>
+          </a:p>
+          <a:p>
+            <a:pPr marL="0" indent="0">
+              <a:buNone/>
+            </a:pPr>
+            <a:endParaRPr lang="en-GB" dirty="0">
+              <a:solidFill>
+                <a:srgbClr val="3A3A3A"/>
+              </a:solidFill>
+            </a:endParaRPr>
+          </a:p>
+          <a:p>
+            <a:pPr marL="0" indent="0">
+              <a:buNone/>
+            </a:pPr>
+            <a:endParaRPr lang="en-GB" dirty="0">
+              <a:solidFill>
+                <a:srgbClr val="3A3A3A"/>
+              </a:solidFill>
+            </a:endParaRPr>
+          </a:p>
+          <a:p>
+            <a:pPr marL="0" indent="0">
+              <a:buNone/>
+            </a:pPr>
+            <a:endParaRPr lang="en-GB" dirty="0"/>
+          </a:p>
+        </p:txBody>
+      </p:sp>
+      <p:pic>
+        <p:nvPicPr>
+          <p:cNvPr id="4" name="Picture 3">
+            <a:extLst>
+              <a:ext uri="{FF2B5EF4-FFF2-40B4-BE49-F238E27FC236}">
+                <a16:creationId xmlns:a16="http://schemas.microsoft.com/office/drawing/2014/main" id="{1D479101-E8FD-13D3-116C-FF2394CC9C4F}"/>
+              </a:ext>
+            </a:extLst>
+          </p:cNvPr>
+          <p:cNvPicPr>
+            <a:picLocks noChangeAspect="1"/>
+          </p:cNvPicPr>
+          <p:nvPr/>
+        </p:nvPicPr>
+        <p:blipFill>
+          <a:blip r:embed="rId4">
+            <a:extLst>
+              <a:ext uri="{28A0092B-C50C-407E-A947-70E740481C1C}">
+                <a14:useLocalDpi xmlns:a14="http://schemas.microsoft.com/office/drawing/2010/main" val="0"/>
+              </a:ext>
+            </a:extLst>
+          </a:blip>
+          <a:srcRect/>
+          <a:stretch/>
+        </p:blipFill>
+        <p:spPr>
+          <a:xfrm>
+            <a:off x="8340213" y="1413031"/>
+            <a:ext cx="2642419" cy="2642419"/>
+          </a:xfrm>
+          <a:prstGeom prst="rect">
+            <a:avLst/>
+          </a:prstGeom>
+        </p:spPr>
+      </p:pic>
+    </p:spTree>
+    <p:extLst>
+      <p:ext uri="{BB962C8B-B14F-4D97-AF65-F5344CB8AC3E}">
+        <p14:creationId xmlns:p14="http://schemas.microsoft.com/office/powerpoint/2010/main" val="1349075880"/>
+      </p:ext>
+    </p:extLst>
+  </p:cSld>
+  <p:clrMapOvr>
+    <a:masterClrMapping/>
+  </p:clrMapOvr>
+</p:sld>
+</file>
+
+<file path=ppt/slides/slide3.xml><?xml version="1.0" encoding="utf-8"?>
 <p:sld xmlns:a="http://schemas.openxmlformats.org/drawingml/2006/main" xmlns:r="http://schemas.openxmlformats.org/officeDocument/2006/relationships" xmlns:p="http://schemas.openxmlformats.org/presentationml/2006/main">
   <p:cSld>
     <p:bg>
@@ -6223,1133 +7658,7 @@
 </p:sld>
 </file>
 
-<file path=ppt/slides/slide20.xml><?xml version="1.0" encoding="utf-8"?>
-<p:sld xmlns:a="http://schemas.openxmlformats.org/drawingml/2006/main" xmlns:r="http://schemas.openxmlformats.org/officeDocument/2006/relationships" xmlns:p="http://schemas.openxmlformats.org/presentationml/2006/main">
-  <p:cSld>
-    <p:bg>
-      <p:bgPr>
-        <a:solidFill>
-          <a:srgbClr val="FAF0E6"/>
-        </a:solidFill>
-        <a:effectLst/>
-      </p:bgPr>
-    </p:bg>
-    <p:spTree>
-      <p:nvGrpSpPr>
-        <p:cNvPr id="1" name="">
-          <a:extLst>
-            <a:ext uri="{FF2B5EF4-FFF2-40B4-BE49-F238E27FC236}">
-              <a16:creationId xmlns:a16="http://schemas.microsoft.com/office/drawing/2014/main" id="{BBE8893A-DC61-4C1F-F66E-16B9BEF6FEF8}"/>
-            </a:ext>
-          </a:extLst>
-        </p:cNvPr>
-        <p:cNvGrpSpPr/>
-        <p:nvPr/>
-      </p:nvGrpSpPr>
-      <p:grpSpPr>
-        <a:xfrm>
-          <a:off x="0" y="0"/>
-          <a:ext cx="0" cy="0"/>
-          <a:chOff x="0" y="0"/>
-          <a:chExt cx="0" cy="0"/>
-        </a:xfrm>
-      </p:grpSpPr>
-      <p:sp>
-        <p:nvSpPr>
-          <p:cNvPr id="2" name="Title 1">
-            <a:extLst>
-              <a:ext uri="{FF2B5EF4-FFF2-40B4-BE49-F238E27FC236}">
-                <a16:creationId xmlns:a16="http://schemas.microsoft.com/office/drawing/2014/main" id="{8573560D-6E5D-1168-8281-F94F2F5A04BA}"/>
-              </a:ext>
-            </a:extLst>
-          </p:cNvPr>
-          <p:cNvSpPr>
-            <a:spLocks noGrp="1"/>
-          </p:cNvSpPr>
-          <p:nvPr>
-            <p:ph type="title"/>
-          </p:nvPr>
-        </p:nvSpPr>
-        <p:spPr>
-          <a:xfrm>
-            <a:off x="919314" y="190464"/>
-            <a:ext cx="10515600" cy="1325563"/>
-          </a:xfrm>
-        </p:spPr>
-        <p:txBody>
-          <a:bodyPr/>
-          <a:lstStyle/>
-          <a:p>
-            <a:r>
-              <a:rPr lang="en-GB" dirty="0">
-                <a:solidFill>
-                  <a:srgbClr val="676767"/>
-                </a:solidFill>
-              </a:rPr>
-              <a:t>A possible workflow</a:t>
-            </a:r>
-          </a:p>
-        </p:txBody>
-      </p:sp>
-      <p:sp>
-        <p:nvSpPr>
-          <p:cNvPr id="3" name="Content Placeholder 2">
-            <a:extLst>
-              <a:ext uri="{FF2B5EF4-FFF2-40B4-BE49-F238E27FC236}">
-                <a16:creationId xmlns:a16="http://schemas.microsoft.com/office/drawing/2014/main" id="{A6BF4D6B-1CA0-DB9A-FA7F-A5FA83DEBA99}"/>
-              </a:ext>
-            </a:extLst>
-          </p:cNvPr>
-          <p:cNvSpPr>
-            <a:spLocks noGrp="1"/>
-          </p:cNvSpPr>
-          <p:nvPr>
-            <p:ph idx="1"/>
-          </p:nvPr>
-        </p:nvSpPr>
-        <p:spPr>
-          <a:xfrm>
-            <a:off x="838199" y="1413031"/>
-            <a:ext cx="10596715" cy="4906652"/>
-          </a:xfrm>
-          <a:solidFill>
-            <a:srgbClr val="FAF0E6"/>
-          </a:solidFill>
-        </p:spPr>
-        <p:txBody>
-          <a:bodyPr>
-            <a:normAutofit/>
-          </a:bodyPr>
-          <a:lstStyle/>
-          <a:p>
-            <a:pPr marL="0" indent="0">
-              <a:buNone/>
-            </a:pPr>
-            <a:r>
-              <a:rPr lang="en-GB" sz="3600" dirty="0">
-                <a:solidFill>
-                  <a:srgbClr val="3A3A3A"/>
-                </a:solidFill>
-              </a:rPr>
-              <a:t>Now that we are looking at our data, we see that sometimes the app offers financial advice.</a:t>
-            </a:r>
-          </a:p>
-          <a:p>
-            <a:pPr marL="0" indent="0">
-              <a:buNone/>
-            </a:pPr>
-            <a:endParaRPr lang="en-GB" sz="3600" dirty="0">
-              <a:solidFill>
-                <a:srgbClr val="3A3A3A"/>
-              </a:solidFill>
-            </a:endParaRPr>
-          </a:p>
-          <a:p>
-            <a:pPr marL="0" indent="0">
-              <a:buNone/>
-            </a:pPr>
-            <a:r>
-              <a:rPr lang="en-GB" sz="3600" dirty="0">
-                <a:solidFill>
-                  <a:srgbClr val="3A3A3A"/>
-                </a:solidFill>
-              </a:rPr>
-              <a:t>We must prevent this (guardrails) so we create an LLM as Judge that detects if this article had financial advice.</a:t>
-            </a:r>
-          </a:p>
-          <a:p>
-            <a:pPr marL="0" indent="0">
-              <a:buNone/>
-            </a:pPr>
-            <a:endParaRPr lang="en-GB" sz="3600" dirty="0">
-              <a:solidFill>
-                <a:srgbClr val="3A3A3A"/>
-              </a:solidFill>
-            </a:endParaRPr>
-          </a:p>
-          <a:p>
-            <a:pPr marL="0" indent="0">
-              <a:buNone/>
-            </a:pPr>
-            <a:r>
-              <a:rPr lang="en-GB" sz="3600" dirty="0">
-                <a:solidFill>
-                  <a:srgbClr val="3A3A3A"/>
-                </a:solidFill>
-              </a:rPr>
-              <a:t>It saves many problems…</a:t>
-            </a:r>
-            <a:endParaRPr lang="en-GB" sz="3600" dirty="0"/>
-          </a:p>
-        </p:txBody>
-      </p:sp>
-    </p:spTree>
-    <p:extLst>
-      <p:ext uri="{BB962C8B-B14F-4D97-AF65-F5344CB8AC3E}">
-        <p14:creationId xmlns:p14="http://schemas.microsoft.com/office/powerpoint/2010/main" val="2293205134"/>
-      </p:ext>
-    </p:extLst>
-  </p:cSld>
-  <p:clrMapOvr>
-    <a:masterClrMapping/>
-  </p:clrMapOvr>
-</p:sld>
-</file>
-
-<file path=ppt/slides/slide21.xml><?xml version="1.0" encoding="utf-8"?>
-<p:sld xmlns:a="http://schemas.openxmlformats.org/drawingml/2006/main" xmlns:r="http://schemas.openxmlformats.org/officeDocument/2006/relationships" xmlns:p="http://schemas.openxmlformats.org/presentationml/2006/main">
-  <p:cSld>
-    <p:bg>
-      <p:bgPr>
-        <a:solidFill>
-          <a:srgbClr val="FAF0E6"/>
-        </a:solidFill>
-        <a:effectLst/>
-      </p:bgPr>
-    </p:bg>
-    <p:spTree>
-      <p:nvGrpSpPr>
-        <p:cNvPr id="1" name="">
-          <a:extLst>
-            <a:ext uri="{FF2B5EF4-FFF2-40B4-BE49-F238E27FC236}">
-              <a16:creationId xmlns:a16="http://schemas.microsoft.com/office/drawing/2014/main" id="{597709D9-749A-561E-D646-A04FE9BCB443}"/>
-            </a:ext>
-          </a:extLst>
-        </p:cNvPr>
-        <p:cNvGrpSpPr/>
-        <p:nvPr/>
-      </p:nvGrpSpPr>
-      <p:grpSpPr>
-        <a:xfrm>
-          <a:off x="0" y="0"/>
-          <a:ext cx="0" cy="0"/>
-          <a:chOff x="0" y="0"/>
-          <a:chExt cx="0" cy="0"/>
-        </a:xfrm>
-      </p:grpSpPr>
-      <p:sp>
-        <p:nvSpPr>
-          <p:cNvPr id="2" name="Title 1">
-            <a:extLst>
-              <a:ext uri="{FF2B5EF4-FFF2-40B4-BE49-F238E27FC236}">
-                <a16:creationId xmlns:a16="http://schemas.microsoft.com/office/drawing/2014/main" id="{1AF3FBE5-17E2-228C-18B0-FB0EA14A4DAF}"/>
-              </a:ext>
-            </a:extLst>
-          </p:cNvPr>
-          <p:cNvSpPr>
-            <a:spLocks noGrp="1"/>
-          </p:cNvSpPr>
-          <p:nvPr>
-            <p:ph type="title"/>
-          </p:nvPr>
-        </p:nvSpPr>
-        <p:spPr>
-          <a:xfrm>
-            <a:off x="919314" y="190464"/>
-            <a:ext cx="10515600" cy="1325563"/>
-          </a:xfrm>
-        </p:spPr>
-        <p:txBody>
-          <a:bodyPr/>
-          <a:lstStyle/>
-          <a:p>
-            <a:r>
-              <a:rPr lang="en-GB" dirty="0">
-                <a:solidFill>
-                  <a:srgbClr val="676767"/>
-                </a:solidFill>
-              </a:rPr>
-              <a:t>A possible workflow</a:t>
-            </a:r>
-          </a:p>
-        </p:txBody>
-      </p:sp>
-      <p:sp>
-        <p:nvSpPr>
-          <p:cNvPr id="3" name="Content Placeholder 2">
-            <a:extLst>
-              <a:ext uri="{FF2B5EF4-FFF2-40B4-BE49-F238E27FC236}">
-                <a16:creationId xmlns:a16="http://schemas.microsoft.com/office/drawing/2014/main" id="{46E37527-D4B3-3EC3-AC11-F3CCC637F567}"/>
-              </a:ext>
-            </a:extLst>
-          </p:cNvPr>
-          <p:cNvSpPr>
-            <a:spLocks noGrp="1"/>
-          </p:cNvSpPr>
-          <p:nvPr>
-            <p:ph idx="1"/>
-          </p:nvPr>
-        </p:nvSpPr>
-        <p:spPr>
-          <a:xfrm>
-            <a:off x="838199" y="1413031"/>
-            <a:ext cx="10596715" cy="4906652"/>
-          </a:xfrm>
-          <a:solidFill>
-            <a:srgbClr val="FAF0E6"/>
-          </a:solidFill>
-        </p:spPr>
-        <p:txBody>
-          <a:bodyPr>
-            <a:normAutofit lnSpcReduction="10000"/>
-          </a:bodyPr>
-          <a:lstStyle/>
-          <a:p>
-            <a:pPr marL="0" indent="0">
-              <a:buNone/>
-            </a:pPr>
-            <a:r>
-              <a:rPr lang="en-GB" sz="3600" dirty="0">
-                <a:solidFill>
-                  <a:srgbClr val="3A3A3A"/>
-                </a:solidFill>
-              </a:rPr>
-              <a:t>Now that we have a robust way of evaluating our app, we can start to tinker:</a:t>
-            </a:r>
-            <a:endParaRPr lang="en-GB" sz="2400" dirty="0">
-              <a:solidFill>
-                <a:srgbClr val="3A3A3A"/>
-              </a:solidFill>
-            </a:endParaRPr>
-          </a:p>
-          <a:p>
-            <a:r>
-              <a:rPr lang="en-GB" dirty="0">
-                <a:solidFill>
-                  <a:srgbClr val="3A3A3A"/>
-                </a:solidFill>
-              </a:rPr>
-              <a:t>Different models in different places for cost reduction yet same performance? </a:t>
-            </a:r>
-          </a:p>
-          <a:p>
-            <a:r>
-              <a:rPr lang="en-GB" dirty="0">
-                <a:solidFill>
-                  <a:srgbClr val="3A3A3A"/>
-                </a:solidFill>
-              </a:rPr>
-              <a:t>Does one part of the app give greater benefit for unit of change than another?</a:t>
-            </a:r>
-          </a:p>
-          <a:p>
-            <a:r>
-              <a:rPr lang="en-GB" dirty="0">
-                <a:solidFill>
-                  <a:srgbClr val="3A3A3A"/>
-                </a:solidFill>
-              </a:rPr>
-              <a:t>Can we reduce latency without breaking anything (regression testing)</a:t>
-            </a:r>
-          </a:p>
-          <a:p>
-            <a:r>
-              <a:rPr lang="en-GB" dirty="0">
-                <a:solidFill>
-                  <a:srgbClr val="3A3A3A"/>
-                </a:solidFill>
-              </a:rPr>
-              <a:t>Offer a client dashboard of filtered metrics to our clients in real time? They have entrusted us with their business.</a:t>
-            </a:r>
-          </a:p>
-          <a:p>
-            <a:r>
-              <a:rPr lang="en-GB" i="1" dirty="0">
-                <a:solidFill>
-                  <a:srgbClr val="3A3A3A"/>
-                </a:solidFill>
-              </a:rPr>
-              <a:t>Process not tools.</a:t>
-            </a:r>
-            <a:endParaRPr lang="en-GB" i="1" dirty="0"/>
-          </a:p>
-        </p:txBody>
-      </p:sp>
-    </p:spTree>
-    <p:extLst>
-      <p:ext uri="{BB962C8B-B14F-4D97-AF65-F5344CB8AC3E}">
-        <p14:creationId xmlns:p14="http://schemas.microsoft.com/office/powerpoint/2010/main" val="2467199627"/>
-      </p:ext>
-    </p:extLst>
-  </p:cSld>
-  <p:clrMapOvr>
-    <a:masterClrMapping/>
-  </p:clrMapOvr>
-</p:sld>
-</file>
-
-<file path=ppt/slides/slide22.xml><?xml version="1.0" encoding="utf-8"?>
-<p:sld xmlns:a="http://schemas.openxmlformats.org/drawingml/2006/main" xmlns:r="http://schemas.openxmlformats.org/officeDocument/2006/relationships" xmlns:p="http://schemas.openxmlformats.org/presentationml/2006/main">
-  <p:cSld>
-    <p:bg>
-      <p:bgPr>
-        <a:solidFill>
-          <a:srgbClr val="FAF0E6"/>
-        </a:solidFill>
-        <a:effectLst/>
-      </p:bgPr>
-    </p:bg>
-    <p:spTree>
-      <p:nvGrpSpPr>
-        <p:cNvPr id="1" name="">
-          <a:extLst>
-            <a:ext uri="{FF2B5EF4-FFF2-40B4-BE49-F238E27FC236}">
-              <a16:creationId xmlns:a16="http://schemas.microsoft.com/office/drawing/2014/main" id="{E9DE99CB-B7FE-D269-5053-A318EA450790}"/>
-            </a:ext>
-          </a:extLst>
-        </p:cNvPr>
-        <p:cNvGrpSpPr/>
-        <p:nvPr/>
-      </p:nvGrpSpPr>
-      <p:grpSpPr>
-        <a:xfrm>
-          <a:off x="0" y="0"/>
-          <a:ext cx="0" cy="0"/>
-          <a:chOff x="0" y="0"/>
-          <a:chExt cx="0" cy="0"/>
-        </a:xfrm>
-      </p:grpSpPr>
-      <p:sp>
-        <p:nvSpPr>
-          <p:cNvPr id="2" name="Title 1">
-            <a:extLst>
-              <a:ext uri="{FF2B5EF4-FFF2-40B4-BE49-F238E27FC236}">
-                <a16:creationId xmlns:a16="http://schemas.microsoft.com/office/drawing/2014/main" id="{27837EF3-3471-3B0A-0B80-BE9C4680AB83}"/>
-              </a:ext>
-            </a:extLst>
-          </p:cNvPr>
-          <p:cNvSpPr>
-            <a:spLocks noGrp="1"/>
-          </p:cNvSpPr>
-          <p:nvPr>
-            <p:ph type="title"/>
-          </p:nvPr>
-        </p:nvSpPr>
-        <p:spPr>
-          <a:xfrm>
-            <a:off x="919314" y="190464"/>
-            <a:ext cx="10515600" cy="1325563"/>
-          </a:xfrm>
-        </p:spPr>
-        <p:txBody>
-          <a:bodyPr/>
-          <a:lstStyle/>
-          <a:p>
-            <a:r>
-              <a:rPr lang="en-GB" dirty="0">
-                <a:solidFill>
-                  <a:srgbClr val="676767"/>
-                </a:solidFill>
-              </a:rPr>
-              <a:t>Demo – our app from earlier</a:t>
-            </a:r>
-          </a:p>
-        </p:txBody>
-      </p:sp>
-      <p:sp>
-        <p:nvSpPr>
-          <p:cNvPr id="3" name="Content Placeholder 2">
-            <a:extLst>
-              <a:ext uri="{FF2B5EF4-FFF2-40B4-BE49-F238E27FC236}">
-                <a16:creationId xmlns:a16="http://schemas.microsoft.com/office/drawing/2014/main" id="{CB7D921D-0A3A-0A9B-28B4-27739391277E}"/>
-              </a:ext>
-            </a:extLst>
-          </p:cNvPr>
-          <p:cNvSpPr>
-            <a:spLocks noGrp="1"/>
-          </p:cNvSpPr>
-          <p:nvPr>
-            <p:ph idx="1"/>
-          </p:nvPr>
-        </p:nvSpPr>
-        <p:spPr>
-          <a:xfrm>
-            <a:off x="675971" y="1058467"/>
-            <a:ext cx="10596715" cy="4906652"/>
-          </a:xfrm>
-          <a:solidFill>
-            <a:srgbClr val="FAF0E6"/>
-          </a:solidFill>
-        </p:spPr>
-        <p:txBody>
-          <a:bodyPr>
-            <a:normAutofit/>
-          </a:bodyPr>
-          <a:lstStyle/>
-          <a:p>
-            <a:pPr marL="0" indent="0">
-              <a:lnSpc>
-                <a:spcPts val="4500"/>
-              </a:lnSpc>
-              <a:buNone/>
-            </a:pPr>
-            <a:r>
-              <a:rPr lang="en-GB" dirty="0"/>
-              <a:t>We will look at Case Study 1 in the manual and framework.</a:t>
-            </a:r>
-          </a:p>
-          <a:p>
-            <a:pPr>
-              <a:lnSpc>
-                <a:spcPts val="4500"/>
-              </a:lnSpc>
-            </a:pPr>
-            <a:endParaRPr lang="en-GB" dirty="0"/>
-          </a:p>
-        </p:txBody>
-      </p:sp>
-      <p:pic>
-        <p:nvPicPr>
-          <p:cNvPr id="5" name="Picture 4" descr="A diagram of a diagram&#10;&#10;AI-generated content may be incorrect.">
-            <a:extLst>
-              <a:ext uri="{FF2B5EF4-FFF2-40B4-BE49-F238E27FC236}">
-                <a16:creationId xmlns:a16="http://schemas.microsoft.com/office/drawing/2014/main" id="{16C13F1D-73CA-929F-46E5-F1983D274369}"/>
-              </a:ext>
-            </a:extLst>
-          </p:cNvPr>
-          <p:cNvPicPr>
-            <a:picLocks noChangeAspect="1"/>
-          </p:cNvPicPr>
-          <p:nvPr/>
-        </p:nvPicPr>
-        <p:blipFill>
-          <a:blip r:embed="rId2">
-            <a:extLst>
-              <a:ext uri="{28A0092B-C50C-407E-A947-70E740481C1C}">
-                <a14:useLocalDpi xmlns:a14="http://schemas.microsoft.com/office/drawing/2010/main" val="0"/>
-              </a:ext>
-            </a:extLst>
-          </a:blip>
-          <a:stretch>
-            <a:fillRect/>
-          </a:stretch>
-        </p:blipFill>
-        <p:spPr>
-          <a:xfrm>
-            <a:off x="7444321" y="2503499"/>
-            <a:ext cx="4452210" cy="4160262"/>
-          </a:xfrm>
-          <a:prstGeom prst="rect">
-            <a:avLst/>
-          </a:prstGeom>
-        </p:spPr>
-      </p:pic>
-      <p:sp>
-        <p:nvSpPr>
-          <p:cNvPr id="6" name="TextBox 5">
-            <a:extLst>
-              <a:ext uri="{FF2B5EF4-FFF2-40B4-BE49-F238E27FC236}">
-                <a16:creationId xmlns:a16="http://schemas.microsoft.com/office/drawing/2014/main" id="{F59B59F7-7AA3-F77B-5C7B-D1E26FF52C1D}"/>
-              </a:ext>
-            </a:extLst>
-          </p:cNvPr>
-          <p:cNvSpPr txBox="1"/>
-          <p:nvPr/>
-        </p:nvSpPr>
-        <p:spPr>
-          <a:xfrm>
-            <a:off x="675971" y="1324527"/>
-            <a:ext cx="8113466" cy="4832092"/>
-          </a:xfrm>
-          <a:prstGeom prst="rect">
-            <a:avLst/>
-          </a:prstGeom>
-          <a:noFill/>
-        </p:spPr>
-        <p:txBody>
-          <a:bodyPr wrap="square" rtlCol="0">
-            <a:spAutoFit/>
-          </a:bodyPr>
-          <a:lstStyle/>
-          <a:p>
-            <a:endParaRPr lang="en-GB" sz="2400" dirty="0"/>
-          </a:p>
-          <a:p>
-            <a:pPr marL="342900" indent="-342900">
-              <a:buFont typeface="Arial" panose="020B0604020202020204" pitchFamily="34" charset="0"/>
-              <a:buChar char="•"/>
-            </a:pPr>
-            <a:r>
-              <a:rPr lang="en-GB" sz="2400" dirty="0"/>
-              <a:t>Given an article title, determine if it is about AI (ROUTER)</a:t>
-            </a:r>
-          </a:p>
-          <a:p>
-            <a:pPr marL="342900" indent="-342900">
-              <a:buFont typeface="Arial" panose="020B0604020202020204" pitchFamily="34" charset="0"/>
-              <a:buChar char="•"/>
-            </a:pPr>
-            <a:r>
-              <a:rPr lang="en-GB" sz="2400" dirty="0"/>
-              <a:t>Take title and create article of N words (EXPANDER)</a:t>
-            </a:r>
-          </a:p>
-          <a:p>
-            <a:pPr marL="342900" indent="-342900">
-              <a:buFont typeface="Arial" panose="020B0604020202020204" pitchFamily="34" charset="0"/>
-              <a:buChar char="•"/>
-            </a:pPr>
-            <a:r>
-              <a:rPr lang="en-GB" sz="2400" dirty="0"/>
-              <a:t>In a specified language (TRANSLATOR)</a:t>
-            </a:r>
-          </a:p>
-          <a:p>
-            <a:pPr marL="342900" indent="-342900">
-              <a:buFont typeface="Arial" panose="020B0604020202020204" pitchFamily="34" charset="0"/>
-              <a:buChar char="•"/>
-            </a:pPr>
-            <a:r>
-              <a:rPr lang="en-GB" sz="2400" dirty="0"/>
-              <a:t>Ensure article is not sensational (EDITOR)</a:t>
-            </a:r>
-          </a:p>
-          <a:p>
-            <a:endParaRPr lang="en-GB" sz="2400" dirty="0"/>
-          </a:p>
-          <a:p>
-            <a:r>
-              <a:rPr lang="en-GB" sz="2400" dirty="0"/>
-              <a:t>A ‘good article’ – OMITTED IN DEMO</a:t>
-            </a:r>
-          </a:p>
-          <a:p>
-            <a:pPr marL="342900" indent="-342900">
-              <a:buFont typeface="+mj-lt"/>
-              <a:buAutoNum type="arabicPeriod"/>
-            </a:pPr>
-            <a:endParaRPr lang="en-GB" sz="2400" dirty="0"/>
-          </a:p>
-          <a:p>
-            <a:r>
-              <a:rPr lang="en-GB" sz="2400" dirty="0"/>
-              <a:t>PUBLISH = YES only if last three are YES in EDITOR</a:t>
-            </a:r>
-          </a:p>
-          <a:p>
-            <a:endParaRPr lang="en-GB" sz="2400" i="1" dirty="0"/>
-          </a:p>
-          <a:p>
-            <a:r>
-              <a:rPr lang="en-GB" sz="3200" i="1" dirty="0"/>
-              <a:t>Let’s go to the guide and code…</a:t>
-            </a:r>
-          </a:p>
-          <a:p>
-            <a:endParaRPr lang="en-GB" dirty="0"/>
-          </a:p>
-          <a:p>
-            <a:endParaRPr lang="en-GB" dirty="0"/>
-          </a:p>
-        </p:txBody>
-      </p:sp>
-    </p:spTree>
-    <p:extLst>
-      <p:ext uri="{BB962C8B-B14F-4D97-AF65-F5344CB8AC3E}">
-        <p14:creationId xmlns:p14="http://schemas.microsoft.com/office/powerpoint/2010/main" val="1389024405"/>
-      </p:ext>
-    </p:extLst>
-  </p:cSld>
-  <p:clrMapOvr>
-    <a:masterClrMapping/>
-  </p:clrMapOvr>
-</p:sld>
-</file>
-
-<file path=ppt/slides/slide23.xml><?xml version="1.0" encoding="utf-8"?>
-<p:sld xmlns:a="http://schemas.openxmlformats.org/drawingml/2006/main" xmlns:r="http://schemas.openxmlformats.org/officeDocument/2006/relationships" xmlns:p="http://schemas.openxmlformats.org/presentationml/2006/main">
-  <p:cSld>
-    <p:bg>
-      <p:bgPr>
-        <a:solidFill>
-          <a:srgbClr val="FAF0E6"/>
-        </a:solidFill>
-        <a:effectLst/>
-      </p:bgPr>
-    </p:bg>
-    <p:spTree>
-      <p:nvGrpSpPr>
-        <p:cNvPr id="1" name="">
-          <a:extLst>
-            <a:ext uri="{FF2B5EF4-FFF2-40B4-BE49-F238E27FC236}">
-              <a16:creationId xmlns:a16="http://schemas.microsoft.com/office/drawing/2014/main" id="{28532D0B-499F-6B2B-DF29-2721E71E20FD}"/>
-            </a:ext>
-          </a:extLst>
-        </p:cNvPr>
-        <p:cNvGrpSpPr/>
-        <p:nvPr/>
-      </p:nvGrpSpPr>
-      <p:grpSpPr>
-        <a:xfrm>
-          <a:off x="0" y="0"/>
-          <a:ext cx="0" cy="0"/>
-          <a:chOff x="0" y="0"/>
-          <a:chExt cx="0" cy="0"/>
-        </a:xfrm>
-      </p:grpSpPr>
-      <p:sp>
-        <p:nvSpPr>
-          <p:cNvPr id="2" name="Title 1">
-            <a:extLst>
-              <a:ext uri="{FF2B5EF4-FFF2-40B4-BE49-F238E27FC236}">
-                <a16:creationId xmlns:a16="http://schemas.microsoft.com/office/drawing/2014/main" id="{ECA1ECCD-969B-2C26-B0C3-CE65C985C56D}"/>
-              </a:ext>
-            </a:extLst>
-          </p:cNvPr>
-          <p:cNvSpPr>
-            <a:spLocks noGrp="1"/>
-          </p:cNvSpPr>
-          <p:nvPr>
-            <p:ph type="title"/>
-          </p:nvPr>
-        </p:nvSpPr>
-        <p:spPr>
-          <a:xfrm>
-            <a:off x="919314" y="190464"/>
-            <a:ext cx="10515600" cy="1325563"/>
-          </a:xfrm>
-        </p:spPr>
-        <p:txBody>
-          <a:bodyPr/>
-          <a:lstStyle/>
-          <a:p>
-            <a:r>
-              <a:rPr lang="en-GB" dirty="0">
-                <a:solidFill>
-                  <a:srgbClr val="676767"/>
-                </a:solidFill>
-              </a:rPr>
-              <a:t>Summary Key Points</a:t>
-            </a:r>
-          </a:p>
-        </p:txBody>
-      </p:sp>
-      <p:sp>
-        <p:nvSpPr>
-          <p:cNvPr id="3" name="Content Placeholder 2">
-            <a:extLst>
-              <a:ext uri="{FF2B5EF4-FFF2-40B4-BE49-F238E27FC236}">
-                <a16:creationId xmlns:a16="http://schemas.microsoft.com/office/drawing/2014/main" id="{F7B30729-BE9A-44FD-60E7-9CAE0499060D}"/>
-              </a:ext>
-            </a:extLst>
-          </p:cNvPr>
-          <p:cNvSpPr>
-            <a:spLocks noGrp="1"/>
-          </p:cNvSpPr>
-          <p:nvPr>
-            <p:ph idx="1"/>
-          </p:nvPr>
-        </p:nvSpPr>
-        <p:spPr>
-          <a:xfrm>
-            <a:off x="838199" y="1413031"/>
-            <a:ext cx="10596715" cy="4906652"/>
-          </a:xfrm>
-          <a:solidFill>
-            <a:srgbClr val="FAF0E6"/>
-          </a:solidFill>
-        </p:spPr>
-        <p:txBody>
-          <a:bodyPr>
-            <a:normAutofit/>
-          </a:bodyPr>
-          <a:lstStyle/>
-          <a:p>
-            <a:r>
-              <a:rPr lang="en-GB" dirty="0">
-                <a:solidFill>
-                  <a:srgbClr val="3A3A3A"/>
-                </a:solidFill>
-              </a:rPr>
-              <a:t>We need to look at the data to determine what are EVAL criteria are</a:t>
-            </a:r>
-          </a:p>
-          <a:p>
-            <a:r>
-              <a:rPr lang="en-GB" dirty="0">
-                <a:solidFill>
-                  <a:srgbClr val="3A3A3A"/>
-                </a:solidFill>
-              </a:rPr>
-              <a:t>We need to determine what success will look like</a:t>
-            </a:r>
-          </a:p>
-          <a:p>
-            <a:r>
-              <a:rPr lang="en-GB" dirty="0">
-                <a:solidFill>
-                  <a:srgbClr val="3A3A3A"/>
-                </a:solidFill>
-              </a:rPr>
-              <a:t>We will need humans at certain points</a:t>
-            </a:r>
-          </a:p>
-          <a:p>
-            <a:r>
-              <a:rPr lang="en-GB" dirty="0">
-                <a:solidFill>
-                  <a:srgbClr val="3A3A3A"/>
-                </a:solidFill>
-              </a:rPr>
-              <a:t>We need a Domain Expert</a:t>
-            </a:r>
-          </a:p>
-          <a:p>
-            <a:r>
-              <a:rPr lang="en-GB" dirty="0">
-                <a:solidFill>
-                  <a:srgbClr val="3A3A3A"/>
-                </a:solidFill>
-              </a:rPr>
-              <a:t>LLM Judges are primarily for scaling</a:t>
-            </a:r>
-          </a:p>
-          <a:p>
-            <a:r>
-              <a:rPr lang="en-GB" dirty="0">
-                <a:solidFill>
-                  <a:srgbClr val="3A3A3A"/>
-                </a:solidFill>
-              </a:rPr>
-              <a:t>We need to do EVALS on these LLM Judges</a:t>
-            </a:r>
-          </a:p>
-          <a:p>
-            <a:r>
-              <a:rPr lang="en-GB" dirty="0">
-                <a:solidFill>
-                  <a:srgbClr val="3A3A3A"/>
-                </a:solidFill>
-              </a:rPr>
-              <a:t>Process more important than tools</a:t>
-            </a:r>
-          </a:p>
-          <a:p>
-            <a:pPr marL="0" indent="0">
-              <a:buNone/>
-            </a:pPr>
-            <a:endParaRPr lang="en-GB" dirty="0">
-              <a:solidFill>
-                <a:srgbClr val="3A3A3A"/>
-              </a:solidFill>
-            </a:endParaRPr>
-          </a:p>
-          <a:p>
-            <a:pPr marL="0" indent="0">
-              <a:buNone/>
-            </a:pPr>
-            <a:endParaRPr lang="en-GB" dirty="0"/>
-          </a:p>
-        </p:txBody>
-      </p:sp>
-    </p:spTree>
-    <p:extLst>
-      <p:ext uri="{BB962C8B-B14F-4D97-AF65-F5344CB8AC3E}">
-        <p14:creationId xmlns:p14="http://schemas.microsoft.com/office/powerpoint/2010/main" val="1095368260"/>
-      </p:ext>
-    </p:extLst>
-  </p:cSld>
-  <p:clrMapOvr>
-    <a:masterClrMapping/>
-  </p:clrMapOvr>
-</p:sld>
-</file>
-
-<file path=ppt/slides/slide24.xml><?xml version="1.0" encoding="utf-8"?>
-<p:sld xmlns:a="http://schemas.openxmlformats.org/drawingml/2006/main" xmlns:r="http://schemas.openxmlformats.org/officeDocument/2006/relationships" xmlns:p="http://schemas.openxmlformats.org/presentationml/2006/main">
-  <p:cSld>
-    <p:bg>
-      <p:bgPr>
-        <a:solidFill>
-          <a:srgbClr val="FAF0E6"/>
-        </a:solidFill>
-        <a:effectLst/>
-      </p:bgPr>
-    </p:bg>
-    <p:spTree>
-      <p:nvGrpSpPr>
-        <p:cNvPr id="1" name="">
-          <a:extLst>
-            <a:ext uri="{FF2B5EF4-FFF2-40B4-BE49-F238E27FC236}">
-              <a16:creationId xmlns:a16="http://schemas.microsoft.com/office/drawing/2014/main" id="{B9ACA70E-FAAB-6030-8F27-A4E223D005C1}"/>
-            </a:ext>
-          </a:extLst>
-        </p:cNvPr>
-        <p:cNvGrpSpPr/>
-        <p:nvPr/>
-      </p:nvGrpSpPr>
-      <p:grpSpPr>
-        <a:xfrm>
-          <a:off x="0" y="0"/>
-          <a:ext cx="0" cy="0"/>
-          <a:chOff x="0" y="0"/>
-          <a:chExt cx="0" cy="0"/>
-        </a:xfrm>
-      </p:grpSpPr>
-      <p:sp>
-        <p:nvSpPr>
-          <p:cNvPr id="2" name="Title 1">
-            <a:extLst>
-              <a:ext uri="{FF2B5EF4-FFF2-40B4-BE49-F238E27FC236}">
-                <a16:creationId xmlns:a16="http://schemas.microsoft.com/office/drawing/2014/main" id="{3E59E890-081A-3B32-C506-6FF13671B6B0}"/>
-              </a:ext>
-            </a:extLst>
-          </p:cNvPr>
-          <p:cNvSpPr>
-            <a:spLocks noGrp="1"/>
-          </p:cNvSpPr>
-          <p:nvPr>
-            <p:ph type="title"/>
-          </p:nvPr>
-        </p:nvSpPr>
-        <p:spPr>
-          <a:xfrm>
-            <a:off x="919314" y="190464"/>
-            <a:ext cx="10515600" cy="1325563"/>
-          </a:xfrm>
-        </p:spPr>
-        <p:txBody>
-          <a:bodyPr/>
-          <a:lstStyle/>
-          <a:p>
-            <a:r>
-              <a:rPr lang="en-GB" dirty="0">
-                <a:solidFill>
-                  <a:srgbClr val="676767"/>
-                </a:solidFill>
-              </a:rPr>
-              <a:t>Future</a:t>
-            </a:r>
-          </a:p>
-        </p:txBody>
-      </p:sp>
-      <p:sp>
-        <p:nvSpPr>
-          <p:cNvPr id="3" name="Content Placeholder 2">
-            <a:extLst>
-              <a:ext uri="{FF2B5EF4-FFF2-40B4-BE49-F238E27FC236}">
-                <a16:creationId xmlns:a16="http://schemas.microsoft.com/office/drawing/2014/main" id="{63D7FBBE-121F-6462-358B-A2B6E0DFBAC6}"/>
-              </a:ext>
-            </a:extLst>
-          </p:cNvPr>
-          <p:cNvSpPr>
-            <a:spLocks noGrp="1"/>
-          </p:cNvSpPr>
-          <p:nvPr>
-            <p:ph idx="1"/>
-          </p:nvPr>
-        </p:nvSpPr>
-        <p:spPr>
-          <a:xfrm>
-            <a:off x="838199" y="1413031"/>
-            <a:ext cx="10596715" cy="4906652"/>
-          </a:xfrm>
-          <a:solidFill>
-            <a:srgbClr val="FAF0E6"/>
-          </a:solidFill>
-        </p:spPr>
-        <p:txBody>
-          <a:bodyPr>
-            <a:normAutofit/>
-          </a:bodyPr>
-          <a:lstStyle/>
-          <a:p>
-            <a:pPr marL="0" indent="0">
-              <a:buNone/>
-            </a:pPr>
-            <a:endParaRPr lang="en-GB" dirty="0"/>
-          </a:p>
-          <a:p>
-            <a:pPr marL="0" indent="0">
-              <a:buNone/>
-            </a:pPr>
-            <a:r>
-              <a:rPr lang="en-GB" dirty="0">
-                <a:solidFill>
-                  <a:srgbClr val="3A3A3A"/>
-                </a:solidFill>
-              </a:rPr>
-              <a:t>Craig West</a:t>
-            </a:r>
-          </a:p>
-          <a:p>
-            <a:pPr marL="0" indent="0">
-              <a:buNone/>
-            </a:pPr>
-            <a:r>
-              <a:rPr lang="en-GB" dirty="0">
-                <a:solidFill>
-                  <a:srgbClr val="0070C0"/>
-                </a:solidFill>
-                <a:hlinkClick r:id="rId2">
-                  <a:extLst>
-                    <a:ext uri="{A12FA001-AC4F-418D-AE19-62706E023703}">
-                      <ahyp:hlinkClr xmlns:ahyp="http://schemas.microsoft.com/office/drawing/2018/hyperlinkcolor" val="tx"/>
-                    </a:ext>
-                  </a:extLst>
-                </a:hlinkClick>
-              </a:rPr>
-              <a:t>https://craig-west.netlify.app/</a:t>
-            </a:r>
-            <a:endParaRPr lang="en-GB" dirty="0">
-              <a:solidFill>
-                <a:srgbClr val="0070C0"/>
-              </a:solidFill>
-            </a:endParaRPr>
-          </a:p>
-          <a:p>
-            <a:pPr marL="0" indent="0">
-              <a:buNone/>
-            </a:pPr>
-            <a:r>
-              <a:rPr lang="en-GB" dirty="0">
-                <a:solidFill>
-                  <a:srgbClr val="467886"/>
-                </a:solidFill>
-                <a:hlinkClick r:id="rId3">
-                  <a:extLst>
-                    <a:ext uri="{A12FA001-AC4F-418D-AE19-62706E023703}">
-                      <ahyp:hlinkClr xmlns:ahyp="http://schemas.microsoft.com/office/drawing/2018/hyperlinkcolor" val="tx"/>
-                    </a:ext>
-                  </a:extLst>
-                </a:hlinkClick>
-              </a:rPr>
-              <a:t>https</a:t>
-            </a:r>
-            <a:r>
-              <a:rPr lang="en-GB" dirty="0">
-                <a:solidFill>
-                  <a:srgbClr val="0070C0"/>
-                </a:solidFill>
-                <a:hlinkClick r:id="rId3">
-                  <a:extLst>
-                    <a:ext uri="{A12FA001-AC4F-418D-AE19-62706E023703}">
-                      <ahyp:hlinkClr xmlns:ahyp="http://schemas.microsoft.com/office/drawing/2018/hyperlinkcolor" val="tx"/>
-                    </a:ext>
-                  </a:extLst>
-                </a:hlinkClick>
-              </a:rPr>
-              <a:t>://evaluating-ai-agents.com/</a:t>
-            </a:r>
-            <a:endParaRPr lang="en-GB" dirty="0">
-              <a:solidFill>
-                <a:srgbClr val="0070C0"/>
-              </a:solidFill>
-            </a:endParaRPr>
-          </a:p>
-          <a:p>
-            <a:pPr marL="0" indent="0">
-              <a:buNone/>
-            </a:pPr>
-            <a:endParaRPr lang="en-GB" dirty="0">
-              <a:solidFill>
-                <a:srgbClr val="3A3A3A"/>
-              </a:solidFill>
-            </a:endParaRPr>
-          </a:p>
-          <a:p>
-            <a:pPr marL="0" indent="0">
-              <a:buNone/>
-            </a:pPr>
-            <a:r>
-              <a:rPr lang="en-GB" b="1" dirty="0">
-                <a:solidFill>
-                  <a:srgbClr val="3A3A3A"/>
-                </a:solidFill>
-              </a:rPr>
-              <a:t>Contact links on the sites</a:t>
-            </a:r>
-          </a:p>
-          <a:p>
-            <a:pPr marL="0" indent="0">
-              <a:buNone/>
-            </a:pPr>
-            <a:r>
-              <a:rPr lang="en-GB" dirty="0">
-                <a:solidFill>
-                  <a:srgbClr val="3A3A3A"/>
-                </a:solidFill>
-              </a:rPr>
-              <a:t>Always have 10 mins to answer questions…</a:t>
-            </a:r>
-          </a:p>
-          <a:p>
-            <a:pPr marL="0" indent="0">
-              <a:buNone/>
-            </a:pPr>
-            <a:endParaRPr lang="en-GB" dirty="0">
-              <a:solidFill>
-                <a:srgbClr val="3A3A3A"/>
-              </a:solidFill>
-            </a:endParaRPr>
-          </a:p>
-          <a:p>
-            <a:pPr marL="0" indent="0">
-              <a:buNone/>
-            </a:pPr>
-            <a:endParaRPr lang="en-GB" dirty="0">
-              <a:solidFill>
-                <a:srgbClr val="3A3A3A"/>
-              </a:solidFill>
-            </a:endParaRPr>
-          </a:p>
-          <a:p>
-            <a:pPr marL="0" indent="0">
-              <a:buNone/>
-            </a:pPr>
-            <a:endParaRPr lang="en-GB" dirty="0"/>
-          </a:p>
-        </p:txBody>
-      </p:sp>
-      <p:pic>
-        <p:nvPicPr>
-          <p:cNvPr id="4" name="Picture 3">
-            <a:extLst>
-              <a:ext uri="{FF2B5EF4-FFF2-40B4-BE49-F238E27FC236}">
-                <a16:creationId xmlns:a16="http://schemas.microsoft.com/office/drawing/2014/main" id="{1D479101-E8FD-13D3-116C-FF2394CC9C4F}"/>
-              </a:ext>
-            </a:extLst>
-          </p:cNvPr>
-          <p:cNvPicPr>
-            <a:picLocks noChangeAspect="1"/>
-          </p:cNvPicPr>
-          <p:nvPr/>
-        </p:nvPicPr>
-        <p:blipFill>
-          <a:blip r:embed="rId4">
-            <a:extLst>
-              <a:ext uri="{28A0092B-C50C-407E-A947-70E740481C1C}">
-                <a14:useLocalDpi xmlns:a14="http://schemas.microsoft.com/office/drawing/2010/main" val="0"/>
-              </a:ext>
-            </a:extLst>
-          </a:blip>
-          <a:srcRect/>
-          <a:stretch/>
-        </p:blipFill>
-        <p:spPr>
-          <a:xfrm>
-            <a:off x="8340213" y="1413031"/>
-            <a:ext cx="2642419" cy="2642419"/>
-          </a:xfrm>
-          <a:prstGeom prst="rect">
-            <a:avLst/>
-          </a:prstGeom>
-        </p:spPr>
-      </p:pic>
-    </p:spTree>
-    <p:extLst>
-      <p:ext uri="{BB962C8B-B14F-4D97-AF65-F5344CB8AC3E}">
-        <p14:creationId xmlns:p14="http://schemas.microsoft.com/office/powerpoint/2010/main" val="1349075880"/>
-      </p:ext>
-    </p:extLst>
-  </p:cSld>
-  <p:clrMapOvr>
-    <a:masterClrMapping/>
-  </p:clrMapOvr>
-</p:sld>
-</file>
-
-<file path=ppt/slides/slide3.xml><?xml version="1.0" encoding="utf-8"?>
+<file path=ppt/slides/slide4.xml><?xml version="1.0" encoding="utf-8"?>
 <p:sld xmlns:a="http://schemas.openxmlformats.org/drawingml/2006/main" xmlns:r="http://schemas.openxmlformats.org/officeDocument/2006/relationships" xmlns:p="http://schemas.openxmlformats.org/presentationml/2006/main">
   <p:cSld>
     <p:bg>
@@ -7541,7 +7850,7 @@
 </p:sld>
 </file>
 
-<file path=ppt/slides/slide4.xml><?xml version="1.0" encoding="utf-8"?>
+<file path=ppt/slides/slide5.xml><?xml version="1.0" encoding="utf-8"?>
 <p:sld xmlns:a="http://schemas.openxmlformats.org/drawingml/2006/main" xmlns:r="http://schemas.openxmlformats.org/officeDocument/2006/relationships" xmlns:p="http://schemas.openxmlformats.org/presentationml/2006/main">
   <p:cSld>
     <p:bg>
@@ -7709,7 +8018,7 @@
 </p:sld>
 </file>
 
-<file path=ppt/slides/slide5.xml><?xml version="1.0" encoding="utf-8"?>
+<file path=ppt/slides/slide6.xml><?xml version="1.0" encoding="utf-8"?>
 <p:sld xmlns:a="http://schemas.openxmlformats.org/drawingml/2006/main" xmlns:r="http://schemas.openxmlformats.org/officeDocument/2006/relationships" xmlns:p="http://schemas.openxmlformats.org/presentationml/2006/main">
   <p:cSld>
     <p:bg>
@@ -7903,7 +8212,7 @@
 </p:sld>
 </file>
 
-<file path=ppt/slides/slide6.xml><?xml version="1.0" encoding="utf-8"?>
+<file path=ppt/slides/slide7.xml><?xml version="1.0" encoding="utf-8"?>
 <p:sld xmlns:a="http://schemas.openxmlformats.org/drawingml/2006/main" xmlns:r="http://schemas.openxmlformats.org/officeDocument/2006/relationships" xmlns:p="http://schemas.openxmlformats.org/presentationml/2006/main">
   <p:cSld>
     <p:bg>
@@ -8233,7 +8542,7 @@
 </p:sld>
 </file>
 
-<file path=ppt/slides/slide7.xml><?xml version="1.0" encoding="utf-8"?>
+<file path=ppt/slides/slide8.xml><?xml version="1.0" encoding="utf-8"?>
 <p:sld xmlns:a="http://schemas.openxmlformats.org/drawingml/2006/main" xmlns:r="http://schemas.openxmlformats.org/officeDocument/2006/relationships" xmlns:p="http://schemas.openxmlformats.org/presentationml/2006/main">
   <p:cSld>
     <p:bg>
@@ -8417,7 +8726,7 @@
 </p:sld>
 </file>
 
-<file path=ppt/slides/slide8.xml><?xml version="1.0" encoding="utf-8"?>
+<file path=ppt/slides/slide9.xml><?xml version="1.0" encoding="utf-8"?>
 <p:sld xmlns:a="http://schemas.openxmlformats.org/drawingml/2006/main" xmlns:r="http://schemas.openxmlformats.org/officeDocument/2006/relationships" xmlns:p="http://schemas.openxmlformats.org/presentationml/2006/main">
   <p:cSld>
     <p:bg>
@@ -8563,282 +8872,6 @@
     <p:extLst>
       <p:ext uri="{BB962C8B-B14F-4D97-AF65-F5344CB8AC3E}">
         <p14:creationId xmlns:p14="http://schemas.microsoft.com/office/powerpoint/2010/main" val="988705094"/>
-      </p:ext>
-    </p:extLst>
-  </p:cSld>
-  <p:clrMapOvr>
-    <a:masterClrMapping/>
-  </p:clrMapOvr>
-</p:sld>
-</file>
-
-<file path=ppt/slides/slide9.xml><?xml version="1.0" encoding="utf-8"?>
-<p:sld xmlns:a="http://schemas.openxmlformats.org/drawingml/2006/main" xmlns:r="http://schemas.openxmlformats.org/officeDocument/2006/relationships" xmlns:p="http://schemas.openxmlformats.org/presentationml/2006/main">
-  <p:cSld>
-    <p:bg>
-      <p:bgPr>
-        <a:solidFill>
-          <a:srgbClr val="FAF0E6"/>
-        </a:solidFill>
-        <a:effectLst/>
-      </p:bgPr>
-    </p:bg>
-    <p:spTree>
-      <p:nvGrpSpPr>
-        <p:cNvPr id="1" name="">
-          <a:extLst>
-            <a:ext uri="{FF2B5EF4-FFF2-40B4-BE49-F238E27FC236}">
-              <a16:creationId xmlns:a16="http://schemas.microsoft.com/office/drawing/2014/main" id="{D9D054C6-8917-D20E-D273-8120BC3DCEF7}"/>
-            </a:ext>
-          </a:extLst>
-        </p:cNvPr>
-        <p:cNvGrpSpPr/>
-        <p:nvPr/>
-      </p:nvGrpSpPr>
-      <p:grpSpPr>
-        <a:xfrm>
-          <a:off x="0" y="0"/>
-          <a:ext cx="0" cy="0"/>
-          <a:chOff x="0" y="0"/>
-          <a:chExt cx="0" cy="0"/>
-        </a:xfrm>
-      </p:grpSpPr>
-      <p:sp>
-        <p:nvSpPr>
-          <p:cNvPr id="2" name="Title 1">
-            <a:extLst>
-              <a:ext uri="{FF2B5EF4-FFF2-40B4-BE49-F238E27FC236}">
-                <a16:creationId xmlns:a16="http://schemas.microsoft.com/office/drawing/2014/main" id="{EBEC38D0-41FE-8EF6-B85D-AD4F33132BDF}"/>
-              </a:ext>
-            </a:extLst>
-          </p:cNvPr>
-          <p:cNvSpPr>
-            <a:spLocks noGrp="1"/>
-          </p:cNvSpPr>
-          <p:nvPr>
-            <p:ph type="title"/>
-          </p:nvPr>
-        </p:nvSpPr>
-        <p:spPr>
-          <a:xfrm>
-            <a:off x="919314" y="190464"/>
-            <a:ext cx="10515600" cy="1325563"/>
-          </a:xfrm>
-        </p:spPr>
-        <p:txBody>
-          <a:bodyPr/>
-          <a:lstStyle/>
-          <a:p>
-            <a:r>
-              <a:rPr lang="en-GB" dirty="0">
-                <a:solidFill>
-                  <a:srgbClr val="676767"/>
-                </a:solidFill>
-              </a:rPr>
-              <a:t>When to use Evals?</a:t>
-            </a:r>
-          </a:p>
-        </p:txBody>
-      </p:sp>
-      <p:sp>
-        <p:nvSpPr>
-          <p:cNvPr id="3" name="Content Placeholder 2">
-            <a:extLst>
-              <a:ext uri="{FF2B5EF4-FFF2-40B4-BE49-F238E27FC236}">
-                <a16:creationId xmlns:a16="http://schemas.microsoft.com/office/drawing/2014/main" id="{6DE91604-D9B5-E437-CC1A-AA6836D7FBDB}"/>
-              </a:ext>
-            </a:extLst>
-          </p:cNvPr>
-          <p:cNvSpPr>
-            <a:spLocks noGrp="1"/>
-          </p:cNvSpPr>
-          <p:nvPr>
-            <p:ph idx="1"/>
-          </p:nvPr>
-        </p:nvSpPr>
-        <p:spPr>
-          <a:xfrm>
-            <a:off x="919314" y="1413031"/>
-            <a:ext cx="10596715" cy="4906652"/>
-          </a:xfrm>
-          <a:solidFill>
-            <a:srgbClr val="FAF0E6"/>
-          </a:solidFill>
-        </p:spPr>
-        <p:txBody>
-          <a:bodyPr>
-            <a:normAutofit/>
-          </a:bodyPr>
-          <a:lstStyle/>
-          <a:p>
-            <a:pPr marL="0" indent="0" algn="ctr">
-              <a:lnSpc>
-                <a:spcPts val="4500"/>
-              </a:lnSpc>
-              <a:buNone/>
-            </a:pPr>
-            <a:r>
-              <a:rPr lang="en-GB" sz="3600" i="1" dirty="0"/>
-              <a:t>.</a:t>
-            </a:r>
-          </a:p>
-        </p:txBody>
-      </p:sp>
-      <p:pic>
-        <p:nvPicPr>
-          <p:cNvPr id="5" name="Picture 4" descr="A screenshot of a video chat&#10;&#10;AI-generated content may be incorrect.">
-            <a:extLst>
-              <a:ext uri="{FF2B5EF4-FFF2-40B4-BE49-F238E27FC236}">
-                <a16:creationId xmlns:a16="http://schemas.microsoft.com/office/drawing/2014/main" id="{DA6CAE77-CE52-0982-3169-9D57CB095BCF}"/>
-              </a:ext>
-            </a:extLst>
-          </p:cNvPr>
-          <p:cNvPicPr>
-            <a:picLocks noChangeAspect="1"/>
-          </p:cNvPicPr>
-          <p:nvPr/>
-        </p:nvPicPr>
-        <p:blipFill>
-          <a:blip r:embed="rId2">
-            <a:extLst>
-              <a:ext uri="{28A0092B-C50C-407E-A947-70E740481C1C}">
-                <a14:useLocalDpi xmlns:a14="http://schemas.microsoft.com/office/drawing/2010/main" val="0"/>
-              </a:ext>
-            </a:extLst>
-          </a:blip>
-          <a:stretch>
-            <a:fillRect/>
-          </a:stretch>
-        </p:blipFill>
-        <p:spPr>
-          <a:xfrm>
-            <a:off x="951267" y="1238865"/>
-            <a:ext cx="7814286" cy="5080818"/>
-          </a:xfrm>
-          <a:prstGeom prst="rect">
-            <a:avLst/>
-          </a:prstGeom>
-        </p:spPr>
-      </p:pic>
-      <p:sp>
-        <p:nvSpPr>
-          <p:cNvPr id="6" name="TextBox 5">
-            <a:extLst>
-              <a:ext uri="{FF2B5EF4-FFF2-40B4-BE49-F238E27FC236}">
-                <a16:creationId xmlns:a16="http://schemas.microsoft.com/office/drawing/2014/main" id="{AF571150-50D6-DBAC-508E-95157935EFA8}"/>
-              </a:ext>
-            </a:extLst>
-          </p:cNvPr>
-          <p:cNvSpPr txBox="1"/>
-          <p:nvPr/>
-        </p:nvSpPr>
-        <p:spPr>
-          <a:xfrm>
-            <a:off x="6114614" y="2886982"/>
-            <a:ext cx="2682892" cy="1477328"/>
-          </a:xfrm>
-          <a:prstGeom prst="rect">
-            <a:avLst/>
-          </a:prstGeom>
-          <a:noFill/>
-        </p:spPr>
-        <p:txBody>
-          <a:bodyPr wrap="square" rtlCol="0">
-            <a:spAutoFit/>
-          </a:bodyPr>
-          <a:lstStyle/>
-          <a:p>
-            <a:r>
-              <a:rPr lang="en-GB" dirty="0"/>
-              <a:t>Raza Habib is the CEO and Cofounder of Humanloop</a:t>
-            </a:r>
-          </a:p>
-          <a:p>
-            <a:endParaRPr lang="en-GB" dirty="0"/>
-          </a:p>
-          <a:p>
-            <a:r>
-              <a:rPr lang="en-GB" dirty="0"/>
-              <a:t>Acquired by Anthropic</a:t>
-            </a:r>
-          </a:p>
-        </p:txBody>
-      </p:sp>
-      <p:pic>
-        <p:nvPicPr>
-          <p:cNvPr id="9" name="Graphic 8" descr="Convertible with solid fill">
-            <a:extLst>
-              <a:ext uri="{FF2B5EF4-FFF2-40B4-BE49-F238E27FC236}">
-                <a16:creationId xmlns:a16="http://schemas.microsoft.com/office/drawing/2014/main" id="{4311C918-C2A8-40AA-689D-6D6C00BED3AB}"/>
-              </a:ext>
-            </a:extLst>
-          </p:cNvPr>
-          <p:cNvPicPr>
-            <a:picLocks noChangeAspect="1"/>
-          </p:cNvPicPr>
-          <p:nvPr/>
-        </p:nvPicPr>
-        <p:blipFill>
-          <a:blip r:embed="rId3">
-            <a:extLst>
-              <a:ext uri="{96DAC541-7B7A-43D3-8B79-37D633B846F1}">
-                <asvg:svgBlip xmlns:asvg="http://schemas.microsoft.com/office/drawing/2016/SVG/main" r:embed="rId4"/>
-              </a:ext>
-            </a:extLst>
-          </a:blip>
-          <a:stretch>
-            <a:fillRect/>
-          </a:stretch>
-        </p:blipFill>
-        <p:spPr>
-          <a:xfrm>
-            <a:off x="9566196" y="-29615"/>
-            <a:ext cx="1868718" cy="1868718"/>
-          </a:xfrm>
-          <a:prstGeom prst="rect">
-            <a:avLst/>
-          </a:prstGeom>
-        </p:spPr>
-      </p:pic>
-      <p:sp>
-        <p:nvSpPr>
-          <p:cNvPr id="10" name="TextBox 9">
-            <a:extLst>
-              <a:ext uri="{FF2B5EF4-FFF2-40B4-BE49-F238E27FC236}">
-                <a16:creationId xmlns:a16="http://schemas.microsoft.com/office/drawing/2014/main" id="{B879CC0E-0C52-38D8-4BF1-DB740FDAFA55}"/>
-              </a:ext>
-            </a:extLst>
-          </p:cNvPr>
-          <p:cNvSpPr txBox="1"/>
-          <p:nvPr/>
-        </p:nvSpPr>
-        <p:spPr>
-          <a:xfrm>
-            <a:off x="8971838" y="1516027"/>
-            <a:ext cx="3053014" cy="3108543"/>
-          </a:xfrm>
-          <a:prstGeom prst="rect">
-            <a:avLst/>
-          </a:prstGeom>
-          <a:noFill/>
-        </p:spPr>
-        <p:txBody>
-          <a:bodyPr wrap="square" rtlCol="0">
-            <a:spAutoFit/>
-          </a:bodyPr>
-          <a:lstStyle/>
-          <a:p>
-            <a:r>
-              <a:rPr lang="en-GB" sz="2800" dirty="0"/>
-              <a:t>If we are to design and build an F1 race car, we might need a set of specs to develop, test and monitor against.</a:t>
-            </a:r>
-          </a:p>
-        </p:txBody>
-      </p:sp>
-    </p:spTree>
-    <p:extLst>
-      <p:ext uri="{BB962C8B-B14F-4D97-AF65-F5344CB8AC3E}">
-        <p14:creationId xmlns:p14="http://schemas.microsoft.com/office/powerpoint/2010/main" val="1963721843"/>
       </p:ext>
     </p:extLst>
   </p:cSld>

--- a/PYDATA_SOUTHAMPTON_16SEP2025.pptx
+++ b/PYDATA_SOUTHAMPTON_16SEP2025.pptx
@@ -9,12 +9,12 @@
   </p:notesMasterIdLst>
   <p:sldIdLst>
     <p:sldId id="257" r:id="rId2"/>
-    <p:sldId id="275" r:id="rId3"/>
-    <p:sldId id="284" r:id="rId4"/>
-    <p:sldId id="301" r:id="rId5"/>
-    <p:sldId id="280" r:id="rId6"/>
-    <p:sldId id="287" r:id="rId7"/>
-    <p:sldId id="262" r:id="rId8"/>
+    <p:sldId id="262" r:id="rId3"/>
+    <p:sldId id="287" r:id="rId4"/>
+    <p:sldId id="275" r:id="rId5"/>
+    <p:sldId id="284" r:id="rId6"/>
+    <p:sldId id="301" r:id="rId7"/>
+    <p:sldId id="280" r:id="rId8"/>
     <p:sldId id="283" r:id="rId9"/>
     <p:sldId id="266" r:id="rId10"/>
     <p:sldId id="289" r:id="rId11"/>
@@ -230,7 +230,7 @@
           <a:p>
             <a:fld id="{422EBE36-D452-49B2-BC5E-F25DDEF20ED3}" type="datetimeFigureOut">
               <a:rPr lang="en-GB" smtClean="0"/>
-              <a:t>11/09/2025</a:t>
+              <a:t>15/09/2025</a:t>
             </a:fld>
             <a:endParaRPr lang="en-GB"/>
           </a:p>
@@ -731,7 +731,7 @@
           <a:p>
             <a:fld id="{87B02A21-FE86-45F5-9B8B-75D343822DB2}" type="datetimeFigureOut">
               <a:rPr lang="en-GB" smtClean="0"/>
-              <a:t>11/09/2025</a:t>
+              <a:t>15/09/2025</a:t>
             </a:fld>
             <a:endParaRPr lang="en-GB"/>
           </a:p>
@@ -931,7 +931,7 @@
           <a:p>
             <a:fld id="{87B02A21-FE86-45F5-9B8B-75D343822DB2}" type="datetimeFigureOut">
               <a:rPr lang="en-GB" smtClean="0"/>
-              <a:t>11/09/2025</a:t>
+              <a:t>15/09/2025</a:t>
             </a:fld>
             <a:endParaRPr lang="en-GB"/>
           </a:p>
@@ -1141,7 +1141,7 @@
           <a:p>
             <a:fld id="{87B02A21-FE86-45F5-9B8B-75D343822DB2}" type="datetimeFigureOut">
               <a:rPr lang="en-GB" smtClean="0"/>
-              <a:t>11/09/2025</a:t>
+              <a:t>15/09/2025</a:t>
             </a:fld>
             <a:endParaRPr lang="en-GB"/>
           </a:p>
@@ -1341,7 +1341,7 @@
           <a:p>
             <a:fld id="{87B02A21-FE86-45F5-9B8B-75D343822DB2}" type="datetimeFigureOut">
               <a:rPr lang="en-GB" smtClean="0"/>
-              <a:t>11/09/2025</a:t>
+              <a:t>15/09/2025</a:t>
             </a:fld>
             <a:endParaRPr lang="en-GB"/>
           </a:p>
@@ -1617,7 +1617,7 @@
           <a:p>
             <a:fld id="{87B02A21-FE86-45F5-9B8B-75D343822DB2}" type="datetimeFigureOut">
               <a:rPr lang="en-GB" smtClean="0"/>
-              <a:t>11/09/2025</a:t>
+              <a:t>15/09/2025</a:t>
             </a:fld>
             <a:endParaRPr lang="en-GB"/>
           </a:p>
@@ -1885,7 +1885,7 @@
           <a:p>
             <a:fld id="{87B02A21-FE86-45F5-9B8B-75D343822DB2}" type="datetimeFigureOut">
               <a:rPr lang="en-GB" smtClean="0"/>
-              <a:t>11/09/2025</a:t>
+              <a:t>15/09/2025</a:t>
             </a:fld>
             <a:endParaRPr lang="en-GB"/>
           </a:p>
@@ -2300,7 +2300,7 @@
           <a:p>
             <a:fld id="{87B02A21-FE86-45F5-9B8B-75D343822DB2}" type="datetimeFigureOut">
               <a:rPr lang="en-GB" smtClean="0"/>
-              <a:t>11/09/2025</a:t>
+              <a:t>15/09/2025</a:t>
             </a:fld>
             <a:endParaRPr lang="en-GB"/>
           </a:p>
@@ -2442,7 +2442,7 @@
           <a:p>
             <a:fld id="{87B02A21-FE86-45F5-9B8B-75D343822DB2}" type="datetimeFigureOut">
               <a:rPr lang="en-GB" smtClean="0"/>
-              <a:t>11/09/2025</a:t>
+              <a:t>15/09/2025</a:t>
             </a:fld>
             <a:endParaRPr lang="en-GB"/>
           </a:p>
@@ -2555,7 +2555,7 @@
           <a:p>
             <a:fld id="{87B02A21-FE86-45F5-9B8B-75D343822DB2}" type="datetimeFigureOut">
               <a:rPr lang="en-GB" smtClean="0"/>
-              <a:t>11/09/2025</a:t>
+              <a:t>15/09/2025</a:t>
             </a:fld>
             <a:endParaRPr lang="en-GB"/>
           </a:p>
@@ -2868,7 +2868,7 @@
           <a:p>
             <a:fld id="{87B02A21-FE86-45F5-9B8B-75D343822DB2}" type="datetimeFigureOut">
               <a:rPr lang="en-GB" smtClean="0"/>
-              <a:t>11/09/2025</a:t>
+              <a:t>15/09/2025</a:t>
             </a:fld>
             <a:endParaRPr lang="en-GB"/>
           </a:p>
@@ -3157,7 +3157,7 @@
           <a:p>
             <a:fld id="{87B02A21-FE86-45F5-9B8B-75D343822DB2}" type="datetimeFigureOut">
               <a:rPr lang="en-GB" smtClean="0"/>
-              <a:t>11/09/2025</a:t>
+              <a:t>15/09/2025</a:t>
             </a:fld>
             <a:endParaRPr lang="en-GB"/>
           </a:p>
@@ -3400,7 +3400,7 @@
           <a:p>
             <a:fld id="{87B02A21-FE86-45F5-9B8B-75D343822DB2}" type="datetimeFigureOut">
               <a:rPr lang="en-GB" smtClean="0"/>
-              <a:t>11/09/2025</a:t>
+              <a:t>15/09/2025</a:t>
             </a:fld>
             <a:endParaRPr lang="en-GB"/>
           </a:p>
@@ -5105,8 +5105,12 @@
           </a:p>
           <a:p>
             <a:r>
+              <a:rPr lang="en-GB" sz="2400"/>
+              <a:t>GOTO PUBLISH </a:t>
+            </a:r>
+            <a:r>
               <a:rPr lang="en-GB" sz="2400" dirty="0"/>
-              <a:t>PUBLISH = YES only if 1,2 and 3 are YES</a:t>
+              <a:t>= YES only if 1,2 and 3 are YES</a:t>
             </a:r>
           </a:p>
           <a:p>
@@ -5910,7 +5914,7 @@
         <p:cNvPr id="1" name="">
           <a:extLst>
             <a:ext uri="{FF2B5EF4-FFF2-40B4-BE49-F238E27FC236}">
-              <a16:creationId xmlns:a16="http://schemas.microsoft.com/office/drawing/2014/main" id="{DB223AA4-507E-D8B3-7DEB-D9083974AB61}"/>
+              <a16:creationId xmlns:a16="http://schemas.microsoft.com/office/drawing/2014/main" id="{3B3CAD92-64A2-9E64-259C-D0FEF3A00383}"/>
             </a:ext>
           </a:extLst>
         </p:cNvPr>
@@ -5930,7 +5934,7 @@
           <p:cNvPr id="2" name="Title 1">
             <a:extLst>
               <a:ext uri="{FF2B5EF4-FFF2-40B4-BE49-F238E27FC236}">
-                <a16:creationId xmlns:a16="http://schemas.microsoft.com/office/drawing/2014/main" id="{CA99CC66-10D3-E183-1C5E-7DBAE8756398}"/>
+                <a16:creationId xmlns:a16="http://schemas.microsoft.com/office/drawing/2014/main" id="{36969965-CBD5-3274-6734-01C0F3F1DE75}"/>
               </a:ext>
             </a:extLst>
           </p:cNvPr>
@@ -5952,22 +5956,95 @@
           <a:lstStyle/>
           <a:p>
             <a:r>
-              <a:rPr lang="en-GB" dirty="0">
+              <a:rPr lang="en-GB">
                 <a:solidFill>
                   <a:srgbClr val="676767"/>
                 </a:solidFill>
               </a:rPr>
-              <a:t>180-degree shift</a:t>
-            </a:r>
+              <a:t>About me</a:t>
+            </a:r>
+            <a:endParaRPr lang="en-GB" dirty="0">
+              <a:solidFill>
+                <a:srgbClr val="676767"/>
+              </a:solidFill>
+            </a:endParaRPr>
+          </a:p>
+        </p:txBody>
+      </p:sp>
+      <p:sp>
+        <p:nvSpPr>
+          <p:cNvPr id="3" name="Content Placeholder 2">
+            <a:extLst>
+              <a:ext uri="{FF2B5EF4-FFF2-40B4-BE49-F238E27FC236}">
+                <a16:creationId xmlns:a16="http://schemas.microsoft.com/office/drawing/2014/main" id="{FA6ED4D5-40EE-1AD6-45EB-5319021B107B}"/>
+              </a:ext>
+            </a:extLst>
+          </p:cNvPr>
+          <p:cNvSpPr>
+            <a:spLocks noGrp="1"/>
+          </p:cNvSpPr>
+          <p:nvPr>
+            <p:ph idx="1"/>
+          </p:nvPr>
+        </p:nvSpPr>
+        <p:spPr>
+          <a:xfrm>
+            <a:off x="878756" y="1306963"/>
+            <a:ext cx="10596715" cy="5013125"/>
+          </a:xfrm>
+          <a:solidFill>
+            <a:srgbClr val="FAF0E6"/>
+          </a:solidFill>
+        </p:spPr>
+        <p:txBody>
+          <a:bodyPr>
+            <a:normAutofit/>
+          </a:bodyPr>
+          <a:lstStyle/>
+          <a:p>
+            <a:pPr marL="0" indent="0">
+              <a:buNone/>
+            </a:pPr>
+            <a:endParaRPr lang="en-GB"/>
+          </a:p>
+          <a:p>
+            <a:pPr marL="0" indent="0">
+              <a:buNone/>
+            </a:pPr>
+            <a:endParaRPr lang="en-GB"/>
+          </a:p>
+          <a:p>
+            <a:pPr marL="0" indent="0">
+              <a:buNone/>
+            </a:pPr>
+            <a:endParaRPr lang="en-GB"/>
+          </a:p>
+          <a:p>
+            <a:pPr marL="0" indent="0">
+              <a:buNone/>
+            </a:pPr>
+            <a:endParaRPr lang="en-GB"/>
+          </a:p>
+          <a:p>
+            <a:pPr marL="0" indent="0">
+              <a:buNone/>
+            </a:pPr>
+            <a:endParaRPr lang="en-GB"/>
+          </a:p>
+          <a:p>
+            <a:pPr marL="0" indent="0">
+              <a:buNone/>
+            </a:pPr>
+            <a:endParaRPr lang="en-GB" dirty="0"/>
           </a:p>
         </p:txBody>
       </p:sp>
       <p:pic>
         <p:nvPicPr>
-          <p:cNvPr id="5" name="Picture 4" descr="A black computer mouse on a white background&#10;&#10;AI-generated content may be incorrect.">
-            <a:extLst>
-              <a:ext uri="{FF2B5EF4-FFF2-40B4-BE49-F238E27FC236}">
-                <a16:creationId xmlns:a16="http://schemas.microsoft.com/office/drawing/2014/main" id="{4C2BFCCB-3F23-3098-3C1E-2D76213CD97C}"/>
+          <p:cNvPr id="5" name="Picture 4" descr="A close-up of a machine&#10;&#10;AI-generated content may be incorrect.">
+            <a:extLst>
+              <a:ext uri="{FF2B5EF4-FFF2-40B4-BE49-F238E27FC236}">
+                <a16:creationId xmlns:a16="http://schemas.microsoft.com/office/drawing/2014/main" id="{F3C50833-41C6-6D1F-F30A-524D489332FD}"/>
               </a:ext>
             </a:extLst>
           </p:cNvPr>
@@ -5989,9 +6066,9 @@
           </a:stretch>
         </p:blipFill>
         <p:spPr>
-          <a:xfrm rot="10800000">
-            <a:off x="8057775" y="1847529"/>
-            <a:ext cx="2466975" cy="1847850"/>
+          <a:xfrm>
+            <a:off x="8116584" y="1248913"/>
+            <a:ext cx="3689634" cy="2767226"/>
           </a:xfrm>
           <a:prstGeom prst="rect">
             <a:avLst/>
@@ -6000,10 +6077,10 @@
       </p:pic>
       <p:pic>
         <p:nvPicPr>
-          <p:cNvPr id="7" name="Picture 6" descr="A black computer mouse on a white background&#10;&#10;AI-generated content may be incorrect.">
-            <a:extLst>
-              <a:ext uri="{FF2B5EF4-FFF2-40B4-BE49-F238E27FC236}">
-                <a16:creationId xmlns:a16="http://schemas.microsoft.com/office/drawing/2014/main" id="{BDAFD253-325D-AA4F-E8B1-F2175AD4ED24}"/>
+          <p:cNvPr id="7" name="Picture 6">
+            <a:extLst>
+              <a:ext uri="{FF2B5EF4-FFF2-40B4-BE49-F238E27FC236}">
+                <a16:creationId xmlns:a16="http://schemas.microsoft.com/office/drawing/2014/main" id="{C72068A3-9DA4-4572-DE52-739BD2F63608}"/>
               </a:ext>
             </a:extLst>
           </p:cNvPr>
@@ -6020,150 +6097,128 @@
               </a:ext>
             </a:extLst>
           </a:blip>
-          <a:stretch>
-            <a:fillRect/>
-          </a:stretch>
+          <a:srcRect/>
+          <a:stretch/>
         </p:blipFill>
         <p:spPr>
           <a:xfrm>
-            <a:off x="1108332" y="1847530"/>
-            <a:ext cx="2466975" cy="1847850"/>
+            <a:off x="4032947" y="1337937"/>
+            <a:ext cx="1717803" cy="2742790"/>
           </a:xfrm>
           <a:prstGeom prst="rect">
             <a:avLst/>
           </a:prstGeom>
         </p:spPr>
       </p:pic>
-      <p:sp>
-        <p:nvSpPr>
-          <p:cNvPr id="8" name="TextBox 7">
-            <a:extLst>
-              <a:ext uri="{FF2B5EF4-FFF2-40B4-BE49-F238E27FC236}">
-                <a16:creationId xmlns:a16="http://schemas.microsoft.com/office/drawing/2014/main" id="{C85A72E3-B4A4-739E-FAF5-D9B5DFCEC120}"/>
-              </a:ext>
-            </a:extLst>
-          </p:cNvPr>
-          <p:cNvSpPr txBox="1"/>
+      <p:pic>
+        <p:nvPicPr>
+          <p:cNvPr id="9" name="Picture 8">
+            <a:extLst>
+              <a:ext uri="{FF2B5EF4-FFF2-40B4-BE49-F238E27FC236}">
+                <a16:creationId xmlns:a16="http://schemas.microsoft.com/office/drawing/2014/main" id="{D9040783-80F7-1202-94D3-180CF27290FA}"/>
+              </a:ext>
+            </a:extLst>
+          </p:cNvPr>
+          <p:cNvPicPr>
+            <a:picLocks noChangeAspect="1"/>
+          </p:cNvPicPr>
           <p:nvPr/>
-        </p:nvSpPr>
-        <p:spPr>
-          <a:xfrm>
-            <a:off x="750014" y="4099388"/>
-            <a:ext cx="11065267" cy="523220"/>
+        </p:nvPicPr>
+        <p:blipFill>
+          <a:blip r:embed="rId4">
+            <a:extLst>
+              <a:ext uri="{28A0092B-C50C-407E-A947-70E740481C1C}">
+                <a14:useLocalDpi xmlns:a14="http://schemas.microsoft.com/office/drawing/2010/main" val="0"/>
+              </a:ext>
+            </a:extLst>
+          </a:blip>
+          <a:srcRect/>
+          <a:stretch/>
+        </p:blipFill>
+        <p:spPr>
+          <a:xfrm>
+            <a:off x="5921733" y="1367823"/>
+            <a:ext cx="2023867" cy="2683017"/>
           </a:xfrm>
           <a:prstGeom prst="rect">
             <a:avLst/>
           </a:prstGeom>
-          <a:noFill/>
-        </p:spPr>
-        <p:txBody>
-          <a:bodyPr wrap="square" rtlCol="0">
-            <a:spAutoFit/>
-          </a:bodyPr>
-          <a:lstStyle/>
-          <a:p>
-            <a:r>
-              <a:rPr lang="en-GB" sz="2800" dirty="0"/>
-              <a:t>No more difficult than what we do currently – just 180 degrees different</a:t>
-            </a:r>
-          </a:p>
-        </p:txBody>
-      </p:sp>
-      <p:sp>
-        <p:nvSpPr>
-          <p:cNvPr id="9" name="Arrow: Curved Down 8">
-            <a:extLst>
-              <a:ext uri="{FF2B5EF4-FFF2-40B4-BE49-F238E27FC236}">
-                <a16:creationId xmlns:a16="http://schemas.microsoft.com/office/drawing/2014/main" id="{53323BF1-393A-213D-B6C3-D6FAA296990D}"/>
-              </a:ext>
-            </a:extLst>
-          </p:cNvPr>
-          <p:cNvSpPr/>
+        </p:spPr>
+      </p:pic>
+      <p:pic>
+        <p:nvPicPr>
+          <p:cNvPr id="11" name="Picture 10">
+            <a:extLst>
+              <a:ext uri="{FF2B5EF4-FFF2-40B4-BE49-F238E27FC236}">
+                <a16:creationId xmlns:a16="http://schemas.microsoft.com/office/drawing/2014/main" id="{2DCAABF9-7D6A-30DB-DFA8-35DA30991B03}"/>
+              </a:ext>
+            </a:extLst>
+          </p:cNvPr>
+          <p:cNvPicPr>
+            <a:picLocks noChangeAspect="1"/>
+          </p:cNvPicPr>
           <p:nvPr/>
-        </p:nvSpPr>
-        <p:spPr>
-          <a:xfrm>
-            <a:off x="4224046" y="1899809"/>
-            <a:ext cx="3184989" cy="1743290"/>
-          </a:xfrm>
-          <a:prstGeom prst="curvedDownArrow">
-            <a:avLst/>
-          </a:prstGeom>
-          <a:solidFill>
-            <a:schemeClr val="accent2">
-              <a:lumMod val="75000"/>
-            </a:schemeClr>
-          </a:solidFill>
-        </p:spPr>
-        <p:style>
-          <a:lnRef idx="2">
-            <a:schemeClr val="accent1">
-              <a:shade val="15000"/>
-            </a:schemeClr>
-          </a:lnRef>
-          <a:fillRef idx="1">
-            <a:schemeClr val="accent1"/>
-          </a:fillRef>
-          <a:effectRef idx="0">
-            <a:schemeClr val="accent1"/>
-          </a:effectRef>
-          <a:fontRef idx="minor">
-            <a:schemeClr val="lt1"/>
-          </a:fontRef>
-        </p:style>
-        <p:txBody>
-          <a:bodyPr rtlCol="0" anchor="ctr"/>
-          <a:lstStyle/>
-          <a:p>
-            <a:pPr algn="ctr"/>
-            <a:endParaRPr lang="en-GB">
-              <a:solidFill>
-                <a:schemeClr val="tx1"/>
-              </a:solidFill>
-            </a:endParaRPr>
-          </a:p>
-        </p:txBody>
-      </p:sp>
-      <p:sp>
-        <p:nvSpPr>
-          <p:cNvPr id="10" name="TextBox 9">
-            <a:extLst>
-              <a:ext uri="{FF2B5EF4-FFF2-40B4-BE49-F238E27FC236}">
-                <a16:creationId xmlns:a16="http://schemas.microsoft.com/office/drawing/2014/main" id="{A85AE486-5F44-81B6-3E5C-D762ABEA4AC2}"/>
-              </a:ext>
-            </a:extLst>
-          </p:cNvPr>
-          <p:cNvSpPr txBox="1"/>
-          <p:nvPr/>
-        </p:nvSpPr>
-        <p:spPr>
-          <a:xfrm>
-            <a:off x="750014" y="5078897"/>
-            <a:ext cx="11065267" cy="523220"/>
+        </p:nvPicPr>
+        <p:blipFill>
+          <a:blip r:embed="rId5">
+            <a:extLst>
+              <a:ext uri="{28A0092B-C50C-407E-A947-70E740481C1C}">
+                <a14:useLocalDpi xmlns:a14="http://schemas.microsoft.com/office/drawing/2010/main" val="0"/>
+              </a:ext>
+            </a:extLst>
+          </a:blip>
+          <a:srcRect/>
+          <a:stretch/>
+        </p:blipFill>
+        <p:spPr>
+          <a:xfrm>
+            <a:off x="2713098" y="4212445"/>
+            <a:ext cx="6417269" cy="2555464"/>
           </a:xfrm>
           <a:prstGeom prst="rect">
             <a:avLst/>
           </a:prstGeom>
-          <a:noFill/>
-        </p:spPr>
-        <p:txBody>
-          <a:bodyPr wrap="square" rtlCol="0">
-            <a:spAutoFit/>
-          </a:bodyPr>
-          <a:lstStyle/>
-          <a:p>
-            <a:pPr algn="ctr"/>
-            <a:r>
-              <a:rPr lang="en-GB" sz="2800" dirty="0"/>
-              <a:t>“It doesn’t get any easier – just different” - Anon </a:t>
-            </a:r>
-          </a:p>
-        </p:txBody>
-      </p:sp>
+        </p:spPr>
+      </p:pic>
+      <p:pic>
+        <p:nvPicPr>
+          <p:cNvPr id="13" name="Picture 12">
+            <a:extLst>
+              <a:ext uri="{FF2B5EF4-FFF2-40B4-BE49-F238E27FC236}">
+                <a16:creationId xmlns:a16="http://schemas.microsoft.com/office/drawing/2014/main" id="{6AD9A928-8A3F-EBB4-94C3-AF298183888F}"/>
+              </a:ext>
+            </a:extLst>
+          </p:cNvPr>
+          <p:cNvPicPr>
+            <a:picLocks noChangeAspect="1"/>
+          </p:cNvPicPr>
+          <p:nvPr/>
+        </p:nvPicPr>
+        <p:blipFill>
+          <a:blip r:embed="rId6">
+            <a:extLst>
+              <a:ext uri="{28A0092B-C50C-407E-A947-70E740481C1C}">
+                <a14:useLocalDpi xmlns:a14="http://schemas.microsoft.com/office/drawing/2010/main" val="0"/>
+              </a:ext>
+            </a:extLst>
+          </a:blip>
+          <a:srcRect/>
+          <a:stretch/>
+        </p:blipFill>
+        <p:spPr>
+          <a:xfrm>
+            <a:off x="919314" y="1306963"/>
+            <a:ext cx="2782886" cy="2782886"/>
+          </a:xfrm>
+          <a:prstGeom prst="rect">
+            <a:avLst/>
+          </a:prstGeom>
+        </p:spPr>
+      </p:pic>
     </p:spTree>
     <p:extLst>
       <p:ext uri="{BB962C8B-B14F-4D97-AF65-F5344CB8AC3E}">
-        <p14:creationId xmlns:p14="http://schemas.microsoft.com/office/powerpoint/2010/main" val="3122446014"/>
+        <p14:creationId xmlns:p14="http://schemas.microsoft.com/office/powerpoint/2010/main" val="2700586660"/>
       </p:ext>
     </p:extLst>
   </p:cSld>
@@ -7517,6 +7572,479 @@
         <p:cNvPr id="1" name="">
           <a:extLst>
             <a:ext uri="{FF2B5EF4-FFF2-40B4-BE49-F238E27FC236}">
+              <a16:creationId xmlns:a16="http://schemas.microsoft.com/office/drawing/2014/main" id="{FF357D8D-75A6-7D51-8D6A-0577ACB955CF}"/>
+            </a:ext>
+          </a:extLst>
+        </p:cNvPr>
+        <p:cNvGrpSpPr/>
+        <p:nvPr/>
+      </p:nvGrpSpPr>
+      <p:grpSpPr>
+        <a:xfrm>
+          <a:off x="0" y="0"/>
+          <a:ext cx="0" cy="0"/>
+          <a:chOff x="0" y="0"/>
+          <a:chExt cx="0" cy="0"/>
+        </a:xfrm>
+      </p:grpSpPr>
+      <p:sp>
+        <p:nvSpPr>
+          <p:cNvPr id="2" name="Title 1">
+            <a:extLst>
+              <a:ext uri="{FF2B5EF4-FFF2-40B4-BE49-F238E27FC236}">
+                <a16:creationId xmlns:a16="http://schemas.microsoft.com/office/drawing/2014/main" id="{17F2B0CC-EE48-6084-A4EA-5B5D152A8A2B}"/>
+              </a:ext>
+            </a:extLst>
+          </p:cNvPr>
+          <p:cNvSpPr>
+            <a:spLocks noGrp="1"/>
+          </p:cNvSpPr>
+          <p:nvPr>
+            <p:ph type="title"/>
+          </p:nvPr>
+        </p:nvSpPr>
+        <p:spPr>
+          <a:xfrm>
+            <a:off x="919314" y="190464"/>
+            <a:ext cx="10515600" cy="1325563"/>
+          </a:xfrm>
+        </p:spPr>
+        <p:txBody>
+          <a:bodyPr/>
+          <a:lstStyle/>
+          <a:p>
+            <a:r>
+              <a:rPr lang="en-GB" dirty="0">
+                <a:solidFill>
+                  <a:srgbClr val="676767"/>
+                </a:solidFill>
+              </a:rPr>
+              <a:t>My desired outcome</a:t>
+            </a:r>
+          </a:p>
+        </p:txBody>
+      </p:sp>
+      <p:sp>
+        <p:nvSpPr>
+          <p:cNvPr id="3" name="Content Placeholder 2">
+            <a:extLst>
+              <a:ext uri="{FF2B5EF4-FFF2-40B4-BE49-F238E27FC236}">
+                <a16:creationId xmlns:a16="http://schemas.microsoft.com/office/drawing/2014/main" id="{02C99520-102A-F40A-3D72-928418B9CD25}"/>
+              </a:ext>
+            </a:extLst>
+          </p:cNvPr>
+          <p:cNvSpPr>
+            <a:spLocks noGrp="1"/>
+          </p:cNvSpPr>
+          <p:nvPr>
+            <p:ph idx="1"/>
+          </p:nvPr>
+        </p:nvSpPr>
+        <p:spPr>
+          <a:xfrm>
+            <a:off x="919314" y="1413031"/>
+            <a:ext cx="10596715" cy="4906652"/>
+          </a:xfrm>
+          <a:solidFill>
+            <a:srgbClr val="FAF0E6"/>
+          </a:solidFill>
+        </p:spPr>
+        <p:txBody>
+          <a:bodyPr>
+            <a:normAutofit/>
+          </a:bodyPr>
+          <a:lstStyle/>
+          <a:p>
+            <a:pPr marL="0" indent="0">
+              <a:lnSpc>
+                <a:spcPts val="4500"/>
+              </a:lnSpc>
+              <a:buNone/>
+            </a:pPr>
+            <a:r>
+              <a:rPr lang="en-GB" sz="4000" dirty="0"/>
+              <a:t>Not for you to fully understand Evals</a:t>
+            </a:r>
+          </a:p>
+          <a:p>
+            <a:pPr marL="0" indent="0">
+              <a:lnSpc>
+                <a:spcPts val="4500"/>
+              </a:lnSpc>
+              <a:buNone/>
+            </a:pPr>
+            <a:r>
+              <a:rPr lang="en-GB" sz="4000" i="1" dirty="0"/>
+              <a:t>But…</a:t>
+            </a:r>
+          </a:p>
+          <a:p>
+            <a:pPr marL="0" indent="0" algn="ctr">
+              <a:lnSpc>
+                <a:spcPts val="4500"/>
+              </a:lnSpc>
+              <a:buNone/>
+            </a:pPr>
+            <a:r>
+              <a:rPr lang="en-GB" sz="3600" i="1" dirty="0"/>
+              <a:t>That Evals are doable</a:t>
+            </a:r>
+          </a:p>
+          <a:p>
+            <a:pPr marL="0" indent="0" algn="ctr">
+              <a:lnSpc>
+                <a:spcPts val="4500"/>
+              </a:lnSpc>
+              <a:buNone/>
+            </a:pPr>
+            <a:r>
+              <a:rPr lang="en-GB" sz="3600" i="1" dirty="0"/>
+              <a:t>There are useful resources available for you</a:t>
+            </a:r>
+          </a:p>
+          <a:p>
+            <a:pPr marL="0" indent="0" algn="ctr">
+              <a:lnSpc>
+                <a:spcPts val="4500"/>
+              </a:lnSpc>
+              <a:buNone/>
+            </a:pPr>
+            <a:r>
+              <a:rPr lang="en-GB" sz="3600" i="1" dirty="0"/>
+              <a:t>Demystify and simplify what an Agent is</a:t>
+            </a:r>
+          </a:p>
+          <a:p>
+            <a:pPr marL="0" indent="0">
+              <a:lnSpc>
+                <a:spcPts val="4500"/>
+              </a:lnSpc>
+              <a:buNone/>
+            </a:pPr>
+            <a:r>
+              <a:rPr lang="en-GB" sz="3600" dirty="0"/>
+              <a:t>There will be some slides and then we will dive into the code and manual (website).</a:t>
+            </a:r>
+          </a:p>
+          <a:p>
+            <a:pPr marL="0" indent="0" algn="ctr">
+              <a:lnSpc>
+                <a:spcPts val="4500"/>
+              </a:lnSpc>
+              <a:buNone/>
+            </a:pPr>
+            <a:endParaRPr lang="en-GB" sz="3600" i="1" dirty="0"/>
+          </a:p>
+        </p:txBody>
+      </p:sp>
+    </p:spTree>
+    <p:extLst>
+      <p:ext uri="{BB962C8B-B14F-4D97-AF65-F5344CB8AC3E}">
+        <p14:creationId xmlns:p14="http://schemas.microsoft.com/office/powerpoint/2010/main" val="3305599937"/>
+      </p:ext>
+    </p:extLst>
+  </p:cSld>
+  <p:clrMapOvr>
+    <a:masterClrMapping/>
+  </p:clrMapOvr>
+</p:sld>
+</file>
+
+<file path=ppt/slides/slide4.xml><?xml version="1.0" encoding="utf-8"?>
+<p:sld xmlns:a="http://schemas.openxmlformats.org/drawingml/2006/main" xmlns:r="http://schemas.openxmlformats.org/officeDocument/2006/relationships" xmlns:p="http://schemas.openxmlformats.org/presentationml/2006/main">
+  <p:cSld>
+    <p:bg>
+      <p:bgPr>
+        <a:solidFill>
+          <a:srgbClr val="FAF0E6"/>
+        </a:solidFill>
+        <a:effectLst/>
+      </p:bgPr>
+    </p:bg>
+    <p:spTree>
+      <p:nvGrpSpPr>
+        <p:cNvPr id="1" name="">
+          <a:extLst>
+            <a:ext uri="{FF2B5EF4-FFF2-40B4-BE49-F238E27FC236}">
+              <a16:creationId xmlns:a16="http://schemas.microsoft.com/office/drawing/2014/main" id="{DB223AA4-507E-D8B3-7DEB-D9083974AB61}"/>
+            </a:ext>
+          </a:extLst>
+        </p:cNvPr>
+        <p:cNvGrpSpPr/>
+        <p:nvPr/>
+      </p:nvGrpSpPr>
+      <p:grpSpPr>
+        <a:xfrm>
+          <a:off x="0" y="0"/>
+          <a:ext cx="0" cy="0"/>
+          <a:chOff x="0" y="0"/>
+          <a:chExt cx="0" cy="0"/>
+        </a:xfrm>
+      </p:grpSpPr>
+      <p:sp>
+        <p:nvSpPr>
+          <p:cNvPr id="2" name="Title 1">
+            <a:extLst>
+              <a:ext uri="{FF2B5EF4-FFF2-40B4-BE49-F238E27FC236}">
+                <a16:creationId xmlns:a16="http://schemas.microsoft.com/office/drawing/2014/main" id="{CA99CC66-10D3-E183-1C5E-7DBAE8756398}"/>
+              </a:ext>
+            </a:extLst>
+          </p:cNvPr>
+          <p:cNvSpPr>
+            <a:spLocks noGrp="1"/>
+          </p:cNvSpPr>
+          <p:nvPr>
+            <p:ph type="title"/>
+          </p:nvPr>
+        </p:nvSpPr>
+        <p:spPr>
+          <a:xfrm>
+            <a:off x="919314" y="190464"/>
+            <a:ext cx="10515600" cy="1325563"/>
+          </a:xfrm>
+        </p:spPr>
+        <p:txBody>
+          <a:bodyPr/>
+          <a:lstStyle/>
+          <a:p>
+            <a:r>
+              <a:rPr lang="en-GB" dirty="0">
+                <a:solidFill>
+                  <a:srgbClr val="676767"/>
+                </a:solidFill>
+              </a:rPr>
+              <a:t>180-degree shift</a:t>
+            </a:r>
+          </a:p>
+        </p:txBody>
+      </p:sp>
+      <p:pic>
+        <p:nvPicPr>
+          <p:cNvPr id="5" name="Picture 4" descr="A black computer mouse on a white background&#10;&#10;AI-generated content may be incorrect.">
+            <a:extLst>
+              <a:ext uri="{FF2B5EF4-FFF2-40B4-BE49-F238E27FC236}">
+                <a16:creationId xmlns:a16="http://schemas.microsoft.com/office/drawing/2014/main" id="{4C2BFCCB-3F23-3098-3C1E-2D76213CD97C}"/>
+              </a:ext>
+            </a:extLst>
+          </p:cNvPr>
+          <p:cNvPicPr>
+            <a:picLocks noChangeAspect="1"/>
+          </p:cNvPicPr>
+          <p:nvPr/>
+        </p:nvPicPr>
+        <p:blipFill>
+          <a:blip r:embed="rId2">
+            <a:extLst>
+              <a:ext uri="{28A0092B-C50C-407E-A947-70E740481C1C}">
+                <a14:useLocalDpi xmlns:a14="http://schemas.microsoft.com/office/drawing/2010/main" val="0"/>
+              </a:ext>
+            </a:extLst>
+          </a:blip>
+          <a:stretch>
+            <a:fillRect/>
+          </a:stretch>
+        </p:blipFill>
+        <p:spPr>
+          <a:xfrm rot="10800000">
+            <a:off x="8057775" y="1847529"/>
+            <a:ext cx="2466975" cy="1847850"/>
+          </a:xfrm>
+          <a:prstGeom prst="rect">
+            <a:avLst/>
+          </a:prstGeom>
+        </p:spPr>
+      </p:pic>
+      <p:pic>
+        <p:nvPicPr>
+          <p:cNvPr id="7" name="Picture 6" descr="A black computer mouse on a white background&#10;&#10;AI-generated content may be incorrect.">
+            <a:extLst>
+              <a:ext uri="{FF2B5EF4-FFF2-40B4-BE49-F238E27FC236}">
+                <a16:creationId xmlns:a16="http://schemas.microsoft.com/office/drawing/2014/main" id="{BDAFD253-325D-AA4F-E8B1-F2175AD4ED24}"/>
+              </a:ext>
+            </a:extLst>
+          </p:cNvPr>
+          <p:cNvPicPr>
+            <a:picLocks noChangeAspect="1"/>
+          </p:cNvPicPr>
+          <p:nvPr/>
+        </p:nvPicPr>
+        <p:blipFill>
+          <a:blip r:embed="rId3">
+            <a:extLst>
+              <a:ext uri="{28A0092B-C50C-407E-A947-70E740481C1C}">
+                <a14:useLocalDpi xmlns:a14="http://schemas.microsoft.com/office/drawing/2010/main" val="0"/>
+              </a:ext>
+            </a:extLst>
+          </a:blip>
+          <a:stretch>
+            <a:fillRect/>
+          </a:stretch>
+        </p:blipFill>
+        <p:spPr>
+          <a:xfrm>
+            <a:off x="1108332" y="1847530"/>
+            <a:ext cx="2466975" cy="1847850"/>
+          </a:xfrm>
+          <a:prstGeom prst="rect">
+            <a:avLst/>
+          </a:prstGeom>
+        </p:spPr>
+      </p:pic>
+      <p:sp>
+        <p:nvSpPr>
+          <p:cNvPr id="8" name="TextBox 7">
+            <a:extLst>
+              <a:ext uri="{FF2B5EF4-FFF2-40B4-BE49-F238E27FC236}">
+                <a16:creationId xmlns:a16="http://schemas.microsoft.com/office/drawing/2014/main" id="{C85A72E3-B4A4-739E-FAF5-D9B5DFCEC120}"/>
+              </a:ext>
+            </a:extLst>
+          </p:cNvPr>
+          <p:cNvSpPr txBox="1"/>
+          <p:nvPr/>
+        </p:nvSpPr>
+        <p:spPr>
+          <a:xfrm>
+            <a:off x="750014" y="4099388"/>
+            <a:ext cx="11065267" cy="523220"/>
+          </a:xfrm>
+          <a:prstGeom prst="rect">
+            <a:avLst/>
+          </a:prstGeom>
+          <a:noFill/>
+        </p:spPr>
+        <p:txBody>
+          <a:bodyPr wrap="square" rtlCol="0">
+            <a:spAutoFit/>
+          </a:bodyPr>
+          <a:lstStyle/>
+          <a:p>
+            <a:r>
+              <a:rPr lang="en-GB" sz="2800" dirty="0"/>
+              <a:t>No more difficult than what we do currently – just 180 degrees different</a:t>
+            </a:r>
+          </a:p>
+        </p:txBody>
+      </p:sp>
+      <p:sp>
+        <p:nvSpPr>
+          <p:cNvPr id="9" name="Arrow: Curved Down 8">
+            <a:extLst>
+              <a:ext uri="{FF2B5EF4-FFF2-40B4-BE49-F238E27FC236}">
+                <a16:creationId xmlns:a16="http://schemas.microsoft.com/office/drawing/2014/main" id="{53323BF1-393A-213D-B6C3-D6FAA296990D}"/>
+              </a:ext>
+            </a:extLst>
+          </p:cNvPr>
+          <p:cNvSpPr/>
+          <p:nvPr/>
+        </p:nvSpPr>
+        <p:spPr>
+          <a:xfrm>
+            <a:off x="4224046" y="1899809"/>
+            <a:ext cx="3184989" cy="1743290"/>
+          </a:xfrm>
+          <a:prstGeom prst="curvedDownArrow">
+            <a:avLst/>
+          </a:prstGeom>
+          <a:solidFill>
+            <a:schemeClr val="accent2">
+              <a:lumMod val="75000"/>
+            </a:schemeClr>
+          </a:solidFill>
+        </p:spPr>
+        <p:style>
+          <a:lnRef idx="2">
+            <a:schemeClr val="accent1">
+              <a:shade val="15000"/>
+            </a:schemeClr>
+          </a:lnRef>
+          <a:fillRef idx="1">
+            <a:schemeClr val="accent1"/>
+          </a:fillRef>
+          <a:effectRef idx="0">
+            <a:schemeClr val="accent1"/>
+          </a:effectRef>
+          <a:fontRef idx="minor">
+            <a:schemeClr val="lt1"/>
+          </a:fontRef>
+        </p:style>
+        <p:txBody>
+          <a:bodyPr rtlCol="0" anchor="ctr"/>
+          <a:lstStyle/>
+          <a:p>
+            <a:pPr algn="ctr"/>
+            <a:endParaRPr lang="en-GB">
+              <a:solidFill>
+                <a:schemeClr val="tx1"/>
+              </a:solidFill>
+            </a:endParaRPr>
+          </a:p>
+        </p:txBody>
+      </p:sp>
+      <p:sp>
+        <p:nvSpPr>
+          <p:cNvPr id="10" name="TextBox 9">
+            <a:extLst>
+              <a:ext uri="{FF2B5EF4-FFF2-40B4-BE49-F238E27FC236}">
+                <a16:creationId xmlns:a16="http://schemas.microsoft.com/office/drawing/2014/main" id="{A85AE486-5F44-81B6-3E5C-D762ABEA4AC2}"/>
+              </a:ext>
+            </a:extLst>
+          </p:cNvPr>
+          <p:cNvSpPr txBox="1"/>
+          <p:nvPr/>
+        </p:nvSpPr>
+        <p:spPr>
+          <a:xfrm>
+            <a:off x="750014" y="5078897"/>
+            <a:ext cx="11065267" cy="523220"/>
+          </a:xfrm>
+          <a:prstGeom prst="rect">
+            <a:avLst/>
+          </a:prstGeom>
+          <a:noFill/>
+        </p:spPr>
+        <p:txBody>
+          <a:bodyPr wrap="square" rtlCol="0">
+            <a:spAutoFit/>
+          </a:bodyPr>
+          <a:lstStyle/>
+          <a:p>
+            <a:pPr algn="ctr"/>
+            <a:r>
+              <a:rPr lang="en-GB" sz="2800" dirty="0"/>
+              <a:t>“It doesn’t get any easier – just different” - Anon </a:t>
+            </a:r>
+          </a:p>
+        </p:txBody>
+      </p:sp>
+    </p:spTree>
+    <p:extLst>
+      <p:ext uri="{BB962C8B-B14F-4D97-AF65-F5344CB8AC3E}">
+        <p14:creationId xmlns:p14="http://schemas.microsoft.com/office/powerpoint/2010/main" val="3122446014"/>
+      </p:ext>
+    </p:extLst>
+  </p:cSld>
+  <p:clrMapOvr>
+    <a:masterClrMapping/>
+  </p:clrMapOvr>
+</p:sld>
+</file>
+
+<file path=ppt/slides/slide5.xml><?xml version="1.0" encoding="utf-8"?>
+<p:sld xmlns:a="http://schemas.openxmlformats.org/drawingml/2006/main" xmlns:r="http://schemas.openxmlformats.org/officeDocument/2006/relationships" xmlns:p="http://schemas.openxmlformats.org/presentationml/2006/main">
+  <p:cSld>
+    <p:bg>
+      <p:bgPr>
+        <a:solidFill>
+          <a:srgbClr val="FAF0E6"/>
+        </a:solidFill>
+        <a:effectLst/>
+      </p:bgPr>
+    </p:bg>
+    <p:spTree>
+      <p:nvGrpSpPr>
+        <p:cNvPr id="1" name="">
+          <a:extLst>
+            <a:ext uri="{FF2B5EF4-FFF2-40B4-BE49-F238E27FC236}">
               <a16:creationId xmlns:a16="http://schemas.microsoft.com/office/drawing/2014/main" id="{8D8112AC-AE1E-512F-6403-62CFC187D1B2}"/>
             </a:ext>
           </a:extLst>
@@ -7658,7 +8186,7 @@
 </p:sld>
 </file>
 
-<file path=ppt/slides/slide4.xml><?xml version="1.0" encoding="utf-8"?>
+<file path=ppt/slides/slide6.xml><?xml version="1.0" encoding="utf-8"?>
 <p:sld xmlns:a="http://schemas.openxmlformats.org/drawingml/2006/main" xmlns:r="http://schemas.openxmlformats.org/officeDocument/2006/relationships" xmlns:p="http://schemas.openxmlformats.org/presentationml/2006/main">
   <p:cSld>
     <p:bg>
@@ -7850,7 +8378,7 @@
 </p:sld>
 </file>
 
-<file path=ppt/slides/slide5.xml><?xml version="1.0" encoding="utf-8"?>
+<file path=ppt/slides/slide7.xml><?xml version="1.0" encoding="utf-8"?>
 <p:sld xmlns:a="http://schemas.openxmlformats.org/drawingml/2006/main" xmlns:r="http://schemas.openxmlformats.org/officeDocument/2006/relationships" xmlns:p="http://schemas.openxmlformats.org/presentationml/2006/main">
   <p:cSld>
     <p:bg>
@@ -8009,530 +8537,6 @@
     <p:extLst>
       <p:ext uri="{BB962C8B-B14F-4D97-AF65-F5344CB8AC3E}">
         <p14:creationId xmlns:p14="http://schemas.microsoft.com/office/powerpoint/2010/main" val="3279871281"/>
-      </p:ext>
-    </p:extLst>
-  </p:cSld>
-  <p:clrMapOvr>
-    <a:masterClrMapping/>
-  </p:clrMapOvr>
-</p:sld>
-</file>
-
-<file path=ppt/slides/slide6.xml><?xml version="1.0" encoding="utf-8"?>
-<p:sld xmlns:a="http://schemas.openxmlformats.org/drawingml/2006/main" xmlns:r="http://schemas.openxmlformats.org/officeDocument/2006/relationships" xmlns:p="http://schemas.openxmlformats.org/presentationml/2006/main">
-  <p:cSld>
-    <p:bg>
-      <p:bgPr>
-        <a:solidFill>
-          <a:srgbClr val="FAF0E6"/>
-        </a:solidFill>
-        <a:effectLst/>
-      </p:bgPr>
-    </p:bg>
-    <p:spTree>
-      <p:nvGrpSpPr>
-        <p:cNvPr id="1" name="">
-          <a:extLst>
-            <a:ext uri="{FF2B5EF4-FFF2-40B4-BE49-F238E27FC236}">
-              <a16:creationId xmlns:a16="http://schemas.microsoft.com/office/drawing/2014/main" id="{FF357D8D-75A6-7D51-8D6A-0577ACB955CF}"/>
-            </a:ext>
-          </a:extLst>
-        </p:cNvPr>
-        <p:cNvGrpSpPr/>
-        <p:nvPr/>
-      </p:nvGrpSpPr>
-      <p:grpSpPr>
-        <a:xfrm>
-          <a:off x="0" y="0"/>
-          <a:ext cx="0" cy="0"/>
-          <a:chOff x="0" y="0"/>
-          <a:chExt cx="0" cy="0"/>
-        </a:xfrm>
-      </p:grpSpPr>
-      <p:sp>
-        <p:nvSpPr>
-          <p:cNvPr id="2" name="Title 1">
-            <a:extLst>
-              <a:ext uri="{FF2B5EF4-FFF2-40B4-BE49-F238E27FC236}">
-                <a16:creationId xmlns:a16="http://schemas.microsoft.com/office/drawing/2014/main" id="{17F2B0CC-EE48-6084-A4EA-5B5D152A8A2B}"/>
-              </a:ext>
-            </a:extLst>
-          </p:cNvPr>
-          <p:cNvSpPr>
-            <a:spLocks noGrp="1"/>
-          </p:cNvSpPr>
-          <p:nvPr>
-            <p:ph type="title"/>
-          </p:nvPr>
-        </p:nvSpPr>
-        <p:spPr>
-          <a:xfrm>
-            <a:off x="919314" y="190464"/>
-            <a:ext cx="10515600" cy="1325563"/>
-          </a:xfrm>
-        </p:spPr>
-        <p:txBody>
-          <a:bodyPr/>
-          <a:lstStyle/>
-          <a:p>
-            <a:r>
-              <a:rPr lang="en-GB" dirty="0">
-                <a:solidFill>
-                  <a:srgbClr val="676767"/>
-                </a:solidFill>
-              </a:rPr>
-              <a:t>My desired outcome</a:t>
-            </a:r>
-          </a:p>
-        </p:txBody>
-      </p:sp>
-      <p:sp>
-        <p:nvSpPr>
-          <p:cNvPr id="3" name="Content Placeholder 2">
-            <a:extLst>
-              <a:ext uri="{FF2B5EF4-FFF2-40B4-BE49-F238E27FC236}">
-                <a16:creationId xmlns:a16="http://schemas.microsoft.com/office/drawing/2014/main" id="{02C99520-102A-F40A-3D72-928418B9CD25}"/>
-              </a:ext>
-            </a:extLst>
-          </p:cNvPr>
-          <p:cNvSpPr>
-            <a:spLocks noGrp="1"/>
-          </p:cNvSpPr>
-          <p:nvPr>
-            <p:ph idx="1"/>
-          </p:nvPr>
-        </p:nvSpPr>
-        <p:spPr>
-          <a:xfrm>
-            <a:off x="919314" y="1413031"/>
-            <a:ext cx="10596715" cy="4906652"/>
-          </a:xfrm>
-          <a:solidFill>
-            <a:srgbClr val="FAF0E6"/>
-          </a:solidFill>
-        </p:spPr>
-        <p:txBody>
-          <a:bodyPr>
-            <a:normAutofit/>
-          </a:bodyPr>
-          <a:lstStyle/>
-          <a:p>
-            <a:pPr marL="0" indent="0">
-              <a:lnSpc>
-                <a:spcPts val="4500"/>
-              </a:lnSpc>
-              <a:buNone/>
-            </a:pPr>
-            <a:r>
-              <a:rPr lang="en-GB" sz="4000" dirty="0"/>
-              <a:t>Not for you to fully understand Evals</a:t>
-            </a:r>
-          </a:p>
-          <a:p>
-            <a:pPr marL="0" indent="0">
-              <a:lnSpc>
-                <a:spcPts val="4500"/>
-              </a:lnSpc>
-              <a:buNone/>
-            </a:pPr>
-            <a:r>
-              <a:rPr lang="en-GB" sz="4000" i="1" dirty="0"/>
-              <a:t>But…</a:t>
-            </a:r>
-          </a:p>
-          <a:p>
-            <a:pPr marL="0" indent="0" algn="ctr">
-              <a:lnSpc>
-                <a:spcPts val="4500"/>
-              </a:lnSpc>
-              <a:buNone/>
-            </a:pPr>
-            <a:r>
-              <a:rPr lang="en-GB" sz="3600" i="1" dirty="0"/>
-              <a:t>That Evals are doable</a:t>
-            </a:r>
-          </a:p>
-          <a:p>
-            <a:pPr marL="0" indent="0" algn="ctr">
-              <a:lnSpc>
-                <a:spcPts val="4500"/>
-              </a:lnSpc>
-              <a:buNone/>
-            </a:pPr>
-            <a:r>
-              <a:rPr lang="en-GB" sz="3600" i="1" dirty="0"/>
-              <a:t>There are useful resources available for you</a:t>
-            </a:r>
-          </a:p>
-          <a:p>
-            <a:pPr marL="0" indent="0" algn="ctr">
-              <a:lnSpc>
-                <a:spcPts val="4500"/>
-              </a:lnSpc>
-              <a:buNone/>
-            </a:pPr>
-            <a:r>
-              <a:rPr lang="en-GB" sz="3600" i="1" dirty="0"/>
-              <a:t>Demystify and simplify what an Agent is</a:t>
-            </a:r>
-          </a:p>
-          <a:p>
-            <a:pPr marL="0" indent="0">
-              <a:lnSpc>
-                <a:spcPts val="4500"/>
-              </a:lnSpc>
-              <a:buNone/>
-            </a:pPr>
-            <a:r>
-              <a:rPr lang="en-GB" sz="3600" dirty="0"/>
-              <a:t>There will be some slides and then we will dive into the code and manual (website).</a:t>
-            </a:r>
-          </a:p>
-          <a:p>
-            <a:pPr marL="0" indent="0" algn="ctr">
-              <a:lnSpc>
-                <a:spcPts val="4500"/>
-              </a:lnSpc>
-              <a:buNone/>
-            </a:pPr>
-            <a:endParaRPr lang="en-GB" sz="3600" i="1" dirty="0"/>
-          </a:p>
-        </p:txBody>
-      </p:sp>
-    </p:spTree>
-    <p:extLst>
-      <p:ext uri="{BB962C8B-B14F-4D97-AF65-F5344CB8AC3E}">
-        <p14:creationId xmlns:p14="http://schemas.microsoft.com/office/powerpoint/2010/main" val="3305599937"/>
-      </p:ext>
-    </p:extLst>
-  </p:cSld>
-  <p:clrMapOvr>
-    <a:masterClrMapping/>
-  </p:clrMapOvr>
-</p:sld>
-</file>
-
-<file path=ppt/slides/slide7.xml><?xml version="1.0" encoding="utf-8"?>
-<p:sld xmlns:a="http://schemas.openxmlformats.org/drawingml/2006/main" xmlns:r="http://schemas.openxmlformats.org/officeDocument/2006/relationships" xmlns:p="http://schemas.openxmlformats.org/presentationml/2006/main">
-  <p:cSld>
-    <p:bg>
-      <p:bgPr>
-        <a:solidFill>
-          <a:srgbClr val="FAF0E6"/>
-        </a:solidFill>
-        <a:effectLst/>
-      </p:bgPr>
-    </p:bg>
-    <p:spTree>
-      <p:nvGrpSpPr>
-        <p:cNvPr id="1" name="">
-          <a:extLst>
-            <a:ext uri="{FF2B5EF4-FFF2-40B4-BE49-F238E27FC236}">
-              <a16:creationId xmlns:a16="http://schemas.microsoft.com/office/drawing/2014/main" id="{3B3CAD92-64A2-9E64-259C-D0FEF3A00383}"/>
-            </a:ext>
-          </a:extLst>
-        </p:cNvPr>
-        <p:cNvGrpSpPr/>
-        <p:nvPr/>
-      </p:nvGrpSpPr>
-      <p:grpSpPr>
-        <a:xfrm>
-          <a:off x="0" y="0"/>
-          <a:ext cx="0" cy="0"/>
-          <a:chOff x="0" y="0"/>
-          <a:chExt cx="0" cy="0"/>
-        </a:xfrm>
-      </p:grpSpPr>
-      <p:sp>
-        <p:nvSpPr>
-          <p:cNvPr id="2" name="Title 1">
-            <a:extLst>
-              <a:ext uri="{FF2B5EF4-FFF2-40B4-BE49-F238E27FC236}">
-                <a16:creationId xmlns:a16="http://schemas.microsoft.com/office/drawing/2014/main" id="{36969965-CBD5-3274-6734-01C0F3F1DE75}"/>
-              </a:ext>
-            </a:extLst>
-          </p:cNvPr>
-          <p:cNvSpPr>
-            <a:spLocks noGrp="1"/>
-          </p:cNvSpPr>
-          <p:nvPr>
-            <p:ph type="title"/>
-          </p:nvPr>
-        </p:nvSpPr>
-        <p:spPr>
-          <a:xfrm>
-            <a:off x="919314" y="190464"/>
-            <a:ext cx="10515600" cy="1325563"/>
-          </a:xfrm>
-        </p:spPr>
-        <p:txBody>
-          <a:bodyPr/>
-          <a:lstStyle/>
-          <a:p>
-            <a:r>
-              <a:rPr lang="en-GB">
-                <a:solidFill>
-                  <a:srgbClr val="676767"/>
-                </a:solidFill>
-              </a:rPr>
-              <a:t>About me</a:t>
-            </a:r>
-            <a:endParaRPr lang="en-GB" dirty="0">
-              <a:solidFill>
-                <a:srgbClr val="676767"/>
-              </a:solidFill>
-            </a:endParaRPr>
-          </a:p>
-        </p:txBody>
-      </p:sp>
-      <p:sp>
-        <p:nvSpPr>
-          <p:cNvPr id="3" name="Content Placeholder 2">
-            <a:extLst>
-              <a:ext uri="{FF2B5EF4-FFF2-40B4-BE49-F238E27FC236}">
-                <a16:creationId xmlns:a16="http://schemas.microsoft.com/office/drawing/2014/main" id="{FA6ED4D5-40EE-1AD6-45EB-5319021B107B}"/>
-              </a:ext>
-            </a:extLst>
-          </p:cNvPr>
-          <p:cNvSpPr>
-            <a:spLocks noGrp="1"/>
-          </p:cNvSpPr>
-          <p:nvPr>
-            <p:ph idx="1"/>
-          </p:nvPr>
-        </p:nvSpPr>
-        <p:spPr>
-          <a:xfrm>
-            <a:off x="878756" y="1306963"/>
-            <a:ext cx="10596715" cy="5013125"/>
-          </a:xfrm>
-          <a:solidFill>
-            <a:srgbClr val="FAF0E6"/>
-          </a:solidFill>
-        </p:spPr>
-        <p:txBody>
-          <a:bodyPr>
-            <a:normAutofit/>
-          </a:bodyPr>
-          <a:lstStyle/>
-          <a:p>
-            <a:pPr marL="0" indent="0">
-              <a:buNone/>
-            </a:pPr>
-            <a:endParaRPr lang="en-GB"/>
-          </a:p>
-          <a:p>
-            <a:pPr marL="0" indent="0">
-              <a:buNone/>
-            </a:pPr>
-            <a:endParaRPr lang="en-GB"/>
-          </a:p>
-          <a:p>
-            <a:pPr marL="0" indent="0">
-              <a:buNone/>
-            </a:pPr>
-            <a:endParaRPr lang="en-GB"/>
-          </a:p>
-          <a:p>
-            <a:pPr marL="0" indent="0">
-              <a:buNone/>
-            </a:pPr>
-            <a:endParaRPr lang="en-GB"/>
-          </a:p>
-          <a:p>
-            <a:pPr marL="0" indent="0">
-              <a:buNone/>
-            </a:pPr>
-            <a:endParaRPr lang="en-GB"/>
-          </a:p>
-          <a:p>
-            <a:pPr marL="0" indent="0">
-              <a:buNone/>
-            </a:pPr>
-            <a:endParaRPr lang="en-GB" dirty="0"/>
-          </a:p>
-        </p:txBody>
-      </p:sp>
-      <p:pic>
-        <p:nvPicPr>
-          <p:cNvPr id="5" name="Picture 4" descr="A close-up of a machine&#10;&#10;AI-generated content may be incorrect.">
-            <a:extLst>
-              <a:ext uri="{FF2B5EF4-FFF2-40B4-BE49-F238E27FC236}">
-                <a16:creationId xmlns:a16="http://schemas.microsoft.com/office/drawing/2014/main" id="{F3C50833-41C6-6D1F-F30A-524D489332FD}"/>
-              </a:ext>
-            </a:extLst>
-          </p:cNvPr>
-          <p:cNvPicPr>
-            <a:picLocks noChangeAspect="1"/>
-          </p:cNvPicPr>
-          <p:nvPr/>
-        </p:nvPicPr>
-        <p:blipFill>
-          <a:blip r:embed="rId2">
-            <a:extLst>
-              <a:ext uri="{28A0092B-C50C-407E-A947-70E740481C1C}">
-                <a14:useLocalDpi xmlns:a14="http://schemas.microsoft.com/office/drawing/2010/main" val="0"/>
-              </a:ext>
-            </a:extLst>
-          </a:blip>
-          <a:stretch>
-            <a:fillRect/>
-          </a:stretch>
-        </p:blipFill>
-        <p:spPr>
-          <a:xfrm>
-            <a:off x="8116584" y="1248913"/>
-            <a:ext cx="3689634" cy="2767226"/>
-          </a:xfrm>
-          <a:prstGeom prst="rect">
-            <a:avLst/>
-          </a:prstGeom>
-        </p:spPr>
-      </p:pic>
-      <p:pic>
-        <p:nvPicPr>
-          <p:cNvPr id="7" name="Picture 6">
-            <a:extLst>
-              <a:ext uri="{FF2B5EF4-FFF2-40B4-BE49-F238E27FC236}">
-                <a16:creationId xmlns:a16="http://schemas.microsoft.com/office/drawing/2014/main" id="{C72068A3-9DA4-4572-DE52-739BD2F63608}"/>
-              </a:ext>
-            </a:extLst>
-          </p:cNvPr>
-          <p:cNvPicPr>
-            <a:picLocks noChangeAspect="1"/>
-          </p:cNvPicPr>
-          <p:nvPr/>
-        </p:nvPicPr>
-        <p:blipFill>
-          <a:blip r:embed="rId3">
-            <a:extLst>
-              <a:ext uri="{28A0092B-C50C-407E-A947-70E740481C1C}">
-                <a14:useLocalDpi xmlns:a14="http://schemas.microsoft.com/office/drawing/2010/main" val="0"/>
-              </a:ext>
-            </a:extLst>
-          </a:blip>
-          <a:srcRect/>
-          <a:stretch/>
-        </p:blipFill>
-        <p:spPr>
-          <a:xfrm>
-            <a:off x="4032947" y="1337937"/>
-            <a:ext cx="1717803" cy="2742790"/>
-          </a:xfrm>
-          <a:prstGeom prst="rect">
-            <a:avLst/>
-          </a:prstGeom>
-        </p:spPr>
-      </p:pic>
-      <p:pic>
-        <p:nvPicPr>
-          <p:cNvPr id="9" name="Picture 8">
-            <a:extLst>
-              <a:ext uri="{FF2B5EF4-FFF2-40B4-BE49-F238E27FC236}">
-                <a16:creationId xmlns:a16="http://schemas.microsoft.com/office/drawing/2014/main" id="{D9040783-80F7-1202-94D3-180CF27290FA}"/>
-              </a:ext>
-            </a:extLst>
-          </p:cNvPr>
-          <p:cNvPicPr>
-            <a:picLocks noChangeAspect="1"/>
-          </p:cNvPicPr>
-          <p:nvPr/>
-        </p:nvPicPr>
-        <p:blipFill>
-          <a:blip r:embed="rId4">
-            <a:extLst>
-              <a:ext uri="{28A0092B-C50C-407E-A947-70E740481C1C}">
-                <a14:useLocalDpi xmlns:a14="http://schemas.microsoft.com/office/drawing/2010/main" val="0"/>
-              </a:ext>
-            </a:extLst>
-          </a:blip>
-          <a:srcRect/>
-          <a:stretch/>
-        </p:blipFill>
-        <p:spPr>
-          <a:xfrm>
-            <a:off x="5921733" y="1367823"/>
-            <a:ext cx="2023867" cy="2683017"/>
-          </a:xfrm>
-          <a:prstGeom prst="rect">
-            <a:avLst/>
-          </a:prstGeom>
-        </p:spPr>
-      </p:pic>
-      <p:pic>
-        <p:nvPicPr>
-          <p:cNvPr id="11" name="Picture 10">
-            <a:extLst>
-              <a:ext uri="{FF2B5EF4-FFF2-40B4-BE49-F238E27FC236}">
-                <a16:creationId xmlns:a16="http://schemas.microsoft.com/office/drawing/2014/main" id="{2DCAABF9-7D6A-30DB-DFA8-35DA30991B03}"/>
-              </a:ext>
-            </a:extLst>
-          </p:cNvPr>
-          <p:cNvPicPr>
-            <a:picLocks noChangeAspect="1"/>
-          </p:cNvPicPr>
-          <p:nvPr/>
-        </p:nvPicPr>
-        <p:blipFill>
-          <a:blip r:embed="rId5">
-            <a:extLst>
-              <a:ext uri="{28A0092B-C50C-407E-A947-70E740481C1C}">
-                <a14:useLocalDpi xmlns:a14="http://schemas.microsoft.com/office/drawing/2010/main" val="0"/>
-              </a:ext>
-            </a:extLst>
-          </a:blip>
-          <a:srcRect/>
-          <a:stretch/>
-        </p:blipFill>
-        <p:spPr>
-          <a:xfrm>
-            <a:off x="2713098" y="4212445"/>
-            <a:ext cx="6417269" cy="2555464"/>
-          </a:xfrm>
-          <a:prstGeom prst="rect">
-            <a:avLst/>
-          </a:prstGeom>
-        </p:spPr>
-      </p:pic>
-      <p:pic>
-        <p:nvPicPr>
-          <p:cNvPr id="13" name="Picture 12">
-            <a:extLst>
-              <a:ext uri="{FF2B5EF4-FFF2-40B4-BE49-F238E27FC236}">
-                <a16:creationId xmlns:a16="http://schemas.microsoft.com/office/drawing/2014/main" id="{6AD9A928-8A3F-EBB4-94C3-AF298183888F}"/>
-              </a:ext>
-            </a:extLst>
-          </p:cNvPr>
-          <p:cNvPicPr>
-            <a:picLocks noChangeAspect="1"/>
-          </p:cNvPicPr>
-          <p:nvPr/>
-        </p:nvPicPr>
-        <p:blipFill>
-          <a:blip r:embed="rId6">
-            <a:extLst>
-              <a:ext uri="{28A0092B-C50C-407E-A947-70E740481C1C}">
-                <a14:useLocalDpi xmlns:a14="http://schemas.microsoft.com/office/drawing/2010/main" val="0"/>
-              </a:ext>
-            </a:extLst>
-          </a:blip>
-          <a:srcRect/>
-          <a:stretch/>
-        </p:blipFill>
-        <p:spPr>
-          <a:xfrm>
-            <a:off x="919314" y="1306963"/>
-            <a:ext cx="2782886" cy="2782886"/>
-          </a:xfrm>
-          <a:prstGeom prst="rect">
-            <a:avLst/>
-          </a:prstGeom>
-        </p:spPr>
-      </p:pic>
-    </p:spTree>
-    <p:extLst>
-      <p:ext uri="{BB962C8B-B14F-4D97-AF65-F5344CB8AC3E}">
-        <p14:creationId xmlns:p14="http://schemas.microsoft.com/office/powerpoint/2010/main" val="2700586660"/>
       </p:ext>
     </p:extLst>
   </p:cSld>

--- a/PYDATA_SOUTHAMPTON_16SEP2025.pptx
+++ b/PYDATA_SOUTHAMPTON_16SEP2025.pptx
@@ -148,6 +148,95 @@
 </p1510:revInfo>
 </file>
 
+<file path=ppt/ink/ink1.xml><?xml version="1.0" encoding="utf-8"?>
+<inkml:ink xmlns:inkml="http://www.w3.org/2003/InkML">
+  <inkml:definitions>
+    <inkml:context xml:id="ctx0">
+      <inkml:inkSource xml:id="inkSrc0">
+        <inkml:traceFormat>
+          <inkml:channel name="X" type="integer" min="-2.14748E9" max="2.14748E9" units="cm"/>
+          <inkml:channel name="Y" type="integer" min="-2.14748E9" max="2.14748E9" units="cm"/>
+        </inkml:traceFormat>
+        <inkml:channelProperties>
+          <inkml:channelProperty channel="X" name="resolution" value="1000" units="1/cm"/>
+          <inkml:channelProperty channel="Y" name="resolution" value="1000" units="1/cm"/>
+        </inkml:channelProperties>
+      </inkml:inkSource>
+      <inkml:timestamp xml:id="ts0" timeString="2025-09-16T12:25:40.033"/>
+    </inkml:context>
+    <inkml:brush xml:id="br0">
+      <inkml:brushProperty name="width" value="0.3" units="cm"/>
+      <inkml:brushProperty name="height" value="0.6" units="cm"/>
+      <inkml:brushProperty name="color" value="#FFFC00"/>
+      <inkml:brushProperty name="tip" value="rectangle"/>
+      <inkml:brushProperty name="rasterOp" value="maskPen"/>
+      <inkml:brushProperty name="ignorePressure" value="1"/>
+    </inkml:brush>
+  </inkml:definitions>
+  <inkml:trace contextRef="#ctx0" brushRef="#br0">0 1,'3'2,"0"0,-1 1,1-1,-1 1,1 0,-1 0,0 0,0 0,0 0,-1 0,1 1,-1-1,1 0,0 5,-1-4,20 52,-2 0,-3 2,14 97,-17-45,-2 118,-10 511,-3-336,17-218,-1-25,-13-134</inkml:trace>
+</inkml:ink>
+</file>
+
+<file path=ppt/ink/ink2.xml><?xml version="1.0" encoding="utf-8"?>
+<inkml:ink xmlns:inkml="http://www.w3.org/2003/InkML">
+  <inkml:definitions>
+    <inkml:context xml:id="ctx0">
+      <inkml:inkSource xml:id="inkSrc0">
+        <inkml:traceFormat>
+          <inkml:channel name="X" type="integer" min="-2.14748E9" max="2.14748E9" units="cm"/>
+          <inkml:channel name="Y" type="integer" min="-2.14748E9" max="2.14748E9" units="cm"/>
+        </inkml:traceFormat>
+        <inkml:channelProperties>
+          <inkml:channelProperty channel="X" name="resolution" value="1000" units="1/cm"/>
+          <inkml:channelProperty channel="Y" name="resolution" value="1000" units="1/cm"/>
+        </inkml:channelProperties>
+      </inkml:inkSource>
+      <inkml:timestamp xml:id="ts0" timeString="2025-09-16T12:25:40.462"/>
+    </inkml:context>
+    <inkml:brush xml:id="br0">
+      <inkml:brushProperty name="width" value="0.3" units="cm"/>
+      <inkml:brushProperty name="height" value="0.6" units="cm"/>
+      <inkml:brushProperty name="color" value="#FFFC00"/>
+      <inkml:brushProperty name="tip" value="rectangle"/>
+      <inkml:brushProperty name="rasterOp" value="maskPen"/>
+      <inkml:brushProperty name="ignorePressure" value="1"/>
+    </inkml:brush>
+  </inkml:definitions>
+  <inkml:trace contextRef="#ctx0" brushRef="#br0">1 0,'0'0</inkml:trace>
+</inkml:ink>
+</file>
+
+<file path=ppt/ink/ink3.xml><?xml version="1.0" encoding="utf-8"?>
+<inkml:ink xmlns:inkml="http://www.w3.org/2003/InkML">
+  <inkml:definitions>
+    <inkml:context xml:id="ctx0">
+      <inkml:inkSource xml:id="inkSrc0">
+        <inkml:traceFormat>
+          <inkml:channel name="X" type="integer" min="-2.14748E9" max="2.14748E9" units="cm"/>
+          <inkml:channel name="Y" type="integer" min="-2.14748E9" max="2.14748E9" units="cm"/>
+          <inkml:channel name="F" type="integer" max="32767" units="dev"/>
+        </inkml:traceFormat>
+        <inkml:channelProperties>
+          <inkml:channelProperty channel="X" name="resolution" value="1000" units="1/cm"/>
+          <inkml:channelProperty channel="Y" name="resolution" value="1000" units="1/cm"/>
+          <inkml:channelProperty channel="F" name="resolution" value="0" units="1/dev"/>
+        </inkml:channelProperties>
+      </inkml:inkSource>
+      <inkml:timestamp xml:id="ts0" timeString="2025-09-16T12:26:02.805"/>
+    </inkml:context>
+    <inkml:brush xml:id="br0">
+      <inkml:brushProperty name="width" value="0.3" units="cm"/>
+      <inkml:brushProperty name="height" value="0.6" units="cm"/>
+      <inkml:brushProperty name="color" value="#FF2500"/>
+      <inkml:brushProperty name="tip" value="rectangle"/>
+      <inkml:brushProperty name="rasterOp" value="maskPen"/>
+      <inkml:brushProperty name="ignorePressure" value="1"/>
+    </inkml:brush>
+  </inkml:definitions>
+  <inkml:trace contextRef="#ctx0" brushRef="#br0">0 0 0,'0'3968'0</inkml:trace>
+</inkml:ink>
+</file>
+
 <file path=ppt/notesMasters/notesMaster1.xml><?xml version="1.0" encoding="utf-8"?>
 <p:notesMaster xmlns:a="http://schemas.openxmlformats.org/drawingml/2006/main" xmlns:r="http://schemas.openxmlformats.org/officeDocument/2006/relationships" xmlns:p="http://schemas.openxmlformats.org/presentationml/2006/main">
   <p:cSld>
@@ -230,7 +319,7 @@
           <a:p>
             <a:fld id="{422EBE36-D452-49B2-BC5E-F25DDEF20ED3}" type="datetimeFigureOut">
               <a:rPr lang="en-GB" smtClean="0"/>
-              <a:t>15/09/2025</a:t>
+              <a:t>16/09/2025</a:t>
             </a:fld>
             <a:endParaRPr lang="en-GB"/>
           </a:p>
@@ -731,7 +820,7 @@
           <a:p>
             <a:fld id="{87B02A21-FE86-45F5-9B8B-75D343822DB2}" type="datetimeFigureOut">
               <a:rPr lang="en-GB" smtClean="0"/>
-              <a:t>15/09/2025</a:t>
+              <a:t>16/09/2025</a:t>
             </a:fld>
             <a:endParaRPr lang="en-GB"/>
           </a:p>
@@ -931,7 +1020,7 @@
           <a:p>
             <a:fld id="{87B02A21-FE86-45F5-9B8B-75D343822DB2}" type="datetimeFigureOut">
               <a:rPr lang="en-GB" smtClean="0"/>
-              <a:t>15/09/2025</a:t>
+              <a:t>16/09/2025</a:t>
             </a:fld>
             <a:endParaRPr lang="en-GB"/>
           </a:p>
@@ -1141,7 +1230,7 @@
           <a:p>
             <a:fld id="{87B02A21-FE86-45F5-9B8B-75D343822DB2}" type="datetimeFigureOut">
               <a:rPr lang="en-GB" smtClean="0"/>
-              <a:t>15/09/2025</a:t>
+              <a:t>16/09/2025</a:t>
             </a:fld>
             <a:endParaRPr lang="en-GB"/>
           </a:p>
@@ -1341,7 +1430,7 @@
           <a:p>
             <a:fld id="{87B02A21-FE86-45F5-9B8B-75D343822DB2}" type="datetimeFigureOut">
               <a:rPr lang="en-GB" smtClean="0"/>
-              <a:t>15/09/2025</a:t>
+              <a:t>16/09/2025</a:t>
             </a:fld>
             <a:endParaRPr lang="en-GB"/>
           </a:p>
@@ -1617,7 +1706,7 @@
           <a:p>
             <a:fld id="{87B02A21-FE86-45F5-9B8B-75D343822DB2}" type="datetimeFigureOut">
               <a:rPr lang="en-GB" smtClean="0"/>
-              <a:t>15/09/2025</a:t>
+              <a:t>16/09/2025</a:t>
             </a:fld>
             <a:endParaRPr lang="en-GB"/>
           </a:p>
@@ -1885,7 +1974,7 @@
           <a:p>
             <a:fld id="{87B02A21-FE86-45F5-9B8B-75D343822DB2}" type="datetimeFigureOut">
               <a:rPr lang="en-GB" smtClean="0"/>
-              <a:t>15/09/2025</a:t>
+              <a:t>16/09/2025</a:t>
             </a:fld>
             <a:endParaRPr lang="en-GB"/>
           </a:p>
@@ -2300,7 +2389,7 @@
           <a:p>
             <a:fld id="{87B02A21-FE86-45F5-9B8B-75D343822DB2}" type="datetimeFigureOut">
               <a:rPr lang="en-GB" smtClean="0"/>
-              <a:t>15/09/2025</a:t>
+              <a:t>16/09/2025</a:t>
             </a:fld>
             <a:endParaRPr lang="en-GB"/>
           </a:p>
@@ -2442,7 +2531,7 @@
           <a:p>
             <a:fld id="{87B02A21-FE86-45F5-9B8B-75D343822DB2}" type="datetimeFigureOut">
               <a:rPr lang="en-GB" smtClean="0"/>
-              <a:t>15/09/2025</a:t>
+              <a:t>16/09/2025</a:t>
             </a:fld>
             <a:endParaRPr lang="en-GB"/>
           </a:p>
@@ -2555,7 +2644,7 @@
           <a:p>
             <a:fld id="{87B02A21-FE86-45F5-9B8B-75D343822DB2}" type="datetimeFigureOut">
               <a:rPr lang="en-GB" smtClean="0"/>
-              <a:t>15/09/2025</a:t>
+              <a:t>16/09/2025</a:t>
             </a:fld>
             <a:endParaRPr lang="en-GB"/>
           </a:p>
@@ -2868,7 +2957,7 @@
           <a:p>
             <a:fld id="{87B02A21-FE86-45F5-9B8B-75D343822DB2}" type="datetimeFigureOut">
               <a:rPr lang="en-GB" smtClean="0"/>
-              <a:t>15/09/2025</a:t>
+              <a:t>16/09/2025</a:t>
             </a:fld>
             <a:endParaRPr lang="en-GB"/>
           </a:p>
@@ -3157,7 +3246,7 @@
           <a:p>
             <a:fld id="{87B02A21-FE86-45F5-9B8B-75D343822DB2}" type="datetimeFigureOut">
               <a:rPr lang="en-GB" smtClean="0"/>
-              <a:t>15/09/2025</a:t>
+              <a:t>16/09/2025</a:t>
             </a:fld>
             <a:endParaRPr lang="en-GB"/>
           </a:p>
@@ -3400,7 +3489,7 @@
           <a:p>
             <a:fld id="{87B02A21-FE86-45F5-9B8B-75D343822DB2}" type="datetimeFigureOut">
               <a:rPr lang="en-GB" smtClean="0"/>
-              <a:t>15/09/2025</a:t>
+              <a:t>16/09/2025</a:t>
             </a:fld>
             <a:endParaRPr lang="en-GB"/>
           </a:p>
@@ -4616,6 +4705,159 @@
           </a:solidFill>
         </p:spPr>
       </p:pic>
+      <mc:AlternateContent xmlns:mc="http://schemas.openxmlformats.org/markup-compatibility/2006">
+        <mc:Choice xmlns:p14="http://schemas.microsoft.com/office/powerpoint/2010/main" Requires="p14">
+          <p:contentPart p14:bwMode="auto" r:id="rId5">
+            <p14:nvContentPartPr>
+              <p14:cNvPr id="3" name="Ink 2">
+                <a:extLst>
+                  <a:ext uri="{FF2B5EF4-FFF2-40B4-BE49-F238E27FC236}">
+                    <a16:creationId xmlns:a16="http://schemas.microsoft.com/office/drawing/2014/main" id="{CDEF32E7-0090-68ED-3496-D70017D2E4D9}"/>
+                  </a:ext>
+                </a:extLst>
+              </p14:cNvPr>
+              <p14:cNvContentPartPr/>
+              <p14:nvPr/>
+            </p14:nvContentPartPr>
+            <p14:xfrm>
+              <a:off x="10921559" y="4828498"/>
+              <a:ext cx="62280" cy="802440"/>
+            </p14:xfrm>
+          </p:contentPart>
+        </mc:Choice>
+        <mc:Fallback>
+          <p:pic>
+            <p:nvPicPr>
+              <p:cNvPr id="3" name="Ink 2">
+                <a:extLst>
+                  <a:ext uri="{FF2B5EF4-FFF2-40B4-BE49-F238E27FC236}">
+                    <a16:creationId xmlns:a16="http://schemas.microsoft.com/office/drawing/2014/main" id="{CDEF32E7-0090-68ED-3496-D70017D2E4D9}"/>
+                  </a:ext>
+                </a:extLst>
+              </p:cNvPr>
+              <p:cNvPicPr/>
+              <p:nvPr/>
+            </p:nvPicPr>
+            <p:blipFill>
+              <a:blip r:embed="rId6"/>
+              <a:stretch>
+                <a:fillRect/>
+              </a:stretch>
+            </p:blipFill>
+            <p:spPr>
+              <a:xfrm>
+                <a:off x="10867559" y="4720858"/>
+                <a:ext cx="169920" cy="1018080"/>
+              </a:xfrm>
+              <a:prstGeom prst="rect">
+                <a:avLst/>
+              </a:prstGeom>
+            </p:spPr>
+          </p:pic>
+        </mc:Fallback>
+      </mc:AlternateContent>
+      <mc:AlternateContent xmlns:mc="http://schemas.openxmlformats.org/markup-compatibility/2006">
+        <mc:Choice xmlns:p14="http://schemas.microsoft.com/office/powerpoint/2010/main" Requires="p14">
+          <p:contentPart p14:bwMode="auto" r:id="rId7">
+            <p14:nvContentPartPr>
+              <p14:cNvPr id="4" name="Ink 3">
+                <a:extLst>
+                  <a:ext uri="{FF2B5EF4-FFF2-40B4-BE49-F238E27FC236}">
+                    <a16:creationId xmlns:a16="http://schemas.microsoft.com/office/drawing/2014/main" id="{05F4655D-DE09-8EC6-B6C2-2304B6C048D3}"/>
+                  </a:ext>
+                </a:extLst>
+              </p14:cNvPr>
+              <p14:cNvContentPartPr/>
+              <p14:nvPr/>
+            </p14:nvContentPartPr>
+            <p14:xfrm>
+              <a:off x="11003279" y="5650738"/>
+              <a:ext cx="360" cy="360"/>
+            </p14:xfrm>
+          </p:contentPart>
+        </mc:Choice>
+        <mc:Fallback>
+          <p:pic>
+            <p:nvPicPr>
+              <p:cNvPr id="4" name="Ink 3">
+                <a:extLst>
+                  <a:ext uri="{FF2B5EF4-FFF2-40B4-BE49-F238E27FC236}">
+                    <a16:creationId xmlns:a16="http://schemas.microsoft.com/office/drawing/2014/main" id="{05F4655D-DE09-8EC6-B6C2-2304B6C048D3}"/>
+                  </a:ext>
+                </a:extLst>
+              </p:cNvPr>
+              <p:cNvPicPr/>
+              <p:nvPr/>
+            </p:nvPicPr>
+            <p:blipFill>
+              <a:blip r:embed="rId8"/>
+              <a:stretch>
+                <a:fillRect/>
+              </a:stretch>
+            </p:blipFill>
+            <p:spPr>
+              <a:xfrm>
+                <a:off x="10949639" y="5542738"/>
+                <a:ext cx="108000" cy="216000"/>
+              </a:xfrm>
+              <a:prstGeom prst="rect">
+                <a:avLst/>
+              </a:prstGeom>
+            </p:spPr>
+          </p:pic>
+        </mc:Fallback>
+      </mc:AlternateContent>
+      <mc:AlternateContent xmlns:mc="http://schemas.openxmlformats.org/markup-compatibility/2006">
+        <mc:Choice xmlns:p14="http://schemas.microsoft.com/office/powerpoint/2010/main" Requires="p14">
+          <p:contentPart p14:bwMode="auto" r:id="rId9">
+            <p14:nvContentPartPr>
+              <p14:cNvPr id="8" name="Ink 7">
+                <a:extLst>
+                  <a:ext uri="{FF2B5EF4-FFF2-40B4-BE49-F238E27FC236}">
+                    <a16:creationId xmlns:a16="http://schemas.microsoft.com/office/drawing/2014/main" id="{6CFA8433-FE3E-F86B-01E5-BD6A8860F31B}"/>
+                  </a:ext>
+                </a:extLst>
+              </p14:cNvPr>
+              <p14:cNvContentPartPr/>
+              <p14:nvPr/>
+            </p14:nvContentPartPr>
+            <p14:xfrm>
+              <a:off x="770279" y="4828498"/>
+              <a:ext cx="720" cy="1428840"/>
+            </p14:xfrm>
+          </p:contentPart>
+        </mc:Choice>
+        <mc:Fallback>
+          <p:pic>
+            <p:nvPicPr>
+              <p:cNvPr id="8" name="Ink 7">
+                <a:extLst>
+                  <a:ext uri="{FF2B5EF4-FFF2-40B4-BE49-F238E27FC236}">
+                    <a16:creationId xmlns:a16="http://schemas.microsoft.com/office/drawing/2014/main" id="{6CFA8433-FE3E-F86B-01E5-BD6A8860F31B}"/>
+                  </a:ext>
+                </a:extLst>
+              </p:cNvPr>
+              <p:cNvPicPr/>
+              <p:nvPr/>
+            </p:nvPicPr>
+            <p:blipFill>
+              <a:blip r:embed="rId10"/>
+              <a:stretch>
+                <a:fillRect/>
+              </a:stretch>
+            </p:blipFill>
+            <p:spPr>
+              <a:xfrm>
+                <a:off x="662279" y="4720498"/>
+                <a:ext cx="216000" cy="1644480"/>
+              </a:xfrm>
+              <a:prstGeom prst="rect">
+                <a:avLst/>
+              </a:prstGeom>
+            </p:spPr>
+          </p:pic>
+        </mc:Fallback>
+      </mc:AlternateContent>
     </p:spTree>
     <p:extLst>
       <p:ext uri="{BB962C8B-B14F-4D97-AF65-F5344CB8AC3E}">

--- a/PYDATA_SOUTHAMPTON_16SEP2025.pptx
+++ b/PYDATA_SOUTHAMPTON_16SEP2025.pptx
@@ -30,7 +30,7 @@
     <p:sldId id="296" r:id="rId21"/>
     <p:sldId id="297" r:id="rId22"/>
     <p:sldId id="298" r:id="rId23"/>
-    <p:sldId id="300" r:id="rId24"/>
+    <p:sldId id="304" r:id="rId24"/>
     <p:sldId id="290" r:id="rId25"/>
     <p:sldId id="286" r:id="rId26"/>
   </p:sldIdLst>
@@ -148,6 +148,68 @@
 </p1510:revInfo>
 </file>
 
+<file path=ppt/ink/ink1.xml><?xml version="1.0" encoding="utf-8"?>
+<inkml:ink xmlns:inkml="http://www.w3.org/2003/InkML">
+  <inkml:definitions>
+    <inkml:context xml:id="ctx0">
+      <inkml:inkSource xml:id="inkSrc0">
+        <inkml:traceFormat>
+          <inkml:channel name="X" type="integer" min="-2.14748E9" max="2.14748E9" units="cm"/>
+          <inkml:channel name="Y" type="integer" min="-2.14748E9" max="2.14748E9" units="cm"/>
+          <inkml:channel name="F" type="integer" max="32767" units="dev"/>
+        </inkml:traceFormat>
+        <inkml:channelProperties>
+          <inkml:channelProperty channel="X" name="resolution" value="1000" units="1/cm"/>
+          <inkml:channelProperty channel="Y" name="resolution" value="1000" units="1/cm"/>
+          <inkml:channelProperty channel="F" name="resolution" value="0" units="1/dev"/>
+        </inkml:channelProperties>
+      </inkml:inkSource>
+      <inkml:timestamp xml:id="ts0" timeString="2025-09-16T15:10:27.509"/>
+    </inkml:context>
+    <inkml:brush xml:id="br0">
+      <inkml:brushProperty name="width" value="0.5" units="cm"/>
+      <inkml:brushProperty name="height" value="1" units="cm"/>
+      <inkml:brushProperty name="color" value="#FF2500"/>
+      <inkml:brushProperty name="tip" value="rectangle"/>
+      <inkml:brushProperty name="rasterOp" value="maskPen"/>
+      <inkml:brushProperty name="ignorePressure" value="1"/>
+    </inkml:brush>
+  </inkml:definitions>
+  <inkml:trace contextRef="#ctx0" brushRef="#br0">10 1 0,'0'3628'0</inkml:trace>
+</inkml:ink>
+</file>
+
+<file path=ppt/ink/ink2.xml><?xml version="1.0" encoding="utf-8"?>
+<inkml:ink xmlns:inkml="http://www.w3.org/2003/InkML">
+  <inkml:definitions>
+    <inkml:context xml:id="ctx0">
+      <inkml:inkSource xml:id="inkSrc0">
+        <inkml:traceFormat>
+          <inkml:channel name="X" type="integer" min="-2.14748E9" max="2.14748E9" units="cm"/>
+          <inkml:channel name="Y" type="integer" min="-2.14748E9" max="2.14748E9" units="cm"/>
+          <inkml:channel name="F" type="integer" max="32767" units="dev"/>
+        </inkml:traceFormat>
+        <inkml:channelProperties>
+          <inkml:channelProperty channel="X" name="resolution" value="1000" units="1/cm"/>
+          <inkml:channelProperty channel="Y" name="resolution" value="1000" units="1/cm"/>
+          <inkml:channelProperty channel="F" name="resolution" value="0" units="1/dev"/>
+        </inkml:channelProperties>
+      </inkml:inkSource>
+      <inkml:timestamp xml:id="ts0" timeString="2025-09-16T15:11:01.600"/>
+    </inkml:context>
+    <inkml:brush xml:id="br0">
+      <inkml:brushProperty name="width" value="0.5" units="cm"/>
+      <inkml:brushProperty name="height" value="1" units="cm"/>
+      <inkml:brushProperty name="color" value="#FF2500"/>
+      <inkml:brushProperty name="tip" value="rectangle"/>
+      <inkml:brushProperty name="rasterOp" value="maskPen"/>
+      <inkml:brushProperty name="ignorePressure" value="1"/>
+    </inkml:brush>
+  </inkml:definitions>
+  <inkml:trace contextRef="#ctx0" brushRef="#br0">10 1 0,'0'3628'0</inkml:trace>
+</inkml:ink>
+</file>
+
 <file path=ppt/notesMasters/notesMaster1.xml><?xml version="1.0" encoding="utf-8"?>
 <p:notesMaster xmlns:a="http://schemas.openxmlformats.org/drawingml/2006/main" xmlns:r="http://schemas.openxmlformats.org/officeDocument/2006/relationships" xmlns:p="http://schemas.openxmlformats.org/presentationml/2006/main">
   <p:cSld>
@@ -230,7 +292,7 @@
           <a:p>
             <a:fld id="{422EBE36-D452-49B2-BC5E-F25DDEF20ED3}" type="datetimeFigureOut">
               <a:rPr lang="en-GB" smtClean="0"/>
-              <a:t>15/09/2025</a:t>
+              <a:t>16/09/2025</a:t>
             </a:fld>
             <a:endParaRPr lang="en-GB"/>
           </a:p>
@@ -731,7 +793,7 @@
           <a:p>
             <a:fld id="{87B02A21-FE86-45F5-9B8B-75D343822DB2}" type="datetimeFigureOut">
               <a:rPr lang="en-GB" smtClean="0"/>
-              <a:t>15/09/2025</a:t>
+              <a:t>16/09/2025</a:t>
             </a:fld>
             <a:endParaRPr lang="en-GB"/>
           </a:p>
@@ -931,7 +993,7 @@
           <a:p>
             <a:fld id="{87B02A21-FE86-45F5-9B8B-75D343822DB2}" type="datetimeFigureOut">
               <a:rPr lang="en-GB" smtClean="0"/>
-              <a:t>15/09/2025</a:t>
+              <a:t>16/09/2025</a:t>
             </a:fld>
             <a:endParaRPr lang="en-GB"/>
           </a:p>
@@ -1141,7 +1203,7 @@
           <a:p>
             <a:fld id="{87B02A21-FE86-45F5-9B8B-75D343822DB2}" type="datetimeFigureOut">
               <a:rPr lang="en-GB" smtClean="0"/>
-              <a:t>15/09/2025</a:t>
+              <a:t>16/09/2025</a:t>
             </a:fld>
             <a:endParaRPr lang="en-GB"/>
           </a:p>
@@ -1341,7 +1403,7 @@
           <a:p>
             <a:fld id="{87B02A21-FE86-45F5-9B8B-75D343822DB2}" type="datetimeFigureOut">
               <a:rPr lang="en-GB" smtClean="0"/>
-              <a:t>15/09/2025</a:t>
+              <a:t>16/09/2025</a:t>
             </a:fld>
             <a:endParaRPr lang="en-GB"/>
           </a:p>
@@ -1617,7 +1679,7 @@
           <a:p>
             <a:fld id="{87B02A21-FE86-45F5-9B8B-75D343822DB2}" type="datetimeFigureOut">
               <a:rPr lang="en-GB" smtClean="0"/>
-              <a:t>15/09/2025</a:t>
+              <a:t>16/09/2025</a:t>
             </a:fld>
             <a:endParaRPr lang="en-GB"/>
           </a:p>
@@ -1885,7 +1947,7 @@
           <a:p>
             <a:fld id="{87B02A21-FE86-45F5-9B8B-75D343822DB2}" type="datetimeFigureOut">
               <a:rPr lang="en-GB" smtClean="0"/>
-              <a:t>15/09/2025</a:t>
+              <a:t>16/09/2025</a:t>
             </a:fld>
             <a:endParaRPr lang="en-GB"/>
           </a:p>
@@ -2300,7 +2362,7 @@
           <a:p>
             <a:fld id="{87B02A21-FE86-45F5-9B8B-75D343822DB2}" type="datetimeFigureOut">
               <a:rPr lang="en-GB" smtClean="0"/>
-              <a:t>15/09/2025</a:t>
+              <a:t>16/09/2025</a:t>
             </a:fld>
             <a:endParaRPr lang="en-GB"/>
           </a:p>
@@ -2442,7 +2504,7 @@
           <a:p>
             <a:fld id="{87B02A21-FE86-45F5-9B8B-75D343822DB2}" type="datetimeFigureOut">
               <a:rPr lang="en-GB" smtClean="0"/>
-              <a:t>15/09/2025</a:t>
+              <a:t>16/09/2025</a:t>
             </a:fld>
             <a:endParaRPr lang="en-GB"/>
           </a:p>
@@ -2555,7 +2617,7 @@
           <a:p>
             <a:fld id="{87B02A21-FE86-45F5-9B8B-75D343822DB2}" type="datetimeFigureOut">
               <a:rPr lang="en-GB" smtClean="0"/>
-              <a:t>15/09/2025</a:t>
+              <a:t>16/09/2025</a:t>
             </a:fld>
             <a:endParaRPr lang="en-GB"/>
           </a:p>
@@ -2868,7 +2930,7 @@
           <a:p>
             <a:fld id="{87B02A21-FE86-45F5-9B8B-75D343822DB2}" type="datetimeFigureOut">
               <a:rPr lang="en-GB" smtClean="0"/>
-              <a:t>15/09/2025</a:t>
+              <a:t>16/09/2025</a:t>
             </a:fld>
             <a:endParaRPr lang="en-GB"/>
           </a:p>
@@ -3157,7 +3219,7 @@
           <a:p>
             <a:fld id="{87B02A21-FE86-45F5-9B8B-75D343822DB2}" type="datetimeFigureOut">
               <a:rPr lang="en-GB" smtClean="0"/>
-              <a:t>15/09/2025</a:t>
+              <a:t>16/09/2025</a:t>
             </a:fld>
             <a:endParaRPr lang="en-GB"/>
           </a:p>
@@ -3400,7 +3462,7 @@
           <a:p>
             <a:fld id="{87B02A21-FE86-45F5-9B8B-75D343822DB2}" type="datetimeFigureOut">
               <a:rPr lang="en-GB" smtClean="0"/>
-              <a:t>15/09/2025</a:t>
+              <a:t>16/09/2025</a:t>
             </a:fld>
             <a:endParaRPr lang="en-GB"/>
           </a:p>
@@ -4616,6 +4678,157 @@
           </a:solidFill>
         </p:spPr>
       </p:pic>
+      <mc:AlternateContent xmlns:mc="http://schemas.openxmlformats.org/markup-compatibility/2006">
+        <mc:Choice xmlns:p14="http://schemas.microsoft.com/office/powerpoint/2010/main" Requires="p14">
+          <p:contentPart p14:bwMode="auto" r:id="rId5">
+            <p14:nvContentPartPr>
+              <p14:cNvPr id="6" name="Ink 5">
+                <a:extLst>
+                  <a:ext uri="{FF2B5EF4-FFF2-40B4-BE49-F238E27FC236}">
+                    <a16:creationId xmlns:a16="http://schemas.microsoft.com/office/drawing/2014/main" id="{678E0214-F3F8-B573-69D9-8481CEB2DA9B}"/>
+                  </a:ext>
+                </a:extLst>
+              </p14:cNvPr>
+              <p14:cNvContentPartPr/>
+              <p14:nvPr/>
+            </p14:nvContentPartPr>
+            <p14:xfrm>
+              <a:off x="727288" y="4739723"/>
+              <a:ext cx="720" cy="1306800"/>
+            </p14:xfrm>
+          </p:contentPart>
+        </mc:Choice>
+        <mc:Fallback>
+          <p:pic>
+            <p:nvPicPr>
+              <p:cNvPr id="6" name="Ink 5">
+                <a:extLst>
+                  <a:ext uri="{FF2B5EF4-FFF2-40B4-BE49-F238E27FC236}">
+                    <a16:creationId xmlns:a16="http://schemas.microsoft.com/office/drawing/2014/main" id="{678E0214-F3F8-B573-69D9-8481CEB2DA9B}"/>
+                  </a:ext>
+                </a:extLst>
+              </p:cNvPr>
+              <p:cNvPicPr/>
+              <p:nvPr/>
+            </p:nvPicPr>
+            <p:blipFill>
+              <a:blip r:embed="rId6"/>
+              <a:stretch>
+                <a:fillRect/>
+              </a:stretch>
+            </p:blipFill>
+            <p:spPr>
+              <a:xfrm>
+                <a:off x="547288" y="4560083"/>
+                <a:ext cx="360000" cy="1666440"/>
+              </a:xfrm>
+              <a:prstGeom prst="rect">
+                <a:avLst/>
+              </a:prstGeom>
+            </p:spPr>
+          </p:pic>
+        </mc:Fallback>
+      </mc:AlternateContent>
+      <mc:AlternateContent xmlns:mc="http://schemas.openxmlformats.org/markup-compatibility/2006">
+        <mc:Choice xmlns:p14="http://schemas.microsoft.com/office/powerpoint/2010/main" Requires="p14">
+          <p:contentPart p14:bwMode="auto" r:id="rId7">
+            <p14:nvContentPartPr>
+              <p14:cNvPr id="14" name="Ink 13">
+                <a:extLst>
+                  <a:ext uri="{FF2B5EF4-FFF2-40B4-BE49-F238E27FC236}">
+                    <a16:creationId xmlns:a16="http://schemas.microsoft.com/office/drawing/2014/main" id="{FB1EE908-78F0-48E7-D529-50D24EDBAE9E}"/>
+                  </a:ext>
+                </a:extLst>
+              </p14:cNvPr>
+              <p14:cNvContentPartPr/>
+              <p14:nvPr/>
+            </p14:nvContentPartPr>
+            <p14:xfrm>
+              <a:off x="11642448" y="4739723"/>
+              <a:ext cx="720" cy="1306800"/>
+            </p14:xfrm>
+          </p:contentPart>
+        </mc:Choice>
+        <mc:Fallback>
+          <p:pic>
+            <p:nvPicPr>
+              <p:cNvPr id="14" name="Ink 13">
+                <a:extLst>
+                  <a:ext uri="{FF2B5EF4-FFF2-40B4-BE49-F238E27FC236}">
+                    <a16:creationId xmlns:a16="http://schemas.microsoft.com/office/drawing/2014/main" id="{FB1EE908-78F0-48E7-D529-50D24EDBAE9E}"/>
+                  </a:ext>
+                </a:extLst>
+              </p:cNvPr>
+              <p:cNvPicPr/>
+              <p:nvPr/>
+            </p:nvPicPr>
+            <p:blipFill>
+              <a:blip r:embed="rId6"/>
+              <a:stretch>
+                <a:fillRect/>
+              </a:stretch>
+            </p:blipFill>
+            <p:spPr>
+              <a:xfrm>
+                <a:off x="11462448" y="4560083"/>
+                <a:ext cx="360000" cy="1666440"/>
+              </a:xfrm>
+              <a:prstGeom prst="rect">
+                <a:avLst/>
+              </a:prstGeom>
+            </p:spPr>
+          </p:pic>
+        </mc:Fallback>
+      </mc:AlternateContent>
+      <p:sp>
+        <p:nvSpPr>
+          <p:cNvPr id="15" name="Arrow: Down 14">
+            <a:extLst>
+              <a:ext uri="{FF2B5EF4-FFF2-40B4-BE49-F238E27FC236}">
+                <a16:creationId xmlns:a16="http://schemas.microsoft.com/office/drawing/2014/main" id="{B52D1AA8-7966-AB6F-E7DB-695838D435B0}"/>
+              </a:ext>
+            </a:extLst>
+          </p:cNvPr>
+          <p:cNvSpPr/>
+          <p:nvPr/>
+        </p:nvSpPr>
+        <p:spPr>
+          <a:xfrm rot="2933217">
+            <a:off x="4741002" y="3924691"/>
+            <a:ext cx="597159" cy="1362470"/>
+          </a:xfrm>
+          <a:prstGeom prst="downArrow">
+            <a:avLst/>
+          </a:prstGeom>
+          <a:solidFill>
+            <a:srgbClr val="FFFF00"/>
+          </a:solidFill>
+        </p:spPr>
+        <p:style>
+          <a:lnRef idx="2">
+            <a:schemeClr val="accent1">
+              <a:shade val="15000"/>
+            </a:schemeClr>
+          </a:lnRef>
+          <a:fillRef idx="1">
+            <a:schemeClr val="accent1"/>
+          </a:fillRef>
+          <a:effectRef idx="0">
+            <a:schemeClr val="accent1"/>
+          </a:effectRef>
+          <a:fontRef idx="minor">
+            <a:schemeClr val="lt1"/>
+          </a:fontRef>
+        </p:style>
+        <p:txBody>
+          <a:bodyPr rtlCol="0" anchor="ctr"/>
+          <a:lstStyle/>
+          <a:p>
+            <a:pPr algn="ctr"/>
+            <a:endParaRPr lang="en-GB"/>
+          </a:p>
+        </p:txBody>
+      </p:sp>
     </p:spTree>
     <p:extLst>
       <p:ext uri="{BB962C8B-B14F-4D97-AF65-F5344CB8AC3E}">
@@ -4952,7 +5165,7 @@
         </p:nvSpPr>
         <p:spPr>
           <a:xfrm>
-            <a:off x="919314" y="1413031"/>
+            <a:off x="878756" y="1174906"/>
             <a:ext cx="10596715" cy="4906652"/>
           </a:xfrm>
           <a:solidFill>
@@ -5034,8 +5247,8 @@
         </p:nvSpPr>
         <p:spPr>
           <a:xfrm>
-            <a:off x="675971" y="2369262"/>
-            <a:ext cx="6413198" cy="5078313"/>
+            <a:off x="878756" y="1763664"/>
+            <a:ext cx="6413198" cy="5447645"/>
           </a:xfrm>
           <a:prstGeom prst="rect">
             <a:avLst/>
@@ -5093,7 +5306,7 @@
             </a:pPr>
             <a:r>
               <a:rPr lang="en-GB" sz="2400" dirty="0"/>
-              <a:t>Publisher determines prices with dependent tools (TOOL CALLING)</a:t>
+              <a:t>Publisher determines prices with dependent tools (TOOL CALLING) – calculate price and then categorise this price.</a:t>
             </a:r>
           </a:p>
           <a:p>
@@ -5105,12 +5318,8 @@
           </a:p>
           <a:p>
             <a:r>
-              <a:rPr lang="en-GB" sz="2400"/>
-              <a:t>GOTO PUBLISH </a:t>
-            </a:r>
-            <a:r>
               <a:rPr lang="en-GB" sz="2400" dirty="0"/>
-              <a:t>= YES only if 1,2 and 3 are YES</a:t>
+              <a:t>GOTO PUBLISH = YES only if 1,2 and 3 are YES</a:t>
             </a:r>
           </a:p>
           <a:p>
@@ -5245,34 +5454,37 @@
             <a:pPr marL="0" indent="0">
               <a:buNone/>
             </a:pPr>
-            <a:endParaRPr lang="en-GB" dirty="0">
-              <a:solidFill>
-                <a:srgbClr val="3A3A3A"/>
-              </a:solidFill>
-            </a:endParaRPr>
-          </a:p>
-          <a:p>
-            <a:pPr marL="0" indent="0">
-              <a:buNone/>
-            </a:pPr>
             <a:r>
               <a:rPr lang="en-GB" sz="3600" dirty="0">
                 <a:solidFill>
                   <a:srgbClr val="3A3A3A"/>
                 </a:solidFill>
               </a:rPr>
-              <a:t>We build our app with a basic prompt “Write an article on {topic} of around {N} words.”</a:t>
+              <a:t>We build our app with a basic prompt “Write an article on {TOPIC} of around {N} words in language {LANGUAGE}.”</a:t>
             </a:r>
           </a:p>
           <a:p>
             <a:pPr marL="0" indent="0">
               <a:buNone/>
             </a:pPr>
-            <a:endParaRPr lang="en-GB" sz="3600" dirty="0">
+            <a:endParaRPr lang="en-GB" sz="1600" dirty="0">
               <a:solidFill>
                 <a:srgbClr val="3A3A3A"/>
               </a:solidFill>
             </a:endParaRPr>
+          </a:p>
+          <a:p>
+            <a:pPr marL="0" indent="0">
+              <a:buNone/>
+            </a:pPr>
+            <a:r>
+              <a:rPr lang="en-GB" sz="3600" dirty="0">
+                <a:solidFill>
+                  <a:srgbClr val="3A3A3A"/>
+                </a:solidFill>
+              </a:rPr>
+              <a:t>We test manually during dev.</a:t>
+            </a:r>
           </a:p>
           <a:p>
             <a:pPr marL="0" indent="0">
@@ -5291,7 +5503,7 @@
             <a:pPr marL="0" indent="0">
               <a:buNone/>
             </a:pPr>
-            <a:endParaRPr lang="en-GB" sz="3600" dirty="0">
+            <a:endParaRPr lang="en-GB" sz="1400" dirty="0">
               <a:solidFill>
                 <a:srgbClr val="3A3A3A"/>
               </a:solidFill>
@@ -5459,18 +5671,24 @@
                   <a:srgbClr val="3A3A3A"/>
                 </a:solidFill>
               </a:rPr>
-              <a:t>We decide to add a simple </a:t>
-            </a:r>
-          </a:p>
-          <a:p>
-            <a:pPr marL="0" indent="0">
-              <a:buNone/>
-            </a:pPr>
-            <a:endParaRPr lang="en-GB" sz="3600" dirty="0">
-              <a:solidFill>
-                <a:srgbClr val="3A3A3A"/>
-              </a:solidFill>
-            </a:endParaRPr>
+              <a:t>We decide to add a simple          to see what </a:t>
+            </a:r>
+            <a:r>
+              <a:rPr lang="en-GB" sz="3600" dirty="0" err="1">
+                <a:solidFill>
+                  <a:srgbClr val="3A3A3A"/>
+                </a:solidFill>
+              </a:rPr>
+              <a:t>cusomers</a:t>
+            </a:r>
+            <a:r>
+              <a:rPr lang="en-GB" sz="3600" dirty="0">
+                <a:solidFill>
+                  <a:srgbClr val="3A3A3A"/>
+                </a:solidFill>
+              </a:rPr>
+              <a:t> like.</a:t>
+            </a:r>
           </a:p>
           <a:p>
             <a:pPr marL="0" indent="0">
@@ -5719,7 +5937,7 @@
                   <a:srgbClr val="3A3A3A"/>
                 </a:solidFill>
               </a:rPr>
-              <a:t>However, only 2% of users give feedback so we decide to use Human Evaluators to give feedback as well as label articles ‘good’ etc</a:t>
+              <a:t>However, only 2% of users give feedback so we decide to use Human Evaluators to give feedback as well as label articles as ‘good article’ etc.</a:t>
             </a:r>
             <a:endParaRPr lang="en-GB" sz="3600" dirty="0"/>
           </a:p>
@@ -6323,7 +6541,7 @@
         </p:spPr>
         <p:txBody>
           <a:bodyPr>
-            <a:normAutofit fontScale="85000" lnSpcReduction="20000"/>
+            <a:noAutofit/>
           </a:bodyPr>
           <a:lstStyle/>
           <a:p>
@@ -6334,19 +6552,19 @@
               <a:buNone/>
             </a:pPr>
             <a:r>
-              <a:rPr lang="en-GB" sz="3600" dirty="0">
+              <a:rPr lang="en-GB" dirty="0">
                 <a:solidFill>
                   <a:srgbClr val="3A3A3A"/>
                 </a:solidFill>
               </a:rPr>
-              <a:t>We can only handle/afford a small percentage, so we decide to use LLM as  Judge.</a:t>
+              <a:t>We can only handle/afford a small percentage, so we decide to use an LLM as  Judge.</a:t>
             </a:r>
           </a:p>
           <a:p>
             <a:pPr marL="0" indent="0">
               <a:buNone/>
             </a:pPr>
-            <a:endParaRPr lang="en-GB" sz="3600" dirty="0">
+            <a:endParaRPr lang="en-GB" sz="900" dirty="0">
               <a:solidFill>
                 <a:srgbClr val="3A3A3A"/>
               </a:solidFill>
@@ -6354,22 +6572,41 @@
           </a:p>
           <a:p>
             <a:pPr marL="0" indent="0">
+              <a:lnSpc>
+                <a:spcPts val="3500"/>
+              </a:lnSpc>
               <a:buNone/>
             </a:pPr>
             <a:r>
-              <a:rPr lang="en-GB" sz="3600" dirty="0">
+              <a:rPr lang="en-GB" dirty="0">
                 <a:solidFill>
                   <a:srgbClr val="3A3A3A"/>
                 </a:solidFill>
               </a:rPr>
-              <a:t>Seems illogical but is actually very effective.</a:t>
+              <a:t>Seems illogical but is actually very effective. An uncalibrated </a:t>
+            </a:r>
+            <a:r>
+              <a:rPr lang="en-GB" dirty="0" err="1">
+                <a:solidFill>
+                  <a:srgbClr val="3A3A3A"/>
+                </a:solidFill>
+              </a:rPr>
+              <a:t>bitof</a:t>
+            </a:r>
+            <a:r>
+              <a:rPr lang="en-GB" dirty="0">
+                <a:solidFill>
+                  <a:srgbClr val="3A3A3A"/>
+                </a:solidFill>
+              </a:rPr>
+              <a:t> code calibrating another</a:t>
             </a:r>
           </a:p>
           <a:p>
             <a:pPr marL="0" indent="0">
               <a:buNone/>
             </a:pPr>
-            <a:endParaRPr lang="en-GB" sz="3600" dirty="0">
+            <a:endParaRPr lang="en-GB" sz="800" dirty="0">
               <a:solidFill>
                 <a:srgbClr val="3A3A3A"/>
               </a:solidFill>
@@ -6383,7 +6620,7 @@
               <a:buNone/>
             </a:pPr>
             <a:r>
-              <a:rPr lang="en-GB" sz="3600" dirty="0">
+              <a:rPr lang="en-GB" dirty="0">
                 <a:solidFill>
                   <a:srgbClr val="3A3A3A"/>
                 </a:solidFill>
@@ -6395,7 +6632,7 @@
             <a:pPr marL="0" indent="0">
               <a:buNone/>
             </a:pPr>
-            <a:endParaRPr lang="en-GB" sz="3600" dirty="0">
+            <a:endParaRPr lang="en-GB" sz="1000" dirty="0">
               <a:solidFill>
                 <a:srgbClr val="3A3A3A"/>
               </a:solidFill>
@@ -6406,14 +6643,14 @@
               <a:buNone/>
             </a:pPr>
             <a:r>
-              <a:rPr lang="en-GB" sz="3600" dirty="0">
+              <a:rPr lang="en-GB" dirty="0">
                 <a:solidFill>
                   <a:srgbClr val="3A3A3A"/>
                 </a:solidFill>
               </a:rPr>
               <a:t>It is better than our app! We refine our app prompt…</a:t>
             </a:r>
-            <a:endParaRPr lang="en-GB" sz="3600" dirty="0"/>
+            <a:endParaRPr lang="en-GB" dirty="0"/>
           </a:p>
         </p:txBody>
       </p:sp>
@@ -6801,7 +7038,7 @@
         <p:cNvPr id="1" name="">
           <a:extLst>
             <a:ext uri="{FF2B5EF4-FFF2-40B4-BE49-F238E27FC236}">
-              <a16:creationId xmlns:a16="http://schemas.microsoft.com/office/drawing/2014/main" id="{E9DE99CB-B7FE-D269-5053-A318EA450790}"/>
+              <a16:creationId xmlns:a16="http://schemas.microsoft.com/office/drawing/2014/main" id="{E0AEB2D7-07CD-11E5-5630-677F49725486}"/>
             </a:ext>
           </a:extLst>
         </p:cNvPr>
@@ -6821,7 +7058,7 @@
           <p:cNvPr id="2" name="Title 1">
             <a:extLst>
               <a:ext uri="{FF2B5EF4-FFF2-40B4-BE49-F238E27FC236}">
-                <a16:creationId xmlns:a16="http://schemas.microsoft.com/office/drawing/2014/main" id="{27837EF3-3471-3B0A-0B80-BE9C4680AB83}"/>
+                <a16:creationId xmlns:a16="http://schemas.microsoft.com/office/drawing/2014/main" id="{13B0B960-8F0D-5DBE-4BA4-EB467EAA326F}"/>
               </a:ext>
             </a:extLst>
           </p:cNvPr>
@@ -6858,7 +7095,7 @@
           <p:cNvPr id="3" name="Content Placeholder 2">
             <a:extLst>
               <a:ext uri="{FF2B5EF4-FFF2-40B4-BE49-F238E27FC236}">
-                <a16:creationId xmlns:a16="http://schemas.microsoft.com/office/drawing/2014/main" id="{CB7D921D-0A3A-0A9B-28B4-27739391277E}"/>
+                <a16:creationId xmlns:a16="http://schemas.microsoft.com/office/drawing/2014/main" id="{E948035A-B978-9B03-14AD-E32EC001F9A7}"/>
               </a:ext>
             </a:extLst>
           </p:cNvPr>
@@ -6871,7 +7108,7 @@
         </p:nvSpPr>
         <p:spPr>
           <a:xfrm>
-            <a:off x="675971" y="1058467"/>
+            <a:off x="878756" y="1174906"/>
             <a:ext cx="10596715" cy="4906652"/>
           </a:xfrm>
           <a:solidFill>
@@ -6884,11 +7121,10 @@
           </a:bodyPr>
           <a:lstStyle/>
           <a:p>
-            <a:pPr marL="0" indent="0">
+            <a:pPr>
               <a:lnSpc>
                 <a:spcPts val="4500"/>
               </a:lnSpc>
-              <a:buNone/>
             </a:pPr>
             <a:r>
               <a:rPr lang="en-GB" dirty="0"/>
@@ -6907,10 +7143,10 @@
       </p:sp>
       <p:pic>
         <p:nvPicPr>
-          <p:cNvPr id="5" name="Picture 4" descr="A diagram of a diagram&#10;&#10;AI-generated content may be incorrect.">
-            <a:extLst>
-              <a:ext uri="{FF2B5EF4-FFF2-40B4-BE49-F238E27FC236}">
-                <a16:creationId xmlns:a16="http://schemas.microsoft.com/office/drawing/2014/main" id="{16C13F1D-73CA-929F-46E5-F1983D274369}"/>
+          <p:cNvPr id="5" name="Picture 4">
+            <a:extLst>
+              <a:ext uri="{FF2B5EF4-FFF2-40B4-BE49-F238E27FC236}">
+                <a16:creationId xmlns:a16="http://schemas.microsoft.com/office/drawing/2014/main" id="{805EC903-BAA2-BC46-D90E-1E8CA97761E4}"/>
               </a:ext>
             </a:extLst>
           </p:cNvPr>
@@ -6927,14 +7163,13 @@
               </a:ext>
             </a:extLst>
           </a:blip>
-          <a:stretch>
-            <a:fillRect/>
-          </a:stretch>
+          <a:srcRect/>
+          <a:stretch/>
         </p:blipFill>
         <p:spPr>
           <a:xfrm>
-            <a:off x="7444321" y="2503499"/>
-            <a:ext cx="4452210" cy="4160262"/>
+            <a:off x="7509889" y="1992264"/>
+            <a:ext cx="4122392" cy="3851181"/>
           </a:xfrm>
           <a:prstGeom prst="rect">
             <a:avLst/>
@@ -6946,7 +7181,7 @@
           <p:cNvPr id="6" name="TextBox 5">
             <a:extLst>
               <a:ext uri="{FF2B5EF4-FFF2-40B4-BE49-F238E27FC236}">
-                <a16:creationId xmlns:a16="http://schemas.microsoft.com/office/drawing/2014/main" id="{F59B59F7-7AA3-F77B-5C7B-D1E26FF52C1D}"/>
+                <a16:creationId xmlns:a16="http://schemas.microsoft.com/office/drawing/2014/main" id="{89B1AD8C-79A9-7657-A216-A377296B5ECC}"/>
               </a:ext>
             </a:extLst>
           </p:cNvPr>
@@ -6955,8 +7190,8 @@
         </p:nvSpPr>
         <p:spPr>
           <a:xfrm>
-            <a:off x="675971" y="1324527"/>
-            <a:ext cx="8113466" cy="4832092"/>
+            <a:off x="878756" y="1763664"/>
+            <a:ext cx="6413198" cy="5447645"/>
           </a:xfrm>
           <a:prstGeom prst="rect">
             <a:avLst/>
@@ -6969,22 +7204,18 @@
           </a:bodyPr>
           <a:lstStyle/>
           <a:p>
+            <a:r>
+              <a:rPr lang="en-GB" sz="2400" dirty="0"/>
+              <a:t>Given an article title, determine if it is about AI.</a:t>
+            </a:r>
+          </a:p>
+          <a:p>
             <a:endParaRPr lang="en-GB" sz="2400" dirty="0"/>
           </a:p>
           <a:p>
             <a:pPr marL="342900" indent="-342900">
-              <a:buFont typeface="Arial" panose="020B0604020202020204" pitchFamily="34" charset="0"/>
-              <a:buChar char="•"/>
-            </a:pPr>
-            <a:r>
-              <a:rPr lang="en-GB" sz="2400" dirty="0"/>
-              <a:t>Given an article title, determine if it is about AI (ROUTER)</a:t>
-            </a:r>
-          </a:p>
-          <a:p>
-            <a:pPr marL="342900" indent="-342900">
-              <a:buFont typeface="Arial" panose="020B0604020202020204" pitchFamily="34" charset="0"/>
-              <a:buChar char="•"/>
+              <a:buFont typeface="+mj-lt"/>
+              <a:buAutoNum type="arabicPeriod"/>
             </a:pPr>
             <a:r>
               <a:rPr lang="en-GB" sz="2400" dirty="0"/>
@@ -6993,8 +7224,8 @@
           </a:p>
           <a:p>
             <a:pPr marL="342900" indent="-342900">
-              <a:buFont typeface="Arial" panose="020B0604020202020204" pitchFamily="34" charset="0"/>
-              <a:buChar char="•"/>
+              <a:buFont typeface="+mj-lt"/>
+              <a:buAutoNum type="arabicPeriod"/>
             </a:pPr>
             <a:r>
               <a:rPr lang="en-GB" sz="2400" dirty="0"/>
@@ -7003,8 +7234,8 @@
           </a:p>
           <a:p>
             <a:pPr marL="342900" indent="-342900">
-              <a:buFont typeface="Arial" panose="020B0604020202020204" pitchFamily="34" charset="0"/>
-              <a:buChar char="•"/>
+              <a:buFont typeface="+mj-lt"/>
+              <a:buAutoNum type="arabicPeriod"/>
             </a:pPr>
             <a:r>
               <a:rPr lang="en-GB" sz="2400" dirty="0"/>
@@ -7012,12 +7243,13 @@
             </a:r>
           </a:p>
           <a:p>
-            <a:endParaRPr lang="en-GB" sz="2400" dirty="0"/>
-          </a:p>
-          <a:p>
+            <a:pPr marL="342900" indent="-342900">
+              <a:buFont typeface="+mj-lt"/>
+              <a:buAutoNum type="arabicPeriod"/>
+            </a:pPr>
             <a:r>
               <a:rPr lang="en-GB" sz="2400" dirty="0"/>
-              <a:t>A ‘good article’ – OMITTED IN DEMO</a:t>
+              <a:t>Publisher determines prices with dependent tools (TOOL CALLING) – calculate price and then categorise this price.</a:t>
             </a:r>
           </a:p>
           <a:p>
@@ -7030,7 +7262,7 @@
           <a:p>
             <a:r>
               <a:rPr lang="en-GB" sz="2400" dirty="0"/>
-              <a:t>PUBLISH = YES only if last three are YES in EDITOR</a:t>
+              <a:t>GOTO PUBLISH = YES only if 1,2 and 3 are YES</a:t>
             </a:r>
           </a:p>
           <a:p>
@@ -7038,8 +7270,8 @@
           </a:p>
           <a:p>
             <a:r>
-              <a:rPr lang="en-GB" sz="3200" i="1" dirty="0"/>
-              <a:t>Let’s go to the guide and code…</a:t>
+              <a:rPr lang="en-GB" sz="2400" i="1" dirty="0"/>
+              <a:t>This app could be a leaf of a larger app.</a:t>
             </a:r>
           </a:p>
           <a:p>
@@ -7053,7 +7285,7 @@
     </p:spTree>
     <p:extLst>
       <p:ext uri="{BB962C8B-B14F-4D97-AF65-F5344CB8AC3E}">
-        <p14:creationId xmlns:p14="http://schemas.microsoft.com/office/powerpoint/2010/main" val="1389024405"/>
+        <p14:creationId xmlns:p14="http://schemas.microsoft.com/office/powerpoint/2010/main" val="739487643"/>
       </p:ext>
     </p:extLst>
   </p:cSld>
@@ -7128,6 +7360,18 @@
               </a:rPr>
               <a:t>Summary Key Points</a:t>
             </a:r>
+            <a:br>
+              <a:rPr lang="en-GB" dirty="0">
+                <a:solidFill>
+                  <a:srgbClr val="676767"/>
+                </a:solidFill>
+              </a:rPr>
+            </a:br>
+            <a:endParaRPr lang="en-GB" dirty="0">
+              <a:solidFill>
+                <a:srgbClr val="676767"/>
+              </a:solidFill>
+            </a:endParaRPr>
           </a:p>
         </p:txBody>
       </p:sp>
@@ -7149,7 +7393,7 @@
         </p:nvSpPr>
         <p:spPr>
           <a:xfrm>
-            <a:off x="838199" y="1413031"/>
+            <a:off x="990599" y="1060606"/>
             <a:ext cx="10596715" cy="4906652"/>
           </a:xfrm>
           <a:solidFill>
@@ -7158,9 +7402,45 @@
         </p:spPr>
         <p:txBody>
           <a:bodyPr>
-            <a:normAutofit/>
+            <a:normAutofit lnSpcReduction="10000"/>
           </a:bodyPr>
           <a:lstStyle/>
+          <a:p>
+            <a:pPr marL="0" indent="0">
+              <a:buNone/>
+            </a:pPr>
+            <a:endParaRPr lang="en-GB" dirty="0">
+              <a:solidFill>
+                <a:srgbClr val="3A3A3A"/>
+              </a:solidFill>
+            </a:endParaRPr>
+          </a:p>
+          <a:p>
+            <a:r>
+              <a:rPr lang="en-GB" dirty="0">
+                <a:solidFill>
+                  <a:srgbClr val="3A3A3A"/>
+                </a:solidFill>
+              </a:rPr>
+              <a:t>Evals are tests we carry out in the same way we would in </a:t>
+            </a:r>
+            <a:r>
+              <a:rPr lang="en-GB" dirty="0" err="1">
+                <a:solidFill>
+                  <a:srgbClr val="3A3A3A"/>
+                </a:solidFill>
+              </a:rPr>
+              <a:t>tradional</a:t>
+            </a:r>
+            <a:r>
+              <a:rPr lang="en-GB" dirty="0">
+                <a:solidFill>
+                  <a:srgbClr val="3A3A3A"/>
+                </a:solidFill>
+              </a:rPr>
+              <a:t> software development.</a:t>
+            </a:r>
+          </a:p>
           <a:p>
             <a:r>
               <a:rPr lang="en-GB" dirty="0">
@@ -8130,7 +8410,7 @@
           <a:p>
             <a:pPr>
               <a:lnSpc>
-                <a:spcPts val="4500"/>
+                <a:spcPts val="3500"/>
               </a:lnSpc>
             </a:pPr>
             <a:r>
@@ -8141,7 +8421,7 @@
           <a:p>
             <a:pPr>
               <a:lnSpc>
-                <a:spcPts val="4500"/>
+                <a:spcPts val="3500"/>
               </a:lnSpc>
             </a:pPr>
             <a:r>
@@ -8152,7 +8432,7 @@
           <a:p>
             <a:pPr>
               <a:lnSpc>
-                <a:spcPts val="4500"/>
+                <a:spcPts val="3500"/>
               </a:lnSpc>
             </a:pPr>
             <a:r>
@@ -8163,7 +8443,18 @@
           <a:p>
             <a:pPr>
               <a:lnSpc>
-                <a:spcPts val="4500"/>
+                <a:spcPts val="3500"/>
+              </a:lnSpc>
+            </a:pPr>
+            <a:r>
+              <a:rPr lang="en-GB" dirty="0"/>
+              <a:t>Or need to make an MCP Server</a:t>
+            </a:r>
+          </a:p>
+          <a:p>
+            <a:pPr>
+              <a:lnSpc>
+                <a:spcPts val="3500"/>
               </a:lnSpc>
             </a:pPr>
             <a:r>

--- a/PYDATA_SOUTHAMPTON_16SEP2025.pptx
+++ b/PYDATA_SOUTHAMPTON_16SEP2025.pptx
@@ -4678,8 +4678,8 @@
           </a:solidFill>
         </p:spPr>
       </p:pic>
-      <mc:AlternateContent xmlns:mc="http://schemas.openxmlformats.org/markup-compatibility/2006">
-        <mc:Choice xmlns:p14="http://schemas.microsoft.com/office/powerpoint/2010/main" Requires="p14">
+      <mc:AlternateContent xmlns:mc="http://schemas.openxmlformats.org/markup-compatibility/2006" xmlns:p14="http://schemas.microsoft.com/office/powerpoint/2010/main">
+        <mc:Choice Requires="p14">
           <p:contentPart p14:bwMode="auto" r:id="rId5">
             <p14:nvContentPartPr>
               <p14:cNvPr id="6" name="Ink 5">
@@ -4698,7 +4698,7 @@
             </p14:xfrm>
           </p:contentPart>
         </mc:Choice>
-        <mc:Fallback>
+        <mc:Fallback xmlns="">
           <p:pic>
             <p:nvPicPr>
               <p:cNvPr id="6" name="Ink 5">
@@ -4729,8 +4729,8 @@
           </p:pic>
         </mc:Fallback>
       </mc:AlternateContent>
-      <mc:AlternateContent xmlns:mc="http://schemas.openxmlformats.org/markup-compatibility/2006">
-        <mc:Choice xmlns:p14="http://schemas.microsoft.com/office/powerpoint/2010/main" Requires="p14">
+      <mc:AlternateContent xmlns:mc="http://schemas.openxmlformats.org/markup-compatibility/2006" xmlns:p14="http://schemas.microsoft.com/office/powerpoint/2010/main">
+        <mc:Choice Requires="p14">
           <p:contentPart p14:bwMode="auto" r:id="rId7">
             <p14:nvContentPartPr>
               <p14:cNvPr id="14" name="Ink 13">
@@ -4749,7 +4749,7 @@
             </p14:xfrm>
           </p:contentPart>
         </mc:Choice>
-        <mc:Fallback>
+        <mc:Fallback xmlns="">
           <p:pic>
             <p:nvPicPr>
               <p:cNvPr id="14" name="Ink 13">
@@ -7605,7 +7605,7 @@
                   <a:srgbClr val="676767"/>
                 </a:solidFill>
               </a:rPr>
-              <a:t>Future</a:t>
+              <a:t>Craig West</a:t>
             </a:r>
           </a:p>
         </p:txBody>
@@ -7628,8 +7628,8 @@
         </p:nvSpPr>
         <p:spPr>
           <a:xfrm>
-            <a:off x="838199" y="1413031"/>
-            <a:ext cx="10596715" cy="4906652"/>
+            <a:off x="838199" y="1129004"/>
+            <a:ext cx="10596715" cy="5190679"/>
           </a:xfrm>
           <a:solidFill>
             <a:srgbClr val="FAF0E6"/>
@@ -7644,25 +7644,21 @@
             <a:pPr marL="0" indent="0">
               <a:buNone/>
             </a:pPr>
-            <a:endParaRPr lang="en-GB" dirty="0"/>
-          </a:p>
-          <a:p>
-            <a:pPr marL="0" indent="0">
-              <a:buNone/>
-            </a:pPr>
-            <a:r>
-              <a:rPr lang="en-GB" dirty="0">
+            <a:r>
+              <a:rPr lang="en-GB">
                 <a:solidFill>
-                  <a:srgbClr val="3A3A3A"/>
+                  <a:srgbClr val="0070C0"/>
                 </a:solidFill>
+                <a:hlinkClick r:id="rId2">
+                  <a:extLst>
+                    <a:ext uri="{A12FA001-AC4F-418D-AE19-62706E023703}">
+                      <ahyp:hlinkClr xmlns:ahyp="http://schemas.microsoft.com/office/drawing/2018/hyperlinkcolor" val="tx"/>
+                    </a:ext>
+                  </a:extLst>
+                </a:hlinkClick>
               </a:rPr>
-              <a:t>Craig West</a:t>
-            </a:r>
-          </a:p>
-          <a:p>
-            <a:pPr marL="0" indent="0">
-              <a:buNone/>
-            </a:pPr>
+              <a:t>https</a:t>
+            </a:r>
             <a:r>
               <a:rPr lang="en-GB" dirty="0">
                 <a:solidFill>
@@ -7676,7 +7672,7 @@
                   </a:extLst>
                 </a:hlinkClick>
               </a:rPr>
-              <a:t>https://craig-west.netlify.app/</a:t>
+              <a:t>://craig-west.netlify.app/</a:t>
             </a:r>
             <a:endParaRPr lang="en-GB" dirty="0">
               <a:solidFill>
@@ -7730,6 +7726,55 @@
             </a:pPr>
             <a:endParaRPr lang="en-GB" dirty="0">
               <a:solidFill>
+                <a:srgbClr val="0070C0"/>
+              </a:solidFill>
+            </a:endParaRPr>
+          </a:p>
+          <a:p>
+            <a:pPr marL="0" indent="0">
+              <a:buNone/>
+            </a:pPr>
+            <a:r>
+              <a:rPr lang="en-GB" i="1" dirty="0">
+                <a:solidFill>
+                  <a:srgbClr val="3A3A3A"/>
+                </a:solidFill>
+              </a:rPr>
+              <a:t>Catching 915 train to Brighton so I can’t stay </a:t>
+            </a:r>
+          </a:p>
+          <a:p>
+            <a:pPr marL="0" indent="0">
+              <a:buNone/>
+            </a:pPr>
+            <a:r>
+              <a:rPr lang="en-GB" i="1" dirty="0">
+                <a:solidFill>
+                  <a:srgbClr val="3A3A3A"/>
+                </a:solidFill>
+              </a:rPr>
+              <a:t>Afterwards but you can contact me whilst </a:t>
+            </a:r>
+          </a:p>
+          <a:p>
+            <a:pPr marL="0" indent="0">
+              <a:buNone/>
+            </a:pPr>
+            <a:r>
+              <a:rPr lang="en-GB" i="1" dirty="0">
+                <a:solidFill>
+                  <a:srgbClr val="3A3A3A"/>
+                </a:solidFill>
+              </a:rPr>
+              <a:t>on train and we can text/call.</a:t>
+            </a:r>
+          </a:p>
+          <a:p>
+            <a:pPr marL="0" indent="0">
+              <a:buNone/>
+            </a:pPr>
+            <a:endParaRPr lang="en-GB" i="1" dirty="0">
+              <a:solidFill>
                 <a:srgbClr val="3A3A3A"/>
               </a:solidFill>
             </a:endParaRPr>
@@ -7815,8 +7860,8 @@
         </p:blipFill>
         <p:spPr>
           <a:xfrm>
-            <a:off x="8340213" y="1413031"/>
-            <a:ext cx="2642419" cy="2642419"/>
+            <a:off x="7873682" y="1275435"/>
+            <a:ext cx="2959159" cy="2959159"/>
           </a:xfrm>
           <a:prstGeom prst="rect">
             <a:avLst/>
